--- a/docs/test/stress/e2e-outputs/income_case02_hongdae_fnb_basic.pptx
+++ b/docs/test/stress/e2e-outputs/income_case02_hongdae_fnb_basic.pptx
@@ -5909,7 +5909,7 @@
                 <a:ea typeface="Pretendard" pitchFamily="34" charset="-122"/>
                 <a:cs typeface="Pretendard" pitchFamily="34" charset="-120"/>
               </a:rPr>
-              <a:t>용도 리스크</a:t>
+              <a:t>건물 물리적 상태</a:t>
             </a:r>
             <a:endParaRPr lang="en-US" sz="1350" dirty="0"/>
           </a:p>
@@ -5948,7 +5948,7 @@
                 <a:ea typeface="Pretendard" pitchFamily="34" charset="-122"/>
                 <a:cs typeface="Pretendard" pitchFamily="34" charset="-120"/>
               </a:rPr>
-              <a:t>—</a:t>
+              <a:t>2017년 준공 신축급 상태 (누수/균열</a:t>
             </a:r>
             <a:endParaRPr lang="en-US" sz="1500" dirty="0"/>
           </a:p>
@@ -5988,7 +5988,7 @@
                 <a:ea typeface="Pretendard" pitchFamily="34" charset="-122"/>
                 <a:cs typeface="Pretendard" pitchFamily="34" charset="-120"/>
               </a:rPr>
-              <a:t>{"ok":true,"mocked":true,"extractedFields":{"area_signal":"역삼","asset_type":"오피스빌딩","price_band":"300억","size_signal":"3000평(약 9917.4㎡)"},"extractedFacts":{"region":"역삼","exactAddressCandidate":"역삼동 7</a:t>
+              <a:t>준공 10년 미만으로 대규모 수선비용 발생 가능성 낮음</a:t>
             </a:r>
             <a:endParaRPr lang="en-US" sz="1250" dirty="0"/>
           </a:p>
@@ -5996,7 +5996,457 @@
       </p:sp>
       <p:sp>
         <p:nvSpPr>
-          <p:cNvPr id="11" name="Text 9"/>
+          <p:cNvPr id="11" name="Shape 9"/>
+          <p:cNvSpPr/>
+          <p:nvPr/>
+        </p:nvSpPr>
+        <p:spPr>
+          <a:xfrm>
+            <a:off x="4344314" y="1417320"/>
+            <a:ext cx="3503066" cy="3611880"/>
+          </a:xfrm>
+          <a:prstGeom prst="rect">
+            <a:avLst/>
+          </a:prstGeom>
+          <a:solidFill>
+            <a:srgbClr val="F8FAFC"/>
+          </a:solidFill>
+          <a:ln w="3810">
+            <a:solidFill>
+              <a:srgbClr val="CBD5E1"/>
+            </a:solidFill>
+            <a:prstDash val="solid"/>
+          </a:ln>
+        </p:spPr>
+      </p:sp>
+      <p:sp>
+        <p:nvSpPr>
+          <p:cNvPr id="12" name="Shape 10"/>
+          <p:cNvSpPr/>
+          <p:nvPr/>
+        </p:nvSpPr>
+        <p:spPr>
+          <a:xfrm>
+            <a:off x="4344314" y="1417320"/>
+            <a:ext cx="3503066" cy="36576"/>
+          </a:xfrm>
+          <a:prstGeom prst="rect">
+            <a:avLst/>
+          </a:prstGeom>
+          <a:solidFill>
+            <a:srgbClr val="6B8E00"/>
+          </a:solidFill>
+          <a:ln/>
+        </p:spPr>
+      </p:sp>
+      <p:sp>
+        <p:nvSpPr>
+          <p:cNvPr id="13" name="Shape 11"/>
+          <p:cNvSpPr/>
+          <p:nvPr/>
+        </p:nvSpPr>
+        <p:spPr>
+          <a:xfrm>
+            <a:off x="4344314" y="1417320"/>
+            <a:ext cx="3503066" cy="45720"/>
+          </a:xfrm>
+          <a:prstGeom prst="rect">
+            <a:avLst/>
+          </a:prstGeom>
+          <a:solidFill>
+            <a:srgbClr val="6B8E00"/>
+          </a:solidFill>
+          <a:ln/>
+        </p:spPr>
+      </p:sp>
+      <p:sp>
+        <p:nvSpPr>
+          <p:cNvPr id="14" name="Text 12"/>
+          <p:cNvSpPr/>
+          <p:nvPr/>
+        </p:nvSpPr>
+        <p:spPr>
+          <a:xfrm>
+            <a:off x="4572914" y="1618488"/>
+            <a:ext cx="3045866" cy="292608"/>
+          </a:xfrm>
+          <a:prstGeom prst="rect">
+            <a:avLst/>
+          </a:prstGeom>
+          <a:noFill/>
+          <a:ln/>
+        </p:spPr>
+        <p:txBody>
+          <a:bodyPr wrap="square" lIns="0" tIns="0" rIns="0" bIns="0" rtlCol="0" anchor="ctr"/>
+          <a:lstStyle/>
+          <a:p>
+            <a:pPr indent="0" marL="0">
+              <a:buNone/>
+            </a:pPr>
+            <a:r>
+              <a:rPr lang="en-US" sz="1350" b="1" dirty="0">
+                <a:solidFill>
+                  <a:srgbClr val="4F6A00"/>
+                </a:solidFill>
+                <a:latin typeface="Pretendard" pitchFamily="34" charset="0"/>
+                <a:ea typeface="Pretendard" pitchFamily="34" charset="-122"/>
+                <a:cs typeface="Pretendard" pitchFamily="34" charset="-120"/>
+              </a:rPr>
+              <a:t>승강기 및 설비</a:t>
+            </a:r>
+            <a:endParaRPr lang="en-US" sz="1350" dirty="0"/>
+          </a:p>
+        </p:txBody>
+      </p:sp>
+      <p:sp>
+        <p:nvSpPr>
+          <p:cNvPr id="15" name="Text 13"/>
+          <p:cNvSpPr/>
+          <p:nvPr/>
+        </p:nvSpPr>
+        <p:spPr>
+          <a:xfrm>
+            <a:off x="4572914" y="1929384"/>
+            <a:ext cx="3045866" cy="347472"/>
+          </a:xfrm>
+          <a:prstGeom prst="rect">
+            <a:avLst/>
+          </a:prstGeom>
+          <a:noFill/>
+          <a:ln/>
+        </p:spPr>
+        <p:txBody>
+          <a:bodyPr wrap="square" lIns="0" tIns="0" rIns="0" bIns="0" rtlCol="0" anchor="ctr"/>
+          <a:lstStyle/>
+          <a:p>
+            <a:pPr indent="0" marL="0">
+              <a:buNone/>
+            </a:pPr>
+            <a:r>
+              <a:rPr lang="en-US" sz="1500" b="1" dirty="0">
+                <a:solidFill>
+                  <a:srgbClr val="0F172A"/>
+                </a:solidFill>
+                <a:latin typeface="Pretendard" pitchFamily="34" charset="0"/>
+                <a:ea typeface="Pretendard" pitchFamily="34" charset="-122"/>
+                <a:cs typeface="Pretendard" pitchFamily="34" charset="-120"/>
+              </a:rPr>
+              <a:t>15인승 침대용 승강기 및 냉난방 설비 </a:t>
+            </a:r>
+            <a:endParaRPr lang="en-US" sz="1500" dirty="0"/>
+          </a:p>
+        </p:txBody>
+      </p:sp>
+      <p:sp>
+        <p:nvSpPr>
+          <p:cNvPr id="16" name="Text 14"/>
+          <p:cNvSpPr/>
+          <p:nvPr/>
+        </p:nvSpPr>
+        <p:spPr>
+          <a:xfrm>
+            <a:off x="4572914" y="2313432"/>
+            <a:ext cx="3045866" cy="2606040"/>
+          </a:xfrm>
+          <a:prstGeom prst="rect">
+            <a:avLst/>
+          </a:prstGeom>
+          <a:noFill/>
+          <a:ln/>
+        </p:spPr>
+        <p:txBody>
+          <a:bodyPr wrap="square" lIns="0" tIns="0" rIns="0" bIns="0" rtlCol="0" anchor="t"/>
+          <a:lstStyle/>
+          <a:p>
+            <a:pPr marL="342900" indent="-342900">
+              <a:buSzPct val="100000"/>
+              <a:buChar char="•"/>
+            </a:pPr>
+            <a:r>
+              <a:rPr lang="en-US" sz="1250" dirty="0">
+                <a:solidFill>
+                  <a:srgbClr val="0F172A"/>
+                </a:solidFill>
+                <a:latin typeface="Pretendard" pitchFamily="34" charset="0"/>
+                <a:ea typeface="Pretendard" pitchFamily="34" charset="-122"/>
+                <a:cs typeface="Pretendard" pitchFamily="34" charset="-120"/>
+              </a:rPr>
+              <a:t>주기적 정기 점검 계약 유지로 관리 리스크 최소화</a:t>
+            </a:r>
+            <a:endParaRPr lang="en-US" sz="1250" dirty="0"/>
+          </a:p>
+        </p:txBody>
+      </p:sp>
+      <p:sp>
+        <p:nvSpPr>
+          <p:cNvPr id="17" name="Shape 15"/>
+          <p:cNvSpPr/>
+          <p:nvPr/>
+        </p:nvSpPr>
+        <p:spPr>
+          <a:xfrm>
+            <a:off x="8121701" y="1417320"/>
+            <a:ext cx="3503066" cy="3611880"/>
+          </a:xfrm>
+          <a:prstGeom prst="rect">
+            <a:avLst/>
+          </a:prstGeom>
+          <a:solidFill>
+            <a:srgbClr val="F8FAFC"/>
+          </a:solidFill>
+          <a:ln w="3810">
+            <a:solidFill>
+              <a:srgbClr val="CBD5E1"/>
+            </a:solidFill>
+            <a:prstDash val="solid"/>
+          </a:ln>
+        </p:spPr>
+      </p:sp>
+      <p:sp>
+        <p:nvSpPr>
+          <p:cNvPr id="18" name="Shape 16"/>
+          <p:cNvSpPr/>
+          <p:nvPr/>
+        </p:nvSpPr>
+        <p:spPr>
+          <a:xfrm>
+            <a:off x="8121701" y="1417320"/>
+            <a:ext cx="3503066" cy="36576"/>
+          </a:xfrm>
+          <a:prstGeom prst="rect">
+            <a:avLst/>
+          </a:prstGeom>
+          <a:solidFill>
+            <a:srgbClr val="6B8E00"/>
+          </a:solidFill>
+          <a:ln/>
+        </p:spPr>
+      </p:sp>
+      <p:sp>
+        <p:nvSpPr>
+          <p:cNvPr id="19" name="Shape 17"/>
+          <p:cNvSpPr/>
+          <p:nvPr/>
+        </p:nvSpPr>
+        <p:spPr>
+          <a:xfrm>
+            <a:off x="8121701" y="1417320"/>
+            <a:ext cx="3503066" cy="45720"/>
+          </a:xfrm>
+          <a:prstGeom prst="rect">
+            <a:avLst/>
+          </a:prstGeom>
+          <a:solidFill>
+            <a:srgbClr val="6B8E00"/>
+          </a:solidFill>
+          <a:ln/>
+        </p:spPr>
+      </p:sp>
+      <p:sp>
+        <p:nvSpPr>
+          <p:cNvPr id="20" name="Text 18"/>
+          <p:cNvSpPr/>
+          <p:nvPr/>
+        </p:nvSpPr>
+        <p:spPr>
+          <a:xfrm>
+            <a:off x="8350301" y="1618488"/>
+            <a:ext cx="3045866" cy="292608"/>
+          </a:xfrm>
+          <a:prstGeom prst="rect">
+            <a:avLst/>
+          </a:prstGeom>
+          <a:noFill/>
+          <a:ln/>
+        </p:spPr>
+        <p:txBody>
+          <a:bodyPr wrap="square" lIns="0" tIns="0" rIns="0" bIns="0" rtlCol="0" anchor="ctr"/>
+          <a:lstStyle/>
+          <a:p>
+            <a:pPr indent="0" marL="0">
+              <a:buNone/>
+            </a:pPr>
+            <a:r>
+              <a:rPr lang="en-US" sz="1350" b="1" dirty="0">
+                <a:solidFill>
+                  <a:srgbClr val="4F6A00"/>
+                </a:solidFill>
+                <a:latin typeface="Pretendard" pitchFamily="34" charset="0"/>
+                <a:ea typeface="Pretendard" pitchFamily="34" charset="-122"/>
+                <a:cs typeface="Pretendard" pitchFamily="34" charset="-120"/>
+              </a:rPr>
+              <a:t>임차인 이탈 위험</a:t>
+            </a:r>
+            <a:endParaRPr lang="en-US" sz="1350" dirty="0"/>
+          </a:p>
+        </p:txBody>
+      </p:sp>
+      <p:sp>
+        <p:nvSpPr>
+          <p:cNvPr id="21" name="Text 19"/>
+          <p:cNvSpPr/>
+          <p:nvPr/>
+        </p:nvSpPr>
+        <p:spPr>
+          <a:xfrm>
+            <a:off x="8350301" y="1929384"/>
+            <a:ext cx="3045866" cy="347472"/>
+          </a:xfrm>
+          <a:prstGeom prst="rect">
+            <a:avLst/>
+          </a:prstGeom>
+          <a:noFill/>
+          <a:ln/>
+        </p:spPr>
+        <p:txBody>
+          <a:bodyPr wrap="square" lIns="0" tIns="0" rIns="0" bIns="0" rtlCol="0" anchor="ctr"/>
+          <a:lstStyle/>
+          <a:p>
+            <a:pPr indent="0" marL="0">
+              <a:buNone/>
+            </a:pPr>
+            <a:r>
+              <a:rPr lang="en-US" sz="1500" b="1" dirty="0">
+                <a:solidFill>
+                  <a:srgbClr val="0F172A"/>
+                </a:solidFill>
+                <a:latin typeface="Pretendard" pitchFamily="34" charset="0"/>
+                <a:ea typeface="Pretendard" pitchFamily="34" charset="-122"/>
+                <a:cs typeface="Pretendard" pitchFamily="34" charset="-120"/>
+              </a:rPr>
+              <a:t>병의원/약국 인테리어 투자비(호실당 5억</a:t>
+            </a:r>
+            <a:endParaRPr lang="en-US" sz="1500" dirty="0"/>
+          </a:p>
+        </p:txBody>
+      </p:sp>
+      <p:sp>
+        <p:nvSpPr>
+          <p:cNvPr id="22" name="Text 20"/>
+          <p:cNvSpPr/>
+          <p:nvPr/>
+        </p:nvSpPr>
+        <p:spPr>
+          <a:xfrm>
+            <a:off x="8350301" y="2313432"/>
+            <a:ext cx="3045866" cy="2606040"/>
+          </a:xfrm>
+          <a:prstGeom prst="rect">
+            <a:avLst/>
+          </a:prstGeom>
+          <a:noFill/>
+          <a:ln/>
+        </p:spPr>
+        <p:txBody>
+          <a:bodyPr wrap="square" lIns="0" tIns="0" rIns="0" bIns="0" rtlCol="0" anchor="t"/>
+          <a:lstStyle/>
+          <a:p>
+            <a:pPr marL="342900" indent="-342900">
+              <a:buSzPct val="100000"/>
+              <a:buChar char="•"/>
+            </a:pPr>
+            <a:r>
+              <a:rPr lang="en-US" sz="1250" dirty="0">
+                <a:solidFill>
+                  <a:srgbClr val="0F172A"/>
+                </a:solidFill>
+                <a:latin typeface="Pretendard" pitchFamily="34" charset="0"/>
+                <a:ea typeface="Pretendard" pitchFamily="34" charset="-122"/>
+                <a:cs typeface="Pretendard" pitchFamily="34" charset="-120"/>
+              </a:rPr>
+              <a:t>WALE 3.5년 확보 및 만기 6개월 전 재계약 협상 개시</a:t>
+            </a:r>
+            <a:endParaRPr lang="en-US" sz="1250" dirty="0"/>
+          </a:p>
+        </p:txBody>
+      </p:sp>
+      <p:sp>
+        <p:nvSpPr>
+          <p:cNvPr id="23" name="Shape 21"/>
+          <p:cNvSpPr/>
+          <p:nvPr/>
+        </p:nvSpPr>
+        <p:spPr>
+          <a:xfrm>
+            <a:off x="566928" y="5193792"/>
+            <a:ext cx="11057839" cy="621792"/>
+          </a:xfrm>
+          <a:prstGeom prst="rect">
+            <a:avLst/>
+          </a:prstGeom>
+          <a:solidFill>
+            <a:srgbClr val="F8FAFC"/>
+          </a:solidFill>
+          <a:ln w="3810">
+            <a:solidFill>
+              <a:srgbClr val="CBD5E1"/>
+            </a:solidFill>
+            <a:prstDash val="solid"/>
+          </a:ln>
+        </p:spPr>
+      </p:sp>
+      <p:sp>
+        <p:nvSpPr>
+          <p:cNvPr id="24" name="Shape 22"/>
+          <p:cNvSpPr/>
+          <p:nvPr/>
+        </p:nvSpPr>
+        <p:spPr>
+          <a:xfrm>
+            <a:off x="566928" y="5193792"/>
+            <a:ext cx="11057839" cy="36576"/>
+          </a:xfrm>
+          <a:prstGeom prst="rect">
+            <a:avLst/>
+          </a:prstGeom>
+          <a:solidFill>
+            <a:srgbClr val="6B8E00"/>
+          </a:solidFill>
+          <a:ln/>
+        </p:spPr>
+      </p:sp>
+      <p:sp>
+        <p:nvSpPr>
+          <p:cNvPr id="25" name="Text 23"/>
+          <p:cNvSpPr/>
+          <p:nvPr/>
+        </p:nvSpPr>
+        <p:spPr>
+          <a:xfrm>
+            <a:off x="795528" y="5193792"/>
+            <a:ext cx="10600639" cy="621792"/>
+          </a:xfrm>
+          <a:prstGeom prst="rect">
+            <a:avLst/>
+          </a:prstGeom>
+          <a:noFill/>
+          <a:ln/>
+        </p:spPr>
+        <p:txBody>
+          <a:bodyPr wrap="square" lIns="0" tIns="0" rIns="0" bIns="0" rtlCol="0" anchor="ctr"/>
+          <a:lstStyle/>
+          <a:p>
+            <a:pPr indent="0" marL="0">
+              <a:buNone/>
+            </a:pPr>
+            <a:r>
+              <a:rPr lang="en-US" sz="1200" dirty="0">
+                <a:solidFill>
+                  <a:srgbClr val="0F172A"/>
+                </a:solidFill>
+                <a:latin typeface="Pretendard" pitchFamily="34" charset="0"/>
+                <a:ea typeface="Pretendard" pitchFamily="34" charset="-122"/>
+                <a:cs typeface="Pretendard" pitchFamily="34" charset="-120"/>
+              </a:rPr>
+              <a:t>실사 총평: 자산의 물리적·권리적 하자가 없으며, 세부 임대차 계약서 및 등기사항증명서는 LOI 접수 후 원본 열람 검토 여지가 있으나, 관련 법규·인허가·시설 요건의 현장 확인이 필요합니다..</a:t>
+            </a:r>
+            <a:endParaRPr lang="en-US" sz="1200" dirty="0"/>
+          </a:p>
+        </p:txBody>
+      </p:sp>
+      <p:sp>
+        <p:nvSpPr>
+          <p:cNvPr id="26" name="Text 24"/>
           <p:cNvSpPr/>
           <p:nvPr/>
         </p:nvSpPr>
@@ -6035,7 +6485,7 @@
       </p:sp>
       <p:sp>
         <p:nvSpPr>
-          <p:cNvPr id="12" name="Shape 10"/>
+          <p:cNvPr id="27" name="Shape 25"/>
           <p:cNvSpPr/>
           <p:nvPr/>
         </p:nvSpPr>
@@ -6219,7 +6669,7 @@
                 <a:ea typeface="Pretendard" pitchFamily="34" charset="-122"/>
                 <a:cs typeface="Pretendard" pitchFamily="34" charset="-120"/>
               </a:rPr>
-              <a:t>3대 핵심 투자 포인트 (Investment Highlights)</a:t>
+              <a:t>밸류업 시나리오 (AI 추정)</a:t>
             </a:r>
             <a:endParaRPr lang="en-US" sz="1050" dirty="0"/>
           </a:p>
@@ -6228,642 +6678,6 @@
       <p:sp>
         <p:nvSpPr>
           <p:cNvPr id="6" name="Shape 4"/>
-          <p:cNvSpPr/>
-          <p:nvPr/>
-        </p:nvSpPr>
-        <p:spPr>
-          <a:xfrm>
-            <a:off x="566928" y="1481328"/>
-            <a:ext cx="3472586" cy="3474720"/>
-          </a:xfrm>
-          <a:prstGeom prst="roundRect">
-            <a:avLst>
-              <a:gd name="adj" fmla="val 2107"/>
-            </a:avLst>
-          </a:prstGeom>
-          <a:solidFill>
-            <a:srgbClr val="F8FAFC"/>
-          </a:solidFill>
-          <a:ln w="10160">
-            <a:solidFill>
-              <a:srgbClr val="CBD5E1"/>
-            </a:solidFill>
-            <a:prstDash val="solid"/>
-          </a:ln>
-        </p:spPr>
-      </p:sp>
-      <p:sp>
-        <p:nvSpPr>
-          <p:cNvPr id="7" name="Shape 5"/>
-          <p:cNvSpPr/>
-          <p:nvPr/>
-        </p:nvSpPr>
-        <p:spPr>
-          <a:xfrm>
-            <a:off x="566928" y="1481328"/>
-            <a:ext cx="3472586" cy="54864"/>
-          </a:xfrm>
-          <a:prstGeom prst="rect">
-            <a:avLst/>
-          </a:prstGeom>
-          <a:solidFill>
-            <a:srgbClr val="6B8E00"/>
-          </a:solidFill>
-          <a:ln/>
-        </p:spPr>
-      </p:sp>
-      <p:sp>
-        <p:nvSpPr>
-          <p:cNvPr id="8" name="Shape 6"/>
-          <p:cNvSpPr/>
-          <p:nvPr/>
-        </p:nvSpPr>
-        <p:spPr>
-          <a:xfrm>
-            <a:off x="795528" y="1755648"/>
-            <a:ext cx="475488" cy="292608"/>
-          </a:xfrm>
-          <a:prstGeom prst="roundRect">
-            <a:avLst>
-              <a:gd name="adj" fmla="val 12500"/>
-            </a:avLst>
-          </a:prstGeom>
-          <a:solidFill>
-            <a:srgbClr val="A3D900"/>
-          </a:solidFill>
-          <a:ln/>
-        </p:spPr>
-      </p:sp>
-      <p:sp>
-        <p:nvSpPr>
-          <p:cNvPr id="9" name="Text 7"/>
-          <p:cNvSpPr/>
-          <p:nvPr/>
-        </p:nvSpPr>
-        <p:spPr>
-          <a:xfrm>
-            <a:off x="795528" y="1755648"/>
-            <a:ext cx="475488" cy="292608"/>
-          </a:xfrm>
-          <a:prstGeom prst="rect">
-            <a:avLst/>
-          </a:prstGeom>
-          <a:noFill/>
-          <a:ln/>
-        </p:spPr>
-        <p:txBody>
-          <a:bodyPr wrap="square" lIns="0" tIns="0" rIns="0" bIns="0" rtlCol="0" anchor="ctr"/>
-          <a:lstStyle/>
-          <a:p>
-            <a:pPr algn="ctr" indent="0" marL="0">
-              <a:buNone/>
-            </a:pPr>
-            <a:r>
-              <a:rPr lang="en-US" sz="1100" b="1" dirty="0">
-                <a:solidFill>
-                  <a:srgbClr val="4F6A00"/>
-                </a:solidFill>
-                <a:latin typeface="Arial" pitchFamily="34" charset="0"/>
-                <a:ea typeface="Arial" pitchFamily="34" charset="-122"/>
-                <a:cs typeface="Arial" pitchFamily="34" charset="-120"/>
-              </a:rPr>
-              <a:t>01</a:t>
-            </a:r>
-            <a:endParaRPr lang="en-US" sz="1100" dirty="0"/>
-          </a:p>
-        </p:txBody>
-      </p:sp>
-      <p:sp>
-        <p:nvSpPr>
-          <p:cNvPr id="10" name="Text 8"/>
-          <p:cNvSpPr/>
-          <p:nvPr/>
-        </p:nvSpPr>
-        <p:spPr>
-          <a:xfrm>
-            <a:off x="795528" y="2194560"/>
-            <a:ext cx="3015386" cy="365760"/>
-          </a:xfrm>
-          <a:prstGeom prst="rect">
-            <a:avLst/>
-          </a:prstGeom>
-          <a:noFill/>
-          <a:ln/>
-        </p:spPr>
-        <p:txBody>
-          <a:bodyPr wrap="square" lIns="0" tIns="0" rIns="0" bIns="0" rtlCol="0" anchor="t"/>
-          <a:lstStyle/>
-          <a:p>
-            <a:pPr indent="0" marL="0">
-              <a:buNone/>
-            </a:pPr>
-            <a:r>
-              <a:rPr lang="en-US" sz="1500" b="1" dirty="0">
-                <a:solidFill>
-                  <a:srgbClr val="0F172A"/>
-                </a:solidFill>
-                <a:latin typeface="Pretendard" pitchFamily="34" charset="0"/>
-                <a:ea typeface="Pretendard" pitchFamily="34" charset="-122"/>
-                <a:cs typeface="Pretendard" pitchFamily="34" charset="-120"/>
-              </a:rPr>
-              <a:t>원금 안전판 확보</a:t>
-            </a:r>
-            <a:endParaRPr lang="en-US" sz="1500" dirty="0"/>
-          </a:p>
-        </p:txBody>
-      </p:sp>
-      <p:sp>
-        <p:nvSpPr>
-          <p:cNvPr id="11" name="Shape 9"/>
-          <p:cNvSpPr/>
-          <p:nvPr/>
-        </p:nvSpPr>
-        <p:spPr>
-          <a:xfrm>
-            <a:off x="795528" y="2624328"/>
-            <a:ext cx="3015386" cy="0"/>
-          </a:xfrm>
-          <a:prstGeom prst="line">
-            <a:avLst/>
-          </a:prstGeom>
-          <a:noFill/>
-          <a:ln w="6350">
-            <a:solidFill>
-              <a:srgbClr val="CBD5E1"/>
-            </a:solidFill>
-            <a:prstDash val="solid"/>
-          </a:ln>
-        </p:spPr>
-      </p:sp>
-      <p:sp>
-        <p:nvSpPr>
-          <p:cNvPr id="12" name="Text 10"/>
-          <p:cNvSpPr/>
-          <p:nvPr/>
-        </p:nvSpPr>
-        <p:spPr>
-          <a:xfrm>
-            <a:off x="795528" y="2779776"/>
-            <a:ext cx="3015386" cy="1965960"/>
-          </a:xfrm>
-          <a:prstGeom prst="rect">
-            <a:avLst/>
-          </a:prstGeom>
-          <a:noFill/>
-          <a:ln/>
-        </p:spPr>
-        <p:txBody>
-          <a:bodyPr wrap="square" lIns="0" tIns="0" rIns="0" bIns="0" rtlCol="0" anchor="t"/>
-          <a:lstStyle/>
-          <a:p>
-            <a:pPr indent="0" marL="0">
-              <a:lnSpc>
-                <a:spcPct val="130000"/>
-              </a:lnSpc>
-              <a:buNone/>
-            </a:pPr>
-            <a:r>
-              <a:rPr lang="en-US" sz="1200" dirty="0">
-                <a:solidFill>
-                  <a:srgbClr val="0F172A"/>
-                </a:solidFill>
-                <a:latin typeface="Pretendard" pitchFamily="34" charset="0"/>
-                <a:ea typeface="Pretendard" pitchFamily="34" charset="-122"/>
-                <a:cs typeface="Pretendard" pitchFamily="34" charset="-120"/>
-              </a:rPr>
-              <a:t>마포권역의 핵심 입지로, 우량한 대지 지분 가치가 하방 경직성을 강력히 지지합니다.</a:t>
-            </a:r>
-            <a:endParaRPr lang="en-US" sz="1200" dirty="0"/>
-          </a:p>
-        </p:txBody>
-      </p:sp>
-      <p:sp>
-        <p:nvSpPr>
-          <p:cNvPr id="13" name="Shape 11"/>
-          <p:cNvSpPr/>
-          <p:nvPr/>
-        </p:nvSpPr>
-        <p:spPr>
-          <a:xfrm>
-            <a:off x="4359554" y="1481328"/>
-            <a:ext cx="3472586" cy="3474720"/>
-          </a:xfrm>
-          <a:prstGeom prst="roundRect">
-            <a:avLst>
-              <a:gd name="adj" fmla="val 2107"/>
-            </a:avLst>
-          </a:prstGeom>
-          <a:solidFill>
-            <a:srgbClr val="F8FAFC"/>
-          </a:solidFill>
-          <a:ln w="10160">
-            <a:solidFill>
-              <a:srgbClr val="CBD5E1"/>
-            </a:solidFill>
-            <a:prstDash val="solid"/>
-          </a:ln>
-        </p:spPr>
-      </p:sp>
-      <p:sp>
-        <p:nvSpPr>
-          <p:cNvPr id="14" name="Shape 12"/>
-          <p:cNvSpPr/>
-          <p:nvPr/>
-        </p:nvSpPr>
-        <p:spPr>
-          <a:xfrm>
-            <a:off x="4359554" y="1481328"/>
-            <a:ext cx="3472586" cy="54864"/>
-          </a:xfrm>
-          <a:prstGeom prst="rect">
-            <a:avLst/>
-          </a:prstGeom>
-          <a:solidFill>
-            <a:srgbClr val="6B8E00"/>
-          </a:solidFill>
-          <a:ln/>
-        </p:spPr>
-      </p:sp>
-      <p:sp>
-        <p:nvSpPr>
-          <p:cNvPr id="15" name="Shape 13"/>
-          <p:cNvSpPr/>
-          <p:nvPr/>
-        </p:nvSpPr>
-        <p:spPr>
-          <a:xfrm>
-            <a:off x="4588154" y="1755648"/>
-            <a:ext cx="475488" cy="292608"/>
-          </a:xfrm>
-          <a:prstGeom prst="roundRect">
-            <a:avLst>
-              <a:gd name="adj" fmla="val 12500"/>
-            </a:avLst>
-          </a:prstGeom>
-          <a:solidFill>
-            <a:srgbClr val="A3D900"/>
-          </a:solidFill>
-          <a:ln/>
-        </p:spPr>
-      </p:sp>
-      <p:sp>
-        <p:nvSpPr>
-          <p:cNvPr id="16" name="Text 14"/>
-          <p:cNvSpPr/>
-          <p:nvPr/>
-        </p:nvSpPr>
-        <p:spPr>
-          <a:xfrm>
-            <a:off x="4588154" y="1755648"/>
-            <a:ext cx="475488" cy="292608"/>
-          </a:xfrm>
-          <a:prstGeom prst="rect">
-            <a:avLst/>
-          </a:prstGeom>
-          <a:noFill/>
-          <a:ln/>
-        </p:spPr>
-        <p:txBody>
-          <a:bodyPr wrap="square" lIns="0" tIns="0" rIns="0" bIns="0" rtlCol="0" anchor="ctr"/>
-          <a:lstStyle/>
-          <a:p>
-            <a:pPr algn="ctr" indent="0" marL="0">
-              <a:buNone/>
-            </a:pPr>
-            <a:r>
-              <a:rPr lang="en-US" sz="1100" b="1" dirty="0">
-                <a:solidFill>
-                  <a:srgbClr val="4F6A00"/>
-                </a:solidFill>
-                <a:latin typeface="Arial" pitchFamily="34" charset="0"/>
-                <a:ea typeface="Arial" pitchFamily="34" charset="-122"/>
-                <a:cs typeface="Arial" pitchFamily="34" charset="-120"/>
-              </a:rPr>
-              <a:t>02</a:t>
-            </a:r>
-            <a:endParaRPr lang="en-US" sz="1100" dirty="0"/>
-          </a:p>
-        </p:txBody>
-      </p:sp>
-      <p:sp>
-        <p:nvSpPr>
-          <p:cNvPr id="17" name="Text 15"/>
-          <p:cNvSpPr/>
-          <p:nvPr/>
-        </p:nvSpPr>
-        <p:spPr>
-          <a:xfrm>
-            <a:off x="4588154" y="2194560"/>
-            <a:ext cx="3015386" cy="365760"/>
-          </a:xfrm>
-          <a:prstGeom prst="rect">
-            <a:avLst/>
-          </a:prstGeom>
-          <a:noFill/>
-          <a:ln/>
-        </p:spPr>
-        <p:txBody>
-          <a:bodyPr wrap="square" lIns="0" tIns="0" rIns="0" bIns="0" rtlCol="0" anchor="t"/>
-          <a:lstStyle/>
-          <a:p>
-            <a:pPr indent="0" marL="0">
-              <a:buNone/>
-            </a:pPr>
-            <a:r>
-              <a:rPr lang="en-US" sz="1500" b="1" dirty="0">
-                <a:solidFill>
-                  <a:srgbClr val="0F172A"/>
-                </a:solidFill>
-                <a:latin typeface="Pretendard" pitchFamily="34" charset="0"/>
-                <a:ea typeface="Pretendard" pitchFamily="34" charset="-122"/>
-                <a:cs typeface="Pretendard" pitchFamily="34" charset="-120"/>
-              </a:rPr>
-              <a:t>확실한 월 현금흐름</a:t>
-            </a:r>
-            <a:endParaRPr lang="en-US" sz="1500" dirty="0"/>
-          </a:p>
-        </p:txBody>
-      </p:sp>
-      <p:sp>
-        <p:nvSpPr>
-          <p:cNvPr id="18" name="Shape 16"/>
-          <p:cNvSpPr/>
-          <p:nvPr/>
-        </p:nvSpPr>
-        <p:spPr>
-          <a:xfrm>
-            <a:off x="4588154" y="2624328"/>
-            <a:ext cx="3015386" cy="0"/>
-          </a:xfrm>
-          <a:prstGeom prst="line">
-            <a:avLst/>
-          </a:prstGeom>
-          <a:noFill/>
-          <a:ln w="6350">
-            <a:solidFill>
-              <a:srgbClr val="CBD5E1"/>
-            </a:solidFill>
-            <a:prstDash val="solid"/>
-          </a:ln>
-        </p:spPr>
-      </p:sp>
-      <p:sp>
-        <p:nvSpPr>
-          <p:cNvPr id="19" name="Text 17"/>
-          <p:cNvSpPr/>
-          <p:nvPr/>
-        </p:nvSpPr>
-        <p:spPr>
-          <a:xfrm>
-            <a:off x="4588154" y="2779776"/>
-            <a:ext cx="3015386" cy="1965960"/>
-          </a:xfrm>
-          <a:prstGeom prst="rect">
-            <a:avLst/>
-          </a:prstGeom>
-          <a:noFill/>
-          <a:ln/>
-        </p:spPr>
-        <p:txBody>
-          <a:bodyPr wrap="square" lIns="0" tIns="0" rIns="0" bIns="0" rtlCol="0" anchor="t"/>
-          <a:lstStyle/>
-          <a:p>
-            <a:pPr indent="0" marL="0">
-              <a:lnSpc>
-                <a:spcPct val="130000"/>
-              </a:lnSpc>
-              <a:buNone/>
-            </a:pPr>
-            <a:r>
-              <a:rPr lang="en-US" sz="1200" dirty="0">
-                <a:solidFill>
-                  <a:srgbClr val="0F172A"/>
-                </a:solidFill>
-                <a:latin typeface="Pretendard" pitchFamily="34" charset="0"/>
-                <a:ea typeface="Pretendard" pitchFamily="34" charset="-122"/>
-                <a:cs typeface="Pretendard" pitchFamily="34" charset="-120"/>
-              </a:rPr>
-              <a:t>우량 테넌트 만실 운영 및 장기 계약 구조를 통해 매월 안정적인 순수익 창출이 검토 여지가 있으나, 관련 법규·인허가·시설 요건의 현장 확인이 필요합니다..</a:t>
-            </a:r>
-            <a:endParaRPr lang="en-US" sz="1200" dirty="0"/>
-          </a:p>
-        </p:txBody>
-      </p:sp>
-      <p:sp>
-        <p:nvSpPr>
-          <p:cNvPr id="20" name="Shape 18"/>
-          <p:cNvSpPr/>
-          <p:nvPr/>
-        </p:nvSpPr>
-        <p:spPr>
-          <a:xfrm>
-            <a:off x="8152181" y="1481328"/>
-            <a:ext cx="3472586" cy="3474720"/>
-          </a:xfrm>
-          <a:prstGeom prst="roundRect">
-            <a:avLst>
-              <a:gd name="adj" fmla="val 2107"/>
-            </a:avLst>
-          </a:prstGeom>
-          <a:solidFill>
-            <a:srgbClr val="F8FAFC"/>
-          </a:solidFill>
-          <a:ln w="10160">
-            <a:solidFill>
-              <a:srgbClr val="CBD5E1"/>
-            </a:solidFill>
-            <a:prstDash val="solid"/>
-          </a:ln>
-        </p:spPr>
-      </p:sp>
-      <p:sp>
-        <p:nvSpPr>
-          <p:cNvPr id="21" name="Shape 19"/>
-          <p:cNvSpPr/>
-          <p:nvPr/>
-        </p:nvSpPr>
-        <p:spPr>
-          <a:xfrm>
-            <a:off x="8152181" y="1481328"/>
-            <a:ext cx="3472586" cy="54864"/>
-          </a:xfrm>
-          <a:prstGeom prst="rect">
-            <a:avLst/>
-          </a:prstGeom>
-          <a:solidFill>
-            <a:srgbClr val="6B8E00"/>
-          </a:solidFill>
-          <a:ln/>
-        </p:spPr>
-      </p:sp>
-      <p:sp>
-        <p:nvSpPr>
-          <p:cNvPr id="22" name="Shape 20"/>
-          <p:cNvSpPr/>
-          <p:nvPr/>
-        </p:nvSpPr>
-        <p:spPr>
-          <a:xfrm>
-            <a:off x="8380781" y="1755648"/>
-            <a:ext cx="475488" cy="292608"/>
-          </a:xfrm>
-          <a:prstGeom prst="roundRect">
-            <a:avLst>
-              <a:gd name="adj" fmla="val 12500"/>
-            </a:avLst>
-          </a:prstGeom>
-          <a:solidFill>
-            <a:srgbClr val="A3D900"/>
-          </a:solidFill>
-          <a:ln/>
-        </p:spPr>
-      </p:sp>
-      <p:sp>
-        <p:nvSpPr>
-          <p:cNvPr id="23" name="Text 21"/>
-          <p:cNvSpPr/>
-          <p:nvPr/>
-        </p:nvSpPr>
-        <p:spPr>
-          <a:xfrm>
-            <a:off x="8380781" y="1755648"/>
-            <a:ext cx="475488" cy="292608"/>
-          </a:xfrm>
-          <a:prstGeom prst="rect">
-            <a:avLst/>
-          </a:prstGeom>
-          <a:noFill/>
-          <a:ln/>
-        </p:spPr>
-        <p:txBody>
-          <a:bodyPr wrap="square" lIns="0" tIns="0" rIns="0" bIns="0" rtlCol="0" anchor="ctr"/>
-          <a:lstStyle/>
-          <a:p>
-            <a:pPr algn="ctr" indent="0" marL="0">
-              <a:buNone/>
-            </a:pPr>
-            <a:r>
-              <a:rPr lang="en-US" sz="1100" b="1" dirty="0">
-                <a:solidFill>
-                  <a:srgbClr val="4F6A00"/>
-                </a:solidFill>
-                <a:latin typeface="Arial" pitchFamily="34" charset="0"/>
-                <a:ea typeface="Arial" pitchFamily="34" charset="-122"/>
-                <a:cs typeface="Arial" pitchFamily="34" charset="-120"/>
-              </a:rPr>
-              <a:t>03</a:t>
-            </a:r>
-            <a:endParaRPr lang="en-US" sz="1100" dirty="0"/>
-          </a:p>
-        </p:txBody>
-      </p:sp>
-      <p:sp>
-        <p:nvSpPr>
-          <p:cNvPr id="24" name="Text 22"/>
-          <p:cNvSpPr/>
-          <p:nvPr/>
-        </p:nvSpPr>
-        <p:spPr>
-          <a:xfrm>
-            <a:off x="8380781" y="2194560"/>
-            <a:ext cx="3015386" cy="365760"/>
-          </a:xfrm>
-          <a:prstGeom prst="rect">
-            <a:avLst/>
-          </a:prstGeom>
-          <a:noFill/>
-          <a:ln/>
-        </p:spPr>
-        <p:txBody>
-          <a:bodyPr wrap="square" lIns="0" tIns="0" rIns="0" bIns="0" rtlCol="0" anchor="t"/>
-          <a:lstStyle/>
-          <a:p>
-            <a:pPr indent="0" marL="0">
-              <a:buNone/>
-            </a:pPr>
-            <a:r>
-              <a:rPr lang="en-US" sz="1500" b="1" dirty="0">
-                <a:solidFill>
-                  <a:srgbClr val="0F172A"/>
-                </a:solidFill>
-                <a:latin typeface="Pretendard" pitchFamily="34" charset="0"/>
-                <a:ea typeface="Pretendard" pitchFamily="34" charset="-122"/>
-                <a:cs typeface="Pretendard" pitchFamily="34" charset="-120"/>
-              </a:rPr>
-              <a:t>가치 상승 및 출구 전략</a:t>
-            </a:r>
-            <a:endParaRPr lang="en-US" sz="1500" dirty="0"/>
-          </a:p>
-        </p:txBody>
-      </p:sp>
-      <p:sp>
-        <p:nvSpPr>
-          <p:cNvPr id="25" name="Shape 23"/>
-          <p:cNvSpPr/>
-          <p:nvPr/>
-        </p:nvSpPr>
-        <p:spPr>
-          <a:xfrm>
-            <a:off x="8380781" y="2624328"/>
-            <a:ext cx="3015386" cy="0"/>
-          </a:xfrm>
-          <a:prstGeom prst="line">
-            <a:avLst/>
-          </a:prstGeom>
-          <a:noFill/>
-          <a:ln w="6350">
-            <a:solidFill>
-              <a:srgbClr val="CBD5E1"/>
-            </a:solidFill>
-            <a:prstDash val="solid"/>
-          </a:ln>
-        </p:spPr>
-      </p:sp>
-      <p:sp>
-        <p:nvSpPr>
-          <p:cNvPr id="26" name="Text 24"/>
-          <p:cNvSpPr/>
-          <p:nvPr/>
-        </p:nvSpPr>
-        <p:spPr>
-          <a:xfrm>
-            <a:off x="8380781" y="2779776"/>
-            <a:ext cx="3015386" cy="1965960"/>
-          </a:xfrm>
-          <a:prstGeom prst="rect">
-            <a:avLst/>
-          </a:prstGeom>
-          <a:noFill/>
-          <a:ln/>
-        </p:spPr>
-        <p:txBody>
-          <a:bodyPr wrap="square" lIns="0" tIns="0" rIns="0" bIns="0" rtlCol="0" anchor="t"/>
-          <a:lstStyle/>
-          <a:p>
-            <a:pPr indent="0" marL="0">
-              <a:lnSpc>
-                <a:spcPct val="130000"/>
-              </a:lnSpc>
-              <a:buNone/>
-            </a:pPr>
-            <a:r>
-              <a:rPr lang="en-US" sz="1200" dirty="0">
-                <a:solidFill>
-                  <a:srgbClr val="0F172A"/>
-                </a:solidFill>
-                <a:latin typeface="Pretendard" pitchFamily="34" charset="0"/>
-                <a:ea typeface="Pretendard" pitchFamily="34" charset="-122"/>
-                <a:cs typeface="Pretendard" pitchFamily="34" charset="-120"/>
-              </a:rPr>
-              <a:t>현행 공법 여력을 활용한 밸류업 기회와 더불어 향후 권역 지가 상승에 따른 시세차익 실현이 유력합니다.</a:t>
-            </a:r>
-            <a:endParaRPr lang="en-US" sz="1200" dirty="0"/>
-          </a:p>
-        </p:txBody>
-      </p:sp>
-      <p:sp>
-        <p:nvSpPr>
-          <p:cNvPr id="27" name="Shape 25"/>
           <p:cNvSpPr/>
           <p:nvPr/>
         </p:nvSpPr>
@@ -6890,7 +6704,7 @@
       </p:sp>
       <p:sp>
         <p:nvSpPr>
-          <p:cNvPr id="28" name="Text 26"/>
+          <p:cNvPr id="7" name="Text 5"/>
           <p:cNvSpPr/>
           <p:nvPr/>
         </p:nvSpPr>
@@ -6929,7 +6743,7 @@
       </p:sp>
       <p:sp>
         <p:nvSpPr>
-          <p:cNvPr id="29" name="Text 27"/>
+          <p:cNvPr id="8" name="Text 6"/>
           <p:cNvSpPr/>
           <p:nvPr/>
         </p:nvSpPr>
@@ -6963,7 +6777,7 @@
                 <a:ea typeface="Pretendard" pitchFamily="34" charset="-122"/>
                 <a:cs typeface="Pretendard" pitchFamily="34" charset="-120"/>
               </a:rPr>
-              <a:t>본 자산의 3대 핵심 투자 포인트와 예상 매수자 유형 분석입니다. &gt; 밸류업 시나리오는 AI 추정이며 실제 시장 조건에 따라 다를 수 있습니다.</a:t>
+              <a:t>{"ok":true,"mocked":true,"extractedFields":{"area_signal":"역삼","asset_type":"오피스빌딩","price_band":"300억","size_signal":"3000평(약 9917.4㎡)"},"extractedFacts":{"region":"역삼","exactAddressCandidate":"역삼동 742-1","assetType":"오피스빌딩","priceText":"300억","sizeText":"3000평(약 9917.4㎡)","currentUse":"오피스","currentUseSignal":"근린생활시설","leaseSignal":"임대중","vacancySignal":"공실없음","tenantNames":["쿠팡","네이버"],"unitRentTexts":["301호: 1500만"],"sellerMotivationText":"자산 효율화","brokerNotes":["초역세권 매물"]},"detectedSensitiveFields":["exact_address","tenant_name"],"ambiguousFields":[],"warnings":[],"areaSignal":"역삼","assetType":"오피스빌딩","priceBand":"300억","sizeSignal":"3000평(약 9917.4㎡)","dealType":"매각","buildingName":"역삼 센트럴타워","exactAddress":"역삼동 742-1","totalFloorArea":9917.3,"buildYear":2015,"currentUseSignal":"근린생활시설","vacancySignal":"공실 없음","fitSummary":"초역세권 근생 빌딩으로 시행/사옥 매입에 최적화","cautionSummary":"주요 임차 업종 만기 조율 필요","hiddenFields":["exact_address","seller_motivation"],"confidence":{"areaSignal":"confirmed","assetType":"confirmed","priceBand":"ai_hypothesis","fitSummary":"ai_hypothesis"},"missingData":["sizeSignal"],"boundaryNote":"본 자료는 실거래 통계 기반 참고치입니다.","buyerType":"법인 사옥형","budgetRange":{"min":50,"max":80,"display":"50억~80억"},"preferredRegions":["강남","성수"],"assetTypes":["꼬마빌딩","사옥용"],"purchasePurpose":"사옥용 매입","mustHave":["초역세권","주차"],"niceToHave":["테라스","루프탑"],"riskTolerance":"medium","financingNote":"자본금 50% 준비","missingQuestions":["구체적인 입주 시기가 언제인가요?","선호하는 수익률이 있나요?"],"privacyNotes":["연락처 비공개"],"fitReasons":["매수자 예산(50-80억)에 부합하는 매물입니다.","요청하신 성수/강남 권역에 해당합니다."],"cautionReasons":["요청한 용도와 달리 명도 협의가 다소 필요합니다."],"recommendedNextAction":"현장 답사 제안","kakaoMessage":"안녕하세요! 요청하신 조건에 부합하는 추천 매물이 있어 안내해 드립니다. 확인해보시고 피드백 부탁드립니다.","title":"강남 역삼역 초역세권 오피스 사옥용 빌딩 매각","shortSummary":"역삼역 도보 5분 거리의 준신축급 대형 오피스빌딩입니다.","dealPoints":["초역세권","사옥 최적"],"cautionPoints":["명도 조율 필요"],"hiddenInfoNotice":["보증금 및 지번은 인가 후 확인 가능"],"gateMessage":"G1 등급 등록이 필요합니다.","kakaoText":"강남 역삼역 오피스 빌딩 매각 안내입니다.","exactUnitCandidate":"101호","floor":"1층","areaSqmText":"150㎡","spaceType":"office","depositText":"5000만","monthlyRentText":"400만","maintenanceFeeText":"50만","availableFromText":"즉시입주","leaseTermMonthsText":"24","incentivesText":"렌트프리 2개월","restrictions":[],"landlordIdentity":"김성수","currentTenant":"스타트업","vacancyReason":"이전 확장","rentNegotiation":"협의 가능","region":"성수동","areaSqm":150,"deposit":5000,"monthlyRent":400,"maintenanceFee":50,"availableFrom":"즉시입주","leaseTermMonths":24,"incentives":{"rentFreeMonths":2,"interiorSupport":"일부 인테리어 지원","freeRentDetail":"렌트프리 2개월 지원"},"shortSummaryLease":"성수역 도보 5분 거리 1층 리테일 상가 매물입니다."} &gt; 밸류업 시나리오는 AI 추정이며 실제 시장 조건에 따라 다를 수 있습니다.</a:t>
             </a:r>
             <a:endParaRPr lang="en-US" sz="1000" dirty="0"/>
           </a:p>
@@ -6971,7 +6785,7 @@
       </p:sp>
       <p:sp>
         <p:nvSpPr>
-          <p:cNvPr id="30" name="Text 28"/>
+          <p:cNvPr id="9" name="Text 7"/>
           <p:cNvSpPr/>
           <p:nvPr/>
         </p:nvSpPr>
@@ -7010,7 +6824,7 @@
       </p:sp>
       <p:sp>
         <p:nvSpPr>
-          <p:cNvPr id="31" name="Shape 29"/>
+          <p:cNvPr id="10" name="Shape 8"/>
           <p:cNvSpPr/>
           <p:nvPr/>
         </p:nvSpPr>

--- a/docs/test/stress/e2e-outputs/income_case02_hongdae_fnb_basic.pptx
+++ b/docs/test/stress/e2e-outputs/income_case02_hongdae_fnb_basic.pptx
@@ -5788,7 +5788,7 @@
                 <a:ea typeface="Pretendard" pitchFamily="34" charset="-122"/>
                 <a:cs typeface="Pretendard" pitchFamily="34" charset="-120"/>
               </a:rPr>
-              <a:t>{"ok"</a:t>
+              <a:t>소재지</a:t>
             </a:r>
             <a:endParaRPr lang="en-US" sz="1400" dirty="0"/>
           </a:p>
@@ -5830,7 +5830,7 @@
                 <a:ea typeface="Pretendard" pitchFamily="34" charset="-122"/>
                 <a:cs typeface="Pretendard" pitchFamily="34" charset="-120"/>
               </a:rPr>
-              <a:t>true,"mocked":true,"extractedFields":{"area_signal":"역삼","asset_type":"오피스빌딩","price_band":"300억","size_signal":"3000평(약 9917.4㎡)"},"extractedFacts":{"region":"역삼","exactAddressCandidate":"역삼동 742-1","assetType":"오피스빌딩","priceText":"300억","sizeText":"3000평(약 9917.4㎡)","currentUse":"오피스","currentUseSignal":"근린생활시설","leaseSignal":"임대중","vacancySignal":"공실없음","tenantNames":"쿠팡","네이버","unitRentTexts":"301호: 1500만","sellerMotivationText":"자산 효율화","brokerNotes":"초역세권 매물"},"detectedSensitiveFields":"exact_address","tenant_name","ambiguousFields":,"warnings":,"areaSignal":"역삼","assetType":"오피스빌딩","priceBand":"300억","sizeSignal":"3000평(약 9917.4㎡)","dealType":"매각","buildingName":"역삼 센트럴타워","exactAddress":"역삼동 742-1","totalFloorArea":9917.3,"buildYear":2015,"currentUseSignal":"근린생활시설","vacancySignal":"공실 없음","fitSummary":"초역세권 근생 빌딩으로 시행/사옥 매입에 최적화","cautionSummary":"주요 임차 업종 만기 조율 필요","hiddenFields":"exact_address","seller_motivation","confidence":{"areaSignal":"confirmed","assetType":"confirmed","priceBand":"ai_hypothesis","fitSummary":"ai_hypothesis"},"missingData":"sizeSignal","boundaryNote":"본 자료는 실거래 통계 기반 참고치입니다.","buyerType":"법인 사옥형","budgetRange":{"min":50,"max":80,"display":"50억~80억"},"preferredRegions":"강남","성수","assetTypes":"꼬마빌딩","사옥용","purchasePurpose":"사옥용 매입","mustHave":"초역세권","주차","niceToHave":"테라스","루프탑","riskTolerance":"medium","financingNote":"자본금 50% 준비","missingQuestions":"구체적인 입주 시기가 언제인가요?","선호하는 수익률이 있나요?","privacyNotes":"연락처 비공개","fitReasons":"매수자 예산(50-80억)에 부합하는 매물입니다.","요청하신 성수/강남 권역에 해당합니다.","cautionReasons":"요청한 용도와 달리 명도 협의가 다소 필요합니다.","recommendedNextAction":"현장 답사 제안","kakaoMessage":"안녕하세요! 요청하신 조건에 부합하는 추천 매물이 있어 안내해 드립니다. 확인해보시고 피드백 부탁드립니다.","title":"강남 역삼역 초역세권 오피스 사옥용 빌딩 매각","shortSummary":"역삼역 도보 5분 거리의 준신축급 대형 오피스빌딩입니다.","dealPoints":"초역세권","사옥 최적","cautionPoints":"명도 조율 필요","hiddenInfoNotice":"보증금 및 지번은 인가 후 확인 가능","gateMessage":"G1 등급 등록이 필요합니다.","kakaoText":"강남 역삼역 오피스 빌딩 매각 안내입니다.","exactUnitCandidate":"101호","floor":"1층","areaSqmText":"150㎡","spaceType":"office","depositText":"5000만","monthlyRentText":"400만","maintenanceFeeText":"50만","availableFromText":"즉시입주","leaseTermMonthsText":"24","incentivesText":"렌트프리 2개월","restrictions":,"landlordIdentity":"김성수","currentTenant":"스타트업","vacancyReason":"이전 확장","rentNegotiation":"협의 가능","region":"성수동","areaSqm":150,"deposit":5000,"monthlyRent":400,"maintenanceFee":50,"availableFrom":"즉시입주","leaseTermMonths":24,"incentives":{"rentFreeMonths":2,"interiorSupport":"일부 인테리어 지원","freeRentDetail":"렌트프리 2개월 지원"},"shortSummaryLease":"성수역 도보 5분 거리 1층 리테일 상가 매물입니다."}</a:t>
+              <a:t>마포권역</a:t>
             </a:r>
             <a:endParaRPr lang="en-US" sz="1400" dirty="0"/>
           </a:p>
@@ -5839,6 +5839,862 @@
       <p:sp>
         <p:nvSpPr>
           <p:cNvPr id="9" name="Shape 7"/>
+          <p:cNvSpPr/>
+          <p:nvPr/>
+        </p:nvSpPr>
+        <p:spPr>
+          <a:xfrm>
+            <a:off x="566928" y="2048256"/>
+            <a:ext cx="6858000" cy="0"/>
+          </a:xfrm>
+          <a:prstGeom prst="line">
+            <a:avLst/>
+          </a:prstGeom>
+          <a:noFill/>
+          <a:ln w="3810">
+            <a:solidFill>
+              <a:srgbClr val="CBD5E0"/>
+            </a:solidFill>
+            <a:prstDash val="solid"/>
+          </a:ln>
+        </p:spPr>
+      </p:sp>
+      <p:sp>
+        <p:nvSpPr>
+          <p:cNvPr id="10" name="Text 8"/>
+          <p:cNvSpPr/>
+          <p:nvPr/>
+        </p:nvSpPr>
+        <p:spPr>
+          <a:xfrm>
+            <a:off x="566928" y="2048256"/>
+            <a:ext cx="2606040" cy="402336"/>
+          </a:xfrm>
+          <a:prstGeom prst="rect">
+            <a:avLst/>
+          </a:prstGeom>
+          <a:noFill/>
+          <a:ln/>
+        </p:spPr>
+        <p:txBody>
+          <a:bodyPr wrap="square" lIns="0" tIns="0" rIns="0" bIns="0" rtlCol="0" anchor="ctr"/>
+          <a:lstStyle/>
+          <a:p>
+            <a:pPr indent="0" marL="0">
+              <a:lnSpc>
+                <a:spcPct val="120000"/>
+              </a:lnSpc>
+              <a:buNone/>
+            </a:pPr>
+            <a:r>
+              <a:rPr lang="en-US" sz="1400" dirty="0">
+                <a:solidFill>
+                  <a:srgbClr val="718096"/>
+                </a:solidFill>
+                <a:latin typeface="Pretendard" pitchFamily="34" charset="0"/>
+                <a:ea typeface="Pretendard" pitchFamily="34" charset="-122"/>
+                <a:cs typeface="Pretendard" pitchFamily="34" charset="-120"/>
+              </a:rPr>
+              <a:t>주요 용도</a:t>
+            </a:r>
+            <a:endParaRPr lang="en-US" sz="1400" dirty="0"/>
+          </a:p>
+        </p:txBody>
+      </p:sp>
+      <p:sp>
+        <p:nvSpPr>
+          <p:cNvPr id="11" name="Text 9"/>
+          <p:cNvSpPr/>
+          <p:nvPr/>
+        </p:nvSpPr>
+        <p:spPr>
+          <a:xfrm>
+            <a:off x="3172968" y="2048256"/>
+            <a:ext cx="4251960" cy="402336"/>
+          </a:xfrm>
+          <a:prstGeom prst="rect">
+            <a:avLst/>
+          </a:prstGeom>
+          <a:noFill/>
+          <a:ln/>
+        </p:spPr>
+        <p:txBody>
+          <a:bodyPr wrap="square" lIns="0" tIns="0" rIns="0" bIns="0" rtlCol="0" anchor="ctr"/>
+          <a:lstStyle/>
+          <a:p>
+            <a:pPr indent="0" marL="0">
+              <a:lnSpc>
+                <a:spcPct val="120000"/>
+              </a:lnSpc>
+              <a:buNone/>
+            </a:pPr>
+            <a:r>
+              <a:rPr lang="en-US" sz="1400" b="1" dirty="0">
+                <a:solidFill>
+                  <a:srgbClr val="10161F"/>
+                </a:solidFill>
+                <a:latin typeface="Pretendard" pitchFamily="34" charset="0"/>
+                <a:ea typeface="Pretendard" pitchFamily="34" charset="-122"/>
+                <a:cs typeface="Pretendard" pitchFamily="34" charset="-120"/>
+              </a:rPr>
+              <a:t>근린생활시설</a:t>
+            </a:r>
+            <a:endParaRPr lang="en-US" sz="1400" dirty="0"/>
+          </a:p>
+        </p:txBody>
+      </p:sp>
+      <p:sp>
+        <p:nvSpPr>
+          <p:cNvPr id="12" name="Shape 10"/>
+          <p:cNvSpPr/>
+          <p:nvPr/>
+        </p:nvSpPr>
+        <p:spPr>
+          <a:xfrm>
+            <a:off x="566928" y="2450592"/>
+            <a:ext cx="6858000" cy="0"/>
+          </a:xfrm>
+          <a:prstGeom prst="line">
+            <a:avLst/>
+          </a:prstGeom>
+          <a:noFill/>
+          <a:ln w="3810">
+            <a:solidFill>
+              <a:srgbClr val="CBD5E0"/>
+            </a:solidFill>
+            <a:prstDash val="solid"/>
+          </a:ln>
+        </p:spPr>
+      </p:sp>
+      <p:sp>
+        <p:nvSpPr>
+          <p:cNvPr id="13" name="Text 11"/>
+          <p:cNvSpPr/>
+          <p:nvPr/>
+        </p:nvSpPr>
+        <p:spPr>
+          <a:xfrm>
+            <a:off x="566928" y="2450592"/>
+            <a:ext cx="2606040" cy="402336"/>
+          </a:xfrm>
+          <a:prstGeom prst="rect">
+            <a:avLst/>
+          </a:prstGeom>
+          <a:noFill/>
+          <a:ln/>
+        </p:spPr>
+        <p:txBody>
+          <a:bodyPr wrap="square" lIns="0" tIns="0" rIns="0" bIns="0" rtlCol="0" anchor="ctr"/>
+          <a:lstStyle/>
+          <a:p>
+            <a:pPr indent="0" marL="0">
+              <a:lnSpc>
+                <a:spcPct val="120000"/>
+              </a:lnSpc>
+              <a:buNone/>
+            </a:pPr>
+            <a:r>
+              <a:rPr lang="en-US" sz="1400" dirty="0">
+                <a:solidFill>
+                  <a:srgbClr val="718096"/>
+                </a:solidFill>
+                <a:latin typeface="Pretendard" pitchFamily="34" charset="0"/>
+                <a:ea typeface="Pretendard" pitchFamily="34" charset="-122"/>
+                <a:cs typeface="Pretendard" pitchFamily="34" charset="-120"/>
+              </a:rPr>
+              <a:t>연면적</a:t>
+            </a:r>
+            <a:endParaRPr lang="en-US" sz="1400" dirty="0"/>
+          </a:p>
+        </p:txBody>
+      </p:sp>
+      <p:sp>
+        <p:nvSpPr>
+          <p:cNvPr id="14" name="Text 12"/>
+          <p:cNvSpPr/>
+          <p:nvPr/>
+        </p:nvSpPr>
+        <p:spPr>
+          <a:xfrm>
+            <a:off x="3172968" y="2450592"/>
+            <a:ext cx="4251960" cy="402336"/>
+          </a:xfrm>
+          <a:prstGeom prst="rect">
+            <a:avLst/>
+          </a:prstGeom>
+          <a:noFill/>
+          <a:ln/>
+        </p:spPr>
+        <p:txBody>
+          <a:bodyPr wrap="square" lIns="0" tIns="0" rIns="0" bIns="0" rtlCol="0" anchor="ctr"/>
+          <a:lstStyle/>
+          <a:p>
+            <a:pPr indent="0" marL="0">
+              <a:lnSpc>
+                <a:spcPct val="120000"/>
+              </a:lnSpc>
+              <a:buNone/>
+            </a:pPr>
+            <a:r>
+              <a:rPr lang="en-US" sz="1400" b="1" dirty="0">
+                <a:solidFill>
+                  <a:srgbClr val="10161F"/>
+                </a:solidFill>
+                <a:latin typeface="Pretendard" pitchFamily="34" charset="0"/>
+                <a:ea typeface="Pretendard" pitchFamily="34" charset="-122"/>
+                <a:cs typeface="Pretendard" pitchFamily="34" charset="-120"/>
+              </a:rPr>
+              <a:t>5,000㎡ (약 1513평(약 5001.7㎡))</a:t>
+            </a:r>
+            <a:endParaRPr lang="en-US" sz="1400" dirty="0"/>
+          </a:p>
+        </p:txBody>
+      </p:sp>
+      <p:sp>
+        <p:nvSpPr>
+          <p:cNvPr id="15" name="Shape 13"/>
+          <p:cNvSpPr/>
+          <p:nvPr/>
+        </p:nvSpPr>
+        <p:spPr>
+          <a:xfrm>
+            <a:off x="566928" y="2852928"/>
+            <a:ext cx="6858000" cy="0"/>
+          </a:xfrm>
+          <a:prstGeom prst="line">
+            <a:avLst/>
+          </a:prstGeom>
+          <a:noFill/>
+          <a:ln w="3810">
+            <a:solidFill>
+              <a:srgbClr val="CBD5E0"/>
+            </a:solidFill>
+            <a:prstDash val="solid"/>
+          </a:ln>
+        </p:spPr>
+      </p:sp>
+      <p:sp>
+        <p:nvSpPr>
+          <p:cNvPr id="16" name="Text 14"/>
+          <p:cNvSpPr/>
+          <p:nvPr/>
+        </p:nvSpPr>
+        <p:spPr>
+          <a:xfrm>
+            <a:off x="566928" y="2852928"/>
+            <a:ext cx="2606040" cy="402336"/>
+          </a:xfrm>
+          <a:prstGeom prst="rect">
+            <a:avLst/>
+          </a:prstGeom>
+          <a:noFill/>
+          <a:ln/>
+        </p:spPr>
+        <p:txBody>
+          <a:bodyPr wrap="square" lIns="0" tIns="0" rIns="0" bIns="0" rtlCol="0" anchor="ctr"/>
+          <a:lstStyle/>
+          <a:p>
+            <a:pPr indent="0" marL="0">
+              <a:lnSpc>
+                <a:spcPct val="120000"/>
+              </a:lnSpc>
+              <a:buNone/>
+            </a:pPr>
+            <a:r>
+              <a:rPr lang="en-US" sz="1400" dirty="0">
+                <a:solidFill>
+                  <a:srgbClr val="718096"/>
+                </a:solidFill>
+                <a:latin typeface="Pretendard" pitchFamily="34" charset="0"/>
+                <a:ea typeface="Pretendard" pitchFamily="34" charset="-122"/>
+                <a:cs typeface="Pretendard" pitchFamily="34" charset="-120"/>
+              </a:rPr>
+              <a:t>대지면적</a:t>
+            </a:r>
+            <a:endParaRPr lang="en-US" sz="1400" dirty="0"/>
+          </a:p>
+        </p:txBody>
+      </p:sp>
+      <p:sp>
+        <p:nvSpPr>
+          <p:cNvPr id="17" name="Text 15"/>
+          <p:cNvSpPr/>
+          <p:nvPr/>
+        </p:nvSpPr>
+        <p:spPr>
+          <a:xfrm>
+            <a:off x="3172968" y="2852928"/>
+            <a:ext cx="4251960" cy="402336"/>
+          </a:xfrm>
+          <a:prstGeom prst="rect">
+            <a:avLst/>
+          </a:prstGeom>
+          <a:noFill/>
+          <a:ln/>
+        </p:spPr>
+        <p:txBody>
+          <a:bodyPr wrap="square" lIns="0" tIns="0" rIns="0" bIns="0" rtlCol="0" anchor="ctr"/>
+          <a:lstStyle/>
+          <a:p>
+            <a:pPr indent="0" marL="0">
+              <a:lnSpc>
+                <a:spcPct val="120000"/>
+              </a:lnSpc>
+              <a:buNone/>
+            </a:pPr>
+            <a:r>
+              <a:rPr lang="en-US" sz="1400" b="1" dirty="0">
+                <a:solidFill>
+                  <a:srgbClr val="10161F"/>
+                </a:solidFill>
+                <a:latin typeface="Pretendard" pitchFamily="34" charset="0"/>
+                <a:ea typeface="Pretendard" pitchFamily="34" charset="-122"/>
+                <a:cs typeface="Pretendard" pitchFamily="34" charset="-120"/>
+              </a:rPr>
+              <a:t>1,000㎡ (약 303평(약 1001.7㎡))</a:t>
+            </a:r>
+            <a:endParaRPr lang="en-US" sz="1400" dirty="0"/>
+          </a:p>
+        </p:txBody>
+      </p:sp>
+      <p:sp>
+        <p:nvSpPr>
+          <p:cNvPr id="18" name="Shape 16"/>
+          <p:cNvSpPr/>
+          <p:nvPr/>
+        </p:nvSpPr>
+        <p:spPr>
+          <a:xfrm>
+            <a:off x="566928" y="3255264"/>
+            <a:ext cx="6858000" cy="0"/>
+          </a:xfrm>
+          <a:prstGeom prst="line">
+            <a:avLst/>
+          </a:prstGeom>
+          <a:noFill/>
+          <a:ln w="3810">
+            <a:solidFill>
+              <a:srgbClr val="CBD5E0"/>
+            </a:solidFill>
+            <a:prstDash val="solid"/>
+          </a:ln>
+        </p:spPr>
+      </p:sp>
+      <p:sp>
+        <p:nvSpPr>
+          <p:cNvPr id="19" name="Text 17"/>
+          <p:cNvSpPr/>
+          <p:nvPr/>
+        </p:nvSpPr>
+        <p:spPr>
+          <a:xfrm>
+            <a:off x="566928" y="3255264"/>
+            <a:ext cx="2606040" cy="402336"/>
+          </a:xfrm>
+          <a:prstGeom prst="rect">
+            <a:avLst/>
+          </a:prstGeom>
+          <a:noFill/>
+          <a:ln/>
+        </p:spPr>
+        <p:txBody>
+          <a:bodyPr wrap="square" lIns="0" tIns="0" rIns="0" bIns="0" rtlCol="0" anchor="ctr"/>
+          <a:lstStyle/>
+          <a:p>
+            <a:pPr indent="0" marL="0">
+              <a:lnSpc>
+                <a:spcPct val="120000"/>
+              </a:lnSpc>
+              <a:buNone/>
+            </a:pPr>
+            <a:r>
+              <a:rPr lang="en-US" sz="1400" dirty="0">
+                <a:solidFill>
+                  <a:srgbClr val="718096"/>
+                </a:solidFill>
+                <a:latin typeface="Pretendard" pitchFamily="34" charset="0"/>
+                <a:ea typeface="Pretendard" pitchFamily="34" charset="-122"/>
+                <a:cs typeface="Pretendard" pitchFamily="34" charset="-120"/>
+              </a:rPr>
+              <a:t>용도지역</a:t>
+            </a:r>
+            <a:endParaRPr lang="en-US" sz="1400" dirty="0"/>
+          </a:p>
+        </p:txBody>
+      </p:sp>
+      <p:sp>
+        <p:nvSpPr>
+          <p:cNvPr id="20" name="Text 18"/>
+          <p:cNvSpPr/>
+          <p:nvPr/>
+        </p:nvSpPr>
+        <p:spPr>
+          <a:xfrm>
+            <a:off x="3172968" y="3255264"/>
+            <a:ext cx="4251960" cy="402336"/>
+          </a:xfrm>
+          <a:prstGeom prst="rect">
+            <a:avLst/>
+          </a:prstGeom>
+          <a:noFill/>
+          <a:ln/>
+        </p:spPr>
+        <p:txBody>
+          <a:bodyPr wrap="square" lIns="0" tIns="0" rIns="0" bIns="0" rtlCol="0" anchor="ctr"/>
+          <a:lstStyle/>
+          <a:p>
+            <a:pPr indent="0" marL="0">
+              <a:lnSpc>
+                <a:spcPct val="120000"/>
+              </a:lnSpc>
+              <a:buNone/>
+            </a:pPr>
+            <a:r>
+              <a:rPr lang="en-US" sz="1400" b="1" dirty="0">
+                <a:solidFill>
+                  <a:srgbClr val="10161F"/>
+                </a:solidFill>
+                <a:latin typeface="Pretendard" pitchFamily="34" charset="0"/>
+                <a:ea typeface="Pretendard" pitchFamily="34" charset="-122"/>
+                <a:cs typeface="Pretendard" pitchFamily="34" charset="-120"/>
+              </a:rPr>
+              <a:t>일반상업지역</a:t>
+            </a:r>
+            <a:endParaRPr lang="en-US" sz="1400" dirty="0"/>
+          </a:p>
+        </p:txBody>
+      </p:sp>
+      <p:sp>
+        <p:nvSpPr>
+          <p:cNvPr id="21" name="Shape 19"/>
+          <p:cNvSpPr/>
+          <p:nvPr/>
+        </p:nvSpPr>
+        <p:spPr>
+          <a:xfrm>
+            <a:off x="566928" y="3657600"/>
+            <a:ext cx="6858000" cy="0"/>
+          </a:xfrm>
+          <a:prstGeom prst="line">
+            <a:avLst/>
+          </a:prstGeom>
+          <a:noFill/>
+          <a:ln w="3810">
+            <a:solidFill>
+              <a:srgbClr val="CBD5E0"/>
+            </a:solidFill>
+            <a:prstDash val="solid"/>
+          </a:ln>
+        </p:spPr>
+      </p:sp>
+      <p:sp>
+        <p:nvSpPr>
+          <p:cNvPr id="22" name="Text 20"/>
+          <p:cNvSpPr/>
+          <p:nvPr/>
+        </p:nvSpPr>
+        <p:spPr>
+          <a:xfrm>
+            <a:off x="566928" y="3657600"/>
+            <a:ext cx="2606040" cy="402336"/>
+          </a:xfrm>
+          <a:prstGeom prst="rect">
+            <a:avLst/>
+          </a:prstGeom>
+          <a:noFill/>
+          <a:ln/>
+        </p:spPr>
+        <p:txBody>
+          <a:bodyPr wrap="square" lIns="0" tIns="0" rIns="0" bIns="0" rtlCol="0" anchor="ctr"/>
+          <a:lstStyle/>
+          <a:p>
+            <a:pPr indent="0" marL="0">
+              <a:lnSpc>
+                <a:spcPct val="120000"/>
+              </a:lnSpc>
+              <a:buNone/>
+            </a:pPr>
+            <a:r>
+              <a:rPr lang="en-US" sz="1400" dirty="0">
+                <a:solidFill>
+                  <a:srgbClr val="718096"/>
+                </a:solidFill>
+                <a:latin typeface="Pretendard" pitchFamily="34" charset="0"/>
+                <a:ea typeface="Pretendard" pitchFamily="34" charset="-122"/>
+                <a:cs typeface="Pretendard" pitchFamily="34" charset="-120"/>
+              </a:rPr>
+              <a:t>승강기</a:t>
+            </a:r>
+            <a:endParaRPr lang="en-US" sz="1400" dirty="0"/>
+          </a:p>
+        </p:txBody>
+      </p:sp>
+      <p:sp>
+        <p:nvSpPr>
+          <p:cNvPr id="23" name="Text 21"/>
+          <p:cNvSpPr/>
+          <p:nvPr/>
+        </p:nvSpPr>
+        <p:spPr>
+          <a:xfrm>
+            <a:off x="3172968" y="3657600"/>
+            <a:ext cx="4251960" cy="402336"/>
+          </a:xfrm>
+          <a:prstGeom prst="rect">
+            <a:avLst/>
+          </a:prstGeom>
+          <a:noFill/>
+          <a:ln/>
+        </p:spPr>
+        <p:txBody>
+          <a:bodyPr wrap="square" lIns="0" tIns="0" rIns="0" bIns="0" rtlCol="0" anchor="ctr"/>
+          <a:lstStyle/>
+          <a:p>
+            <a:pPr indent="0" marL="0">
+              <a:lnSpc>
+                <a:spcPct val="120000"/>
+              </a:lnSpc>
+              <a:buNone/>
+            </a:pPr>
+            <a:r>
+              <a:rPr lang="en-US" sz="1400" b="1" dirty="0">
+                <a:solidFill>
+                  <a:srgbClr val="10161F"/>
+                </a:solidFill>
+                <a:latin typeface="Pretendard" pitchFamily="34" charset="0"/>
+                <a:ea typeface="Pretendard" pitchFamily="34" charset="-122"/>
+                <a:cs typeface="Pretendard" pitchFamily="34" charset="-120"/>
+              </a:rPr>
+              <a:t>1대 (15인승 침대용)</a:t>
+            </a:r>
+            <a:endParaRPr lang="en-US" sz="1400" dirty="0"/>
+          </a:p>
+        </p:txBody>
+      </p:sp>
+      <p:sp>
+        <p:nvSpPr>
+          <p:cNvPr id="24" name="Shape 22"/>
+          <p:cNvSpPr/>
+          <p:nvPr/>
+        </p:nvSpPr>
+        <p:spPr>
+          <a:xfrm>
+            <a:off x="566928" y="4059936"/>
+            <a:ext cx="6858000" cy="0"/>
+          </a:xfrm>
+          <a:prstGeom prst="line">
+            <a:avLst/>
+          </a:prstGeom>
+          <a:noFill/>
+          <a:ln w="3810">
+            <a:solidFill>
+              <a:srgbClr val="CBD5E0"/>
+            </a:solidFill>
+            <a:prstDash val="solid"/>
+          </a:ln>
+        </p:spPr>
+      </p:sp>
+      <p:sp>
+        <p:nvSpPr>
+          <p:cNvPr id="25" name="Text 23"/>
+          <p:cNvSpPr/>
+          <p:nvPr/>
+        </p:nvSpPr>
+        <p:spPr>
+          <a:xfrm>
+            <a:off x="566928" y="4059936"/>
+            <a:ext cx="2606040" cy="402336"/>
+          </a:xfrm>
+          <a:prstGeom prst="rect">
+            <a:avLst/>
+          </a:prstGeom>
+          <a:noFill/>
+          <a:ln/>
+        </p:spPr>
+        <p:txBody>
+          <a:bodyPr wrap="square" lIns="0" tIns="0" rIns="0" bIns="0" rtlCol="0" anchor="ctr"/>
+          <a:lstStyle/>
+          <a:p>
+            <a:pPr indent="0" marL="0">
+              <a:lnSpc>
+                <a:spcPct val="120000"/>
+              </a:lnSpc>
+              <a:buNone/>
+            </a:pPr>
+            <a:r>
+              <a:rPr lang="en-US" sz="1400" dirty="0">
+                <a:solidFill>
+                  <a:srgbClr val="718096"/>
+                </a:solidFill>
+                <a:latin typeface="Pretendard" pitchFamily="34" charset="0"/>
+                <a:ea typeface="Pretendard" pitchFamily="34" charset="-122"/>
+                <a:cs typeface="Pretendard" pitchFamily="34" charset="-120"/>
+              </a:rPr>
+              <a:t>주차 대수</a:t>
+            </a:r>
+            <a:endParaRPr lang="en-US" sz="1400" dirty="0"/>
+          </a:p>
+        </p:txBody>
+      </p:sp>
+      <p:sp>
+        <p:nvSpPr>
+          <p:cNvPr id="26" name="Text 24"/>
+          <p:cNvSpPr/>
+          <p:nvPr/>
+        </p:nvSpPr>
+        <p:spPr>
+          <a:xfrm>
+            <a:off x="3172968" y="4059936"/>
+            <a:ext cx="4251960" cy="402336"/>
+          </a:xfrm>
+          <a:prstGeom prst="rect">
+            <a:avLst/>
+          </a:prstGeom>
+          <a:noFill/>
+          <a:ln/>
+        </p:spPr>
+        <p:txBody>
+          <a:bodyPr wrap="square" lIns="0" tIns="0" rIns="0" bIns="0" rtlCol="0" anchor="ctr"/>
+          <a:lstStyle/>
+          <a:p>
+            <a:pPr indent="0" marL="0">
+              <a:lnSpc>
+                <a:spcPct val="120000"/>
+              </a:lnSpc>
+              <a:buNone/>
+            </a:pPr>
+            <a:r>
+              <a:rPr lang="en-US" sz="1400" b="1" dirty="0">
+                <a:solidFill>
+                  <a:srgbClr val="10161F"/>
+                </a:solidFill>
+                <a:latin typeface="Pretendard" pitchFamily="34" charset="0"/>
+                <a:ea typeface="Pretendard" pitchFamily="34" charset="-122"/>
+                <a:cs typeface="Pretendard" pitchFamily="34" charset="-120"/>
+              </a:rPr>
+              <a:t>18대 (자주식 완비)</a:t>
+            </a:r>
+            <a:endParaRPr lang="en-US" sz="1400" dirty="0"/>
+          </a:p>
+        </p:txBody>
+      </p:sp>
+      <p:sp>
+        <p:nvSpPr>
+          <p:cNvPr id="27" name="Shape 25"/>
+          <p:cNvSpPr/>
+          <p:nvPr/>
+        </p:nvSpPr>
+        <p:spPr>
+          <a:xfrm>
+            <a:off x="566928" y="4462272"/>
+            <a:ext cx="6858000" cy="0"/>
+          </a:xfrm>
+          <a:prstGeom prst="line">
+            <a:avLst/>
+          </a:prstGeom>
+          <a:noFill/>
+          <a:ln w="3810">
+            <a:solidFill>
+              <a:srgbClr val="CBD5E0"/>
+            </a:solidFill>
+            <a:prstDash val="solid"/>
+          </a:ln>
+        </p:spPr>
+      </p:sp>
+      <p:sp>
+        <p:nvSpPr>
+          <p:cNvPr id="28" name="Text 26"/>
+          <p:cNvSpPr/>
+          <p:nvPr/>
+        </p:nvSpPr>
+        <p:spPr>
+          <a:xfrm>
+            <a:off x="566928" y="4462272"/>
+            <a:ext cx="2606040" cy="402336"/>
+          </a:xfrm>
+          <a:prstGeom prst="rect">
+            <a:avLst/>
+          </a:prstGeom>
+          <a:noFill/>
+          <a:ln/>
+        </p:spPr>
+        <p:txBody>
+          <a:bodyPr wrap="square" lIns="0" tIns="0" rIns="0" bIns="0" rtlCol="0" anchor="ctr"/>
+          <a:lstStyle/>
+          <a:p>
+            <a:pPr indent="0" marL="0">
+              <a:lnSpc>
+                <a:spcPct val="120000"/>
+              </a:lnSpc>
+              <a:buNone/>
+            </a:pPr>
+            <a:r>
+              <a:rPr lang="en-US" sz="1400" dirty="0">
+                <a:solidFill>
+                  <a:srgbClr val="718096"/>
+                </a:solidFill>
+                <a:latin typeface="Pretendard" pitchFamily="34" charset="0"/>
+                <a:ea typeface="Pretendard" pitchFamily="34" charset="-122"/>
+                <a:cs typeface="Pretendard" pitchFamily="34" charset="-120"/>
+              </a:rPr>
+              <a:t>주구조</a:t>
+            </a:r>
+            <a:endParaRPr lang="en-US" sz="1400" dirty="0"/>
+          </a:p>
+        </p:txBody>
+      </p:sp>
+      <p:sp>
+        <p:nvSpPr>
+          <p:cNvPr id="29" name="Text 27"/>
+          <p:cNvSpPr/>
+          <p:nvPr/>
+        </p:nvSpPr>
+        <p:spPr>
+          <a:xfrm>
+            <a:off x="3172968" y="4462272"/>
+            <a:ext cx="4251960" cy="402336"/>
+          </a:xfrm>
+          <a:prstGeom prst="rect">
+            <a:avLst/>
+          </a:prstGeom>
+          <a:noFill/>
+          <a:ln/>
+        </p:spPr>
+        <p:txBody>
+          <a:bodyPr wrap="square" lIns="0" tIns="0" rIns="0" bIns="0" rtlCol="0" anchor="ctr"/>
+          <a:lstStyle/>
+          <a:p>
+            <a:pPr indent="0" marL="0">
+              <a:lnSpc>
+                <a:spcPct val="120000"/>
+              </a:lnSpc>
+              <a:buNone/>
+            </a:pPr>
+            <a:r>
+              <a:rPr lang="en-US" sz="1400" b="1" dirty="0">
+                <a:solidFill>
+                  <a:srgbClr val="10161F"/>
+                </a:solidFill>
+                <a:latin typeface="Pretendard" pitchFamily="34" charset="0"/>
+                <a:ea typeface="Pretendard" pitchFamily="34" charset="-122"/>
+                <a:cs typeface="Pretendard" pitchFamily="34" charset="-120"/>
+              </a:rPr>
+              <a:t>철근콘크리트구조</a:t>
+            </a:r>
+            <a:endParaRPr lang="en-US" sz="1400" dirty="0"/>
+          </a:p>
+        </p:txBody>
+      </p:sp>
+      <p:sp>
+        <p:nvSpPr>
+          <p:cNvPr id="30" name="Shape 28"/>
+          <p:cNvSpPr/>
+          <p:nvPr/>
+        </p:nvSpPr>
+        <p:spPr>
+          <a:xfrm>
+            <a:off x="566928" y="4864608"/>
+            <a:ext cx="6858000" cy="0"/>
+          </a:xfrm>
+          <a:prstGeom prst="line">
+            <a:avLst/>
+          </a:prstGeom>
+          <a:noFill/>
+          <a:ln w="3810">
+            <a:solidFill>
+              <a:srgbClr val="CBD5E0"/>
+            </a:solidFill>
+            <a:prstDash val="solid"/>
+          </a:ln>
+        </p:spPr>
+      </p:sp>
+      <p:sp>
+        <p:nvSpPr>
+          <p:cNvPr id="31" name="Text 29"/>
+          <p:cNvSpPr/>
+          <p:nvPr/>
+        </p:nvSpPr>
+        <p:spPr>
+          <a:xfrm>
+            <a:off x="566928" y="4864608"/>
+            <a:ext cx="2606040" cy="402336"/>
+          </a:xfrm>
+          <a:prstGeom prst="rect">
+            <a:avLst/>
+          </a:prstGeom>
+          <a:noFill/>
+          <a:ln/>
+        </p:spPr>
+        <p:txBody>
+          <a:bodyPr wrap="square" lIns="0" tIns="0" rIns="0" bIns="0" rtlCol="0" anchor="ctr"/>
+          <a:lstStyle/>
+          <a:p>
+            <a:pPr indent="0" marL="0">
+              <a:lnSpc>
+                <a:spcPct val="120000"/>
+              </a:lnSpc>
+              <a:buNone/>
+            </a:pPr>
+            <a:r>
+              <a:rPr lang="en-US" sz="1400" dirty="0">
+                <a:solidFill>
+                  <a:srgbClr val="718096"/>
+                </a:solidFill>
+                <a:latin typeface="Pretendard" pitchFamily="34" charset="0"/>
+                <a:ea typeface="Pretendard" pitchFamily="34" charset="-122"/>
+                <a:cs typeface="Pretendard" pitchFamily="34" charset="-120"/>
+              </a:rPr>
+              <a:t>매매 희망가</a:t>
+            </a:r>
+            <a:endParaRPr lang="en-US" sz="1400" dirty="0"/>
+          </a:p>
+        </p:txBody>
+      </p:sp>
+      <p:sp>
+        <p:nvSpPr>
+          <p:cNvPr id="32" name="Text 30"/>
+          <p:cNvSpPr/>
+          <p:nvPr/>
+        </p:nvSpPr>
+        <p:spPr>
+          <a:xfrm>
+            <a:off x="3172968" y="4864608"/>
+            <a:ext cx="4251960" cy="402336"/>
+          </a:xfrm>
+          <a:prstGeom prst="rect">
+            <a:avLst/>
+          </a:prstGeom>
+          <a:noFill/>
+          <a:ln/>
+        </p:spPr>
+        <p:txBody>
+          <a:bodyPr wrap="square" lIns="0" tIns="0" rIns="0" bIns="0" rtlCol="0" anchor="ctr"/>
+          <a:lstStyle/>
+          <a:p>
+            <a:pPr indent="0" marL="0">
+              <a:lnSpc>
+                <a:spcPct val="120000"/>
+              </a:lnSpc>
+              <a:buNone/>
+            </a:pPr>
+            <a:r>
+              <a:rPr lang="en-US" sz="1400" b="1" dirty="0">
+                <a:solidFill>
+                  <a:srgbClr val="10161F"/>
+                </a:solidFill>
+                <a:latin typeface="Pretendard" pitchFamily="34" charset="0"/>
+                <a:ea typeface="Pretendard" pitchFamily="34" charset="-122"/>
+                <a:cs typeface="Pretendard" pitchFamily="34" charset="-120"/>
+              </a:rPr>
+              <a:t>58억</a:t>
+            </a:r>
+            <a:endParaRPr lang="en-US" sz="1400" dirty="0"/>
+          </a:p>
+        </p:txBody>
+      </p:sp>
+      <p:sp>
+        <p:nvSpPr>
+          <p:cNvPr id="33" name="Shape 31"/>
           <p:cNvSpPr/>
           <p:nvPr/>
         </p:nvSpPr>
@@ -5861,49 +6717,49 @@
       </p:sp>
       <p:sp>
         <p:nvSpPr>
-          <p:cNvPr id="10" name="Shape 8"/>
+          <p:cNvPr id="34" name="Shape 32"/>
           <p:cNvSpPr/>
           <p:nvPr/>
         </p:nvSpPr>
         <p:spPr>
           <a:xfrm>
             <a:off x="7784287" y="1645920"/>
-            <a:ext cx="3840480" cy="2103120"/>
+            <a:ext cx="3840480" cy="1645920"/>
           </a:xfrm>
           <a:prstGeom prst="roundRect">
             <a:avLst>
-              <a:gd name="adj" fmla="val 2609"/>
+              <a:gd name="adj" fmla="val 3333"/>
             </a:avLst>
           </a:prstGeom>
           <a:solidFill>
-            <a:srgbClr val="F3EBDA"/>
+            <a:srgbClr val="BEE3F8"/>
           </a:solidFill>
           <a:ln/>
         </p:spPr>
       </p:sp>
       <p:sp>
         <p:nvSpPr>
-          <p:cNvPr id="11" name="Shape 9"/>
+          <p:cNvPr id="35" name="Shape 33"/>
           <p:cNvSpPr/>
           <p:nvPr/>
         </p:nvSpPr>
         <p:spPr>
           <a:xfrm>
             <a:off x="7784287" y="1700784"/>
-            <a:ext cx="36576" cy="1993392"/>
+            <a:ext cx="36576" cy="1536192"/>
           </a:xfrm>
           <a:prstGeom prst="rect">
             <a:avLst/>
           </a:prstGeom>
           <a:solidFill>
-            <a:srgbClr val="977024"/>
+            <a:srgbClr val="2B6CB0"/>
           </a:solidFill>
           <a:ln/>
         </p:spPr>
       </p:sp>
       <p:sp>
         <p:nvSpPr>
-          <p:cNvPr id="12" name="Text 10"/>
+          <p:cNvPr id="36" name="Text 34"/>
           <p:cNvSpPr/>
           <p:nvPr/>
         </p:nvSpPr>
@@ -5931,14 +6787,14 @@
       </p:sp>
       <p:sp>
         <p:nvSpPr>
-          <p:cNvPr id="13" name="Text 11"/>
+          <p:cNvPr id="37" name="Text 35"/>
           <p:cNvSpPr/>
           <p:nvPr/>
         </p:nvSpPr>
         <p:spPr>
           <a:xfrm>
             <a:off x="7967167" y="1975104"/>
-            <a:ext cx="3511296" cy="1700784"/>
+            <a:ext cx="3511296" cy="1243584"/>
           </a:xfrm>
           <a:prstGeom prst="rect">
             <a:avLst/>
@@ -5965,7 +6821,7 @@
                 <a:ea typeface="Pretendard" pitchFamily="34" charset="-122"/>
                 <a:cs typeface="Pretendard" pitchFamily="34" charset="-120"/>
               </a:rPr>
-              <a:t>{"ok":true,"mocked":true,"extractedFields":{"area_signal":"역삼","asset_type":"오피스빌딩","price_band":"300억","size_signal":"3</a:t>
+              <a:t>본 매물은 마포권역 입지의 안정적 운영 자산입니다.</a:t>
             </a:r>
             <a:endParaRPr lang="en-US" sz="930" dirty="0"/>
           </a:p>
@@ -5973,7 +6829,7 @@
       </p:sp>
       <p:sp>
         <p:nvSpPr>
-          <p:cNvPr id="14" name="Text 12"/>
+          <p:cNvPr id="38" name="Text 36"/>
           <p:cNvSpPr/>
           <p:nvPr/>
         </p:nvSpPr>
@@ -6012,7 +6868,7 @@
       </p:sp>
       <p:sp>
         <p:nvSpPr>
-          <p:cNvPr id="15" name="Text 13"/>
+          <p:cNvPr id="39" name="Text 37"/>
           <p:cNvSpPr/>
           <p:nvPr/>
         </p:nvSpPr>
@@ -8011,8 +8867,8 @@
         </p:nvSpPr>
         <p:spPr>
           <a:xfrm>
-            <a:off x="566928" y="4535424"/>
-            <a:ext cx="11057839" cy="384048"/>
+            <a:off x="566928" y="6382512"/>
+            <a:ext cx="7315200" cy="219456"/>
           </a:xfrm>
           <a:prstGeom prst="rect">
             <a:avLst/>
@@ -8025,68 +8881,26 @@
           <a:lstStyle/>
           <a:p>
             <a:pPr indent="0" marL="0">
-              <a:lnSpc>
-                <a:spcPct val="125000"/>
-              </a:lnSpc>
-              <a:buNone/>
-            </a:pPr>
-            <a:r>
-              <a:rPr lang="en-US" sz="780" dirty="0">
-                <a:solidFill>
-                  <a:srgbClr val="A0AEC0"/>
+              <a:buNone/>
+            </a:pPr>
+            <a:r>
+              <a:rPr lang="en-US" sz="800" dirty="0">
+                <a:solidFill>
+                  <a:srgbClr val="718096"/>
                 </a:solidFill>
                 <a:latin typeface="Pretendard" pitchFamily="34" charset="0"/>
                 <a:ea typeface="Pretendard" pitchFamily="34" charset="-122"/>
                 <a:cs typeface="Pretendard" pitchFamily="34" charset="-120"/>
               </a:rPr>
-              <a:t>[주의] 임차인명 및 상세 정보는 개인정보 보호를 위해 비공개 처리되었습니다.</a:t>
-            </a:r>
-            <a:endParaRPr lang="en-US" sz="780" dirty="0"/>
+              <a:t>크리딜   |   </a:t>
+            </a:r>
+            <a:endParaRPr lang="en-US" sz="800" dirty="0"/>
           </a:p>
         </p:txBody>
       </p:sp>
       <p:sp>
         <p:nvSpPr>
           <p:cNvPr id="8" name="Text 5"/>
-          <p:cNvSpPr/>
-          <p:nvPr/>
-        </p:nvSpPr>
-        <p:spPr>
-          <a:xfrm>
-            <a:off x="566928" y="6382512"/>
-            <a:ext cx="7315200" cy="219456"/>
-          </a:xfrm>
-          <a:prstGeom prst="rect">
-            <a:avLst/>
-          </a:prstGeom>
-          <a:noFill/>
-          <a:ln/>
-        </p:spPr>
-        <p:txBody>
-          <a:bodyPr wrap="square" lIns="0" tIns="0" rIns="0" bIns="0" rtlCol="0" anchor="ctr"/>
-          <a:lstStyle/>
-          <a:p>
-            <a:pPr indent="0" marL="0">
-              <a:buNone/>
-            </a:pPr>
-            <a:r>
-              <a:rPr lang="en-US" sz="800" dirty="0">
-                <a:solidFill>
-                  <a:srgbClr val="718096"/>
-                </a:solidFill>
-                <a:latin typeface="Pretendard" pitchFamily="34" charset="0"/>
-                <a:ea typeface="Pretendard" pitchFamily="34" charset="-122"/>
-                <a:cs typeface="Pretendard" pitchFamily="34" charset="-120"/>
-              </a:rPr>
-              <a:t>크리딜   |   </a:t>
-            </a:r>
-            <a:endParaRPr lang="en-US" sz="800" dirty="0"/>
-          </a:p>
-        </p:txBody>
-      </p:sp>
-      <p:sp>
-        <p:nvSpPr>
-          <p:cNvPr id="9" name="Text 6"/>
           <p:cNvSpPr/>
           <p:nvPr/>
         </p:nvSpPr>
@@ -9609,11 +10423,11 @@
         <p:spPr>
           <a:xfrm>
             <a:off x="566928" y="1417320"/>
-            <a:ext cx="1992112" cy="3611880"/>
+            <a:ext cx="11057839" cy="3611880"/>
           </a:xfrm>
           <a:prstGeom prst="roundRect">
             <a:avLst>
-              <a:gd name="adj" fmla="val 2754"/>
+              <a:gd name="adj" fmla="val 1519"/>
             </a:avLst>
           </a:prstGeom>
           <a:solidFill>
@@ -9636,7 +10450,7 @@
         <p:spPr>
           <a:xfrm>
             <a:off x="566928" y="1417320"/>
-            <a:ext cx="1992112" cy="45720"/>
+            <a:ext cx="11057839" cy="45720"/>
           </a:xfrm>
           <a:prstGeom prst="rect">
             <a:avLst/>
@@ -9656,7 +10470,7 @@
         <p:spPr>
           <a:xfrm>
             <a:off x="795528" y="1618488"/>
-            <a:ext cx="1534912" cy="292608"/>
+            <a:ext cx="10600639" cy="292608"/>
           </a:xfrm>
           <a:prstGeom prst="rect">
             <a:avLst/>
@@ -9672,7 +10486,7 @@
               <a:buNone/>
             </a:pPr>
             <a:r>
-              <a:rPr lang="en-US" sz="1150" b="1" dirty="0">
+              <a:rPr lang="en-US" sz="1350" b="1" dirty="0">
                 <a:solidFill>
                   <a:srgbClr val="977024"/>
                 </a:solidFill>
@@ -9680,9 +10494,9 @@
                 <a:ea typeface="Pretendard" pitchFamily="34" charset="-122"/>
                 <a:cs typeface="Pretendard" pitchFamily="34" charset="-120"/>
               </a:rPr>
-              <a:t>건물 물리적 상태</a:t>
-            </a:r>
-            <a:endParaRPr lang="en-US" sz="1150" dirty="0"/>
+              <a:t>용도 리스크</a:t>
+            </a:r>
+            <a:endParaRPr lang="en-US" sz="1350" dirty="0"/>
           </a:p>
         </p:txBody>
       </p:sp>
@@ -9695,7 +10509,7 @@
         <p:spPr>
           <a:xfrm>
             <a:off x="795528" y="1911096"/>
-            <a:ext cx="1534912" cy="402336"/>
+            <a:ext cx="10600639" cy="402336"/>
           </a:xfrm>
           <a:prstGeom prst="rect">
             <a:avLst/>
@@ -9713,7 +10527,7 @@
               <a:buNone/>
             </a:pPr>
             <a:r>
-              <a:rPr lang="en-US" sz="1150" b="1" dirty="0">
+              <a:rPr lang="en-US" sz="1350" b="1" dirty="0">
                 <a:solidFill>
                   <a:srgbClr val="10161F"/>
                 </a:solidFill>
@@ -9721,9 +10535,9 @@
                 <a:ea typeface="Pretendard" pitchFamily="34" charset="-122"/>
                 <a:cs typeface="Pretendard" pitchFamily="34" charset="-120"/>
               </a:rPr>
-              <a:t>2017년 준공 신축급 상태 (누수/균열 결함 없음)</a:t>
-            </a:r>
-            <a:endParaRPr lang="en-US" sz="1150" dirty="0"/>
+              <a:t>—</a:t>
+            </a:r>
+            <a:endParaRPr lang="en-US" sz="1350" dirty="0"/>
           </a:p>
         </p:txBody>
       </p:sp>
@@ -9736,7 +10550,7 @@
         <p:spPr>
           <a:xfrm>
             <a:off x="795528" y="2377440"/>
-            <a:ext cx="1534912" cy="2560320"/>
+            <a:ext cx="10600639" cy="2560320"/>
           </a:xfrm>
           <a:prstGeom prst="rect">
             <a:avLst/>
@@ -9758,7 +10572,7 @@
               <a:buChar char="•"/>
             </a:pPr>
             <a:r>
-              <a:rPr lang="en-US" sz="1050" dirty="0">
+              <a:rPr lang="en-US" sz="1200" dirty="0">
                 <a:solidFill>
                   <a:srgbClr val="10161F"/>
                 </a:solidFill>
@@ -9766,69 +10580,22 @@
                 <a:ea typeface="Pretendard" pitchFamily="34" charset="-122"/>
                 <a:cs typeface="Pretendard" pitchFamily="34" charset="-120"/>
               </a:rPr>
-              <a:t>준공 10년 미만으로 대규모 수선비용 발생 가능성 낮음</a:t>
-            </a:r>
-            <a:endParaRPr lang="en-US" sz="1050" dirty="0"/>
-          </a:p>
-        </p:txBody>
-      </p:sp>
-      <p:sp>
-        <p:nvSpPr>
-          <p:cNvPr id="11" name="Shape 9"/>
-          <p:cNvSpPr/>
-          <p:nvPr/>
-        </p:nvSpPr>
-        <p:spPr>
-          <a:xfrm>
-            <a:off x="2833360" y="1417320"/>
-            <a:ext cx="1992112" cy="3611880"/>
-          </a:xfrm>
-          <a:prstGeom prst="roundRect">
-            <a:avLst>
-              <a:gd name="adj" fmla="val 2754"/>
-            </a:avLst>
-          </a:prstGeom>
-          <a:solidFill>
-            <a:srgbClr val="F7FAFC"/>
-          </a:solidFill>
-          <a:ln w="6350">
-            <a:solidFill>
-              <a:srgbClr val="CBD5E0"/>
-            </a:solidFill>
-            <a:prstDash val="solid"/>
-          </a:ln>
-        </p:spPr>
-      </p:sp>
-      <p:sp>
-        <p:nvSpPr>
-          <p:cNvPr id="12" name="Shape 10"/>
-          <p:cNvSpPr/>
-          <p:nvPr/>
-        </p:nvSpPr>
-        <p:spPr>
-          <a:xfrm>
-            <a:off x="2833360" y="1417320"/>
-            <a:ext cx="1992112" cy="45720"/>
-          </a:xfrm>
-          <a:prstGeom prst="rect">
-            <a:avLst/>
-          </a:prstGeom>
-          <a:solidFill>
-            <a:srgbClr val="B98A2E"/>
-          </a:solidFill>
-          <a:ln/>
-        </p:spPr>
-      </p:sp>
-      <p:sp>
-        <p:nvSpPr>
-          <p:cNvPr id="13" name="Text 11"/>
-          <p:cNvSpPr/>
-          <p:nvPr/>
-        </p:nvSpPr>
-        <p:spPr>
-          <a:xfrm>
-            <a:off x="3061960" y="1618488"/>
-            <a:ext cx="1534912" cy="292608"/>
+              <a:t>{"ok":true,"mocked":true,"extractedFields":{"area_signal":"역삼","asset_type":"오피스빌딩","price_band":"300억","size_signal":"3000평(약 9917.4㎡)"},"extractedFacts":{"region":"역삼","exactAddressCandidate":"역삼동 7</a:t>
+            </a:r>
+            <a:endParaRPr lang="en-US" sz="1200" dirty="0"/>
+          </a:p>
+        </p:txBody>
+      </p:sp>
+      <p:sp>
+        <p:nvSpPr>
+          <p:cNvPr id="11" name="Text 9"/>
+          <p:cNvSpPr/>
+          <p:nvPr/>
+        </p:nvSpPr>
+        <p:spPr>
+          <a:xfrm>
+            <a:off x="566928" y="6382512"/>
+            <a:ext cx="7315200" cy="219456"/>
           </a:xfrm>
           <a:prstGeom prst="rect">
             <a:avLst/>
@@ -9844,721 +10611,14 @@
               <a:buNone/>
             </a:pPr>
             <a:r>
-              <a:rPr lang="en-US" sz="1150" b="1" dirty="0">
-                <a:solidFill>
-                  <a:srgbClr val="977024"/>
+              <a:rPr lang="en-US" sz="800" dirty="0">
+                <a:solidFill>
+                  <a:srgbClr val="718096"/>
                 </a:solidFill>
                 <a:latin typeface="Pretendard" pitchFamily="34" charset="0"/>
                 <a:ea typeface="Pretendard" pitchFamily="34" charset="-122"/>
                 <a:cs typeface="Pretendard" pitchFamily="34" charset="-120"/>
               </a:rPr>
-              <a:t>승강기 및 설비</a:t>
-            </a:r>
-            <a:endParaRPr lang="en-US" sz="1150" dirty="0"/>
-          </a:p>
-        </p:txBody>
-      </p:sp>
-      <p:sp>
-        <p:nvSpPr>
-          <p:cNvPr id="14" name="Text 12"/>
-          <p:cNvSpPr/>
-          <p:nvPr/>
-        </p:nvSpPr>
-        <p:spPr>
-          <a:xfrm>
-            <a:off x="3061960" y="1911096"/>
-            <a:ext cx="1534912" cy="402336"/>
-          </a:xfrm>
-          <a:prstGeom prst="rect">
-            <a:avLst/>
-          </a:prstGeom>
-          <a:noFill/>
-          <a:ln/>
-        </p:spPr>
-        <p:txBody>
-          <a:bodyPr wrap="square" lIns="0" tIns="0" rIns="0" bIns="0" rtlCol="0" anchor="ctr">
-            <a:normAutofit/>
-          </a:bodyPr>
-          <a:lstStyle/>
-          <a:p>
-            <a:pPr indent="0" marL="0">
-              <a:buNone/>
-            </a:pPr>
-            <a:r>
-              <a:rPr lang="en-US" sz="1150" b="1" dirty="0">
-                <a:solidFill>
-                  <a:srgbClr val="10161F"/>
-                </a:solidFill>
-                <a:latin typeface="Pretendard" pitchFamily="34" charset="0"/>
-                <a:ea typeface="Pretendard" pitchFamily="34" charset="-122"/>
-                <a:cs typeface="Pretendard" pitchFamily="34" charset="-120"/>
-              </a:rPr>
-              <a:t>15인승 침대용 승강기 및 냉난방 설비 양호</a:t>
-            </a:r>
-            <a:endParaRPr lang="en-US" sz="1150" dirty="0"/>
-          </a:p>
-        </p:txBody>
-      </p:sp>
-      <p:sp>
-        <p:nvSpPr>
-          <p:cNvPr id="15" name="Text 13"/>
-          <p:cNvSpPr/>
-          <p:nvPr/>
-        </p:nvSpPr>
-        <p:spPr>
-          <a:xfrm>
-            <a:off x="3061960" y="2377440"/>
-            <a:ext cx="1534912" cy="2560320"/>
-          </a:xfrm>
-          <a:prstGeom prst="rect">
-            <a:avLst/>
-          </a:prstGeom>
-          <a:noFill/>
-          <a:ln/>
-        </p:spPr>
-        <p:txBody>
-          <a:bodyPr wrap="square" lIns="0" tIns="0" rIns="0" bIns="0" rtlCol="0" anchor="t">
-            <a:normAutofit/>
-          </a:bodyPr>
-          <a:lstStyle/>
-          <a:p>
-            <a:pPr marL="342900" indent="-342900">
-              <a:lnSpc>
-                <a:spcPct val="125000"/>
-              </a:lnSpc>
-              <a:buSzPct val="100000"/>
-              <a:buChar char="•"/>
-            </a:pPr>
-            <a:r>
-              <a:rPr lang="en-US" sz="1050" dirty="0">
-                <a:solidFill>
-                  <a:srgbClr val="10161F"/>
-                </a:solidFill>
-                <a:latin typeface="Pretendard" pitchFamily="34" charset="0"/>
-                <a:ea typeface="Pretendard" pitchFamily="34" charset="-122"/>
-                <a:cs typeface="Pretendard" pitchFamily="34" charset="-120"/>
-              </a:rPr>
-              <a:t>주기적 정기 점검 계약 유지로 관리 리스크 최소화</a:t>
-            </a:r>
-            <a:endParaRPr lang="en-US" sz="1050" dirty="0"/>
-          </a:p>
-        </p:txBody>
-      </p:sp>
-      <p:sp>
-        <p:nvSpPr>
-          <p:cNvPr id="16" name="Shape 14"/>
-          <p:cNvSpPr/>
-          <p:nvPr/>
-        </p:nvSpPr>
-        <p:spPr>
-          <a:xfrm>
-            <a:off x="5099792" y="1417320"/>
-            <a:ext cx="1992112" cy="3611880"/>
-          </a:xfrm>
-          <a:prstGeom prst="roundRect">
-            <a:avLst>
-              <a:gd name="adj" fmla="val 2754"/>
-            </a:avLst>
-          </a:prstGeom>
-          <a:solidFill>
-            <a:srgbClr val="F7FAFC"/>
-          </a:solidFill>
-          <a:ln w="6350">
-            <a:solidFill>
-              <a:srgbClr val="CBD5E0"/>
-            </a:solidFill>
-            <a:prstDash val="solid"/>
-          </a:ln>
-        </p:spPr>
-      </p:sp>
-      <p:sp>
-        <p:nvSpPr>
-          <p:cNvPr id="17" name="Shape 15"/>
-          <p:cNvSpPr/>
-          <p:nvPr/>
-        </p:nvSpPr>
-        <p:spPr>
-          <a:xfrm>
-            <a:off x="5099792" y="1417320"/>
-            <a:ext cx="1992112" cy="45720"/>
-          </a:xfrm>
-          <a:prstGeom prst="rect">
-            <a:avLst/>
-          </a:prstGeom>
-          <a:solidFill>
-            <a:srgbClr val="B98A2E"/>
-          </a:solidFill>
-          <a:ln/>
-        </p:spPr>
-      </p:sp>
-      <p:sp>
-        <p:nvSpPr>
-          <p:cNvPr id="18" name="Text 16"/>
-          <p:cNvSpPr/>
-          <p:nvPr/>
-        </p:nvSpPr>
-        <p:spPr>
-          <a:xfrm>
-            <a:off x="5328392" y="1618488"/>
-            <a:ext cx="1534912" cy="292608"/>
-          </a:xfrm>
-          <a:prstGeom prst="rect">
-            <a:avLst/>
-          </a:prstGeom>
-          <a:noFill/>
-          <a:ln/>
-        </p:spPr>
-        <p:txBody>
-          <a:bodyPr wrap="square" lIns="0" tIns="0" rIns="0" bIns="0" rtlCol="0" anchor="ctr"/>
-          <a:lstStyle/>
-          <a:p>
-            <a:pPr indent="0" marL="0">
-              <a:buNone/>
-            </a:pPr>
-            <a:r>
-              <a:rPr lang="en-US" sz="1150" b="1" dirty="0">
-                <a:solidFill>
-                  <a:srgbClr val="977024"/>
-                </a:solidFill>
-                <a:latin typeface="Pretendard" pitchFamily="34" charset="0"/>
-                <a:ea typeface="Pretendard" pitchFamily="34" charset="-122"/>
-                <a:cs typeface="Pretendard" pitchFamily="34" charset="-120"/>
-              </a:rPr>
-              <a:t>임차인 이탈 위험</a:t>
-            </a:r>
-            <a:endParaRPr lang="en-US" sz="1150" dirty="0"/>
-          </a:p>
-        </p:txBody>
-      </p:sp>
-      <p:sp>
-        <p:nvSpPr>
-          <p:cNvPr id="19" name="Text 17"/>
-          <p:cNvSpPr/>
-          <p:nvPr/>
-        </p:nvSpPr>
-        <p:spPr>
-          <a:xfrm>
-            <a:off x="5328392" y="1911096"/>
-            <a:ext cx="1534912" cy="402336"/>
-          </a:xfrm>
-          <a:prstGeom prst="rect">
-            <a:avLst/>
-          </a:prstGeom>
-          <a:noFill/>
-          <a:ln/>
-        </p:spPr>
-        <p:txBody>
-          <a:bodyPr wrap="square" lIns="0" tIns="0" rIns="0" bIns="0" rtlCol="0" anchor="ctr">
-            <a:normAutofit/>
-          </a:bodyPr>
-          <a:lstStyle/>
-          <a:p>
-            <a:pPr indent="0" marL="0">
-              <a:buNone/>
-            </a:pPr>
-            <a:r>
-              <a:rPr lang="en-US" sz="1150" b="1" dirty="0">
-                <a:solidFill>
-                  <a:srgbClr val="10161F"/>
-                </a:solidFill>
-                <a:latin typeface="Pretendard" pitchFamily="34" charset="0"/>
-                <a:ea typeface="Pretendard" pitchFamily="34" charset="-122"/>
-                <a:cs typeface="Pretendard" pitchFamily="34" charset="-120"/>
-              </a:rPr>
-              <a:t>병의원/약국 인테리어 투자비(호실당 5억↑) 존속</a:t>
-            </a:r>
-            <a:endParaRPr lang="en-US" sz="1150" dirty="0"/>
-          </a:p>
-        </p:txBody>
-      </p:sp>
-      <p:sp>
-        <p:nvSpPr>
-          <p:cNvPr id="20" name="Text 18"/>
-          <p:cNvSpPr/>
-          <p:nvPr/>
-        </p:nvSpPr>
-        <p:spPr>
-          <a:xfrm>
-            <a:off x="5328392" y="2377440"/>
-            <a:ext cx="1534912" cy="2560320"/>
-          </a:xfrm>
-          <a:prstGeom prst="rect">
-            <a:avLst/>
-          </a:prstGeom>
-          <a:noFill/>
-          <a:ln/>
-        </p:spPr>
-        <p:txBody>
-          <a:bodyPr wrap="square" lIns="0" tIns="0" rIns="0" bIns="0" rtlCol="0" anchor="t">
-            <a:normAutofit/>
-          </a:bodyPr>
-          <a:lstStyle/>
-          <a:p>
-            <a:pPr marL="342900" indent="-342900">
-              <a:lnSpc>
-                <a:spcPct val="125000"/>
-              </a:lnSpc>
-              <a:buSzPct val="100000"/>
-              <a:buChar char="•"/>
-            </a:pPr>
-            <a:r>
-              <a:rPr lang="en-US" sz="1050" dirty="0">
-                <a:solidFill>
-                  <a:srgbClr val="10161F"/>
-                </a:solidFill>
-                <a:latin typeface="Pretendard" pitchFamily="34" charset="0"/>
-                <a:ea typeface="Pretendard" pitchFamily="34" charset="-122"/>
-                <a:cs typeface="Pretendard" pitchFamily="34" charset="-120"/>
-              </a:rPr>
-              <a:t>WALE 3.5년 확보 및 만기 6개월 전 재계약 협상 개시</a:t>
-            </a:r>
-            <a:endParaRPr lang="en-US" sz="1050" dirty="0"/>
-          </a:p>
-        </p:txBody>
-      </p:sp>
-      <p:sp>
-        <p:nvSpPr>
-          <p:cNvPr id="21" name="Shape 19"/>
-          <p:cNvSpPr/>
-          <p:nvPr/>
-        </p:nvSpPr>
-        <p:spPr>
-          <a:xfrm>
-            <a:off x="7366224" y="1417320"/>
-            <a:ext cx="1992112" cy="3611880"/>
-          </a:xfrm>
-          <a:prstGeom prst="roundRect">
-            <a:avLst>
-              <a:gd name="adj" fmla="val 2754"/>
-            </a:avLst>
-          </a:prstGeom>
-          <a:solidFill>
-            <a:srgbClr val="F7FAFC"/>
-          </a:solidFill>
-          <a:ln w="6350">
-            <a:solidFill>
-              <a:srgbClr val="CBD5E0"/>
-            </a:solidFill>
-            <a:prstDash val="solid"/>
-          </a:ln>
-        </p:spPr>
-      </p:sp>
-      <p:sp>
-        <p:nvSpPr>
-          <p:cNvPr id="22" name="Shape 20"/>
-          <p:cNvSpPr/>
-          <p:nvPr/>
-        </p:nvSpPr>
-        <p:spPr>
-          <a:xfrm>
-            <a:off x="7366224" y="1417320"/>
-            <a:ext cx="1992112" cy="45720"/>
-          </a:xfrm>
-          <a:prstGeom prst="rect">
-            <a:avLst/>
-          </a:prstGeom>
-          <a:solidFill>
-            <a:srgbClr val="B98A2E"/>
-          </a:solidFill>
-          <a:ln/>
-        </p:spPr>
-      </p:sp>
-      <p:sp>
-        <p:nvSpPr>
-          <p:cNvPr id="23" name="Text 21"/>
-          <p:cNvSpPr/>
-          <p:nvPr/>
-        </p:nvSpPr>
-        <p:spPr>
-          <a:xfrm>
-            <a:off x="7594824" y="1618488"/>
-            <a:ext cx="1534912" cy="292608"/>
-          </a:xfrm>
-          <a:prstGeom prst="rect">
-            <a:avLst/>
-          </a:prstGeom>
-          <a:noFill/>
-          <a:ln/>
-        </p:spPr>
-        <p:txBody>
-          <a:bodyPr wrap="square" lIns="0" tIns="0" rIns="0" bIns="0" rtlCol="0" anchor="ctr"/>
-          <a:lstStyle/>
-          <a:p>
-            <a:pPr indent="0" marL="0">
-              <a:buNone/>
-            </a:pPr>
-            <a:r>
-              <a:rPr lang="en-US" sz="1150" b="1" dirty="0">
-                <a:solidFill>
-                  <a:srgbClr val="977024"/>
-                </a:solidFill>
-                <a:latin typeface="Pretendard" pitchFamily="34" charset="0"/>
-                <a:ea typeface="Pretendard" pitchFamily="34" charset="-122"/>
-                <a:cs typeface="Pretendard" pitchFamily="34" charset="-120"/>
-              </a:rPr>
-              <a:t>명도 및 분쟁</a:t>
-            </a:r>
-            <a:endParaRPr lang="en-US" sz="1150" dirty="0"/>
-          </a:p>
-        </p:txBody>
-      </p:sp>
-      <p:sp>
-        <p:nvSpPr>
-          <p:cNvPr id="24" name="Text 22"/>
-          <p:cNvSpPr/>
-          <p:nvPr/>
-        </p:nvSpPr>
-        <p:spPr>
-          <a:xfrm>
-            <a:off x="7594824" y="1911096"/>
-            <a:ext cx="1534912" cy="402336"/>
-          </a:xfrm>
-          <a:prstGeom prst="rect">
-            <a:avLst/>
-          </a:prstGeom>
-          <a:noFill/>
-          <a:ln/>
-        </p:spPr>
-        <p:txBody>
-          <a:bodyPr wrap="square" lIns="0" tIns="0" rIns="0" bIns="0" rtlCol="0" anchor="ctr">
-            <a:normAutofit/>
-          </a:bodyPr>
-          <a:lstStyle/>
-          <a:p>
-            <a:pPr indent="0" marL="0">
-              <a:buNone/>
-            </a:pPr>
-            <a:r>
-              <a:rPr lang="en-US" sz="1150" b="1" dirty="0">
-                <a:solidFill>
-                  <a:srgbClr val="10161F"/>
-                </a:solidFill>
-                <a:latin typeface="Pretendard" pitchFamily="34" charset="0"/>
-                <a:ea typeface="Pretendard" pitchFamily="34" charset="-122"/>
-                <a:cs typeface="Pretendard" pitchFamily="34" charset="-120"/>
-              </a:rPr>
-              <a:t>전층 정상 임대차 상태 (임대료 연체 0건)</a:t>
-            </a:r>
-            <a:endParaRPr lang="en-US" sz="1150" dirty="0"/>
-          </a:p>
-        </p:txBody>
-      </p:sp>
-      <p:sp>
-        <p:nvSpPr>
-          <p:cNvPr id="25" name="Text 23"/>
-          <p:cNvSpPr/>
-          <p:nvPr/>
-        </p:nvSpPr>
-        <p:spPr>
-          <a:xfrm>
-            <a:off x="7594824" y="2377440"/>
-            <a:ext cx="1534912" cy="2560320"/>
-          </a:xfrm>
-          <a:prstGeom prst="rect">
-            <a:avLst/>
-          </a:prstGeom>
-          <a:noFill/>
-          <a:ln/>
-        </p:spPr>
-        <p:txBody>
-          <a:bodyPr wrap="square" lIns="0" tIns="0" rIns="0" bIns="0" rtlCol="0" anchor="t">
-            <a:normAutofit/>
-          </a:bodyPr>
-          <a:lstStyle/>
-          <a:p>
-            <a:pPr marL="342900" indent="-342900">
-              <a:lnSpc>
-                <a:spcPct val="125000"/>
-              </a:lnSpc>
-              <a:buSzPct val="100000"/>
-              <a:buChar char="•"/>
-            </a:pPr>
-            <a:r>
-              <a:rPr lang="en-US" sz="1050" dirty="0">
-                <a:solidFill>
-                  <a:srgbClr val="10161F"/>
-                </a:solidFill>
-                <a:latin typeface="Pretendard" pitchFamily="34" charset="0"/>
-                <a:ea typeface="Pretendard" pitchFamily="34" charset="-122"/>
-                <a:cs typeface="Pretendard" pitchFamily="34" charset="-120"/>
-              </a:rPr>
-              <a:t>임대차 분쟁 및 소송 이력 없음 (명도 리스크 극소)</a:t>
-            </a:r>
-            <a:endParaRPr lang="en-US" sz="1050" dirty="0"/>
-          </a:p>
-        </p:txBody>
-      </p:sp>
-      <p:sp>
-        <p:nvSpPr>
-          <p:cNvPr id="26" name="Shape 24"/>
-          <p:cNvSpPr/>
-          <p:nvPr/>
-        </p:nvSpPr>
-        <p:spPr>
-          <a:xfrm>
-            <a:off x="9632655" y="1417320"/>
-            <a:ext cx="1992112" cy="3611880"/>
-          </a:xfrm>
-          <a:prstGeom prst="roundRect">
-            <a:avLst>
-              <a:gd name="adj" fmla="val 2754"/>
-            </a:avLst>
-          </a:prstGeom>
-          <a:solidFill>
-            <a:srgbClr val="F7FAFC"/>
-          </a:solidFill>
-          <a:ln w="6350">
-            <a:solidFill>
-              <a:srgbClr val="CBD5E0"/>
-            </a:solidFill>
-            <a:prstDash val="solid"/>
-          </a:ln>
-        </p:spPr>
-      </p:sp>
-      <p:sp>
-        <p:nvSpPr>
-          <p:cNvPr id="27" name="Shape 25"/>
-          <p:cNvSpPr/>
-          <p:nvPr/>
-        </p:nvSpPr>
-        <p:spPr>
-          <a:xfrm>
-            <a:off x="9632655" y="1417320"/>
-            <a:ext cx="1992112" cy="45720"/>
-          </a:xfrm>
-          <a:prstGeom prst="rect">
-            <a:avLst/>
-          </a:prstGeom>
-          <a:solidFill>
-            <a:srgbClr val="B98A2E"/>
-          </a:solidFill>
-          <a:ln/>
-        </p:spPr>
-      </p:sp>
-      <p:sp>
-        <p:nvSpPr>
-          <p:cNvPr id="28" name="Text 26"/>
-          <p:cNvSpPr/>
-          <p:nvPr/>
-        </p:nvSpPr>
-        <p:spPr>
-          <a:xfrm>
-            <a:off x="9861255" y="1618488"/>
-            <a:ext cx="1534912" cy="292608"/>
-          </a:xfrm>
-          <a:prstGeom prst="rect">
-            <a:avLst/>
-          </a:prstGeom>
-          <a:noFill/>
-          <a:ln/>
-        </p:spPr>
-        <p:txBody>
-          <a:bodyPr wrap="square" lIns="0" tIns="0" rIns="0" bIns="0" rtlCol="0" anchor="ctr"/>
-          <a:lstStyle/>
-          <a:p>
-            <a:pPr indent="0" marL="0">
-              <a:buNone/>
-            </a:pPr>
-            <a:r>
-              <a:rPr lang="en-US" sz="1150" b="1" dirty="0">
-                <a:solidFill>
-                  <a:srgbClr val="977024"/>
-                </a:solidFill>
-                <a:latin typeface="Pretendard" pitchFamily="34" charset="0"/>
-                <a:ea typeface="Pretendard" pitchFamily="34" charset="-122"/>
-                <a:cs typeface="Pretendard" pitchFamily="34" charset="-120"/>
-              </a:rPr>
-              <a:t>권리관계 및 금융</a:t>
-            </a:r>
-            <a:endParaRPr lang="en-US" sz="1150" dirty="0"/>
-          </a:p>
-        </p:txBody>
-      </p:sp>
-      <p:sp>
-        <p:nvSpPr>
-          <p:cNvPr id="29" name="Text 27"/>
-          <p:cNvSpPr/>
-          <p:nvPr/>
-        </p:nvSpPr>
-        <p:spPr>
-          <a:xfrm>
-            <a:off x="9861255" y="1911096"/>
-            <a:ext cx="1534912" cy="402336"/>
-          </a:xfrm>
-          <a:prstGeom prst="rect">
-            <a:avLst/>
-          </a:prstGeom>
-          <a:noFill/>
-          <a:ln/>
-        </p:spPr>
-        <p:txBody>
-          <a:bodyPr wrap="square" lIns="0" tIns="0" rIns="0" bIns="0" rtlCol="0" anchor="ctr">
-            <a:normAutofit/>
-          </a:bodyPr>
-          <a:lstStyle/>
-          <a:p>
-            <a:pPr indent="0" marL="0">
-              <a:buNone/>
-            </a:pPr>
-            <a:r>
-              <a:rPr lang="en-US" sz="1150" b="1" dirty="0">
-                <a:solidFill>
-                  <a:srgbClr val="10161F"/>
-                </a:solidFill>
-                <a:latin typeface="Pretendard" pitchFamily="34" charset="0"/>
-                <a:ea typeface="Pretendard" pitchFamily="34" charset="-122"/>
-                <a:cs typeface="Pretendard" pitchFamily="34" charset="-120"/>
-              </a:rPr>
-              <a:t>단독 법인 소유 (가압류/가처분 일체 없음)</a:t>
-            </a:r>
-            <a:endParaRPr lang="en-US" sz="1150" dirty="0"/>
-          </a:p>
-        </p:txBody>
-      </p:sp>
-      <p:sp>
-        <p:nvSpPr>
-          <p:cNvPr id="30" name="Text 28"/>
-          <p:cNvSpPr/>
-          <p:nvPr/>
-        </p:nvSpPr>
-        <p:spPr>
-          <a:xfrm>
-            <a:off x="9861255" y="2377440"/>
-            <a:ext cx="1534912" cy="2560320"/>
-          </a:xfrm>
-          <a:prstGeom prst="rect">
-            <a:avLst/>
-          </a:prstGeom>
-          <a:noFill/>
-          <a:ln/>
-        </p:spPr>
-        <p:txBody>
-          <a:bodyPr wrap="square" lIns="0" tIns="0" rIns="0" bIns="0" rtlCol="0" anchor="t">
-            <a:normAutofit/>
-          </a:bodyPr>
-          <a:lstStyle/>
-          <a:p>
-            <a:pPr marL="342900" indent="-342900">
-              <a:lnSpc>
-                <a:spcPct val="125000"/>
-              </a:lnSpc>
-              <a:buSzPct val="100000"/>
-              <a:buChar char="•"/>
-            </a:pPr>
-            <a:r>
-              <a:rPr lang="en-US" sz="1050" dirty="0">
-                <a:solidFill>
-                  <a:srgbClr val="10161F"/>
-                </a:solidFill>
-                <a:latin typeface="Pretendard" pitchFamily="34" charset="0"/>
-                <a:ea typeface="Pretendard" pitchFamily="34" charset="-122"/>
-                <a:cs typeface="Pretendard" pitchFamily="34" charset="-120"/>
-              </a:rPr>
-              <a:t>1금융권 기존 담보대출 85억(연 4.1%) 승계 적격 판정</a:t>
-            </a:r>
-            <a:endParaRPr lang="en-US" sz="1050" dirty="0"/>
-          </a:p>
-        </p:txBody>
-      </p:sp>
-      <p:sp>
-        <p:nvSpPr>
-          <p:cNvPr id="31" name="Shape 29"/>
-          <p:cNvSpPr/>
-          <p:nvPr/>
-        </p:nvSpPr>
-        <p:spPr>
-          <a:xfrm>
-            <a:off x="566928" y="5193792"/>
-            <a:ext cx="11057839" cy="621792"/>
-          </a:xfrm>
-          <a:prstGeom prst="roundRect">
-            <a:avLst>
-              <a:gd name="adj" fmla="val 8824"/>
-            </a:avLst>
-          </a:prstGeom>
-          <a:solidFill>
-            <a:srgbClr val="F7FAFC"/>
-          </a:solidFill>
-          <a:ln w="6350">
-            <a:solidFill>
-              <a:srgbClr val="CBD5E0"/>
-            </a:solidFill>
-            <a:prstDash val="solid"/>
-          </a:ln>
-        </p:spPr>
-      </p:sp>
-      <p:sp>
-        <p:nvSpPr>
-          <p:cNvPr id="32" name="Text 30"/>
-          <p:cNvSpPr/>
-          <p:nvPr/>
-        </p:nvSpPr>
-        <p:spPr>
-          <a:xfrm>
-            <a:off x="795528" y="5193792"/>
-            <a:ext cx="10600639" cy="621792"/>
-          </a:xfrm>
-          <a:prstGeom prst="rect">
-            <a:avLst/>
-          </a:prstGeom>
-          <a:noFill/>
-          <a:ln/>
-        </p:spPr>
-        <p:txBody>
-          <a:bodyPr wrap="square" lIns="0" tIns="0" rIns="0" bIns="0" rtlCol="0" anchor="ctr"/>
-          <a:lstStyle/>
-          <a:p>
-            <a:pPr indent="0" marL="0">
-              <a:buNone/>
-            </a:pPr>
-            <a:r>
-              <a:rPr lang="en-US" sz="1200" dirty="0">
-                <a:solidFill>
-                  <a:srgbClr val="10161F"/>
-                </a:solidFill>
-                <a:latin typeface="Pretendard" pitchFamily="34" charset="0"/>
-                <a:ea typeface="Pretendard" pitchFamily="34" charset="-122"/>
-                <a:cs typeface="Pretendard" pitchFamily="34" charset="-120"/>
-              </a:rPr>
-              <a:t>실사 총평: 자산의 물리적·권리적 하자가 없으며, 세부 임대차 계약서 및 등기사항증명서는 LOI 접수 후 원본 열람 가능합니다.</a:t>
-            </a:r>
-            <a:endParaRPr lang="en-US" sz="1200" dirty="0"/>
-          </a:p>
-        </p:txBody>
-      </p:sp>
-      <p:sp>
-        <p:nvSpPr>
-          <p:cNvPr id="33" name="Text 31"/>
-          <p:cNvSpPr/>
-          <p:nvPr/>
-        </p:nvSpPr>
-        <p:spPr>
-          <a:xfrm>
-            <a:off x="566928" y="6382512"/>
-            <a:ext cx="7315200" cy="219456"/>
-          </a:xfrm>
-          <a:prstGeom prst="rect">
-            <a:avLst/>
-          </a:prstGeom>
-          <a:noFill/>
-          <a:ln/>
-        </p:spPr>
-        <p:txBody>
-          <a:bodyPr wrap="square" lIns="0" tIns="0" rIns="0" bIns="0" rtlCol="0" anchor="ctr"/>
-          <a:lstStyle/>
-          <a:p>
-            <a:pPr indent="0" marL="0">
-              <a:buNone/>
-            </a:pPr>
-            <a:r>
-              <a:rPr lang="en-US" sz="800" dirty="0">
-                <a:solidFill>
-                  <a:srgbClr val="718096"/>
-                </a:solidFill>
-                <a:latin typeface="Pretendard" pitchFamily="34" charset="0"/>
-                <a:ea typeface="Pretendard" pitchFamily="34" charset="-122"/>
-                <a:cs typeface="Pretendard" pitchFamily="34" charset="-120"/>
-              </a:rPr>
               <a:t>크리딜   |   </a:t>
             </a:r>
             <a:endParaRPr lang="en-US" sz="800" dirty="0"/>
@@ -10567,7 +10627,7 @@
       </p:sp>
       <p:sp>
         <p:nvSpPr>
-          <p:cNvPr id="34" name="Text 32"/>
+          <p:cNvPr id="12" name="Text 10"/>
           <p:cNvSpPr/>
           <p:nvPr/>
         </p:nvSpPr>
@@ -12821,11 +12881,11 @@
         <p:spPr>
           <a:xfrm>
             <a:off x="566928" y="1572768"/>
-            <a:ext cx="11057839" cy="3200400"/>
+            <a:ext cx="2490140" cy="3200400"/>
           </a:xfrm>
           <a:prstGeom prst="roundRect">
             <a:avLst>
-              <a:gd name="adj" fmla="val 1714"/>
+              <a:gd name="adj" fmla="val 2203"/>
             </a:avLst>
           </a:prstGeom>
           <a:solidFill>
@@ -12907,7 +12967,7 @@
         <p:spPr>
           <a:xfrm>
             <a:off x="786384" y="2304288"/>
-            <a:ext cx="10618927" cy="365760"/>
+            <a:ext cx="2051228" cy="365760"/>
           </a:xfrm>
           <a:prstGeom prst="rect">
             <a:avLst/>
@@ -12931,7 +12991,7 @@
                 <a:ea typeface="Pretendard" pitchFamily="34" charset="-122"/>
                 <a:cs typeface="Pretendard" pitchFamily="34" charset="-120"/>
               </a:rPr>
-              <a:t>{"ok"</a:t>
+              <a:t>초기 관심 표명 → 담당자 연락</a:t>
             </a:r>
             <a:endParaRPr lang="en-US" sz="1600" dirty="0"/>
           </a:p>
@@ -12946,7 +13006,7 @@
         <p:spPr>
           <a:xfrm>
             <a:off x="786384" y="2761488"/>
-            <a:ext cx="10618927" cy="1828800"/>
+            <a:ext cx="2051228" cy="1828800"/>
           </a:xfrm>
           <a:prstGeom prst="rect">
             <a:avLst/>
@@ -12961,8 +13021,147 @@
             <a:pPr indent="0" marL="0">
               <a:buNone/>
             </a:pPr>
-            <a:r>
-              <a:rPr lang="en-US" sz="1100" dirty="0">
+            <a:endParaRPr lang="en-US" sz="1100" dirty="0"/>
+          </a:p>
+        </p:txBody>
+      </p:sp>
+      <p:sp>
+        <p:nvSpPr>
+          <p:cNvPr id="11" name="Shape 9"/>
+          <p:cNvSpPr/>
+          <p:nvPr/>
+        </p:nvSpPr>
+        <p:spPr>
+          <a:xfrm>
+            <a:off x="3148508" y="3035808"/>
+            <a:ext cx="182880" cy="274320"/>
+          </a:xfrm>
+          <a:prstGeom prst="rightArrow">
+            <a:avLst/>
+          </a:prstGeom>
+          <a:solidFill>
+            <a:srgbClr val="CBD5E0"/>
+          </a:solidFill>
+          <a:ln w="6350">
+            <a:solidFill>
+              <a:srgbClr val="718096"/>
+            </a:solidFill>
+            <a:prstDash val="solid"/>
+          </a:ln>
+        </p:spPr>
+      </p:sp>
+      <p:sp>
+        <p:nvSpPr>
+          <p:cNvPr id="12" name="Shape 10"/>
+          <p:cNvSpPr/>
+          <p:nvPr/>
+        </p:nvSpPr>
+        <p:spPr>
+          <a:xfrm>
+            <a:off x="3422828" y="1572768"/>
+            <a:ext cx="2490140" cy="3200400"/>
+          </a:xfrm>
+          <a:prstGeom prst="roundRect">
+            <a:avLst>
+              <a:gd name="adj" fmla="val 2203"/>
+            </a:avLst>
+          </a:prstGeom>
+          <a:solidFill>
+            <a:srgbClr val="F7FAFC"/>
+          </a:solidFill>
+          <a:ln w="6350">
+            <a:solidFill>
+              <a:srgbClr val="CBD5E0"/>
+            </a:solidFill>
+            <a:prstDash val="solid"/>
+          </a:ln>
+        </p:spPr>
+      </p:sp>
+      <p:sp>
+        <p:nvSpPr>
+          <p:cNvPr id="13" name="Shape 11"/>
+          <p:cNvSpPr/>
+          <p:nvPr/>
+        </p:nvSpPr>
+        <p:spPr>
+          <a:xfrm>
+            <a:off x="3642284" y="1792224"/>
+            <a:ext cx="384048" cy="384048"/>
+          </a:xfrm>
+          <a:prstGeom prst="ellipse">
+            <a:avLst/>
+          </a:prstGeom>
+          <a:solidFill>
+            <a:srgbClr val="B98A2E"/>
+          </a:solidFill>
+          <a:ln/>
+        </p:spPr>
+      </p:sp>
+      <p:sp>
+        <p:nvSpPr>
+          <p:cNvPr id="14" name="Text 12"/>
+          <p:cNvSpPr/>
+          <p:nvPr/>
+        </p:nvSpPr>
+        <p:spPr>
+          <a:xfrm>
+            <a:off x="3642284" y="1792224"/>
+            <a:ext cx="384048" cy="384048"/>
+          </a:xfrm>
+          <a:prstGeom prst="rect">
+            <a:avLst/>
+          </a:prstGeom>
+          <a:noFill/>
+          <a:ln/>
+        </p:spPr>
+        <p:txBody>
+          <a:bodyPr wrap="square" lIns="0" tIns="0" rIns="0" bIns="0" rtlCol="0" anchor="ctr"/>
+          <a:lstStyle/>
+          <a:p>
+            <a:pPr algn="ctr" indent="0" marL="0">
+              <a:buNone/>
+            </a:pPr>
+            <a:r>
+              <a:rPr lang="en-US" sz="1300" b="1" dirty="0">
+                <a:solidFill>
+                  <a:srgbClr val="FFFFFF"/>
+                </a:solidFill>
+                <a:latin typeface="Arial" pitchFamily="34" charset="0"/>
+                <a:ea typeface="Arial" pitchFamily="34" charset="-122"/>
+                <a:cs typeface="Arial" pitchFamily="34" charset="-120"/>
+              </a:rPr>
+              <a:t>STEP 2</a:t>
+            </a:r>
+            <a:endParaRPr lang="en-US" sz="1300" dirty="0"/>
+          </a:p>
+        </p:txBody>
+      </p:sp>
+      <p:sp>
+        <p:nvSpPr>
+          <p:cNvPr id="15" name="Text 13"/>
+          <p:cNvSpPr/>
+          <p:nvPr/>
+        </p:nvSpPr>
+        <p:spPr>
+          <a:xfrm>
+            <a:off x="3642284" y="2304288"/>
+            <a:ext cx="2051228" cy="365760"/>
+          </a:xfrm>
+          <a:prstGeom prst="rect">
+            <a:avLst/>
+          </a:prstGeom>
+          <a:noFill/>
+          <a:ln/>
+        </p:spPr>
+        <p:txBody>
+          <a:bodyPr wrap="square" rtlCol="0" anchor="ctr"/>
+          <a:lstStyle/>
+          <a:p>
+            <a:pPr indent="0" marL="0">
+              <a:buNone/>
+            </a:pPr>
+            <a:r>
+              <a:rPr lang="en-US" sz="1600" b="1" dirty="0">
                 <a:solidFill>
                   <a:srgbClr val="10161F"/>
                 </a:solidFill>
@@ -12970,22 +13169,122 @@
                 <a:ea typeface="Pretendard" pitchFamily="34" charset="-122"/>
                 <a:cs typeface="Pretendard" pitchFamily="34" charset="-120"/>
               </a:rPr>
-              <a:t>true,"mocked":true,"extractedFields":{"area_signal":"역삼","asset_type":"오피스빌딩","price_band":"300억","size_signal":"3000평(약 9917.4㎡)"},"extractedFacts":{"region":"역삼","exactAddressCandidate":"역삼동 742-1","assetType":"오피스빌딩","priceText":"300억","sizeText":"3000평(약 9917.4㎡)","currentUse":"오피스","currentUseSignal":"근린생활시설","leaseSignal":"임대중","vacancySignal":"공실없음","tenantNames":["쿠팡","네이버"],"unitRentTexts":["301호: 1500만"],"sellerMotivationText":"자산 효율화","brokerNotes":["초역세권 매물"]},"detectedSensitiveFields":["exact_address","tenant_name"],"ambiguousFields":[],"warnings":[],"areaSignal":"역삼","assetType":"오피스빌딩","priceBand":"300억","sizeSignal":"3000평(약 9917.4㎡)","dealType":"매각","buildingName":"역삼 센트럴타워","exactAddress":"역삼동 742-1","totalFloorArea":9917.3,"buildYear":2015,"currentUseSignal":"근린생활시설","vacancySignal":"공실 없음","fitSummary":"초역세권 근생 빌딩으로 시행/사옥 매입에 최적화","cautionSummary":"주요 임차 업종 만기 조율 필요","hiddenFields":["exact_address","seller_motivation"],"confidence":{"areaSignal":"confirmed","assetType":"confirmed","priceBand":"ai_hypothesis","fitSummary":"ai_hypothesis"},"missingData":["sizeSignal"],"boundaryNote":"본 자료는 실거래 통계 기반 참고치입니다.","buyerType":"법인 사옥형","budgetRange":{"min":50,"max":80,"display":"50억~80억"},"preferredRegions":["강남","성수"],"assetTypes":["꼬마빌딩","사옥용"],"purchasePurpose":"사옥용 매입","mustHave":["초역세권","주차"],"niceToHave":["테라스","루프탑"],"riskTolerance":"medium","financingNote":"자본금 50% 준비","missingQuestions":["구체적인 입주 시기가 언제인가요?","선호하는 수익률이 있나요?"],"privacyNotes":["연락처 비공개"],"fitReasons":["매수자 예산(50-80억)에 부합하는 매물입니다.","요청하신 성수/강남 권역에 해당합니다."],"cautionReasons":["요청한 용도와 달리 명도 협의가 다소 필요합니다."],"recommendedNextAction":"현장 답사 제안","kakaoMessage":"안녕하세요! 요청하신 조건에 부합하는 추천 매물이 있어 안내해 드립니다. 확인해보시고 피드백 부탁드립니다.","title":"강남 역삼역 초역세권 오피스 사옥용 빌딩 매각","shortSummary":"역삼역 도보 5분 거리의 준신축급 대형 오피스빌딩입니다.","dealPoints":["초역세권","사옥 최적"],"cautionPoints":["명도 조율 필요"],"hiddenInfoNotice":["보증금 및 지번은 인가 후 확인 가능"],"gateMessage":"G1 등급 등록이 필요합니다.","kakaoText":"강남 역삼역 오피스 빌딩 매각 안내입니다.","exactUnitCandidate":"101호","floor":"1층","areaSqmText":"150㎡","spaceType":"office","depositText":"5000만","monthlyRentText":"400만","maintenanceFeeText":"50만","availableFromText":"즉시입주","leaseTermMonthsText":"24","incentivesText":"렌트프리 2개월","restrictions":[],"landlordIdentity":"김성수","currentTenant":"스타트업","vacancyReason":"이전 확장","rentNegotiation":"협의 가능","region":"성수동","areaSqm":150,"deposit":5000,"monthlyRent":400,"maintenanceFee":50,"availableFrom":"즉시입주","leaseTermMonths":24,"incentives":{"rentFreeMonths":2,"interiorSupport":"일부 인테리어 지원","freeRentDetail":"렌트프리 2개월 지원"},"shortSummaryLease":"성수역 도보 5분 거리 1층 리테일 상가 매물입니다."}</a:t>
-            </a:r>
+              <a:t>NDA 체결 → 임차인 정보 및 임대차계약서 제공</a:t>
+            </a:r>
+            <a:endParaRPr lang="en-US" sz="1600" dirty="0"/>
+          </a:p>
+        </p:txBody>
+      </p:sp>
+      <p:sp>
+        <p:nvSpPr>
+          <p:cNvPr id="16" name="Text 14"/>
+          <p:cNvSpPr/>
+          <p:nvPr/>
+        </p:nvSpPr>
+        <p:spPr>
+          <a:xfrm>
+            <a:off x="3642284" y="2761488"/>
+            <a:ext cx="2051228" cy="1828800"/>
+          </a:xfrm>
+          <a:prstGeom prst="rect">
+            <a:avLst/>
+          </a:prstGeom>
+          <a:noFill/>
+          <a:ln/>
+        </p:spPr>
+        <p:txBody>
+          <a:bodyPr wrap="square" rtlCol="0" anchor="t"/>
+          <a:lstStyle/>
+          <a:p>
+            <a:pPr indent="0" marL="0">
+              <a:buNone/>
+            </a:pPr>
             <a:endParaRPr lang="en-US" sz="1100" dirty="0"/>
           </a:p>
         </p:txBody>
       </p:sp>
       <p:sp>
         <p:nvSpPr>
-          <p:cNvPr id="11" name="Text 9"/>
-          <p:cNvSpPr/>
-          <p:nvPr/>
-        </p:nvSpPr>
-        <p:spPr>
-          <a:xfrm>
-            <a:off x="566928" y="6382512"/>
-            <a:ext cx="7315200" cy="219456"/>
+          <p:cNvPr id="17" name="Shape 15"/>
+          <p:cNvSpPr/>
+          <p:nvPr/>
+        </p:nvSpPr>
+        <p:spPr>
+          <a:xfrm>
+            <a:off x="6004408" y="3035808"/>
+            <a:ext cx="182880" cy="274320"/>
+          </a:xfrm>
+          <a:prstGeom prst="rightArrow">
+            <a:avLst/>
+          </a:prstGeom>
+          <a:solidFill>
+            <a:srgbClr val="CBD5E0"/>
+          </a:solidFill>
+          <a:ln w="6350">
+            <a:solidFill>
+              <a:srgbClr val="718096"/>
+            </a:solidFill>
+            <a:prstDash val="solid"/>
+          </a:ln>
+        </p:spPr>
+      </p:sp>
+      <p:sp>
+        <p:nvSpPr>
+          <p:cNvPr id="18" name="Shape 16"/>
+          <p:cNvSpPr/>
+          <p:nvPr/>
+        </p:nvSpPr>
+        <p:spPr>
+          <a:xfrm>
+            <a:off x="6278728" y="1572768"/>
+            <a:ext cx="2490140" cy="3200400"/>
+          </a:xfrm>
+          <a:prstGeom prst="roundRect">
+            <a:avLst>
+              <a:gd name="adj" fmla="val 2203"/>
+            </a:avLst>
+          </a:prstGeom>
+          <a:solidFill>
+            <a:srgbClr val="F7FAFC"/>
+          </a:solidFill>
+          <a:ln w="6350">
+            <a:solidFill>
+              <a:srgbClr val="CBD5E0"/>
+            </a:solidFill>
+            <a:prstDash val="solid"/>
+          </a:ln>
+        </p:spPr>
+      </p:sp>
+      <p:sp>
+        <p:nvSpPr>
+          <p:cNvPr id="19" name="Shape 17"/>
+          <p:cNvSpPr/>
+          <p:nvPr/>
+        </p:nvSpPr>
+        <p:spPr>
+          <a:xfrm>
+            <a:off x="6498184" y="1792224"/>
+            <a:ext cx="384048" cy="384048"/>
+          </a:xfrm>
+          <a:prstGeom prst="ellipse">
+            <a:avLst/>
+          </a:prstGeom>
+          <a:solidFill>
+            <a:srgbClr val="B98A2E"/>
+          </a:solidFill>
+          <a:ln/>
+        </p:spPr>
+      </p:sp>
+      <p:sp>
+        <p:nvSpPr>
+          <p:cNvPr id="20" name="Text 18"/>
+          <p:cNvSpPr/>
+          <p:nvPr/>
+        </p:nvSpPr>
+        <p:spPr>
+          <a:xfrm>
+            <a:off x="6498184" y="1792224"/>
+            <a:ext cx="384048" cy="384048"/>
           </a:xfrm>
           <a:prstGeom prst="rect">
             <a:avLst/>
@@ -12997,18 +13296,302 @@
           <a:bodyPr wrap="square" lIns="0" tIns="0" rIns="0" bIns="0" rtlCol="0" anchor="ctr"/>
           <a:lstStyle/>
           <a:p>
+            <a:pPr algn="ctr" indent="0" marL="0">
+              <a:buNone/>
+            </a:pPr>
+            <a:r>
+              <a:rPr lang="en-US" sz="1300" b="1" dirty="0">
+                <a:solidFill>
+                  <a:srgbClr val="FFFFFF"/>
+                </a:solidFill>
+                <a:latin typeface="Arial" pitchFamily="34" charset="0"/>
+                <a:ea typeface="Arial" pitchFamily="34" charset="-122"/>
+                <a:cs typeface="Arial" pitchFamily="34" charset="-120"/>
+              </a:rPr>
+              <a:t>STEP 3</a:t>
+            </a:r>
+            <a:endParaRPr lang="en-US" sz="1300" dirty="0"/>
+          </a:p>
+        </p:txBody>
+      </p:sp>
+      <p:sp>
+        <p:nvSpPr>
+          <p:cNvPr id="21" name="Text 19"/>
+          <p:cNvSpPr/>
+          <p:nvPr/>
+        </p:nvSpPr>
+        <p:spPr>
+          <a:xfrm>
+            <a:off x="6498184" y="2304288"/>
+            <a:ext cx="2051228" cy="365760"/>
+          </a:xfrm>
+          <a:prstGeom prst="rect">
+            <a:avLst/>
+          </a:prstGeom>
+          <a:noFill/>
+          <a:ln/>
+        </p:spPr>
+        <p:txBody>
+          <a:bodyPr wrap="square" rtlCol="0" anchor="ctr"/>
+          <a:lstStyle/>
+          <a:p>
             <a:pPr indent="0" marL="0">
               <a:buNone/>
             </a:pPr>
             <a:r>
-              <a:rPr lang="en-US" sz="800" dirty="0">
-                <a:solidFill>
-                  <a:srgbClr val="718096"/>
+              <a:rPr lang="en-US" sz="1600" b="1" dirty="0">
+                <a:solidFill>
+                  <a:srgbClr val="10161F"/>
                 </a:solidFill>
                 <a:latin typeface="Pretendard" pitchFamily="34" charset="0"/>
                 <a:ea typeface="Pretendard" pitchFamily="34" charset="-122"/>
                 <a:cs typeface="Pretendard" pitchFamily="34" charset="-120"/>
               </a:rPr>
+              <a:t>현장 실사 일정 조율 → 건물 컨디션 및 설비 직접 확인</a:t>
+            </a:r>
+            <a:endParaRPr lang="en-US" sz="1600" dirty="0"/>
+          </a:p>
+        </p:txBody>
+      </p:sp>
+      <p:sp>
+        <p:nvSpPr>
+          <p:cNvPr id="22" name="Text 20"/>
+          <p:cNvSpPr/>
+          <p:nvPr/>
+        </p:nvSpPr>
+        <p:spPr>
+          <a:xfrm>
+            <a:off x="6498184" y="2761488"/>
+            <a:ext cx="2051228" cy="1828800"/>
+          </a:xfrm>
+          <a:prstGeom prst="rect">
+            <a:avLst/>
+          </a:prstGeom>
+          <a:noFill/>
+          <a:ln/>
+        </p:spPr>
+        <p:txBody>
+          <a:bodyPr wrap="square" rtlCol="0" anchor="t"/>
+          <a:lstStyle/>
+          <a:p>
+            <a:pPr indent="0" marL="0">
+              <a:buNone/>
+            </a:pPr>
+            <a:endParaRPr lang="en-US" sz="1100" dirty="0"/>
+          </a:p>
+        </p:txBody>
+      </p:sp>
+      <p:sp>
+        <p:nvSpPr>
+          <p:cNvPr id="23" name="Shape 21"/>
+          <p:cNvSpPr/>
+          <p:nvPr/>
+        </p:nvSpPr>
+        <p:spPr>
+          <a:xfrm>
+            <a:off x="8860307" y="3035808"/>
+            <a:ext cx="182880" cy="274320"/>
+          </a:xfrm>
+          <a:prstGeom prst="rightArrow">
+            <a:avLst/>
+          </a:prstGeom>
+          <a:solidFill>
+            <a:srgbClr val="CBD5E0"/>
+          </a:solidFill>
+          <a:ln w="6350">
+            <a:solidFill>
+              <a:srgbClr val="718096"/>
+            </a:solidFill>
+            <a:prstDash val="solid"/>
+          </a:ln>
+        </p:spPr>
+      </p:sp>
+      <p:sp>
+        <p:nvSpPr>
+          <p:cNvPr id="24" name="Shape 22"/>
+          <p:cNvSpPr/>
+          <p:nvPr/>
+        </p:nvSpPr>
+        <p:spPr>
+          <a:xfrm>
+            <a:off x="9134627" y="1572768"/>
+            <a:ext cx="2490140" cy="3200400"/>
+          </a:xfrm>
+          <a:prstGeom prst="roundRect">
+            <a:avLst>
+              <a:gd name="adj" fmla="val 2203"/>
+            </a:avLst>
+          </a:prstGeom>
+          <a:solidFill>
+            <a:srgbClr val="F7FAFC"/>
+          </a:solidFill>
+          <a:ln w="6350">
+            <a:solidFill>
+              <a:srgbClr val="CBD5E0"/>
+            </a:solidFill>
+            <a:prstDash val="solid"/>
+          </a:ln>
+        </p:spPr>
+      </p:sp>
+      <p:sp>
+        <p:nvSpPr>
+          <p:cNvPr id="25" name="Shape 23"/>
+          <p:cNvSpPr/>
+          <p:nvPr/>
+        </p:nvSpPr>
+        <p:spPr>
+          <a:xfrm>
+            <a:off x="9354083" y="1792224"/>
+            <a:ext cx="384048" cy="384048"/>
+          </a:xfrm>
+          <a:prstGeom prst="ellipse">
+            <a:avLst/>
+          </a:prstGeom>
+          <a:solidFill>
+            <a:srgbClr val="B98A2E"/>
+          </a:solidFill>
+          <a:ln/>
+        </p:spPr>
+      </p:sp>
+      <p:sp>
+        <p:nvSpPr>
+          <p:cNvPr id="26" name="Text 24"/>
+          <p:cNvSpPr/>
+          <p:nvPr/>
+        </p:nvSpPr>
+        <p:spPr>
+          <a:xfrm>
+            <a:off x="9354083" y="1792224"/>
+            <a:ext cx="384048" cy="384048"/>
+          </a:xfrm>
+          <a:prstGeom prst="rect">
+            <a:avLst/>
+          </a:prstGeom>
+          <a:noFill/>
+          <a:ln/>
+        </p:spPr>
+        <p:txBody>
+          <a:bodyPr wrap="square" lIns="0" tIns="0" rIns="0" bIns="0" rtlCol="0" anchor="ctr"/>
+          <a:lstStyle/>
+          <a:p>
+            <a:pPr algn="ctr" indent="0" marL="0">
+              <a:buNone/>
+            </a:pPr>
+            <a:r>
+              <a:rPr lang="en-US" sz="1300" b="1" dirty="0">
+                <a:solidFill>
+                  <a:srgbClr val="FFFFFF"/>
+                </a:solidFill>
+                <a:latin typeface="Arial" pitchFamily="34" charset="0"/>
+                <a:ea typeface="Arial" pitchFamily="34" charset="-122"/>
+                <a:cs typeface="Arial" pitchFamily="34" charset="-120"/>
+              </a:rPr>
+              <a:t>STEP 4</a:t>
+            </a:r>
+            <a:endParaRPr lang="en-US" sz="1300" dirty="0"/>
+          </a:p>
+        </p:txBody>
+      </p:sp>
+      <p:sp>
+        <p:nvSpPr>
+          <p:cNvPr id="27" name="Text 25"/>
+          <p:cNvSpPr/>
+          <p:nvPr/>
+        </p:nvSpPr>
+        <p:spPr>
+          <a:xfrm>
+            <a:off x="9354083" y="2304288"/>
+            <a:ext cx="2051228" cy="365760"/>
+          </a:xfrm>
+          <a:prstGeom prst="rect">
+            <a:avLst/>
+          </a:prstGeom>
+          <a:noFill/>
+          <a:ln/>
+        </p:spPr>
+        <p:txBody>
+          <a:bodyPr wrap="square" rtlCol="0" anchor="ctr"/>
+          <a:lstStyle/>
+          <a:p>
+            <a:pPr indent="0" marL="0">
+              <a:buNone/>
+            </a:pPr>
+            <a:r>
+              <a:rPr lang="en-US" sz="1600" b="1" dirty="0">
+                <a:solidFill>
+                  <a:srgbClr val="10161F"/>
+                </a:solidFill>
+                <a:latin typeface="Pretendard" pitchFamily="34" charset="0"/>
+                <a:ea typeface="Pretendard" pitchFamily="34" charset="-122"/>
+                <a:cs typeface="Pretendard" pitchFamily="34" charset="-120"/>
+              </a:rPr>
+              <a:t>LOI(투자의향서) 제출 → 가격 협의 개시</a:t>
+            </a:r>
+            <a:endParaRPr lang="en-US" sz="1600" dirty="0"/>
+          </a:p>
+        </p:txBody>
+      </p:sp>
+      <p:sp>
+        <p:nvSpPr>
+          <p:cNvPr id="28" name="Text 26"/>
+          <p:cNvSpPr/>
+          <p:nvPr/>
+        </p:nvSpPr>
+        <p:spPr>
+          <a:xfrm>
+            <a:off x="9354083" y="2761488"/>
+            <a:ext cx="2051228" cy="1828800"/>
+          </a:xfrm>
+          <a:prstGeom prst="rect">
+            <a:avLst/>
+          </a:prstGeom>
+          <a:noFill/>
+          <a:ln/>
+        </p:spPr>
+        <p:txBody>
+          <a:bodyPr wrap="square" rtlCol="0" anchor="t"/>
+          <a:lstStyle/>
+          <a:p>
+            <a:pPr indent="0" marL="0">
+              <a:buNone/>
+            </a:pPr>
+            <a:endParaRPr lang="en-US" sz="1100" dirty="0"/>
+          </a:p>
+        </p:txBody>
+      </p:sp>
+      <p:sp>
+        <p:nvSpPr>
+          <p:cNvPr id="29" name="Text 27"/>
+          <p:cNvSpPr/>
+          <p:nvPr/>
+        </p:nvSpPr>
+        <p:spPr>
+          <a:xfrm>
+            <a:off x="566928" y="6382512"/>
+            <a:ext cx="7315200" cy="219456"/>
+          </a:xfrm>
+          <a:prstGeom prst="rect">
+            <a:avLst/>
+          </a:prstGeom>
+          <a:noFill/>
+          <a:ln/>
+        </p:spPr>
+        <p:txBody>
+          <a:bodyPr wrap="square" lIns="0" tIns="0" rIns="0" bIns="0" rtlCol="0" anchor="ctr"/>
+          <a:lstStyle/>
+          <a:p>
+            <a:pPr indent="0" marL="0">
+              <a:buNone/>
+            </a:pPr>
+            <a:r>
+              <a:rPr lang="en-US" sz="800" dirty="0">
+                <a:solidFill>
+                  <a:srgbClr val="718096"/>
+                </a:solidFill>
+                <a:latin typeface="Pretendard" pitchFamily="34" charset="0"/>
+                <a:ea typeface="Pretendard" pitchFamily="34" charset="-122"/>
+                <a:cs typeface="Pretendard" pitchFamily="34" charset="-120"/>
+              </a:rPr>
               <a:t>크리딜   |   </a:t>
             </a:r>
             <a:endParaRPr lang="en-US" sz="800" dirty="0"/>
@@ -13017,7 +13600,7 @@
       </p:sp>
       <p:sp>
         <p:nvSpPr>
-          <p:cNvPr id="12" name="Text 10"/>
+          <p:cNvPr id="30" name="Text 28"/>
           <p:cNvSpPr/>
           <p:nvPr/>
         </p:nvSpPr>

--- a/docs/test/stress/e2e-outputs/income_case02_hongdae_fnb_basic.pptx
+++ b/docs/test/stress/e2e-outputs/income_case02_hongdae_fnb_basic.pptx
@@ -4225,7 +4225,7 @@
                 <a:ea typeface="Pretendard" pitchFamily="34" charset="-122"/>
                 <a:cs typeface="Pretendard" pitchFamily="34" charset="-120"/>
               </a:rPr>
-              <a:t>약 55억 원</a:t>
+              <a:t>약 58.2억 원</a:t>
             </a:r>
             <a:endParaRPr lang="en-US" sz="2000" dirty="0"/>
           </a:p>
@@ -5788,7 +5788,7 @@
                 <a:ea typeface="Pretendard" pitchFamily="34" charset="-122"/>
                 <a:cs typeface="Pretendard" pitchFamily="34" charset="-120"/>
               </a:rPr>
-              <a:t>소재지</a:t>
+              <a:t>{"ok"</a:t>
             </a:r>
             <a:endParaRPr lang="en-US" sz="1400" dirty="0"/>
           </a:p>
@@ -5830,7 +5830,7 @@
                 <a:ea typeface="Pretendard" pitchFamily="34" charset="-122"/>
                 <a:cs typeface="Pretendard" pitchFamily="34" charset="-120"/>
               </a:rPr>
-              <a:t>마포권역</a:t>
+              <a:t>true,"mocked":true,"extractedFields":{"area_signal":"역삼","asset_type":"오피스빌딩","price_band":"300억","size_signal":"3000평(약 9917.4㎡)"},"extractedFacts":{"region":"역삼","exactAddressCandidate":"역삼동 742-1","assetType":"오피스빌딩","priceText":"300억","sizeText":"3000평(약 9917.4㎡)","currentUse":"오피스","currentUseSignal":"근린생활시설","leaseSignal":"임대중","vacancySignal":"공실없음","tenantNames":"쿠팡","네이버","unitRentTexts":"301호: 1500만","sellerMotivationText":"자산 효율화","brokerNotes":"초역세권 매물"},"detectedSensitiveFields":"exact_address","tenant_name","ambiguousFields":,"warnings":,"areaSignal":"역삼","assetType":"오피스빌딩","priceBand":"300억","sizeSignal":"3000평(약 9917.4㎡)","dealType":"매각","buildingName":"역삼 센트럴타워","exactAddress":"역삼동 742-1","totalFloorArea":9917.3,"buildYear":2015,"currentUseSignal":"근린생활시설","vacancySignal":"공실 없음","fitSummary":"초역세권 근생 빌딩으로 시행/사옥 매입에 최적화","cautionSummary":"주요 임차 업종 만기 조율 필요","hiddenFields":"exact_address","seller_motivation","confidence":{"areaSignal":"confirmed","assetType":"confirmed","priceBand":"ai_hypothesis","fitSummary":"ai_hypothesis"},"missingData":"sizeSignal","boundaryNote":"본 자료는 실거래 통계 기반 참고치입니다.","buyerType":"법인 사옥형","budgetRange":{"min":50,"max":80,"display":"50억~80억"},"preferredRegions":"강남","성수","assetTypes":"꼬마빌딩","사옥용","purchasePurpose":"사옥용 매입","mustHave":"초역세권","주차","niceToHave":"테라스","루프탑","riskTolerance":"medium","financingNote":"자본금 50% 준비","missingQuestions":"구체적인 입주 시기가 언제인가요?","선호하는 수익률이 있나요?","privacyNotes":"연락처 비공개","fitReasons":"매수자 예산(50-80억)에 부합하는 매물입니다.","요청하신 성수/강남 권역에 해당합니다.","cautionReasons":"요청한 용도와 달리 명도 협의가 다소 필요합니다.","recommendedNextAction":"현장 답사 제안","kakaoMessage":"안녕하세요! 요청하신 조건에 부합하는 추천 매물이 있어 안내해 드립니다. 확인해보시고 피드백 부탁드립니다.","title":"강남 역삼역 초역세권 오피스 사옥용 빌딩 매각","shortSummary":"역삼역 도보 5분 거리의 준신축급 대형 오피스빌딩입니다.","dealPoints":"초역세권","사옥 최적","cautionPoints":"명도 조율 필요","hiddenInfoNotice":"보증금 및 지번은 인가 후 확인 가능","gateMessage":"G1 등급 등록이 필요합니다.","kakaoText":"강남 역삼역 오피스 빌딩 매각 안내입니다.","exactUnitCandidate":"101호","floor":"1층","areaSqmText":"150㎡","spaceType":"office","depositText":"5000만","monthlyRentText":"400만","maintenanceFeeText":"50만","availableFromText":"즉시입주","leaseTermMonthsText":"24","incentivesText":"렌트프리 2개월","restrictions":,"landlordIdentity":"김성수","currentTenant":"스타트업","vacancyReason":"이전 확장","rentNegotiation":"협의 가능","region":"성수동","areaSqm":150,"deposit":5000,"monthlyRent":400,"maintenanceFee":50,"availableFrom":"즉시입주","leaseTermMonths":24,"incentives":{"rentFreeMonths":2,"interiorSupport":"일부 인테리어 지원","freeRentDetail":"렌트프리 2개월 지원"},"shortSummaryLease":"성수역 도보 5분 거리 1층 리테일 상가 매물입니다."}</a:t>
             </a:r>
             <a:endParaRPr lang="en-US" sz="1400" dirty="0"/>
           </a:p>
@@ -5839,862 +5839,6 @@
       <p:sp>
         <p:nvSpPr>
           <p:cNvPr id="9" name="Shape 7"/>
-          <p:cNvSpPr/>
-          <p:nvPr/>
-        </p:nvSpPr>
-        <p:spPr>
-          <a:xfrm>
-            <a:off x="566928" y="2048256"/>
-            <a:ext cx="6858000" cy="0"/>
-          </a:xfrm>
-          <a:prstGeom prst="line">
-            <a:avLst/>
-          </a:prstGeom>
-          <a:noFill/>
-          <a:ln w="3810">
-            <a:solidFill>
-              <a:srgbClr val="CBD5E0"/>
-            </a:solidFill>
-            <a:prstDash val="solid"/>
-          </a:ln>
-        </p:spPr>
-      </p:sp>
-      <p:sp>
-        <p:nvSpPr>
-          <p:cNvPr id="10" name="Text 8"/>
-          <p:cNvSpPr/>
-          <p:nvPr/>
-        </p:nvSpPr>
-        <p:spPr>
-          <a:xfrm>
-            <a:off x="566928" y="2048256"/>
-            <a:ext cx="2606040" cy="402336"/>
-          </a:xfrm>
-          <a:prstGeom prst="rect">
-            <a:avLst/>
-          </a:prstGeom>
-          <a:noFill/>
-          <a:ln/>
-        </p:spPr>
-        <p:txBody>
-          <a:bodyPr wrap="square" lIns="0" tIns="0" rIns="0" bIns="0" rtlCol="0" anchor="ctr"/>
-          <a:lstStyle/>
-          <a:p>
-            <a:pPr indent="0" marL="0">
-              <a:lnSpc>
-                <a:spcPct val="120000"/>
-              </a:lnSpc>
-              <a:buNone/>
-            </a:pPr>
-            <a:r>
-              <a:rPr lang="en-US" sz="1400" dirty="0">
-                <a:solidFill>
-                  <a:srgbClr val="718096"/>
-                </a:solidFill>
-                <a:latin typeface="Pretendard" pitchFamily="34" charset="0"/>
-                <a:ea typeface="Pretendard" pitchFamily="34" charset="-122"/>
-                <a:cs typeface="Pretendard" pitchFamily="34" charset="-120"/>
-              </a:rPr>
-              <a:t>주요 용도</a:t>
-            </a:r>
-            <a:endParaRPr lang="en-US" sz="1400" dirty="0"/>
-          </a:p>
-        </p:txBody>
-      </p:sp>
-      <p:sp>
-        <p:nvSpPr>
-          <p:cNvPr id="11" name="Text 9"/>
-          <p:cNvSpPr/>
-          <p:nvPr/>
-        </p:nvSpPr>
-        <p:spPr>
-          <a:xfrm>
-            <a:off x="3172968" y="2048256"/>
-            <a:ext cx="4251960" cy="402336"/>
-          </a:xfrm>
-          <a:prstGeom prst="rect">
-            <a:avLst/>
-          </a:prstGeom>
-          <a:noFill/>
-          <a:ln/>
-        </p:spPr>
-        <p:txBody>
-          <a:bodyPr wrap="square" lIns="0" tIns="0" rIns="0" bIns="0" rtlCol="0" anchor="ctr"/>
-          <a:lstStyle/>
-          <a:p>
-            <a:pPr indent="0" marL="0">
-              <a:lnSpc>
-                <a:spcPct val="120000"/>
-              </a:lnSpc>
-              <a:buNone/>
-            </a:pPr>
-            <a:r>
-              <a:rPr lang="en-US" sz="1400" b="1" dirty="0">
-                <a:solidFill>
-                  <a:srgbClr val="10161F"/>
-                </a:solidFill>
-                <a:latin typeface="Pretendard" pitchFamily="34" charset="0"/>
-                <a:ea typeface="Pretendard" pitchFamily="34" charset="-122"/>
-                <a:cs typeface="Pretendard" pitchFamily="34" charset="-120"/>
-              </a:rPr>
-              <a:t>근린생활시설</a:t>
-            </a:r>
-            <a:endParaRPr lang="en-US" sz="1400" dirty="0"/>
-          </a:p>
-        </p:txBody>
-      </p:sp>
-      <p:sp>
-        <p:nvSpPr>
-          <p:cNvPr id="12" name="Shape 10"/>
-          <p:cNvSpPr/>
-          <p:nvPr/>
-        </p:nvSpPr>
-        <p:spPr>
-          <a:xfrm>
-            <a:off x="566928" y="2450592"/>
-            <a:ext cx="6858000" cy="0"/>
-          </a:xfrm>
-          <a:prstGeom prst="line">
-            <a:avLst/>
-          </a:prstGeom>
-          <a:noFill/>
-          <a:ln w="3810">
-            <a:solidFill>
-              <a:srgbClr val="CBD5E0"/>
-            </a:solidFill>
-            <a:prstDash val="solid"/>
-          </a:ln>
-        </p:spPr>
-      </p:sp>
-      <p:sp>
-        <p:nvSpPr>
-          <p:cNvPr id="13" name="Text 11"/>
-          <p:cNvSpPr/>
-          <p:nvPr/>
-        </p:nvSpPr>
-        <p:spPr>
-          <a:xfrm>
-            <a:off x="566928" y="2450592"/>
-            <a:ext cx="2606040" cy="402336"/>
-          </a:xfrm>
-          <a:prstGeom prst="rect">
-            <a:avLst/>
-          </a:prstGeom>
-          <a:noFill/>
-          <a:ln/>
-        </p:spPr>
-        <p:txBody>
-          <a:bodyPr wrap="square" lIns="0" tIns="0" rIns="0" bIns="0" rtlCol="0" anchor="ctr"/>
-          <a:lstStyle/>
-          <a:p>
-            <a:pPr indent="0" marL="0">
-              <a:lnSpc>
-                <a:spcPct val="120000"/>
-              </a:lnSpc>
-              <a:buNone/>
-            </a:pPr>
-            <a:r>
-              <a:rPr lang="en-US" sz="1400" dirty="0">
-                <a:solidFill>
-                  <a:srgbClr val="718096"/>
-                </a:solidFill>
-                <a:latin typeface="Pretendard" pitchFamily="34" charset="0"/>
-                <a:ea typeface="Pretendard" pitchFamily="34" charset="-122"/>
-                <a:cs typeface="Pretendard" pitchFamily="34" charset="-120"/>
-              </a:rPr>
-              <a:t>연면적</a:t>
-            </a:r>
-            <a:endParaRPr lang="en-US" sz="1400" dirty="0"/>
-          </a:p>
-        </p:txBody>
-      </p:sp>
-      <p:sp>
-        <p:nvSpPr>
-          <p:cNvPr id="14" name="Text 12"/>
-          <p:cNvSpPr/>
-          <p:nvPr/>
-        </p:nvSpPr>
-        <p:spPr>
-          <a:xfrm>
-            <a:off x="3172968" y="2450592"/>
-            <a:ext cx="4251960" cy="402336"/>
-          </a:xfrm>
-          <a:prstGeom prst="rect">
-            <a:avLst/>
-          </a:prstGeom>
-          <a:noFill/>
-          <a:ln/>
-        </p:spPr>
-        <p:txBody>
-          <a:bodyPr wrap="square" lIns="0" tIns="0" rIns="0" bIns="0" rtlCol="0" anchor="ctr"/>
-          <a:lstStyle/>
-          <a:p>
-            <a:pPr indent="0" marL="0">
-              <a:lnSpc>
-                <a:spcPct val="120000"/>
-              </a:lnSpc>
-              <a:buNone/>
-            </a:pPr>
-            <a:r>
-              <a:rPr lang="en-US" sz="1400" b="1" dirty="0">
-                <a:solidFill>
-                  <a:srgbClr val="10161F"/>
-                </a:solidFill>
-                <a:latin typeface="Pretendard" pitchFamily="34" charset="0"/>
-                <a:ea typeface="Pretendard" pitchFamily="34" charset="-122"/>
-                <a:cs typeface="Pretendard" pitchFamily="34" charset="-120"/>
-              </a:rPr>
-              <a:t>5,000㎡ (약 1513평(약 5001.7㎡))</a:t>
-            </a:r>
-            <a:endParaRPr lang="en-US" sz="1400" dirty="0"/>
-          </a:p>
-        </p:txBody>
-      </p:sp>
-      <p:sp>
-        <p:nvSpPr>
-          <p:cNvPr id="15" name="Shape 13"/>
-          <p:cNvSpPr/>
-          <p:nvPr/>
-        </p:nvSpPr>
-        <p:spPr>
-          <a:xfrm>
-            <a:off x="566928" y="2852928"/>
-            <a:ext cx="6858000" cy="0"/>
-          </a:xfrm>
-          <a:prstGeom prst="line">
-            <a:avLst/>
-          </a:prstGeom>
-          <a:noFill/>
-          <a:ln w="3810">
-            <a:solidFill>
-              <a:srgbClr val="CBD5E0"/>
-            </a:solidFill>
-            <a:prstDash val="solid"/>
-          </a:ln>
-        </p:spPr>
-      </p:sp>
-      <p:sp>
-        <p:nvSpPr>
-          <p:cNvPr id="16" name="Text 14"/>
-          <p:cNvSpPr/>
-          <p:nvPr/>
-        </p:nvSpPr>
-        <p:spPr>
-          <a:xfrm>
-            <a:off x="566928" y="2852928"/>
-            <a:ext cx="2606040" cy="402336"/>
-          </a:xfrm>
-          <a:prstGeom prst="rect">
-            <a:avLst/>
-          </a:prstGeom>
-          <a:noFill/>
-          <a:ln/>
-        </p:spPr>
-        <p:txBody>
-          <a:bodyPr wrap="square" lIns="0" tIns="0" rIns="0" bIns="0" rtlCol="0" anchor="ctr"/>
-          <a:lstStyle/>
-          <a:p>
-            <a:pPr indent="0" marL="0">
-              <a:lnSpc>
-                <a:spcPct val="120000"/>
-              </a:lnSpc>
-              <a:buNone/>
-            </a:pPr>
-            <a:r>
-              <a:rPr lang="en-US" sz="1400" dirty="0">
-                <a:solidFill>
-                  <a:srgbClr val="718096"/>
-                </a:solidFill>
-                <a:latin typeface="Pretendard" pitchFamily="34" charset="0"/>
-                <a:ea typeface="Pretendard" pitchFamily="34" charset="-122"/>
-                <a:cs typeface="Pretendard" pitchFamily="34" charset="-120"/>
-              </a:rPr>
-              <a:t>대지면적</a:t>
-            </a:r>
-            <a:endParaRPr lang="en-US" sz="1400" dirty="0"/>
-          </a:p>
-        </p:txBody>
-      </p:sp>
-      <p:sp>
-        <p:nvSpPr>
-          <p:cNvPr id="17" name="Text 15"/>
-          <p:cNvSpPr/>
-          <p:nvPr/>
-        </p:nvSpPr>
-        <p:spPr>
-          <a:xfrm>
-            <a:off x="3172968" y="2852928"/>
-            <a:ext cx="4251960" cy="402336"/>
-          </a:xfrm>
-          <a:prstGeom prst="rect">
-            <a:avLst/>
-          </a:prstGeom>
-          <a:noFill/>
-          <a:ln/>
-        </p:spPr>
-        <p:txBody>
-          <a:bodyPr wrap="square" lIns="0" tIns="0" rIns="0" bIns="0" rtlCol="0" anchor="ctr"/>
-          <a:lstStyle/>
-          <a:p>
-            <a:pPr indent="0" marL="0">
-              <a:lnSpc>
-                <a:spcPct val="120000"/>
-              </a:lnSpc>
-              <a:buNone/>
-            </a:pPr>
-            <a:r>
-              <a:rPr lang="en-US" sz="1400" b="1" dirty="0">
-                <a:solidFill>
-                  <a:srgbClr val="10161F"/>
-                </a:solidFill>
-                <a:latin typeface="Pretendard" pitchFamily="34" charset="0"/>
-                <a:ea typeface="Pretendard" pitchFamily="34" charset="-122"/>
-                <a:cs typeface="Pretendard" pitchFamily="34" charset="-120"/>
-              </a:rPr>
-              <a:t>1,000㎡ (약 303평(약 1001.7㎡))</a:t>
-            </a:r>
-            <a:endParaRPr lang="en-US" sz="1400" dirty="0"/>
-          </a:p>
-        </p:txBody>
-      </p:sp>
-      <p:sp>
-        <p:nvSpPr>
-          <p:cNvPr id="18" name="Shape 16"/>
-          <p:cNvSpPr/>
-          <p:nvPr/>
-        </p:nvSpPr>
-        <p:spPr>
-          <a:xfrm>
-            <a:off x="566928" y="3255264"/>
-            <a:ext cx="6858000" cy="0"/>
-          </a:xfrm>
-          <a:prstGeom prst="line">
-            <a:avLst/>
-          </a:prstGeom>
-          <a:noFill/>
-          <a:ln w="3810">
-            <a:solidFill>
-              <a:srgbClr val="CBD5E0"/>
-            </a:solidFill>
-            <a:prstDash val="solid"/>
-          </a:ln>
-        </p:spPr>
-      </p:sp>
-      <p:sp>
-        <p:nvSpPr>
-          <p:cNvPr id="19" name="Text 17"/>
-          <p:cNvSpPr/>
-          <p:nvPr/>
-        </p:nvSpPr>
-        <p:spPr>
-          <a:xfrm>
-            <a:off x="566928" y="3255264"/>
-            <a:ext cx="2606040" cy="402336"/>
-          </a:xfrm>
-          <a:prstGeom prst="rect">
-            <a:avLst/>
-          </a:prstGeom>
-          <a:noFill/>
-          <a:ln/>
-        </p:spPr>
-        <p:txBody>
-          <a:bodyPr wrap="square" lIns="0" tIns="0" rIns="0" bIns="0" rtlCol="0" anchor="ctr"/>
-          <a:lstStyle/>
-          <a:p>
-            <a:pPr indent="0" marL="0">
-              <a:lnSpc>
-                <a:spcPct val="120000"/>
-              </a:lnSpc>
-              <a:buNone/>
-            </a:pPr>
-            <a:r>
-              <a:rPr lang="en-US" sz="1400" dirty="0">
-                <a:solidFill>
-                  <a:srgbClr val="718096"/>
-                </a:solidFill>
-                <a:latin typeface="Pretendard" pitchFamily="34" charset="0"/>
-                <a:ea typeface="Pretendard" pitchFamily="34" charset="-122"/>
-                <a:cs typeface="Pretendard" pitchFamily="34" charset="-120"/>
-              </a:rPr>
-              <a:t>용도지역</a:t>
-            </a:r>
-            <a:endParaRPr lang="en-US" sz="1400" dirty="0"/>
-          </a:p>
-        </p:txBody>
-      </p:sp>
-      <p:sp>
-        <p:nvSpPr>
-          <p:cNvPr id="20" name="Text 18"/>
-          <p:cNvSpPr/>
-          <p:nvPr/>
-        </p:nvSpPr>
-        <p:spPr>
-          <a:xfrm>
-            <a:off x="3172968" y="3255264"/>
-            <a:ext cx="4251960" cy="402336"/>
-          </a:xfrm>
-          <a:prstGeom prst="rect">
-            <a:avLst/>
-          </a:prstGeom>
-          <a:noFill/>
-          <a:ln/>
-        </p:spPr>
-        <p:txBody>
-          <a:bodyPr wrap="square" lIns="0" tIns="0" rIns="0" bIns="0" rtlCol="0" anchor="ctr"/>
-          <a:lstStyle/>
-          <a:p>
-            <a:pPr indent="0" marL="0">
-              <a:lnSpc>
-                <a:spcPct val="120000"/>
-              </a:lnSpc>
-              <a:buNone/>
-            </a:pPr>
-            <a:r>
-              <a:rPr lang="en-US" sz="1400" b="1" dirty="0">
-                <a:solidFill>
-                  <a:srgbClr val="10161F"/>
-                </a:solidFill>
-                <a:latin typeface="Pretendard" pitchFamily="34" charset="0"/>
-                <a:ea typeface="Pretendard" pitchFamily="34" charset="-122"/>
-                <a:cs typeface="Pretendard" pitchFamily="34" charset="-120"/>
-              </a:rPr>
-              <a:t>일반상업지역</a:t>
-            </a:r>
-            <a:endParaRPr lang="en-US" sz="1400" dirty="0"/>
-          </a:p>
-        </p:txBody>
-      </p:sp>
-      <p:sp>
-        <p:nvSpPr>
-          <p:cNvPr id="21" name="Shape 19"/>
-          <p:cNvSpPr/>
-          <p:nvPr/>
-        </p:nvSpPr>
-        <p:spPr>
-          <a:xfrm>
-            <a:off x="566928" y="3657600"/>
-            <a:ext cx="6858000" cy="0"/>
-          </a:xfrm>
-          <a:prstGeom prst="line">
-            <a:avLst/>
-          </a:prstGeom>
-          <a:noFill/>
-          <a:ln w="3810">
-            <a:solidFill>
-              <a:srgbClr val="CBD5E0"/>
-            </a:solidFill>
-            <a:prstDash val="solid"/>
-          </a:ln>
-        </p:spPr>
-      </p:sp>
-      <p:sp>
-        <p:nvSpPr>
-          <p:cNvPr id="22" name="Text 20"/>
-          <p:cNvSpPr/>
-          <p:nvPr/>
-        </p:nvSpPr>
-        <p:spPr>
-          <a:xfrm>
-            <a:off x="566928" y="3657600"/>
-            <a:ext cx="2606040" cy="402336"/>
-          </a:xfrm>
-          <a:prstGeom prst="rect">
-            <a:avLst/>
-          </a:prstGeom>
-          <a:noFill/>
-          <a:ln/>
-        </p:spPr>
-        <p:txBody>
-          <a:bodyPr wrap="square" lIns="0" tIns="0" rIns="0" bIns="0" rtlCol="0" anchor="ctr"/>
-          <a:lstStyle/>
-          <a:p>
-            <a:pPr indent="0" marL="0">
-              <a:lnSpc>
-                <a:spcPct val="120000"/>
-              </a:lnSpc>
-              <a:buNone/>
-            </a:pPr>
-            <a:r>
-              <a:rPr lang="en-US" sz="1400" dirty="0">
-                <a:solidFill>
-                  <a:srgbClr val="718096"/>
-                </a:solidFill>
-                <a:latin typeface="Pretendard" pitchFamily="34" charset="0"/>
-                <a:ea typeface="Pretendard" pitchFamily="34" charset="-122"/>
-                <a:cs typeface="Pretendard" pitchFamily="34" charset="-120"/>
-              </a:rPr>
-              <a:t>승강기</a:t>
-            </a:r>
-            <a:endParaRPr lang="en-US" sz="1400" dirty="0"/>
-          </a:p>
-        </p:txBody>
-      </p:sp>
-      <p:sp>
-        <p:nvSpPr>
-          <p:cNvPr id="23" name="Text 21"/>
-          <p:cNvSpPr/>
-          <p:nvPr/>
-        </p:nvSpPr>
-        <p:spPr>
-          <a:xfrm>
-            <a:off x="3172968" y="3657600"/>
-            <a:ext cx="4251960" cy="402336"/>
-          </a:xfrm>
-          <a:prstGeom prst="rect">
-            <a:avLst/>
-          </a:prstGeom>
-          <a:noFill/>
-          <a:ln/>
-        </p:spPr>
-        <p:txBody>
-          <a:bodyPr wrap="square" lIns="0" tIns="0" rIns="0" bIns="0" rtlCol="0" anchor="ctr"/>
-          <a:lstStyle/>
-          <a:p>
-            <a:pPr indent="0" marL="0">
-              <a:lnSpc>
-                <a:spcPct val="120000"/>
-              </a:lnSpc>
-              <a:buNone/>
-            </a:pPr>
-            <a:r>
-              <a:rPr lang="en-US" sz="1400" b="1" dirty="0">
-                <a:solidFill>
-                  <a:srgbClr val="10161F"/>
-                </a:solidFill>
-                <a:latin typeface="Pretendard" pitchFamily="34" charset="0"/>
-                <a:ea typeface="Pretendard" pitchFamily="34" charset="-122"/>
-                <a:cs typeface="Pretendard" pitchFamily="34" charset="-120"/>
-              </a:rPr>
-              <a:t>1대 (15인승 침대용)</a:t>
-            </a:r>
-            <a:endParaRPr lang="en-US" sz="1400" dirty="0"/>
-          </a:p>
-        </p:txBody>
-      </p:sp>
-      <p:sp>
-        <p:nvSpPr>
-          <p:cNvPr id="24" name="Shape 22"/>
-          <p:cNvSpPr/>
-          <p:nvPr/>
-        </p:nvSpPr>
-        <p:spPr>
-          <a:xfrm>
-            <a:off x="566928" y="4059936"/>
-            <a:ext cx="6858000" cy="0"/>
-          </a:xfrm>
-          <a:prstGeom prst="line">
-            <a:avLst/>
-          </a:prstGeom>
-          <a:noFill/>
-          <a:ln w="3810">
-            <a:solidFill>
-              <a:srgbClr val="CBD5E0"/>
-            </a:solidFill>
-            <a:prstDash val="solid"/>
-          </a:ln>
-        </p:spPr>
-      </p:sp>
-      <p:sp>
-        <p:nvSpPr>
-          <p:cNvPr id="25" name="Text 23"/>
-          <p:cNvSpPr/>
-          <p:nvPr/>
-        </p:nvSpPr>
-        <p:spPr>
-          <a:xfrm>
-            <a:off x="566928" y="4059936"/>
-            <a:ext cx="2606040" cy="402336"/>
-          </a:xfrm>
-          <a:prstGeom prst="rect">
-            <a:avLst/>
-          </a:prstGeom>
-          <a:noFill/>
-          <a:ln/>
-        </p:spPr>
-        <p:txBody>
-          <a:bodyPr wrap="square" lIns="0" tIns="0" rIns="0" bIns="0" rtlCol="0" anchor="ctr"/>
-          <a:lstStyle/>
-          <a:p>
-            <a:pPr indent="0" marL="0">
-              <a:lnSpc>
-                <a:spcPct val="120000"/>
-              </a:lnSpc>
-              <a:buNone/>
-            </a:pPr>
-            <a:r>
-              <a:rPr lang="en-US" sz="1400" dirty="0">
-                <a:solidFill>
-                  <a:srgbClr val="718096"/>
-                </a:solidFill>
-                <a:latin typeface="Pretendard" pitchFamily="34" charset="0"/>
-                <a:ea typeface="Pretendard" pitchFamily="34" charset="-122"/>
-                <a:cs typeface="Pretendard" pitchFamily="34" charset="-120"/>
-              </a:rPr>
-              <a:t>주차 대수</a:t>
-            </a:r>
-            <a:endParaRPr lang="en-US" sz="1400" dirty="0"/>
-          </a:p>
-        </p:txBody>
-      </p:sp>
-      <p:sp>
-        <p:nvSpPr>
-          <p:cNvPr id="26" name="Text 24"/>
-          <p:cNvSpPr/>
-          <p:nvPr/>
-        </p:nvSpPr>
-        <p:spPr>
-          <a:xfrm>
-            <a:off x="3172968" y="4059936"/>
-            <a:ext cx="4251960" cy="402336"/>
-          </a:xfrm>
-          <a:prstGeom prst="rect">
-            <a:avLst/>
-          </a:prstGeom>
-          <a:noFill/>
-          <a:ln/>
-        </p:spPr>
-        <p:txBody>
-          <a:bodyPr wrap="square" lIns="0" tIns="0" rIns="0" bIns="0" rtlCol="0" anchor="ctr"/>
-          <a:lstStyle/>
-          <a:p>
-            <a:pPr indent="0" marL="0">
-              <a:lnSpc>
-                <a:spcPct val="120000"/>
-              </a:lnSpc>
-              <a:buNone/>
-            </a:pPr>
-            <a:r>
-              <a:rPr lang="en-US" sz="1400" b="1" dirty="0">
-                <a:solidFill>
-                  <a:srgbClr val="10161F"/>
-                </a:solidFill>
-                <a:latin typeface="Pretendard" pitchFamily="34" charset="0"/>
-                <a:ea typeface="Pretendard" pitchFamily="34" charset="-122"/>
-                <a:cs typeface="Pretendard" pitchFamily="34" charset="-120"/>
-              </a:rPr>
-              <a:t>18대 (자주식 완비)</a:t>
-            </a:r>
-            <a:endParaRPr lang="en-US" sz="1400" dirty="0"/>
-          </a:p>
-        </p:txBody>
-      </p:sp>
-      <p:sp>
-        <p:nvSpPr>
-          <p:cNvPr id="27" name="Shape 25"/>
-          <p:cNvSpPr/>
-          <p:nvPr/>
-        </p:nvSpPr>
-        <p:spPr>
-          <a:xfrm>
-            <a:off x="566928" y="4462272"/>
-            <a:ext cx="6858000" cy="0"/>
-          </a:xfrm>
-          <a:prstGeom prst="line">
-            <a:avLst/>
-          </a:prstGeom>
-          <a:noFill/>
-          <a:ln w="3810">
-            <a:solidFill>
-              <a:srgbClr val="CBD5E0"/>
-            </a:solidFill>
-            <a:prstDash val="solid"/>
-          </a:ln>
-        </p:spPr>
-      </p:sp>
-      <p:sp>
-        <p:nvSpPr>
-          <p:cNvPr id="28" name="Text 26"/>
-          <p:cNvSpPr/>
-          <p:nvPr/>
-        </p:nvSpPr>
-        <p:spPr>
-          <a:xfrm>
-            <a:off x="566928" y="4462272"/>
-            <a:ext cx="2606040" cy="402336"/>
-          </a:xfrm>
-          <a:prstGeom prst="rect">
-            <a:avLst/>
-          </a:prstGeom>
-          <a:noFill/>
-          <a:ln/>
-        </p:spPr>
-        <p:txBody>
-          <a:bodyPr wrap="square" lIns="0" tIns="0" rIns="0" bIns="0" rtlCol="0" anchor="ctr"/>
-          <a:lstStyle/>
-          <a:p>
-            <a:pPr indent="0" marL="0">
-              <a:lnSpc>
-                <a:spcPct val="120000"/>
-              </a:lnSpc>
-              <a:buNone/>
-            </a:pPr>
-            <a:r>
-              <a:rPr lang="en-US" sz="1400" dirty="0">
-                <a:solidFill>
-                  <a:srgbClr val="718096"/>
-                </a:solidFill>
-                <a:latin typeface="Pretendard" pitchFamily="34" charset="0"/>
-                <a:ea typeface="Pretendard" pitchFamily="34" charset="-122"/>
-                <a:cs typeface="Pretendard" pitchFamily="34" charset="-120"/>
-              </a:rPr>
-              <a:t>주구조</a:t>
-            </a:r>
-            <a:endParaRPr lang="en-US" sz="1400" dirty="0"/>
-          </a:p>
-        </p:txBody>
-      </p:sp>
-      <p:sp>
-        <p:nvSpPr>
-          <p:cNvPr id="29" name="Text 27"/>
-          <p:cNvSpPr/>
-          <p:nvPr/>
-        </p:nvSpPr>
-        <p:spPr>
-          <a:xfrm>
-            <a:off x="3172968" y="4462272"/>
-            <a:ext cx="4251960" cy="402336"/>
-          </a:xfrm>
-          <a:prstGeom prst="rect">
-            <a:avLst/>
-          </a:prstGeom>
-          <a:noFill/>
-          <a:ln/>
-        </p:spPr>
-        <p:txBody>
-          <a:bodyPr wrap="square" lIns="0" tIns="0" rIns="0" bIns="0" rtlCol="0" anchor="ctr"/>
-          <a:lstStyle/>
-          <a:p>
-            <a:pPr indent="0" marL="0">
-              <a:lnSpc>
-                <a:spcPct val="120000"/>
-              </a:lnSpc>
-              <a:buNone/>
-            </a:pPr>
-            <a:r>
-              <a:rPr lang="en-US" sz="1400" b="1" dirty="0">
-                <a:solidFill>
-                  <a:srgbClr val="10161F"/>
-                </a:solidFill>
-                <a:latin typeface="Pretendard" pitchFamily="34" charset="0"/>
-                <a:ea typeface="Pretendard" pitchFamily="34" charset="-122"/>
-                <a:cs typeface="Pretendard" pitchFamily="34" charset="-120"/>
-              </a:rPr>
-              <a:t>철근콘크리트구조</a:t>
-            </a:r>
-            <a:endParaRPr lang="en-US" sz="1400" dirty="0"/>
-          </a:p>
-        </p:txBody>
-      </p:sp>
-      <p:sp>
-        <p:nvSpPr>
-          <p:cNvPr id="30" name="Shape 28"/>
-          <p:cNvSpPr/>
-          <p:nvPr/>
-        </p:nvSpPr>
-        <p:spPr>
-          <a:xfrm>
-            <a:off x="566928" y="4864608"/>
-            <a:ext cx="6858000" cy="0"/>
-          </a:xfrm>
-          <a:prstGeom prst="line">
-            <a:avLst/>
-          </a:prstGeom>
-          <a:noFill/>
-          <a:ln w="3810">
-            <a:solidFill>
-              <a:srgbClr val="CBD5E0"/>
-            </a:solidFill>
-            <a:prstDash val="solid"/>
-          </a:ln>
-        </p:spPr>
-      </p:sp>
-      <p:sp>
-        <p:nvSpPr>
-          <p:cNvPr id="31" name="Text 29"/>
-          <p:cNvSpPr/>
-          <p:nvPr/>
-        </p:nvSpPr>
-        <p:spPr>
-          <a:xfrm>
-            <a:off x="566928" y="4864608"/>
-            <a:ext cx="2606040" cy="402336"/>
-          </a:xfrm>
-          <a:prstGeom prst="rect">
-            <a:avLst/>
-          </a:prstGeom>
-          <a:noFill/>
-          <a:ln/>
-        </p:spPr>
-        <p:txBody>
-          <a:bodyPr wrap="square" lIns="0" tIns="0" rIns="0" bIns="0" rtlCol="0" anchor="ctr"/>
-          <a:lstStyle/>
-          <a:p>
-            <a:pPr indent="0" marL="0">
-              <a:lnSpc>
-                <a:spcPct val="120000"/>
-              </a:lnSpc>
-              <a:buNone/>
-            </a:pPr>
-            <a:r>
-              <a:rPr lang="en-US" sz="1400" dirty="0">
-                <a:solidFill>
-                  <a:srgbClr val="718096"/>
-                </a:solidFill>
-                <a:latin typeface="Pretendard" pitchFamily="34" charset="0"/>
-                <a:ea typeface="Pretendard" pitchFamily="34" charset="-122"/>
-                <a:cs typeface="Pretendard" pitchFamily="34" charset="-120"/>
-              </a:rPr>
-              <a:t>매매 희망가</a:t>
-            </a:r>
-            <a:endParaRPr lang="en-US" sz="1400" dirty="0"/>
-          </a:p>
-        </p:txBody>
-      </p:sp>
-      <p:sp>
-        <p:nvSpPr>
-          <p:cNvPr id="32" name="Text 30"/>
-          <p:cNvSpPr/>
-          <p:nvPr/>
-        </p:nvSpPr>
-        <p:spPr>
-          <a:xfrm>
-            <a:off x="3172968" y="4864608"/>
-            <a:ext cx="4251960" cy="402336"/>
-          </a:xfrm>
-          <a:prstGeom prst="rect">
-            <a:avLst/>
-          </a:prstGeom>
-          <a:noFill/>
-          <a:ln/>
-        </p:spPr>
-        <p:txBody>
-          <a:bodyPr wrap="square" lIns="0" tIns="0" rIns="0" bIns="0" rtlCol="0" anchor="ctr"/>
-          <a:lstStyle/>
-          <a:p>
-            <a:pPr indent="0" marL="0">
-              <a:lnSpc>
-                <a:spcPct val="120000"/>
-              </a:lnSpc>
-              <a:buNone/>
-            </a:pPr>
-            <a:r>
-              <a:rPr lang="en-US" sz="1400" b="1" dirty="0">
-                <a:solidFill>
-                  <a:srgbClr val="10161F"/>
-                </a:solidFill>
-                <a:latin typeface="Pretendard" pitchFamily="34" charset="0"/>
-                <a:ea typeface="Pretendard" pitchFamily="34" charset="-122"/>
-                <a:cs typeface="Pretendard" pitchFamily="34" charset="-120"/>
-              </a:rPr>
-              <a:t>58억</a:t>
-            </a:r>
-            <a:endParaRPr lang="en-US" sz="1400" dirty="0"/>
-          </a:p>
-        </p:txBody>
-      </p:sp>
-      <p:sp>
-        <p:nvSpPr>
-          <p:cNvPr id="33" name="Shape 31"/>
           <p:cNvSpPr/>
           <p:nvPr/>
         </p:nvSpPr>
@@ -6717,49 +5861,49 @@
       </p:sp>
       <p:sp>
         <p:nvSpPr>
-          <p:cNvPr id="34" name="Shape 32"/>
+          <p:cNvPr id="10" name="Shape 8"/>
           <p:cNvSpPr/>
           <p:nvPr/>
         </p:nvSpPr>
         <p:spPr>
           <a:xfrm>
             <a:off x="7784287" y="1645920"/>
-            <a:ext cx="3840480" cy="1645920"/>
+            <a:ext cx="3840480" cy="2103120"/>
           </a:xfrm>
           <a:prstGeom prst="roundRect">
             <a:avLst>
-              <a:gd name="adj" fmla="val 3333"/>
+              <a:gd name="adj" fmla="val 2609"/>
             </a:avLst>
           </a:prstGeom>
           <a:solidFill>
-            <a:srgbClr val="BEE3F8"/>
+            <a:srgbClr val="F3EBDA"/>
           </a:solidFill>
           <a:ln/>
         </p:spPr>
       </p:sp>
       <p:sp>
         <p:nvSpPr>
-          <p:cNvPr id="35" name="Shape 33"/>
+          <p:cNvPr id="11" name="Shape 9"/>
           <p:cNvSpPr/>
           <p:nvPr/>
         </p:nvSpPr>
         <p:spPr>
           <a:xfrm>
             <a:off x="7784287" y="1700784"/>
-            <a:ext cx="36576" cy="1536192"/>
+            <a:ext cx="36576" cy="1993392"/>
           </a:xfrm>
           <a:prstGeom prst="rect">
             <a:avLst/>
           </a:prstGeom>
           <a:solidFill>
-            <a:srgbClr val="2B6CB0"/>
+            <a:srgbClr val="977024"/>
           </a:solidFill>
           <a:ln/>
         </p:spPr>
       </p:sp>
       <p:sp>
         <p:nvSpPr>
-          <p:cNvPr id="36" name="Text 34"/>
+          <p:cNvPr id="12" name="Text 10"/>
           <p:cNvSpPr/>
           <p:nvPr/>
         </p:nvSpPr>
@@ -6787,14 +5931,14 @@
       </p:sp>
       <p:sp>
         <p:nvSpPr>
-          <p:cNvPr id="37" name="Text 35"/>
+          <p:cNvPr id="13" name="Text 11"/>
           <p:cNvSpPr/>
           <p:nvPr/>
         </p:nvSpPr>
         <p:spPr>
           <a:xfrm>
             <a:off x="7967167" y="1975104"/>
-            <a:ext cx="3511296" cy="1243584"/>
+            <a:ext cx="3511296" cy="1700784"/>
           </a:xfrm>
           <a:prstGeom prst="rect">
             <a:avLst/>
@@ -6821,7 +5965,7 @@
                 <a:ea typeface="Pretendard" pitchFamily="34" charset="-122"/>
                 <a:cs typeface="Pretendard" pitchFamily="34" charset="-120"/>
               </a:rPr>
-              <a:t>본 매물은 마포권역 입지의 안정적 운영 자산입니다.</a:t>
+              <a:t>{"ok":true,"mocked":true,"extractedFields":{"area_signal":"역삼","asset_type":"오피스빌딩","price_band":"300억","size_signal":"3</a:t>
             </a:r>
             <a:endParaRPr lang="en-US" sz="930" dirty="0"/>
           </a:p>
@@ -6829,7 +5973,7 @@
       </p:sp>
       <p:sp>
         <p:nvSpPr>
-          <p:cNvPr id="38" name="Text 36"/>
+          <p:cNvPr id="14" name="Text 12"/>
           <p:cNvSpPr/>
           <p:nvPr/>
         </p:nvSpPr>
@@ -6868,7 +6012,7 @@
       </p:sp>
       <p:sp>
         <p:nvSpPr>
-          <p:cNvPr id="39" name="Text 37"/>
+          <p:cNvPr id="15" name="Text 13"/>
           <p:cNvSpPr/>
           <p:nvPr/>
         </p:nvSpPr>
@@ -7101,7 +6245,7 @@
                 <a:gridCol w="4253015"/>
                 <a:gridCol w="4253015"/>
               </a:tblGrid>
-              <a:tr h="457200">
+              <a:tr h="438912">
                 <a:tc>
                   <a:txBody>
                     <a:bodyPr/>
@@ -7321,7 +6465,7 @@
                   </a:tcPr>
                 </a:tc>
               </a:tr>
-              <a:tr h="457200">
+              <a:tr h="438912">
                 <a:tc>
                   <a:txBody>
                     <a:bodyPr/>
@@ -7653,7 +6797,7 @@
                   </a:tcPr>
                 </a:tc>
               </a:tr>
-              <a:tr h="457200">
+              <a:tr h="438912">
                 <a:tc>
                   <a:txBody>
                     <a:bodyPr/>
@@ -7943,7 +7087,7 @@
                   </a:tcPr>
                 </a:tc>
               </a:tr>
-              <a:tr h="457200">
+              <a:tr h="438912">
                 <a:tc>
                   <a:txBody>
                     <a:bodyPr/>
@@ -8247,7 +7391,7 @@
                   </a:tcPr>
                 </a:tc>
               </a:tr>
-              <a:tr h="457200">
+              <a:tr h="438912">
                 <a:tc>
                   <a:txBody>
                     <a:bodyPr/>
@@ -8523,7 +7667,7 @@
                   </a:tcPr>
                 </a:tc>
               </a:tr>
-              <a:tr h="457200">
+              <a:tr h="438912">
                 <a:tc>
                   <a:txBody>
                     <a:bodyPr/>
@@ -10423,11 +9567,11 @@
         <p:spPr>
           <a:xfrm>
             <a:off x="566928" y="1417320"/>
-            <a:ext cx="11057839" cy="3611880"/>
+            <a:ext cx="11057839" cy="3657600"/>
           </a:xfrm>
           <a:prstGeom prst="roundRect">
             <a:avLst>
-              <a:gd name="adj" fmla="val 1519"/>
+              <a:gd name="adj" fmla="val 1500"/>
             </a:avLst>
           </a:prstGeom>
           <a:solidFill>
@@ -10508,8 +9652,8 @@
         </p:nvSpPr>
         <p:spPr>
           <a:xfrm>
-            <a:off x="795528" y="1911096"/>
-            <a:ext cx="10600639" cy="402336"/>
+            <a:off x="795528" y="1947672"/>
+            <a:ext cx="10600639" cy="365760"/>
           </a:xfrm>
           <a:prstGeom prst="rect">
             <a:avLst/>
@@ -10527,7 +9671,7 @@
               <a:buNone/>
             </a:pPr>
             <a:r>
-              <a:rPr lang="en-US" sz="1350" b="1" dirty="0">
+              <a:rPr lang="en-US" sz="1250" b="1" dirty="0">
                 <a:solidFill>
                   <a:srgbClr val="10161F"/>
                 </a:solidFill>
@@ -10537,7 +9681,7 @@
               </a:rPr>
               <a:t>—</a:t>
             </a:r>
-            <a:endParaRPr lang="en-US" sz="1350" dirty="0"/>
+            <a:endParaRPr lang="en-US" sz="1250" dirty="0"/>
           </a:p>
         </p:txBody>
       </p:sp>
@@ -10550,7 +9694,7 @@
         <p:spPr>
           <a:xfrm>
             <a:off x="795528" y="2377440"/>
-            <a:ext cx="10600639" cy="2560320"/>
+            <a:ext cx="10600639" cy="2606040"/>
           </a:xfrm>
           <a:prstGeom prst="rect">
             <a:avLst/>
@@ -10572,7 +9716,7 @@
               <a:buChar char="•"/>
             </a:pPr>
             <a:r>
-              <a:rPr lang="en-US" sz="1200" dirty="0">
+              <a:rPr lang="en-US" sz="1100" dirty="0">
                 <a:solidFill>
                   <a:srgbClr val="10161F"/>
                 </a:solidFill>
@@ -10582,20 +9726,47 @@
               </a:rPr>
               <a:t>{"ok":true,"mocked":true,"extractedFields":{"area_signal":"역삼","asset_type":"오피스빌딩","price_band":"300억","size_signal":"3000평(약 9917.4㎡)"},"extractedFacts":{"region":"역삼","exactAddressCandidate":"역삼동 7</a:t>
             </a:r>
-            <a:endParaRPr lang="en-US" sz="1200" dirty="0"/>
-          </a:p>
-        </p:txBody>
-      </p:sp>
-      <p:sp>
-        <p:nvSpPr>
-          <p:cNvPr id="11" name="Text 9"/>
-          <p:cNvSpPr/>
-          <p:nvPr/>
-        </p:nvSpPr>
-        <p:spPr>
-          <a:xfrm>
-            <a:off x="566928" y="6382512"/>
-            <a:ext cx="7315200" cy="219456"/>
+            <a:endParaRPr lang="en-US" sz="1100" dirty="0"/>
+          </a:p>
+        </p:txBody>
+      </p:sp>
+      <p:sp>
+        <p:nvSpPr>
+          <p:cNvPr id="11" name="Shape 9"/>
+          <p:cNvSpPr/>
+          <p:nvPr/>
+        </p:nvSpPr>
+        <p:spPr>
+          <a:xfrm>
+            <a:off x="566928" y="5193792"/>
+            <a:ext cx="11057839" cy="621792"/>
+          </a:xfrm>
+          <a:prstGeom prst="roundRect">
+            <a:avLst>
+              <a:gd name="adj" fmla="val 8824"/>
+            </a:avLst>
+          </a:prstGeom>
+          <a:solidFill>
+            <a:srgbClr val="F7FAFC"/>
+          </a:solidFill>
+          <a:ln w="6350">
+            <a:solidFill>
+              <a:srgbClr val="CBD5E0"/>
+            </a:solidFill>
+            <a:prstDash val="solid"/>
+          </a:ln>
+        </p:spPr>
+      </p:sp>
+      <p:sp>
+        <p:nvSpPr>
+          <p:cNvPr id="12" name="Text 10"/>
+          <p:cNvSpPr/>
+          <p:nvPr/>
+        </p:nvSpPr>
+        <p:spPr>
+          <a:xfrm>
+            <a:off x="795528" y="5193792"/>
+            <a:ext cx="10600639" cy="621792"/>
           </a:xfrm>
           <a:prstGeom prst="rect">
             <a:avLst/>
@@ -10611,14 +9782,53 @@
               <a:buNone/>
             </a:pPr>
             <a:r>
-              <a:rPr lang="en-US" sz="800" dirty="0">
-                <a:solidFill>
-                  <a:srgbClr val="718096"/>
+              <a:rPr lang="en-US" sz="1100" dirty="0">
+                <a:solidFill>
+                  <a:srgbClr val="10161F"/>
                 </a:solidFill>
                 <a:latin typeface="Pretendard" pitchFamily="34" charset="0"/>
                 <a:ea typeface="Pretendard" pitchFamily="34" charset="-122"/>
                 <a:cs typeface="Pretendard" pitchFamily="34" charset="-120"/>
               </a:rPr>
+              <a:t>※ 본 리스크 체크는 공부 및 브로커 확인 기반이며, 매수 전 전문 실사팀(변호사/건축사)을 통한 정밀 실사가 필요합니다.</a:t>
+            </a:r>
+            <a:endParaRPr lang="en-US" sz="1100" dirty="0"/>
+          </a:p>
+        </p:txBody>
+      </p:sp>
+      <p:sp>
+        <p:nvSpPr>
+          <p:cNvPr id="13" name="Text 11"/>
+          <p:cNvSpPr/>
+          <p:nvPr/>
+        </p:nvSpPr>
+        <p:spPr>
+          <a:xfrm>
+            <a:off x="566928" y="6382512"/>
+            <a:ext cx="7315200" cy="219456"/>
+          </a:xfrm>
+          <a:prstGeom prst="rect">
+            <a:avLst/>
+          </a:prstGeom>
+          <a:noFill/>
+          <a:ln/>
+        </p:spPr>
+        <p:txBody>
+          <a:bodyPr wrap="square" lIns="0" tIns="0" rIns="0" bIns="0" rtlCol="0" anchor="ctr"/>
+          <a:lstStyle/>
+          <a:p>
+            <a:pPr indent="0" marL="0">
+              <a:buNone/>
+            </a:pPr>
+            <a:r>
+              <a:rPr lang="en-US" sz="800" dirty="0">
+                <a:solidFill>
+                  <a:srgbClr val="718096"/>
+                </a:solidFill>
+                <a:latin typeface="Pretendard" pitchFamily="34" charset="0"/>
+                <a:ea typeface="Pretendard" pitchFamily="34" charset="-122"/>
+                <a:cs typeface="Pretendard" pitchFamily="34" charset="-120"/>
+              </a:rPr>
               <a:t>크리딜   |   </a:t>
             </a:r>
             <a:endParaRPr lang="en-US" sz="800" dirty="0"/>
@@ -10627,7 +9837,7 @@
       </p:sp>
       <p:sp>
         <p:nvSpPr>
-          <p:cNvPr id="12" name="Text 10"/>
+          <p:cNvPr id="14" name="Text 12"/>
           <p:cNvSpPr/>
           <p:nvPr/>
         </p:nvSpPr>
@@ -12881,11 +12091,11 @@
         <p:spPr>
           <a:xfrm>
             <a:off x="566928" y="1572768"/>
-            <a:ext cx="2490140" cy="3200400"/>
+            <a:ext cx="11057839" cy="3200400"/>
           </a:xfrm>
           <a:prstGeom prst="roundRect">
             <a:avLst>
-              <a:gd name="adj" fmla="val 2203"/>
+              <a:gd name="adj" fmla="val 1714"/>
             </a:avLst>
           </a:prstGeom>
           <a:solidFill>
@@ -12967,7 +12177,7 @@
         <p:spPr>
           <a:xfrm>
             <a:off x="786384" y="2304288"/>
-            <a:ext cx="2051228" cy="365760"/>
+            <a:ext cx="10618927" cy="365760"/>
           </a:xfrm>
           <a:prstGeom prst="rect">
             <a:avLst/>
@@ -12991,7 +12201,7 @@
                 <a:ea typeface="Pretendard" pitchFamily="34" charset="-122"/>
                 <a:cs typeface="Pretendard" pitchFamily="34" charset="-120"/>
               </a:rPr>
-              <a:t>초기 관심 표명 → 담당자 연락</a:t>
+              <a:t>{"ok"</a:t>
             </a:r>
             <a:endParaRPr lang="en-US" sz="1600" dirty="0"/>
           </a:p>
@@ -13006,7 +12216,7 @@
         <p:spPr>
           <a:xfrm>
             <a:off x="786384" y="2761488"/>
-            <a:ext cx="2051228" cy="1828800"/>
+            <a:ext cx="10618927" cy="1828800"/>
           </a:xfrm>
           <a:prstGeom prst="rect">
             <a:avLst/>
@@ -13021,147 +12231,8 @@
             <a:pPr indent="0" marL="0">
               <a:buNone/>
             </a:pPr>
-            <a:endParaRPr lang="en-US" sz="1100" dirty="0"/>
-          </a:p>
-        </p:txBody>
-      </p:sp>
-      <p:sp>
-        <p:nvSpPr>
-          <p:cNvPr id="11" name="Shape 9"/>
-          <p:cNvSpPr/>
-          <p:nvPr/>
-        </p:nvSpPr>
-        <p:spPr>
-          <a:xfrm>
-            <a:off x="3148508" y="3035808"/>
-            <a:ext cx="182880" cy="274320"/>
-          </a:xfrm>
-          <a:prstGeom prst="rightArrow">
-            <a:avLst/>
-          </a:prstGeom>
-          <a:solidFill>
-            <a:srgbClr val="CBD5E0"/>
-          </a:solidFill>
-          <a:ln w="6350">
-            <a:solidFill>
-              <a:srgbClr val="718096"/>
-            </a:solidFill>
-            <a:prstDash val="solid"/>
-          </a:ln>
-        </p:spPr>
-      </p:sp>
-      <p:sp>
-        <p:nvSpPr>
-          <p:cNvPr id="12" name="Shape 10"/>
-          <p:cNvSpPr/>
-          <p:nvPr/>
-        </p:nvSpPr>
-        <p:spPr>
-          <a:xfrm>
-            <a:off x="3422828" y="1572768"/>
-            <a:ext cx="2490140" cy="3200400"/>
-          </a:xfrm>
-          <a:prstGeom prst="roundRect">
-            <a:avLst>
-              <a:gd name="adj" fmla="val 2203"/>
-            </a:avLst>
-          </a:prstGeom>
-          <a:solidFill>
-            <a:srgbClr val="F7FAFC"/>
-          </a:solidFill>
-          <a:ln w="6350">
-            <a:solidFill>
-              <a:srgbClr val="CBD5E0"/>
-            </a:solidFill>
-            <a:prstDash val="solid"/>
-          </a:ln>
-        </p:spPr>
-      </p:sp>
-      <p:sp>
-        <p:nvSpPr>
-          <p:cNvPr id="13" name="Shape 11"/>
-          <p:cNvSpPr/>
-          <p:nvPr/>
-        </p:nvSpPr>
-        <p:spPr>
-          <a:xfrm>
-            <a:off x="3642284" y="1792224"/>
-            <a:ext cx="384048" cy="384048"/>
-          </a:xfrm>
-          <a:prstGeom prst="ellipse">
-            <a:avLst/>
-          </a:prstGeom>
-          <a:solidFill>
-            <a:srgbClr val="B98A2E"/>
-          </a:solidFill>
-          <a:ln/>
-        </p:spPr>
-      </p:sp>
-      <p:sp>
-        <p:nvSpPr>
-          <p:cNvPr id="14" name="Text 12"/>
-          <p:cNvSpPr/>
-          <p:nvPr/>
-        </p:nvSpPr>
-        <p:spPr>
-          <a:xfrm>
-            <a:off x="3642284" y="1792224"/>
-            <a:ext cx="384048" cy="384048"/>
-          </a:xfrm>
-          <a:prstGeom prst="rect">
-            <a:avLst/>
-          </a:prstGeom>
-          <a:noFill/>
-          <a:ln/>
-        </p:spPr>
-        <p:txBody>
-          <a:bodyPr wrap="square" lIns="0" tIns="0" rIns="0" bIns="0" rtlCol="0" anchor="ctr"/>
-          <a:lstStyle/>
-          <a:p>
-            <a:pPr algn="ctr" indent="0" marL="0">
-              <a:buNone/>
-            </a:pPr>
-            <a:r>
-              <a:rPr lang="en-US" sz="1300" b="1" dirty="0">
-                <a:solidFill>
-                  <a:srgbClr val="FFFFFF"/>
-                </a:solidFill>
-                <a:latin typeface="Arial" pitchFamily="34" charset="0"/>
-                <a:ea typeface="Arial" pitchFamily="34" charset="-122"/>
-                <a:cs typeface="Arial" pitchFamily="34" charset="-120"/>
-              </a:rPr>
-              <a:t>STEP 2</a:t>
-            </a:r>
-            <a:endParaRPr lang="en-US" sz="1300" dirty="0"/>
-          </a:p>
-        </p:txBody>
-      </p:sp>
-      <p:sp>
-        <p:nvSpPr>
-          <p:cNvPr id="15" name="Text 13"/>
-          <p:cNvSpPr/>
-          <p:nvPr/>
-        </p:nvSpPr>
-        <p:spPr>
-          <a:xfrm>
-            <a:off x="3642284" y="2304288"/>
-            <a:ext cx="2051228" cy="365760"/>
-          </a:xfrm>
-          <a:prstGeom prst="rect">
-            <a:avLst/>
-          </a:prstGeom>
-          <a:noFill/>
-          <a:ln/>
-        </p:spPr>
-        <p:txBody>
-          <a:bodyPr wrap="square" rtlCol="0" anchor="ctr"/>
-          <a:lstStyle/>
-          <a:p>
-            <a:pPr indent="0" marL="0">
-              <a:buNone/>
-            </a:pPr>
-            <a:r>
-              <a:rPr lang="en-US" sz="1600" b="1" dirty="0">
+            <a:r>
+              <a:rPr lang="en-US" sz="1100" dirty="0">
                 <a:solidFill>
                   <a:srgbClr val="10161F"/>
                 </a:solidFill>
@@ -13169,429 +12240,45 @@
                 <a:ea typeface="Pretendard" pitchFamily="34" charset="-122"/>
                 <a:cs typeface="Pretendard" pitchFamily="34" charset="-120"/>
               </a:rPr>
-              <a:t>NDA 체결 → 임차인 정보 및 임대차계약서 제공</a:t>
-            </a:r>
-            <a:endParaRPr lang="en-US" sz="1600" dirty="0"/>
-          </a:p>
-        </p:txBody>
-      </p:sp>
-      <p:sp>
-        <p:nvSpPr>
-          <p:cNvPr id="16" name="Text 14"/>
-          <p:cNvSpPr/>
-          <p:nvPr/>
-        </p:nvSpPr>
-        <p:spPr>
-          <a:xfrm>
-            <a:off x="3642284" y="2761488"/>
-            <a:ext cx="2051228" cy="1828800"/>
-          </a:xfrm>
-          <a:prstGeom prst="rect">
-            <a:avLst/>
-          </a:prstGeom>
-          <a:noFill/>
-          <a:ln/>
-        </p:spPr>
-        <p:txBody>
-          <a:bodyPr wrap="square" rtlCol="0" anchor="t"/>
+              <a:t>true,"mocked":true,"extractedFields":{"area_signal":"역삼","asset_type":"오피스빌딩","price_band":"300억","size_signal":"3000평(약 9917.4㎡)"},"extractedFacts":{"region":"역삼","exactAddressCandidate":"역삼동 742-1","assetType":"오피스빌딩","priceText":"300억","sizeText":"3000평(약 9917.4㎡)","currentUse":"오피스","currentUseSignal":"근린생활시설","leaseSignal":"임대중","vacancySignal":"공실없음","tenantNames":["쿠팡","네이버"],"unitRentTexts":["301호: 1500만"],"sellerMotivationText":"자산 효율화","brokerNotes":["초역세권 매물"]},"detectedSensitiveFields":["exact_address","tenant_name"],"ambiguousFields":[],"warnings":[],"areaSignal":"역삼","assetType":"오피스빌딩","priceBand":"300억","sizeSignal":"3000평(약 9917.4㎡)","dealType":"매각","buildingName":"역삼 센트럴타워","exactAddress":"역삼동 742-1","totalFloorArea":9917.3,"buildYear":2015,"currentUseSignal":"근린생활시설","vacancySignal":"공실 없음","fitSummary":"초역세권 근생 빌딩으로 시행/사옥 매입에 최적화","cautionSummary":"주요 임차 업종 만기 조율 필요","hiddenFields":["exact_address","seller_motivation"],"confidence":{"areaSignal":"confirmed","assetType":"confirmed","priceBand":"ai_hypothesis","fitSummary":"ai_hypothesis"},"missingData":["sizeSignal"],"boundaryNote":"본 자료는 실거래 통계 기반 참고치입니다.","buyerType":"법인 사옥형","budgetRange":{"min":50,"max":80,"display":"50억~80억"},"preferredRegions":["강남","성수"],"assetTypes":["꼬마빌딩","사옥용"],"purchasePurpose":"사옥용 매입","mustHave":["초역세권","주차"],"niceToHave":["테라스","루프탑"],"riskTolerance":"medium","financingNote":"자본금 50% 준비","missingQuestions":["구체적인 입주 시기가 언제인가요?","선호하는 수익률이 있나요?"],"privacyNotes":["연락처 비공개"],"fitReasons":["매수자 예산(50-80억)에 부합하는 매물입니다.","요청하신 성수/강남 권역에 해당합니다."],"cautionReasons":["요청한 용도와 달리 명도 협의가 다소 필요합니다."],"recommendedNextAction":"현장 답사 제안","kakaoMessage":"안녕하세요! 요청하신 조건에 부합하는 추천 매물이 있어 안내해 드립니다. 확인해보시고 피드백 부탁드립니다.","title":"강남 역삼역 초역세권 오피스 사옥용 빌딩 매각","shortSummary":"역삼역 도보 5분 거리의 준신축급 대형 오피스빌딩입니다.","dealPoints":["초역세권","사옥 최적"],"cautionPoints":["명도 조율 필요"],"hiddenInfoNotice":["보증금 및 지번은 인가 후 확인 가능"],"gateMessage":"G1 등급 등록이 필요합니다.","kakaoText":"강남 역삼역 오피스 빌딩 매각 안내입니다.","exactUnitCandidate":"101호","floor":"1층","areaSqmText":"150㎡","spaceType":"office","depositText":"5000만","monthlyRentText":"400만","maintenanceFeeText":"50만","availableFromText":"즉시입주","leaseTermMonthsText":"24","incentivesText":"렌트프리 2개월","restrictions":[],"landlordIdentity":"김성수","currentTenant":"스타트업","vacancyReason":"이전 확장","rentNegotiation":"협의 가능","region":"성수동","areaSqm":150,"deposit":5000,"monthlyRent":400,"maintenanceFee":50,"availableFrom":"즉시입주","leaseTermMonths":24,"incentives":{"rentFreeMonths":2,"interiorSupport":"일부 인테리어 지원","freeRentDetail":"렌트프리 2개월 지원"},"shortSummaryLease":"성수역 도보 5분 거리 1층 리테일 상가 매물입니다."}</a:t>
+            </a:r>
+            <a:endParaRPr lang="en-US" sz="1100" dirty="0"/>
+          </a:p>
+        </p:txBody>
+      </p:sp>
+      <p:sp>
+        <p:nvSpPr>
+          <p:cNvPr id="11" name="Text 9"/>
+          <p:cNvSpPr/>
+          <p:nvPr/>
+        </p:nvSpPr>
+        <p:spPr>
+          <a:xfrm>
+            <a:off x="566928" y="6382512"/>
+            <a:ext cx="7315200" cy="219456"/>
+          </a:xfrm>
+          <a:prstGeom prst="rect">
+            <a:avLst/>
+          </a:prstGeom>
+          <a:noFill/>
+          <a:ln/>
+        </p:spPr>
+        <p:txBody>
+          <a:bodyPr wrap="square" lIns="0" tIns="0" rIns="0" bIns="0" rtlCol="0" anchor="ctr"/>
           <a:lstStyle/>
           <a:p>
             <a:pPr indent="0" marL="0">
               <a:buNone/>
             </a:pPr>
-            <a:endParaRPr lang="en-US" sz="1100" dirty="0"/>
-          </a:p>
-        </p:txBody>
-      </p:sp>
-      <p:sp>
-        <p:nvSpPr>
-          <p:cNvPr id="17" name="Shape 15"/>
-          <p:cNvSpPr/>
-          <p:nvPr/>
-        </p:nvSpPr>
-        <p:spPr>
-          <a:xfrm>
-            <a:off x="6004408" y="3035808"/>
-            <a:ext cx="182880" cy="274320"/>
-          </a:xfrm>
-          <a:prstGeom prst="rightArrow">
-            <a:avLst/>
-          </a:prstGeom>
-          <a:solidFill>
-            <a:srgbClr val="CBD5E0"/>
-          </a:solidFill>
-          <a:ln w="6350">
-            <a:solidFill>
-              <a:srgbClr val="718096"/>
-            </a:solidFill>
-            <a:prstDash val="solid"/>
-          </a:ln>
-        </p:spPr>
-      </p:sp>
-      <p:sp>
-        <p:nvSpPr>
-          <p:cNvPr id="18" name="Shape 16"/>
-          <p:cNvSpPr/>
-          <p:nvPr/>
-        </p:nvSpPr>
-        <p:spPr>
-          <a:xfrm>
-            <a:off x="6278728" y="1572768"/>
-            <a:ext cx="2490140" cy="3200400"/>
-          </a:xfrm>
-          <a:prstGeom prst="roundRect">
-            <a:avLst>
-              <a:gd name="adj" fmla="val 2203"/>
-            </a:avLst>
-          </a:prstGeom>
-          <a:solidFill>
-            <a:srgbClr val="F7FAFC"/>
-          </a:solidFill>
-          <a:ln w="6350">
-            <a:solidFill>
-              <a:srgbClr val="CBD5E0"/>
-            </a:solidFill>
-            <a:prstDash val="solid"/>
-          </a:ln>
-        </p:spPr>
-      </p:sp>
-      <p:sp>
-        <p:nvSpPr>
-          <p:cNvPr id="19" name="Shape 17"/>
-          <p:cNvSpPr/>
-          <p:nvPr/>
-        </p:nvSpPr>
-        <p:spPr>
-          <a:xfrm>
-            <a:off x="6498184" y="1792224"/>
-            <a:ext cx="384048" cy="384048"/>
-          </a:xfrm>
-          <a:prstGeom prst="ellipse">
-            <a:avLst/>
-          </a:prstGeom>
-          <a:solidFill>
-            <a:srgbClr val="B98A2E"/>
-          </a:solidFill>
-          <a:ln/>
-        </p:spPr>
-      </p:sp>
-      <p:sp>
-        <p:nvSpPr>
-          <p:cNvPr id="20" name="Text 18"/>
-          <p:cNvSpPr/>
-          <p:nvPr/>
-        </p:nvSpPr>
-        <p:spPr>
-          <a:xfrm>
-            <a:off x="6498184" y="1792224"/>
-            <a:ext cx="384048" cy="384048"/>
-          </a:xfrm>
-          <a:prstGeom prst="rect">
-            <a:avLst/>
-          </a:prstGeom>
-          <a:noFill/>
-          <a:ln/>
-        </p:spPr>
-        <p:txBody>
-          <a:bodyPr wrap="square" lIns="0" tIns="0" rIns="0" bIns="0" rtlCol="0" anchor="ctr"/>
-          <a:lstStyle/>
-          <a:p>
-            <a:pPr algn="ctr" indent="0" marL="0">
-              <a:buNone/>
-            </a:pPr>
-            <a:r>
-              <a:rPr lang="en-US" sz="1300" b="1" dirty="0">
-                <a:solidFill>
-                  <a:srgbClr val="FFFFFF"/>
-                </a:solidFill>
-                <a:latin typeface="Arial" pitchFamily="34" charset="0"/>
-                <a:ea typeface="Arial" pitchFamily="34" charset="-122"/>
-                <a:cs typeface="Arial" pitchFamily="34" charset="-120"/>
-              </a:rPr>
-              <a:t>STEP 3</a:t>
-            </a:r>
-            <a:endParaRPr lang="en-US" sz="1300" dirty="0"/>
-          </a:p>
-        </p:txBody>
-      </p:sp>
-      <p:sp>
-        <p:nvSpPr>
-          <p:cNvPr id="21" name="Text 19"/>
-          <p:cNvSpPr/>
-          <p:nvPr/>
-        </p:nvSpPr>
-        <p:spPr>
-          <a:xfrm>
-            <a:off x="6498184" y="2304288"/>
-            <a:ext cx="2051228" cy="365760"/>
-          </a:xfrm>
-          <a:prstGeom prst="rect">
-            <a:avLst/>
-          </a:prstGeom>
-          <a:noFill/>
-          <a:ln/>
-        </p:spPr>
-        <p:txBody>
-          <a:bodyPr wrap="square" rtlCol="0" anchor="ctr"/>
-          <a:lstStyle/>
-          <a:p>
-            <a:pPr indent="0" marL="0">
-              <a:buNone/>
-            </a:pPr>
-            <a:r>
-              <a:rPr lang="en-US" sz="1600" b="1" dirty="0">
-                <a:solidFill>
-                  <a:srgbClr val="10161F"/>
+            <a:r>
+              <a:rPr lang="en-US" sz="800" dirty="0">
+                <a:solidFill>
+                  <a:srgbClr val="718096"/>
                 </a:solidFill>
                 <a:latin typeface="Pretendard" pitchFamily="34" charset="0"/>
                 <a:ea typeface="Pretendard" pitchFamily="34" charset="-122"/>
                 <a:cs typeface="Pretendard" pitchFamily="34" charset="-120"/>
               </a:rPr>
-              <a:t>현장 실사 일정 조율 → 건물 컨디션 및 설비 직접 확인</a:t>
-            </a:r>
-            <a:endParaRPr lang="en-US" sz="1600" dirty="0"/>
-          </a:p>
-        </p:txBody>
-      </p:sp>
-      <p:sp>
-        <p:nvSpPr>
-          <p:cNvPr id="22" name="Text 20"/>
-          <p:cNvSpPr/>
-          <p:nvPr/>
-        </p:nvSpPr>
-        <p:spPr>
-          <a:xfrm>
-            <a:off x="6498184" y="2761488"/>
-            <a:ext cx="2051228" cy="1828800"/>
-          </a:xfrm>
-          <a:prstGeom prst="rect">
-            <a:avLst/>
-          </a:prstGeom>
-          <a:noFill/>
-          <a:ln/>
-        </p:spPr>
-        <p:txBody>
-          <a:bodyPr wrap="square" rtlCol="0" anchor="t"/>
-          <a:lstStyle/>
-          <a:p>
-            <a:pPr indent="0" marL="0">
-              <a:buNone/>
-            </a:pPr>
-            <a:endParaRPr lang="en-US" sz="1100" dirty="0"/>
-          </a:p>
-        </p:txBody>
-      </p:sp>
-      <p:sp>
-        <p:nvSpPr>
-          <p:cNvPr id="23" name="Shape 21"/>
-          <p:cNvSpPr/>
-          <p:nvPr/>
-        </p:nvSpPr>
-        <p:spPr>
-          <a:xfrm>
-            <a:off x="8860307" y="3035808"/>
-            <a:ext cx="182880" cy="274320"/>
-          </a:xfrm>
-          <a:prstGeom prst="rightArrow">
-            <a:avLst/>
-          </a:prstGeom>
-          <a:solidFill>
-            <a:srgbClr val="CBD5E0"/>
-          </a:solidFill>
-          <a:ln w="6350">
-            <a:solidFill>
-              <a:srgbClr val="718096"/>
-            </a:solidFill>
-            <a:prstDash val="solid"/>
-          </a:ln>
-        </p:spPr>
-      </p:sp>
-      <p:sp>
-        <p:nvSpPr>
-          <p:cNvPr id="24" name="Shape 22"/>
-          <p:cNvSpPr/>
-          <p:nvPr/>
-        </p:nvSpPr>
-        <p:spPr>
-          <a:xfrm>
-            <a:off x="9134627" y="1572768"/>
-            <a:ext cx="2490140" cy="3200400"/>
-          </a:xfrm>
-          <a:prstGeom prst="roundRect">
-            <a:avLst>
-              <a:gd name="adj" fmla="val 2203"/>
-            </a:avLst>
-          </a:prstGeom>
-          <a:solidFill>
-            <a:srgbClr val="F7FAFC"/>
-          </a:solidFill>
-          <a:ln w="6350">
-            <a:solidFill>
-              <a:srgbClr val="CBD5E0"/>
-            </a:solidFill>
-            <a:prstDash val="solid"/>
-          </a:ln>
-        </p:spPr>
-      </p:sp>
-      <p:sp>
-        <p:nvSpPr>
-          <p:cNvPr id="25" name="Shape 23"/>
-          <p:cNvSpPr/>
-          <p:nvPr/>
-        </p:nvSpPr>
-        <p:spPr>
-          <a:xfrm>
-            <a:off x="9354083" y="1792224"/>
-            <a:ext cx="384048" cy="384048"/>
-          </a:xfrm>
-          <a:prstGeom prst="ellipse">
-            <a:avLst/>
-          </a:prstGeom>
-          <a:solidFill>
-            <a:srgbClr val="B98A2E"/>
-          </a:solidFill>
-          <a:ln/>
-        </p:spPr>
-      </p:sp>
-      <p:sp>
-        <p:nvSpPr>
-          <p:cNvPr id="26" name="Text 24"/>
-          <p:cNvSpPr/>
-          <p:nvPr/>
-        </p:nvSpPr>
-        <p:spPr>
-          <a:xfrm>
-            <a:off x="9354083" y="1792224"/>
-            <a:ext cx="384048" cy="384048"/>
-          </a:xfrm>
-          <a:prstGeom prst="rect">
-            <a:avLst/>
-          </a:prstGeom>
-          <a:noFill/>
-          <a:ln/>
-        </p:spPr>
-        <p:txBody>
-          <a:bodyPr wrap="square" lIns="0" tIns="0" rIns="0" bIns="0" rtlCol="0" anchor="ctr"/>
-          <a:lstStyle/>
-          <a:p>
-            <a:pPr algn="ctr" indent="0" marL="0">
-              <a:buNone/>
-            </a:pPr>
-            <a:r>
-              <a:rPr lang="en-US" sz="1300" b="1" dirty="0">
-                <a:solidFill>
-                  <a:srgbClr val="FFFFFF"/>
-                </a:solidFill>
-                <a:latin typeface="Arial" pitchFamily="34" charset="0"/>
-                <a:ea typeface="Arial" pitchFamily="34" charset="-122"/>
-                <a:cs typeface="Arial" pitchFamily="34" charset="-120"/>
-              </a:rPr>
-              <a:t>STEP 4</a:t>
-            </a:r>
-            <a:endParaRPr lang="en-US" sz="1300" dirty="0"/>
-          </a:p>
-        </p:txBody>
-      </p:sp>
-      <p:sp>
-        <p:nvSpPr>
-          <p:cNvPr id="27" name="Text 25"/>
-          <p:cNvSpPr/>
-          <p:nvPr/>
-        </p:nvSpPr>
-        <p:spPr>
-          <a:xfrm>
-            <a:off x="9354083" y="2304288"/>
-            <a:ext cx="2051228" cy="365760"/>
-          </a:xfrm>
-          <a:prstGeom prst="rect">
-            <a:avLst/>
-          </a:prstGeom>
-          <a:noFill/>
-          <a:ln/>
-        </p:spPr>
-        <p:txBody>
-          <a:bodyPr wrap="square" rtlCol="0" anchor="ctr"/>
-          <a:lstStyle/>
-          <a:p>
-            <a:pPr indent="0" marL="0">
-              <a:buNone/>
-            </a:pPr>
-            <a:r>
-              <a:rPr lang="en-US" sz="1600" b="1" dirty="0">
-                <a:solidFill>
-                  <a:srgbClr val="10161F"/>
-                </a:solidFill>
-                <a:latin typeface="Pretendard" pitchFamily="34" charset="0"/>
-                <a:ea typeface="Pretendard" pitchFamily="34" charset="-122"/>
-                <a:cs typeface="Pretendard" pitchFamily="34" charset="-120"/>
-              </a:rPr>
-              <a:t>LOI(투자의향서) 제출 → 가격 협의 개시</a:t>
-            </a:r>
-            <a:endParaRPr lang="en-US" sz="1600" dirty="0"/>
-          </a:p>
-        </p:txBody>
-      </p:sp>
-      <p:sp>
-        <p:nvSpPr>
-          <p:cNvPr id="28" name="Text 26"/>
-          <p:cNvSpPr/>
-          <p:nvPr/>
-        </p:nvSpPr>
-        <p:spPr>
-          <a:xfrm>
-            <a:off x="9354083" y="2761488"/>
-            <a:ext cx="2051228" cy="1828800"/>
-          </a:xfrm>
-          <a:prstGeom prst="rect">
-            <a:avLst/>
-          </a:prstGeom>
-          <a:noFill/>
-          <a:ln/>
-        </p:spPr>
-        <p:txBody>
-          <a:bodyPr wrap="square" rtlCol="0" anchor="t"/>
-          <a:lstStyle/>
-          <a:p>
-            <a:pPr indent="0" marL="0">
-              <a:buNone/>
-            </a:pPr>
-            <a:endParaRPr lang="en-US" sz="1100" dirty="0"/>
-          </a:p>
-        </p:txBody>
-      </p:sp>
-      <p:sp>
-        <p:nvSpPr>
-          <p:cNvPr id="29" name="Text 27"/>
-          <p:cNvSpPr/>
-          <p:nvPr/>
-        </p:nvSpPr>
-        <p:spPr>
-          <a:xfrm>
-            <a:off x="566928" y="6382512"/>
-            <a:ext cx="7315200" cy="219456"/>
-          </a:xfrm>
-          <a:prstGeom prst="rect">
-            <a:avLst/>
-          </a:prstGeom>
-          <a:noFill/>
-          <a:ln/>
-        </p:spPr>
-        <p:txBody>
-          <a:bodyPr wrap="square" lIns="0" tIns="0" rIns="0" bIns="0" rtlCol="0" anchor="ctr"/>
-          <a:lstStyle/>
-          <a:p>
-            <a:pPr indent="0" marL="0">
-              <a:buNone/>
-            </a:pPr>
-            <a:r>
-              <a:rPr lang="en-US" sz="800" dirty="0">
-                <a:solidFill>
-                  <a:srgbClr val="718096"/>
-                </a:solidFill>
-                <a:latin typeface="Pretendard" pitchFamily="34" charset="0"/>
-                <a:ea typeface="Pretendard" pitchFamily="34" charset="-122"/>
-                <a:cs typeface="Pretendard" pitchFamily="34" charset="-120"/>
-              </a:rPr>
               <a:t>크리딜   |   </a:t>
             </a:r>
             <a:endParaRPr lang="en-US" sz="800" dirty="0"/>
@@ -13600,7 +12287,7 @@
       </p:sp>
       <p:sp>
         <p:nvSpPr>
-          <p:cNvPr id="30" name="Text 28"/>
+          <p:cNvPr id="12" name="Text 10"/>
           <p:cNvSpPr/>
           <p:nvPr/>
         </p:nvSpPr>

--- a/docs/test/stress/e2e-outputs/income_case02_hongdae_fnb_basic.pptx
+++ b/docs/test/stress/e2e-outputs/income_case02_hongdae_fnb_basic.pptx
@@ -1905,7 +1905,7 @@
                 <a:ea typeface="Arial" pitchFamily="34" charset="-122"/>
                 <a:cs typeface="Arial" pitchFamily="34" charset="-120"/>
               </a:rPr>
-              <a:t>BASIC IM</a:t>
+              <a:t>INVESTMENT MEMORANDUM</a:t>
             </a:r>
             <a:endParaRPr lang="en-US" sz="1000" dirty="0"/>
           </a:p>
@@ -3988,7 +3988,7 @@
                 <a:ea typeface="Pretendard" pitchFamily="34" charset="-122"/>
                 <a:cs typeface="Pretendard" pitchFamily="34" charset="-120"/>
               </a:rPr>
-              <a:t>마포권역 내 꼬마빌딩, 매각 희망가 58억. 입지·임대차 현황을 감안할 때 투자 검토 가치가 있는 물건입니다.</a:t>
+              <a:t>마포권역 소재 꼬마빌딩, 희망가 58억 투자 검토 자료입니다.</a:t>
             </a:r>
             <a:endParaRPr lang="en-US" sz="1500" dirty="0"/>
           </a:p>
@@ -4610,7 +4610,7 @@
                 <a:ea typeface="Pretendard" pitchFamily="34" charset="-122"/>
                 <a:cs typeface="Pretendard" pitchFamily="34" charset="-120"/>
               </a:rPr>
-              <a:t>원금 안전판: 마포권역 핵심 입지 및 우량 대지 지분 가치로 하방 경직성 확보</a:t>
+              <a:t>입지 가치: 마포권역 소재 자산으로 중장기 자산 가치 및 안정적 수요 검토</a:t>
             </a:r>
             <a:endParaRPr lang="en-US" sz="1150" dirty="0"/>
           </a:p>
@@ -4742,7 +4742,7 @@
                 <a:ea typeface="Pretendard" pitchFamily="34" charset="-122"/>
                 <a:cs typeface="Pretendard" pitchFamily="34" charset="-120"/>
               </a:rPr>
-              <a:t>수익 안정성: 매각 희망가 58억 대비 안정적인 월 임대수익 창출 구조</a:t>
+              <a:t>임대 구조: 58억 수준의 가격대 및 현 임대차 기반의 현금흐름 분석</a:t>
             </a:r>
             <a:endParaRPr lang="en-US" sz="1150" dirty="0"/>
           </a:p>
@@ -4874,7 +4874,7 @@
                 <a:ea typeface="Pretendard" pitchFamily="34" charset="-122"/>
                 <a:cs typeface="Pretendard" pitchFamily="34" charset="-120"/>
               </a:rPr>
-              <a:t>미래 가치: 향후 권역 지가 상승 및 공법상 잔여 용적률 활용 밸류업 기회</a:t>
+              <a:t>실사 점검: 계약서 및 공부 확인을 통한 권리관계·물리적 상태 정밀 진단</a:t>
             </a:r>
             <a:endParaRPr lang="en-US" sz="1150" dirty="0"/>
           </a:p>
@@ -5160,45 +5160,6 @@
         <p:spPr>
           <a:xfrm>
             <a:off x="6053328" y="1481328"/>
-            <a:ext cx="5571439" cy="237744"/>
-          </a:xfrm>
-          <a:prstGeom prst="rect">
-            <a:avLst/>
-          </a:prstGeom>
-          <a:noFill/>
-          <a:ln/>
-        </p:spPr>
-        <p:txBody>
-          <a:bodyPr wrap="square" lIns="0" tIns="0" rIns="0" bIns="0" rtlCol="0" anchor="ctr"/>
-          <a:lstStyle/>
-          <a:p>
-            <a:pPr indent="0" marL="0">
-              <a:buNone/>
-            </a:pPr>
-            <a:r>
-              <a:rPr lang="en-US" sz="1100" b="1" dirty="0">
-                <a:solidFill>
-                  <a:srgbClr val="10161F"/>
-                </a:solidFill>
-                <a:latin typeface="Pretendard" pitchFamily="34" charset="0"/>
-                <a:ea typeface="Pretendard" pitchFamily="34" charset="-122"/>
-                <a:cs typeface="Pretendard" pitchFamily="34" charset="-120"/>
-              </a:rPr>
-              <a:t>[교통] 교통 및 도로 접근성</a:t>
-            </a:r>
-            <a:endParaRPr lang="en-US" sz="1100" dirty="0"/>
-          </a:p>
-        </p:txBody>
-      </p:sp>
-      <p:sp>
-        <p:nvSpPr>
-          <p:cNvPr id="8" name="Text 5"/>
-          <p:cNvSpPr/>
-          <p:nvPr/>
-        </p:nvSpPr>
-        <p:spPr>
-          <a:xfrm>
-            <a:off x="6053328" y="1801368"/>
             <a:ext cx="2117147" cy="493776"/>
           </a:xfrm>
           <a:prstGeom prst="rect">
@@ -5234,13 +5195,13 @@
       </p:sp>
       <p:sp>
         <p:nvSpPr>
-          <p:cNvPr id="9" name="Text 6"/>
-          <p:cNvSpPr/>
-          <p:nvPr/>
-        </p:nvSpPr>
-        <p:spPr>
-          <a:xfrm>
-            <a:off x="8170475" y="1801368"/>
+          <p:cNvPr id="8" name="Text 5"/>
+          <p:cNvSpPr/>
+          <p:nvPr/>
+        </p:nvSpPr>
+        <p:spPr>
+          <a:xfrm>
+            <a:off x="8170475" y="1481328"/>
             <a:ext cx="3454292" cy="493776"/>
           </a:xfrm>
           <a:prstGeom prst="rect">
@@ -5265,13 +5226,13 @@
       </p:sp>
       <p:sp>
         <p:nvSpPr>
-          <p:cNvPr id="10" name="Shape 7"/>
-          <p:cNvSpPr/>
-          <p:nvPr/>
-        </p:nvSpPr>
-        <p:spPr>
-          <a:xfrm>
-            <a:off x="6053328" y="2295144"/>
+          <p:cNvPr id="9" name="Shape 6"/>
+          <p:cNvSpPr/>
+          <p:nvPr/>
+        </p:nvSpPr>
+        <p:spPr>
+          <a:xfrm>
+            <a:off x="6053328" y="1975104"/>
             <a:ext cx="5571439" cy="0"/>
           </a:xfrm>
           <a:prstGeom prst="line">
@@ -5288,13 +5249,13 @@
       </p:sp>
       <p:sp>
         <p:nvSpPr>
-          <p:cNvPr id="11" name="Text 8"/>
-          <p:cNvSpPr/>
-          <p:nvPr/>
-        </p:nvSpPr>
-        <p:spPr>
-          <a:xfrm>
-            <a:off x="6053328" y="2295144"/>
+          <p:cNvPr id="10" name="Text 7"/>
+          <p:cNvSpPr/>
+          <p:nvPr/>
+        </p:nvSpPr>
+        <p:spPr>
+          <a:xfrm>
+            <a:off x="6053328" y="1975104"/>
             <a:ext cx="2117147" cy="493776"/>
           </a:xfrm>
           <a:prstGeom prst="rect">
@@ -5330,13 +5291,13 @@
       </p:sp>
       <p:sp>
         <p:nvSpPr>
-          <p:cNvPr id="12" name="Text 9"/>
-          <p:cNvSpPr/>
-          <p:nvPr/>
-        </p:nvSpPr>
-        <p:spPr>
-          <a:xfrm>
-            <a:off x="8170475" y="2295144"/>
+          <p:cNvPr id="11" name="Text 8"/>
+          <p:cNvSpPr/>
+          <p:nvPr/>
+        </p:nvSpPr>
+        <p:spPr>
+          <a:xfrm>
+            <a:off x="8170475" y="1975104"/>
             <a:ext cx="3454292" cy="493776"/>
           </a:xfrm>
           <a:prstGeom prst="rect">
@@ -5364,7 +5325,7 @@
                 <a:ea typeface="Pretendard" pitchFamily="34" charset="-122"/>
                 <a:cs typeface="Pretendard" pitchFamily="34" charset="-120"/>
               </a:rPr>
-              <a:t>마포권역 내 주요 비즈니스 및 유동인구 풍부한 상권 입지</a:t>
+              <a:t>마포권역 내 주요 비즈니스 및 유동인구 풍부한 상권 입지 ### [성장] 입지 평가</a:t>
             </a:r>
             <a:endParaRPr lang="en-US" sz="1300" dirty="0"/>
           </a:p>
@@ -5372,13 +5333,13 @@
       </p:sp>
       <p:sp>
         <p:nvSpPr>
-          <p:cNvPr id="13" name="Shape 10"/>
-          <p:cNvSpPr/>
-          <p:nvPr/>
-        </p:nvSpPr>
-        <p:spPr>
-          <a:xfrm>
-            <a:off x="6053328" y="2788920"/>
+          <p:cNvPr id="12" name="Shape 9"/>
+          <p:cNvSpPr/>
+          <p:nvPr/>
+        </p:nvSpPr>
+        <p:spPr>
+          <a:xfrm>
+            <a:off x="6053328" y="2468880"/>
             <a:ext cx="5571439" cy="0"/>
           </a:xfrm>
           <a:prstGeom prst="line">
@@ -5395,13 +5356,13 @@
       </p:sp>
       <p:sp>
         <p:nvSpPr>
-          <p:cNvPr id="14" name="Text 11"/>
-          <p:cNvSpPr/>
-          <p:nvPr/>
-        </p:nvSpPr>
-        <p:spPr>
-          <a:xfrm>
-            <a:off x="6053328" y="2788920"/>
+          <p:cNvPr id="13" name="Text 10"/>
+          <p:cNvSpPr/>
+          <p:nvPr/>
+        </p:nvSpPr>
+        <p:spPr>
+          <a:xfrm>
+            <a:off x="6053328" y="2468880"/>
             <a:ext cx="2117147" cy="493776"/>
           </a:xfrm>
           <a:prstGeom prst="rect">
@@ -5429,7 +5390,7 @@
                 <a:ea typeface="Pretendard" pitchFamily="34" charset="-122"/>
                 <a:cs typeface="Pretendard" pitchFamily="34" charset="-120"/>
               </a:rPr>
-              <a:t>마포권역 내 우수한 접근성과 높은 가시성을 갖춘 핵</a:t>
+              <a:t>마포권역 내 위치하며 접근성과 가시성이 양호한 입지</a:t>
             </a:r>
             <a:endParaRPr lang="en-US" sz="1300" dirty="0"/>
           </a:p>
@@ -5437,13 +5398,13 @@
       </p:sp>
       <p:sp>
         <p:nvSpPr>
-          <p:cNvPr id="15" name="Text 12"/>
-          <p:cNvSpPr/>
-          <p:nvPr/>
-        </p:nvSpPr>
-        <p:spPr>
-          <a:xfrm>
-            <a:off x="8170475" y="2788920"/>
+          <p:cNvPr id="14" name="Text 11"/>
+          <p:cNvSpPr/>
+          <p:nvPr/>
+        </p:nvSpPr>
+        <p:spPr>
+          <a:xfrm>
+            <a:off x="8170475" y="2468880"/>
             <a:ext cx="3454292" cy="493776"/>
           </a:xfrm>
           <a:prstGeom prst="rect">
@@ -5468,7 +5429,7 @@
       </p:sp>
       <p:sp>
         <p:nvSpPr>
-          <p:cNvPr id="16" name="Text 13"/>
+          <p:cNvPr id="15" name="Text 12"/>
           <p:cNvSpPr/>
           <p:nvPr/>
         </p:nvSpPr>
@@ -5507,7 +5468,7 @@
       </p:sp>
       <p:sp>
         <p:nvSpPr>
-          <p:cNvPr id="17" name="Text 14"/>
+          <p:cNvPr id="16" name="Text 13"/>
           <p:cNvSpPr/>
           <p:nvPr/>
         </p:nvSpPr>
@@ -5830,7 +5791,7 @@
                 <a:ea typeface="Pretendard" pitchFamily="34" charset="-122"/>
                 <a:cs typeface="Pretendard" pitchFamily="34" charset="-120"/>
               </a:rPr>
-              <a:t>true,"mocked":true,"extractedFields":{"area_signal":"역삼","asset_type":"오피스빌딩","price_band":"300억","size_signal":"3000평(약 9917.4㎡)"},"extractedFacts":{"region":"역삼","exactAddressCandidate":"역삼동 742-1","assetType":"오피스빌딩","priceText":"300억","sizeText":"3000평(약 9917.4㎡)","currentUse":"오피스","currentUseSignal":"근린생활시설","leaseSignal":"임대중","vacancySignal":"공실없음","tenantNames":"쿠팡","네이버","unitRentTexts":"301호: 1500만","sellerMotivationText":"자산 효율화","brokerNotes":"초역세권 매물"},"detectedSensitiveFields":"exact_address","tenant_name","ambiguousFields":,"warnings":,"areaSignal":"역삼","assetType":"오피스빌딩","priceBand":"300억","sizeSignal":"3000평(약 9917.4㎡)","dealType":"매각","buildingName":"역삼 센트럴타워","exactAddress":"역삼동 742-1","totalFloorArea":9917.3,"buildYear":2015,"currentUseSignal":"근린생활시설","vacancySignal":"공실 없음","fitSummary":"초역세권 근생 빌딩으로 시행/사옥 매입에 최적화","cautionSummary":"주요 임차 업종 만기 조율 필요","hiddenFields":"exact_address","seller_motivation","confidence":{"areaSignal":"confirmed","assetType":"confirmed","priceBand":"ai_hypothesis","fitSummary":"ai_hypothesis"},"missingData":"sizeSignal","boundaryNote":"본 자료는 실거래 통계 기반 참고치입니다.","buyerType":"법인 사옥형","budgetRange":{"min":50,"max":80,"display":"50억~80억"},"preferredRegions":"강남","성수","assetTypes":"꼬마빌딩","사옥용","purchasePurpose":"사옥용 매입","mustHave":"초역세권","주차","niceToHave":"테라스","루프탑","riskTolerance":"medium","financingNote":"자본금 50% 준비","missingQuestions":"구체적인 입주 시기가 언제인가요?","선호하는 수익률이 있나요?","privacyNotes":"연락처 비공개","fitReasons":"매수자 예산(50-80억)에 부합하는 매물입니다.","요청하신 성수/강남 권역에 해당합니다.","cautionReasons":"요청한 용도와 달리 명도 협의가 다소 필요합니다.","recommendedNextAction":"현장 답사 제안","kakaoMessage":"안녕하세요! 요청하신 조건에 부합하는 추천 매물이 있어 안내해 드립니다. 확인해보시고 피드백 부탁드립니다.","title":"강남 역삼역 초역세권 오피스 사옥용 빌딩 매각","shortSummary":"역삼역 도보 5분 거리의 준신축급 대형 오피스빌딩입니다.","dealPoints":"초역세권","사옥 최적","cautionPoints":"명도 조율 필요","hiddenInfoNotice":"보증금 및 지번은 인가 후 확인 가능","gateMessage":"G1 등급 등록이 필요합니다.","kakaoText":"강남 역삼역 오피스 빌딩 매각 안내입니다.","exactUnitCandidate":"101호","floor":"1층","areaSqmText":"150㎡","spaceType":"office","depositText":"5000만","monthlyRentText":"400만","maintenanceFeeText":"50만","availableFromText":"즉시입주","leaseTermMonthsText":"24","incentivesText":"렌트프리 2개월","restrictions":,"landlordIdentity":"김성수","currentTenant":"스타트업","vacancyReason":"이전 확장","rentNegotiation":"협의 가능","region":"성수동","areaSqm":150,"deposit":5000,"monthlyRent":400,"maintenanceFee":50,"availableFrom":"즉시입주","leaseTermMonths":24,"incentives":{"rentFreeMonths":2,"interiorSupport":"일부 인테리어 지원","freeRentDetail":"렌트프리 2개월 지원"},"shortSummaryLease":"성수역 도보 5분 거리 1층 리테일 상가 매물입니다."}</a:t>
+              <a:t>true,"mocked":true,"extractedFields":{"area_signal":"역삼","asset_type":"오피스빌딩","price_band":"300억","size_signal":"3000평(약 9917.4㎡)"},"extractedFacts":{"region":"역삼","exactAddressCandidate":"역삼동 742-1","assetType":"오피스빌딩","priceText":"300억","sizeText":"3000평(약 9917.4㎡)","currentUse":"오피스","currentUseSignal":"근린생활시설","leaseSignal":"임대중","vacancySignal":"공실없음","tenantNames":"쿠팡","네이버","unitRentTexts":"301호: 1500만","sellerMotivationText":"자산 효율화","brokerNotes":"초역세권 매물"},"detectedSensitiveFields":"exact_address","tenant_name","ambiguousFields":,"warnings":,"areaSignal":"역삼","assetType":"오피스빌딩","priceBand":"300억","sizeSignal":"3000평(약 9917.4㎡)","dealType":"매각","buildingName":"역삼 센트럴타워","exactAddress":"역삼동 742-1","totalFloorArea":9917.3,"buildYear":2015,"currentUseSignal":"근린생활시설","vacancySignal":"공실 없음","fitSummary":"초역세권 근생 빌딩으로 시행/사옥 매입에 최적화","cautionSummary":"주요 임차인 만기 조율 필요","hiddenFields":"exact_address","seller_motivation","confidence":{"areaSignal":"confirmed","assetType":"confirmed","priceBand":"ai_hypothesis","fitSummary":"ai_hypothesis"},"missingData":"sizeSignal","boundaryNote":"본 자료는 실거래 통계 기반 참고치입니다.","buyerType":"법인 사옥형","budgetRange":{"min":50,"max":80,"display":"50억~80억"},"preferredRegions":"강남","성수","assetTypes":"꼬마빌딩","사옥용","purchasePurpose":"사옥용 매입","mustHave":"초역세권","주차","niceToHave":"테라스","루프탑","riskTolerance":"medium","financingNote":"자본금 50% 준비","missingQuestions":"구체적인 입주 시기가 언제인가요?","선호하는 수익률이 있나요?","privacyNotes":"연락처 비공개","fitReasons":"매수자 예산(50-80억)에 부합하는 매물입니다.","요청하신 성수/강남 권역에 해당합니다.","cautionReasons":"요청한 용도와 달리 명도 협의가 다소 필요합니다.","recommendedNextAction":"현장 답사 제안","kakaoMessage":"안녕하세요! 요청하신 조건에 부합하는 추천 매물이 있어 안내해 드립니다. 확인해보시고 피드백 부탁드립니다.","title":"강남 역삼역 초역세권 오피스 사옥용 빌딩 매각","shortSummary":"역삼역 도보 5분 거리의 준신축급 대형 오피스빌딩입니다.","dealPoints":"초역세권","사옥 최적","cautionPoints":"명도 조율 필요","hiddenInfoNotice":"보증금 및 지번은 인가 후 확인 가능","gateMessage":"G1 등급 등록이 필요합니다.","kakaoText":"강남 역삼역 오피스 빌딩 매각 안내입니다.","exactUnitCandidate":"101호","floor":"1층","areaSqmText":"150㎡","spaceType":"office","depositText":"5000만","monthlyRentText":"400만","maintenanceFeeText":"50만","availableFromText":"즉시입주","leaseTermMonthsText":"24","incentivesText":"렌트프리 2개월","restrictions":,"landlordIdentity":"김성수","currentTenant":"스타트업","vacancyReason":"이전 확장","rentNegotiation":"협의 가능","region":"성수동","areaSqm":150,"deposit":5000,"monthlyRent":400,"maintenanceFee":50,"availableFrom":"즉시입주","leaseTermMonths":24,"incentives":{"rentFreeMonths":2,"interiorSupport":"일부 인테리어 지원","freeRentDetail":"렌트프리 2개월 지원"},"shortSummaryLease":"성수역 도보 5분 거리 1층 리테일 상가 매물입니다."}</a:t>
             </a:r>
             <a:endParaRPr lang="en-US" sz="1400" dirty="0"/>
           </a:p>
@@ -6241,11 +6202,15 @@
             <a:tbl>
               <a:tblPr/>
               <a:tblGrid>
-                <a:gridCol w="2551809"/>
-                <a:gridCol w="4253015"/>
-                <a:gridCol w="4253015"/>
+                <a:gridCol w="1005258"/>
+                <a:gridCol w="1675430"/>
+                <a:gridCol w="1675430"/>
+                <a:gridCol w="1675430"/>
+                <a:gridCol w="1675430"/>
+                <a:gridCol w="1675430"/>
+                <a:gridCol w="1675430"/>
               </a:tblGrid>
-              <a:tr h="438912">
+              <a:tr h="347472">
                 <a:tc>
                   <a:txBody>
                     <a:bodyPr/>
@@ -6255,7 +6220,7 @@
                         <a:buNone/>
                       </a:pPr>
                       <a:r>
-                        <a:rPr lang="en-US" sz="1300" b="1" dirty="0">
+                        <a:rPr lang="en-US" sz="900" b="1" dirty="0">
                           <a:solidFill>
                             <a:srgbClr val="718096"/>
                           </a:solidFill>
@@ -6263,9 +6228,9 @@
                           <a:ea typeface="Pretendard" pitchFamily="34" charset="-122"/>
                           <a:cs typeface="Pretendard" pitchFamily="34" charset="-120"/>
                         </a:rPr>
-                        <a:t>구분</a:t>
+                        <a:t>층수</a:t>
                       </a:r>
-                      <a:endParaRPr lang="en-US" sz="1300" dirty="0">
+                      <a:endParaRPr lang="en-US" sz="900" dirty="0">
                         <a:latin typeface="Pretendard" charset="0"/>
                         <a:ea typeface="Pretendard" charset="0"/>
                         <a:cs typeface="Pretendard" charset="0"/>
@@ -6323,7 +6288,7 @@
                         <a:buNone/>
                       </a:pPr>
                       <a:r>
-                        <a:rPr lang="en-US" sz="1300" b="1" dirty="0">
+                        <a:rPr lang="en-US" sz="900" b="1" dirty="0">
                           <a:solidFill>
                             <a:srgbClr val="718096"/>
                           </a:solidFill>
@@ -6331,23 +6296,9 @@
                           <a:ea typeface="Pretendard" pitchFamily="34" charset="-122"/>
                           <a:cs typeface="Pretendard" pitchFamily="34" charset="-120"/>
                         </a:rPr>
-                        <a:t>지표 </a:t>
+                        <a:t>업종</a:t>
                       </a:r>
-                      <a:pPr indent="0" marL="0">
-                        <a:buNone/>
-                      </a:pPr>
-                      <a:r>
-                        <a:rPr lang="en-US" sz="1300" b="1" dirty="0">
-                          <a:solidFill>
-                            <a:srgbClr val="718096"/>
-                          </a:solidFill>
-                          <a:latin typeface="Pretendard" pitchFamily="34" charset="0"/>
-                          <a:ea typeface="Pretendard" pitchFamily="34" charset="-122"/>
-                          <a:cs typeface="Pretendard" pitchFamily="34" charset="-120"/>
-                        </a:rPr>
-                        <a:t>분석</a:t>
-                      </a:r>
-                      <a:endParaRPr lang="en-US" sz="1300" dirty="0">
+                      <a:endParaRPr lang="en-US" sz="900" dirty="0">
                         <a:latin typeface="Pretendard" charset="0"/>
                         <a:ea typeface="Pretendard" charset="0"/>
                         <a:cs typeface="Pretendard" charset="0"/>
@@ -6405,7 +6356,7 @@
                         <a:buNone/>
                       </a:pPr>
                       <a:r>
-                        <a:rPr lang="en-US" sz="1300" b="1" dirty="0">
+                        <a:rPr lang="en-US" sz="900" b="1" dirty="0">
                           <a:solidFill>
                             <a:srgbClr val="718096"/>
                           </a:solidFill>
@@ -6413,9 +6364,9 @@
                           <a:ea typeface="Pretendard" pitchFamily="34" charset="-122"/>
                           <a:cs typeface="Pretendard" pitchFamily="34" charset="-120"/>
                         </a:rPr>
-                        <a:t>비고</a:t>
+                        <a:t>전용면적</a:t>
                       </a:r>
-                      <a:endParaRPr lang="en-US" sz="1300" dirty="0">
+                      <a:endParaRPr lang="en-US" sz="900" dirty="0">
                         <a:latin typeface="Pretendard" charset="0"/>
                         <a:ea typeface="Pretendard" charset="0"/>
                         <a:cs typeface="Pretendard" charset="0"/>
@@ -6464,8 +6415,6 @@
                     </a:solidFill>
                   </a:tcPr>
                 </a:tc>
-              </a:tr>
-              <a:tr h="438912">
                 <a:tc>
                   <a:txBody>
                     <a:bodyPr/>
@@ -6475,7 +6424,309 @@
                         <a:buNone/>
                       </a:pPr>
                       <a:r>
-                        <a:rPr lang="en-US" sz="1300" b="1" dirty="0">
+                        <a:rPr lang="en-US" sz="900" b="1" dirty="0">
+                          <a:solidFill>
+                            <a:srgbClr val="718096"/>
+                          </a:solidFill>
+                          <a:latin typeface="Pretendard" pitchFamily="34" charset="0"/>
+                          <a:ea typeface="Pretendard" pitchFamily="34" charset="-122"/>
+                          <a:cs typeface="Pretendard" pitchFamily="34" charset="-120"/>
+                        </a:rPr>
+                        <a:t>보증금</a:t>
+                      </a:r>
+                      <a:endParaRPr lang="en-US" sz="900" dirty="0">
+                        <a:latin typeface="Pretendard" charset="0"/>
+                        <a:ea typeface="Pretendard" charset="0"/>
+                        <a:cs typeface="Pretendard" charset="0"/>
+                      </a:endParaRPr>
+                    </a:p>
+                  </a:txBody>
+                  <a:tcPr marL="50800" marR="50800" marT="25400" marB="25400" anchor="ctr">
+                    <a:lnL w="3810" cap="flat" cmpd="sng" algn="ctr">
+                      <a:solidFill>
+                        <a:srgbClr val="CBD5E0"/>
+                      </a:solidFill>
+                      <a:prstDash val="solid"/>
+                      <a:round/>
+                      <a:headEnd type="none" w="med" len="med"/>
+                      <a:tailEnd type="none" w="med" len="med"/>
+                    </a:lnL>
+                    <a:lnR w="3810" cap="flat" cmpd="sng" algn="ctr">
+                      <a:solidFill>
+                        <a:srgbClr val="CBD5E0"/>
+                      </a:solidFill>
+                      <a:prstDash val="solid"/>
+                      <a:round/>
+                      <a:headEnd type="none" w="med" len="med"/>
+                      <a:tailEnd type="none" w="med" len="med"/>
+                    </a:lnR>
+                    <a:lnT w="3810" cap="flat" cmpd="sng" algn="ctr">
+                      <a:solidFill>
+                        <a:srgbClr val="CBD5E0"/>
+                      </a:solidFill>
+                      <a:prstDash val="solid"/>
+                      <a:round/>
+                      <a:headEnd type="none" w="med" len="med"/>
+                      <a:tailEnd type="none" w="med" len="med"/>
+                    </a:lnT>
+                    <a:lnB w="3810" cap="flat" cmpd="sng" algn="ctr">
+                      <a:solidFill>
+                        <a:srgbClr val="CBD5E0"/>
+                      </a:solidFill>
+                      <a:prstDash val="solid"/>
+                      <a:round/>
+                      <a:headEnd type="none" w="med" len="med"/>
+                      <a:tailEnd type="none" w="med" len="med"/>
+                    </a:lnB>
+                    <a:solidFill>
+                      <a:srgbClr val="F7FAFC"/>
+                    </a:solidFill>
+                  </a:tcPr>
+                </a:tc>
+                <a:tc>
+                  <a:txBody>
+                    <a:bodyPr/>
+                    <a:lstStyle/>
+                    <a:p>
+                      <a:pPr indent="0" marL="0">
+                        <a:buNone/>
+                      </a:pPr>
+                      <a:r>
+                        <a:rPr lang="en-US" sz="900" b="1" dirty="0">
+                          <a:solidFill>
+                            <a:srgbClr val="718096"/>
+                          </a:solidFill>
+                          <a:latin typeface="Pretendard" pitchFamily="34" charset="0"/>
+                          <a:ea typeface="Pretendard" pitchFamily="34" charset="-122"/>
+                          <a:cs typeface="Pretendard" pitchFamily="34" charset="-120"/>
+                        </a:rPr>
+                        <a:t>월 </a:t>
+                      </a:r>
+                      <a:pPr indent="0" marL="0">
+                        <a:buNone/>
+                      </a:pPr>
+                      <a:r>
+                        <a:rPr lang="en-US" sz="900" b="1" dirty="0">
+                          <a:solidFill>
+                            <a:srgbClr val="718096"/>
+                          </a:solidFill>
+                          <a:latin typeface="Pretendard" pitchFamily="34" charset="0"/>
+                          <a:ea typeface="Pretendard" pitchFamily="34" charset="-122"/>
+                          <a:cs typeface="Pretendard" pitchFamily="34" charset="-120"/>
+                        </a:rPr>
+                        <a:t>임대료</a:t>
+                      </a:r>
+                      <a:endParaRPr lang="en-US" sz="900" dirty="0">
+                        <a:latin typeface="Pretendard" charset="0"/>
+                        <a:ea typeface="Pretendard" charset="0"/>
+                        <a:cs typeface="Pretendard" charset="0"/>
+                      </a:endParaRPr>
+                    </a:p>
+                  </a:txBody>
+                  <a:tcPr marL="50800" marR="50800" marT="25400" marB="25400" anchor="ctr">
+                    <a:lnL w="3810" cap="flat" cmpd="sng" algn="ctr">
+                      <a:solidFill>
+                        <a:srgbClr val="CBD5E0"/>
+                      </a:solidFill>
+                      <a:prstDash val="solid"/>
+                      <a:round/>
+                      <a:headEnd type="none" w="med" len="med"/>
+                      <a:tailEnd type="none" w="med" len="med"/>
+                    </a:lnL>
+                    <a:lnR w="3810" cap="flat" cmpd="sng" algn="ctr">
+                      <a:solidFill>
+                        <a:srgbClr val="CBD5E0"/>
+                      </a:solidFill>
+                      <a:prstDash val="solid"/>
+                      <a:round/>
+                      <a:headEnd type="none" w="med" len="med"/>
+                      <a:tailEnd type="none" w="med" len="med"/>
+                    </a:lnR>
+                    <a:lnT w="3810" cap="flat" cmpd="sng" algn="ctr">
+                      <a:solidFill>
+                        <a:srgbClr val="CBD5E0"/>
+                      </a:solidFill>
+                      <a:prstDash val="solid"/>
+                      <a:round/>
+                      <a:headEnd type="none" w="med" len="med"/>
+                      <a:tailEnd type="none" w="med" len="med"/>
+                    </a:lnT>
+                    <a:lnB w="3810" cap="flat" cmpd="sng" algn="ctr">
+                      <a:solidFill>
+                        <a:srgbClr val="CBD5E0"/>
+                      </a:solidFill>
+                      <a:prstDash val="solid"/>
+                      <a:round/>
+                      <a:headEnd type="none" w="med" len="med"/>
+                      <a:tailEnd type="none" w="med" len="med"/>
+                    </a:lnB>
+                    <a:solidFill>
+                      <a:srgbClr val="F7FAFC"/>
+                    </a:solidFill>
+                  </a:tcPr>
+                </a:tc>
+                <a:tc>
+                  <a:txBody>
+                    <a:bodyPr/>
+                    <a:lstStyle/>
+                    <a:p>
+                      <a:pPr indent="0" marL="0">
+                        <a:buNone/>
+                      </a:pPr>
+                      <a:r>
+                        <a:rPr lang="en-US" sz="900" b="1" dirty="0">
+                          <a:solidFill>
+                            <a:srgbClr val="718096"/>
+                          </a:solidFill>
+                          <a:latin typeface="Pretendard" pitchFamily="34" charset="0"/>
+                          <a:ea typeface="Pretendard" pitchFamily="34" charset="-122"/>
+                          <a:cs typeface="Pretendard" pitchFamily="34" charset="-120"/>
+                        </a:rPr>
+                        <a:t>관리비</a:t>
+                      </a:r>
+                      <a:endParaRPr lang="en-US" sz="900" dirty="0">
+                        <a:latin typeface="Pretendard" charset="0"/>
+                        <a:ea typeface="Pretendard" charset="0"/>
+                        <a:cs typeface="Pretendard" charset="0"/>
+                      </a:endParaRPr>
+                    </a:p>
+                  </a:txBody>
+                  <a:tcPr marL="50800" marR="50800" marT="25400" marB="25400" anchor="ctr">
+                    <a:lnL w="3810" cap="flat" cmpd="sng" algn="ctr">
+                      <a:solidFill>
+                        <a:srgbClr val="CBD5E0"/>
+                      </a:solidFill>
+                      <a:prstDash val="solid"/>
+                      <a:round/>
+                      <a:headEnd type="none" w="med" len="med"/>
+                      <a:tailEnd type="none" w="med" len="med"/>
+                    </a:lnL>
+                    <a:lnR w="3810" cap="flat" cmpd="sng" algn="ctr">
+                      <a:solidFill>
+                        <a:srgbClr val="CBD5E0"/>
+                      </a:solidFill>
+                      <a:prstDash val="solid"/>
+                      <a:round/>
+                      <a:headEnd type="none" w="med" len="med"/>
+                      <a:tailEnd type="none" w="med" len="med"/>
+                    </a:lnR>
+                    <a:lnT w="3810" cap="flat" cmpd="sng" algn="ctr">
+                      <a:solidFill>
+                        <a:srgbClr val="CBD5E0"/>
+                      </a:solidFill>
+                      <a:prstDash val="solid"/>
+                      <a:round/>
+                      <a:headEnd type="none" w="med" len="med"/>
+                      <a:tailEnd type="none" w="med" len="med"/>
+                    </a:lnT>
+                    <a:lnB w="3810" cap="flat" cmpd="sng" algn="ctr">
+                      <a:solidFill>
+                        <a:srgbClr val="CBD5E0"/>
+                      </a:solidFill>
+                      <a:prstDash val="solid"/>
+                      <a:round/>
+                      <a:headEnd type="none" w="med" len="med"/>
+                      <a:tailEnd type="none" w="med" len="med"/>
+                    </a:lnB>
+                    <a:solidFill>
+                      <a:srgbClr val="F7FAFC"/>
+                    </a:solidFill>
+                  </a:tcPr>
+                </a:tc>
+                <a:tc>
+                  <a:txBody>
+                    <a:bodyPr/>
+                    <a:lstStyle/>
+                    <a:p>
+                      <a:pPr indent="0" marL="0">
+                        <a:buNone/>
+                      </a:pPr>
+                      <a:r>
+                        <a:rPr lang="en-US" sz="900" b="1" dirty="0">
+                          <a:solidFill>
+                            <a:srgbClr val="718096"/>
+                          </a:solidFill>
+                          <a:latin typeface="Pretendard" pitchFamily="34" charset="0"/>
+                          <a:ea typeface="Pretendard" pitchFamily="34" charset="-122"/>
+                          <a:cs typeface="Pretendard" pitchFamily="34" charset="-120"/>
+                        </a:rPr>
+                        <a:t>임대 </a:t>
+                      </a:r>
+                      <a:pPr indent="0" marL="0">
+                        <a:buNone/>
+                      </a:pPr>
+                      <a:r>
+                        <a:rPr lang="en-US" sz="900" b="1" dirty="0">
+                          <a:solidFill>
+                            <a:srgbClr val="718096"/>
+                          </a:solidFill>
+                          <a:latin typeface="Pretendard" pitchFamily="34" charset="0"/>
+                          <a:ea typeface="Pretendard" pitchFamily="34" charset="-122"/>
+                          <a:cs typeface="Pretendard" pitchFamily="34" charset="-120"/>
+                        </a:rPr>
+                        <a:t>만기</a:t>
+                      </a:r>
+                      <a:endParaRPr lang="en-US" sz="900" dirty="0">
+                        <a:latin typeface="Pretendard" charset="0"/>
+                        <a:ea typeface="Pretendard" charset="0"/>
+                        <a:cs typeface="Pretendard" charset="0"/>
+                      </a:endParaRPr>
+                    </a:p>
+                  </a:txBody>
+                  <a:tcPr marL="50800" marR="50800" marT="25400" marB="25400" anchor="ctr">
+                    <a:lnL w="3810" cap="flat" cmpd="sng" algn="ctr">
+                      <a:solidFill>
+                        <a:srgbClr val="CBD5E0"/>
+                      </a:solidFill>
+                      <a:prstDash val="solid"/>
+                      <a:round/>
+                      <a:headEnd type="none" w="med" len="med"/>
+                      <a:tailEnd type="none" w="med" len="med"/>
+                    </a:lnL>
+                    <a:lnR w="3810" cap="flat" cmpd="sng" algn="ctr">
+                      <a:solidFill>
+                        <a:srgbClr val="CBD5E0"/>
+                      </a:solidFill>
+                      <a:prstDash val="solid"/>
+                      <a:round/>
+                      <a:headEnd type="none" w="med" len="med"/>
+                      <a:tailEnd type="none" w="med" len="med"/>
+                    </a:lnR>
+                    <a:lnT w="3810" cap="flat" cmpd="sng" algn="ctr">
+                      <a:solidFill>
+                        <a:srgbClr val="CBD5E0"/>
+                      </a:solidFill>
+                      <a:prstDash val="solid"/>
+                      <a:round/>
+                      <a:headEnd type="none" w="med" len="med"/>
+                      <a:tailEnd type="none" w="med" len="med"/>
+                    </a:lnT>
+                    <a:lnB w="3810" cap="flat" cmpd="sng" algn="ctr">
+                      <a:solidFill>
+                        <a:srgbClr val="CBD5E0"/>
+                      </a:solidFill>
+                      <a:prstDash val="solid"/>
+                      <a:round/>
+                      <a:headEnd type="none" w="med" len="med"/>
+                      <a:tailEnd type="none" w="med" len="med"/>
+                    </a:lnB>
+                    <a:solidFill>
+                      <a:srgbClr val="F7FAFC"/>
+                    </a:solidFill>
+                  </a:tcPr>
+                </a:tc>
+              </a:tr>
+              <a:tr h="347472">
+                <a:tc>
+                  <a:txBody>
+                    <a:bodyPr/>
+                    <a:lstStyle/>
+                    <a:p>
+                      <a:pPr indent="0" marL="0">
+                        <a:buNone/>
+                      </a:pPr>
+                      <a:r>
+                        <a:rPr lang="en-US" sz="900" b="1" dirty="0">
                           <a:solidFill>
                             <a:srgbClr val="10161F"/>
                           </a:solidFill>
@@ -6483,23 +6734,9 @@
                           <a:ea typeface="Pretendard" pitchFamily="34" charset="-122"/>
                           <a:cs typeface="Pretendard" pitchFamily="34" charset="-120"/>
                         </a:rPr>
-                        <a:t>공실 </a:t>
+                        <a:t>B1~2F</a:t>
                       </a:r>
-                      <a:pPr indent="0" marL="0">
-                        <a:buNone/>
-                      </a:pPr>
-                      <a:r>
-                        <a:rPr lang="en-US" sz="1300" b="1" dirty="0">
-                          <a:solidFill>
-                            <a:srgbClr val="10161F"/>
-                          </a:solidFill>
-                          <a:latin typeface="Pretendard" pitchFamily="34" charset="0"/>
-                          <a:ea typeface="Pretendard" pitchFamily="34" charset="-122"/>
-                          <a:cs typeface="Pretendard" pitchFamily="34" charset="-120"/>
-                        </a:rPr>
-                        <a:t>현황</a:t>
-                      </a:r>
-                      <a:endParaRPr lang="en-US" sz="1300" dirty="0">
+                      <a:endParaRPr lang="en-US" sz="900" dirty="0">
                         <a:latin typeface="Pretendard" charset="0"/>
                         <a:ea typeface="Pretendard" charset="0"/>
                         <a:cs typeface="Pretendard" charset="0"/>
@@ -6557,7 +6794,7 @@
                         <a:buNone/>
                       </a:pPr>
                       <a:r>
-                        <a:rPr lang="en-US" sz="1300" dirty="0">
+                        <a:rPr lang="en-US" sz="900" dirty="0">
                           <a:solidFill>
                             <a:srgbClr val="10161F"/>
                           </a:solidFill>
@@ -6565,13 +6802,13 @@
                           <a:ea typeface="Pretendard" pitchFamily="34" charset="-122"/>
                           <a:cs typeface="Pretendard" pitchFamily="34" charset="-120"/>
                         </a:rPr>
-                        <a:t>0.0% </a:t>
+                        <a:t>F&amp;B </a:t>
                       </a:r>
                       <a:pPr indent="0" marL="0">
                         <a:buNone/>
                       </a:pPr>
                       <a:r>
-                        <a:rPr lang="en-US" sz="1300" dirty="0">
+                        <a:rPr lang="en-US" sz="900" dirty="0">
                           <a:solidFill>
                             <a:srgbClr val="10161F"/>
                           </a:solidFill>
@@ -6579,93 +6816,9 @@
                           <a:ea typeface="Pretendard" pitchFamily="34" charset="-122"/>
                           <a:cs typeface="Pretendard" pitchFamily="34" charset="-120"/>
                         </a:rPr>
-                        <a:t>(2개 </a:t>
+                        <a:t>브런치펍</a:t>
                       </a:r>
-                      <a:pPr indent="0" marL="0">
-                        <a:buNone/>
-                      </a:pPr>
-                      <a:r>
-                        <a:rPr lang="en-US" sz="1300" dirty="0">
-                          <a:solidFill>
-                            <a:srgbClr val="10161F"/>
-                          </a:solidFill>
-                          <a:latin typeface="Pretendard" pitchFamily="34" charset="0"/>
-                          <a:ea typeface="Pretendard" pitchFamily="34" charset="-122"/>
-                          <a:cs typeface="Pretendard" pitchFamily="34" charset="-120"/>
-                        </a:rPr>
-                        <a:t>호실 </a:t>
-                      </a:r>
-                      <a:pPr indent="0" marL="0">
-                        <a:buNone/>
-                      </a:pPr>
-                      <a:r>
-                        <a:rPr lang="en-US" sz="1300" dirty="0">
-                          <a:solidFill>
-                            <a:srgbClr val="10161F"/>
-                          </a:solidFill>
-                          <a:latin typeface="Pretendard" pitchFamily="34" charset="0"/>
-                          <a:ea typeface="Pretendard" pitchFamily="34" charset="-122"/>
-                          <a:cs typeface="Pretendard" pitchFamily="34" charset="-120"/>
-                        </a:rPr>
-                        <a:t>임대 </a:t>
-                      </a:r>
-                      <a:pPr indent="0" marL="0">
-                        <a:buNone/>
-                      </a:pPr>
-                      <a:r>
-                        <a:rPr lang="en-US" sz="1300" dirty="0">
-                          <a:solidFill>
-                            <a:srgbClr val="10161F"/>
-                          </a:solidFill>
-                          <a:latin typeface="Pretendard" pitchFamily="34" charset="0"/>
-                          <a:ea typeface="Pretendard" pitchFamily="34" charset="-122"/>
-                          <a:cs typeface="Pretendard" pitchFamily="34" charset="-120"/>
-                        </a:rPr>
-                        <a:t>중 </a:t>
-                      </a:r>
-                      <a:pPr indent="0" marL="0">
-                        <a:buNone/>
-                      </a:pPr>
-                      <a:r>
-                        <a:rPr lang="en-US" sz="1300" dirty="0">
-                          <a:solidFill>
-                            <a:srgbClr val="10161F"/>
-                          </a:solidFill>
-                          <a:latin typeface="Pretendard" pitchFamily="34" charset="0"/>
-                          <a:ea typeface="Pretendard" pitchFamily="34" charset="-122"/>
-                          <a:cs typeface="Pretendard" pitchFamily="34" charset="-120"/>
-                        </a:rPr>
-                        <a:t>/ </a:t>
-                      </a:r>
-                      <a:pPr indent="0" marL="0">
-                        <a:buNone/>
-                      </a:pPr>
-                      <a:r>
-                        <a:rPr lang="en-US" sz="1300" dirty="0">
-                          <a:solidFill>
-                            <a:srgbClr val="10161F"/>
-                          </a:solidFill>
-                          <a:latin typeface="Pretendard" pitchFamily="34" charset="0"/>
-                          <a:ea typeface="Pretendard" pitchFamily="34" charset="-122"/>
-                          <a:cs typeface="Pretendard" pitchFamily="34" charset="-120"/>
-                        </a:rPr>
-                        <a:t>총 </a:t>
-                      </a:r>
-                      <a:pPr indent="0" marL="0">
-                        <a:buNone/>
-                      </a:pPr>
-                      <a:r>
-                        <a:rPr lang="en-US" sz="1300" dirty="0">
-                          <a:solidFill>
-                            <a:srgbClr val="10161F"/>
-                          </a:solidFill>
-                          <a:latin typeface="Pretendard" pitchFamily="34" charset="0"/>
-                          <a:ea typeface="Pretendard" pitchFamily="34" charset="-122"/>
-                          <a:cs typeface="Pretendard" pitchFamily="34" charset="-120"/>
-                        </a:rPr>
-                        <a:t>2실)</a:t>
-                      </a:r>
-                      <a:endParaRPr lang="en-US" sz="1300" dirty="0">
+                      <a:endParaRPr lang="en-US" sz="900" dirty="0">
                         <a:latin typeface="Pretendard" charset="0"/>
                         <a:ea typeface="Pretendard" charset="0"/>
                         <a:cs typeface="Pretendard" charset="0"/>
@@ -6723,7 +6876,7 @@
                         <a:buNone/>
                       </a:pPr>
                       <a:r>
-                        <a:rPr lang="en-US" sz="1300" dirty="0">
+                        <a:rPr lang="en-US" sz="900" dirty="0">
                           <a:solidFill>
                             <a:srgbClr val="10161F"/>
                           </a:solidFill>
@@ -6731,13 +6884,13 @@
                           <a:ea typeface="Pretendard" pitchFamily="34" charset="-122"/>
                           <a:cs typeface="Pretendard" pitchFamily="34" charset="-120"/>
                         </a:rPr>
-                        <a:t>공실 </a:t>
+                        <a:t>95평(약 </a:t>
                       </a:r>
                       <a:pPr indent="0" marL="0">
                         <a:buNone/>
                       </a:pPr>
                       <a:r>
-                        <a:rPr lang="en-US" sz="1300" dirty="0">
+                        <a:rPr lang="en-US" sz="900" dirty="0">
                           <a:solidFill>
                             <a:srgbClr val="10161F"/>
                           </a:solidFill>
@@ -6745,9 +6898,9 @@
                           <a:ea typeface="Pretendard" pitchFamily="34" charset="-122"/>
                           <a:cs typeface="Pretendard" pitchFamily="34" charset="-120"/>
                         </a:rPr>
-                        <a:t>0실</a:t>
+                        <a:t>314.1㎡)</a:t>
                       </a:r>
-                      <a:endParaRPr lang="en-US" sz="1300" dirty="0">
+                      <a:endParaRPr lang="en-US" sz="900" dirty="0">
                         <a:latin typeface="Pretendard" charset="0"/>
                         <a:ea typeface="Pretendard" charset="0"/>
                         <a:cs typeface="Pretendard" charset="0"/>
@@ -6796,8 +6949,6 @@
                     </a:solidFill>
                   </a:tcPr>
                 </a:tc>
-              </a:tr>
-              <a:tr h="438912">
                 <a:tc>
                   <a:txBody>
                     <a:bodyPr/>
@@ -6807,7 +6958,7 @@
                         <a:buNone/>
                       </a:pPr>
                       <a:r>
-                        <a:rPr lang="en-US" sz="1300" b="1" dirty="0">
+                        <a:rPr lang="en-US" sz="900" dirty="0">
                           <a:solidFill>
                             <a:srgbClr val="10161F"/>
                           </a:solidFill>
@@ -6815,13 +6966,67 @@
                           <a:ea typeface="Pretendard" pitchFamily="34" charset="-122"/>
                           <a:cs typeface="Pretendard" pitchFamily="34" charset="-120"/>
                         </a:rPr>
-                        <a:t>월 </a:t>
+                        <a:t>20,000만</a:t>
                       </a:r>
+                      <a:endParaRPr lang="en-US" sz="900" dirty="0">
+                        <a:latin typeface="Pretendard" charset="0"/>
+                        <a:ea typeface="Pretendard" charset="0"/>
+                        <a:cs typeface="Pretendard" charset="0"/>
+                      </a:endParaRPr>
+                    </a:p>
+                  </a:txBody>
+                  <a:tcPr marL="50800" marR="50800" marT="25400" marB="25400" anchor="ctr">
+                    <a:lnL w="3810" cap="flat" cmpd="sng" algn="ctr">
+                      <a:solidFill>
+                        <a:srgbClr val="CBD5E0"/>
+                      </a:solidFill>
+                      <a:prstDash val="solid"/>
+                      <a:round/>
+                      <a:headEnd type="none" w="med" len="med"/>
+                      <a:tailEnd type="none" w="med" len="med"/>
+                    </a:lnL>
+                    <a:lnR w="3810" cap="flat" cmpd="sng" algn="ctr">
+                      <a:solidFill>
+                        <a:srgbClr val="CBD5E0"/>
+                      </a:solidFill>
+                      <a:prstDash val="solid"/>
+                      <a:round/>
+                      <a:headEnd type="none" w="med" len="med"/>
+                      <a:tailEnd type="none" w="med" len="med"/>
+                    </a:lnR>
+                    <a:lnT w="3810" cap="flat" cmpd="sng" algn="ctr">
+                      <a:solidFill>
+                        <a:srgbClr val="CBD5E0"/>
+                      </a:solidFill>
+                      <a:prstDash val="solid"/>
+                      <a:round/>
+                      <a:headEnd type="none" w="med" len="med"/>
+                      <a:tailEnd type="none" w="med" len="med"/>
+                    </a:lnT>
+                    <a:lnB w="3810" cap="flat" cmpd="sng" algn="ctr">
+                      <a:solidFill>
+                        <a:srgbClr val="CBD5E0"/>
+                      </a:solidFill>
+                      <a:prstDash val="solid"/>
+                      <a:round/>
+                      <a:headEnd type="none" w="med" len="med"/>
+                      <a:tailEnd type="none" w="med" len="med"/>
+                    </a:lnB>
+                    <a:solidFill>
+                      <a:srgbClr val="FFFFFF"/>
+                    </a:solidFill>
+                  </a:tcPr>
+                </a:tc>
+                <a:tc>
+                  <a:txBody>
+                    <a:bodyPr/>
+                    <a:lstStyle/>
+                    <a:p>
                       <a:pPr indent="0" marL="0">
                         <a:buNone/>
                       </a:pPr>
                       <a:r>
-                        <a:rPr lang="en-US" sz="1300" b="1" dirty="0">
+                        <a:rPr lang="en-US" sz="900" dirty="0">
                           <a:solidFill>
                             <a:srgbClr val="10161F"/>
                           </a:solidFill>
@@ -6829,13 +7034,124 @@
                           <a:ea typeface="Pretendard" pitchFamily="34" charset="-122"/>
                           <a:cs typeface="Pretendard" pitchFamily="34" charset="-120"/>
                         </a:rPr>
-                        <a:t>임대료 </a:t>
+                        <a:t>1,650만</a:t>
                       </a:r>
+                      <a:endParaRPr lang="en-US" sz="900" dirty="0">
+                        <a:latin typeface="Pretendard" charset="0"/>
+                        <a:ea typeface="Pretendard" charset="0"/>
+                        <a:cs typeface="Pretendard" charset="0"/>
+                      </a:endParaRPr>
+                    </a:p>
+                  </a:txBody>
+                  <a:tcPr marL="50800" marR="50800" marT="25400" marB="25400" anchor="ctr">
+                    <a:lnL w="3810" cap="flat" cmpd="sng" algn="ctr">
+                      <a:solidFill>
+                        <a:srgbClr val="CBD5E0"/>
+                      </a:solidFill>
+                      <a:prstDash val="solid"/>
+                      <a:round/>
+                      <a:headEnd type="none" w="med" len="med"/>
+                      <a:tailEnd type="none" w="med" len="med"/>
+                    </a:lnL>
+                    <a:lnR w="3810" cap="flat" cmpd="sng" algn="ctr">
+                      <a:solidFill>
+                        <a:srgbClr val="CBD5E0"/>
+                      </a:solidFill>
+                      <a:prstDash val="solid"/>
+                      <a:round/>
+                      <a:headEnd type="none" w="med" len="med"/>
+                      <a:tailEnd type="none" w="med" len="med"/>
+                    </a:lnR>
+                    <a:lnT w="3810" cap="flat" cmpd="sng" algn="ctr">
+                      <a:solidFill>
+                        <a:srgbClr val="CBD5E0"/>
+                      </a:solidFill>
+                      <a:prstDash val="solid"/>
+                      <a:round/>
+                      <a:headEnd type="none" w="med" len="med"/>
+                      <a:tailEnd type="none" w="med" len="med"/>
+                    </a:lnT>
+                    <a:lnB w="3810" cap="flat" cmpd="sng" algn="ctr">
+                      <a:solidFill>
+                        <a:srgbClr val="CBD5E0"/>
+                      </a:solidFill>
+                      <a:prstDash val="solid"/>
+                      <a:round/>
+                      <a:headEnd type="none" w="med" len="med"/>
+                      <a:tailEnd type="none" w="med" len="med"/>
+                    </a:lnB>
+                    <a:solidFill>
+                      <a:srgbClr val="FFFFFF"/>
+                    </a:solidFill>
+                  </a:tcPr>
+                </a:tc>
+                <a:tc>
+                  <a:txBody>
+                    <a:bodyPr/>
+                    <a:lstStyle/>
+                    <a:p>
+                      <a:pPr indent="0" marL="0">
+                        <a:buNone/>
+                      </a:pPr>
+                      <a:endParaRPr lang="en-US" sz="900" dirty="0">
+                        <a:latin typeface="Pretendard" charset="0"/>
+                        <a:ea typeface="Pretendard" charset="0"/>
+                        <a:cs typeface="Pretendard" charset="0"/>
+                      </a:endParaRPr>
+                    </a:p>
+                  </a:txBody>
+                  <a:tcPr marL="50800" marR="50800" marT="25400" marB="25400" anchor="ctr">
+                    <a:lnL w="3810" cap="flat" cmpd="sng" algn="ctr">
+                      <a:solidFill>
+                        <a:srgbClr val="CBD5E0"/>
+                      </a:solidFill>
+                      <a:prstDash val="solid"/>
+                      <a:round/>
+                      <a:headEnd type="none" w="med" len="med"/>
+                      <a:tailEnd type="none" w="med" len="med"/>
+                    </a:lnL>
+                    <a:lnR w="3810" cap="flat" cmpd="sng" algn="ctr">
+                      <a:solidFill>
+                        <a:srgbClr val="CBD5E0"/>
+                      </a:solidFill>
+                      <a:prstDash val="solid"/>
+                      <a:round/>
+                      <a:headEnd type="none" w="med" len="med"/>
+                      <a:tailEnd type="none" w="med" len="med"/>
+                    </a:lnR>
+                    <a:lnT w="3810" cap="flat" cmpd="sng" algn="ctr">
+                      <a:solidFill>
+                        <a:srgbClr val="CBD5E0"/>
+                      </a:solidFill>
+                      <a:prstDash val="solid"/>
+                      <a:round/>
+                      <a:headEnd type="none" w="med" len="med"/>
+                      <a:tailEnd type="none" w="med" len="med"/>
+                    </a:lnT>
+                    <a:lnB w="3810" cap="flat" cmpd="sng" algn="ctr">
+                      <a:solidFill>
+                        <a:srgbClr val="CBD5E0"/>
+                      </a:solidFill>
+                      <a:prstDash val="solid"/>
+                      <a:round/>
+                      <a:headEnd type="none" w="med" len="med"/>
+                      <a:tailEnd type="none" w="med" len="med"/>
+                    </a:lnB>
+                    <a:solidFill>
+                      <a:srgbClr val="FFFFFF"/>
+                    </a:solidFill>
+                  </a:tcPr>
+                </a:tc>
+                <a:tc>
+                  <a:txBody>
+                    <a:bodyPr/>
+                    <a:lstStyle/>
+                    <a:p>
                       <a:pPr indent="0" marL="0">
                         <a:buNone/>
                       </a:pPr>
                       <a:r>
-                        <a:rPr lang="en-US" sz="1300" b="1" dirty="0">
+                        <a:rPr lang="en-US" sz="900" dirty="0">
                           <a:solidFill>
                             <a:srgbClr val="10161F"/>
                           </a:solidFill>
@@ -6843,9 +7159,79 @@
                           <a:ea typeface="Pretendard" pitchFamily="34" charset="-122"/>
                           <a:cs typeface="Pretendard" pitchFamily="34" charset="-120"/>
                         </a:rPr>
-                        <a:t>합계</a:t>
+                        <a:t>미정</a:t>
                       </a:r>
-                      <a:endParaRPr lang="en-US" sz="1300" dirty="0">
+                      <a:endParaRPr lang="en-US" sz="900" dirty="0">
+                        <a:latin typeface="Pretendard" charset="0"/>
+                        <a:ea typeface="Pretendard" charset="0"/>
+                        <a:cs typeface="Pretendard" charset="0"/>
+                      </a:endParaRPr>
+                    </a:p>
+                  </a:txBody>
+                  <a:tcPr marL="50800" marR="50800" marT="25400" marB="25400" anchor="ctr">
+                    <a:lnL w="3810" cap="flat" cmpd="sng" algn="ctr">
+                      <a:solidFill>
+                        <a:srgbClr val="CBD5E0"/>
+                      </a:solidFill>
+                      <a:prstDash val="solid"/>
+                      <a:round/>
+                      <a:headEnd type="none" w="med" len="med"/>
+                      <a:tailEnd type="none" w="med" len="med"/>
+                    </a:lnL>
+                    <a:lnR w="3810" cap="flat" cmpd="sng" algn="ctr">
+                      <a:solidFill>
+                        <a:srgbClr val="CBD5E0"/>
+                      </a:solidFill>
+                      <a:prstDash val="solid"/>
+                      <a:round/>
+                      <a:headEnd type="none" w="med" len="med"/>
+                      <a:tailEnd type="none" w="med" len="med"/>
+                    </a:lnR>
+                    <a:lnT w="3810" cap="flat" cmpd="sng" algn="ctr">
+                      <a:solidFill>
+                        <a:srgbClr val="CBD5E0"/>
+                      </a:solidFill>
+                      <a:prstDash val="solid"/>
+                      <a:round/>
+                      <a:headEnd type="none" w="med" len="med"/>
+                      <a:tailEnd type="none" w="med" len="med"/>
+                    </a:lnT>
+                    <a:lnB w="3810" cap="flat" cmpd="sng" algn="ctr">
+                      <a:solidFill>
+                        <a:srgbClr val="CBD5E0"/>
+                      </a:solidFill>
+                      <a:prstDash val="solid"/>
+                      <a:round/>
+                      <a:headEnd type="none" w="med" len="med"/>
+                      <a:tailEnd type="none" w="med" len="med"/>
+                    </a:lnB>
+                    <a:solidFill>
+                      <a:srgbClr val="FFFFFF"/>
+                    </a:solidFill>
+                  </a:tcPr>
+                </a:tc>
+              </a:tr>
+              <a:tr h="347472">
+                <a:tc>
+                  <a:txBody>
+                    <a:bodyPr/>
+                    <a:lstStyle/>
+                    <a:p>
+                      <a:pPr indent="0" marL="0">
+                        <a:buNone/>
+                      </a:pPr>
+                      <a:r>
+                        <a:rPr lang="en-US" sz="900" b="1" dirty="0">
+                          <a:solidFill>
+                            <a:srgbClr val="10161F"/>
+                          </a:solidFill>
+                          <a:latin typeface="Pretendard" pitchFamily="34" charset="0"/>
+                          <a:ea typeface="Pretendard" pitchFamily="34" charset="-122"/>
+                          <a:cs typeface="Pretendard" pitchFamily="34" charset="-120"/>
+                        </a:rPr>
+                        <a:t>3F~4F</a:t>
+                      </a:r>
+                      <a:endParaRPr lang="en-US" sz="900" dirty="0">
                         <a:latin typeface="Pretendard" charset="0"/>
                         <a:ea typeface="Pretendard" charset="0"/>
                         <a:cs typeface="Pretendard" charset="0"/>
@@ -6903,7 +7289,7 @@
                         <a:buNone/>
                       </a:pPr>
                       <a:r>
-                        <a:rPr lang="en-US" sz="1300" dirty="0">
+                        <a:rPr lang="en-US" sz="900" dirty="0">
                           <a:solidFill>
                             <a:srgbClr val="10161F"/>
                           </a:solidFill>
@@ -6911,13 +7297,13 @@
                           <a:ea typeface="Pretendard" pitchFamily="34" charset="-122"/>
                           <a:cs typeface="Pretendard" pitchFamily="34" charset="-120"/>
                         </a:rPr>
-                        <a:t>2,350만 </a:t>
+                        <a:t>디자인 </a:t>
                       </a:r>
                       <a:pPr indent="0" marL="0">
                         <a:buNone/>
                       </a:pPr>
                       <a:r>
-                        <a:rPr lang="en-US" sz="1300" dirty="0">
+                        <a:rPr lang="en-US" sz="900" dirty="0">
                           <a:solidFill>
                             <a:srgbClr val="10161F"/>
                           </a:solidFill>
@@ -6925,9 +7311,9 @@
                           <a:ea typeface="Pretendard" pitchFamily="34" charset="-122"/>
                           <a:cs typeface="Pretendard" pitchFamily="34" charset="-120"/>
                         </a:rPr>
-                        <a:t>원/월</a:t>
+                        <a:t>스튜디오</a:t>
                       </a:r>
-                      <a:endParaRPr lang="en-US" sz="1300" dirty="0">
+                      <a:endParaRPr lang="en-US" sz="900" dirty="0">
                         <a:latin typeface="Pretendard" charset="0"/>
                         <a:ea typeface="Pretendard" charset="0"/>
                         <a:cs typeface="Pretendard" charset="0"/>
@@ -6985,7 +7371,7 @@
                         <a:buNone/>
                       </a:pPr>
                       <a:r>
-                        <a:rPr lang="en-US" sz="1300" dirty="0">
+                        <a:rPr lang="en-US" sz="900" dirty="0">
                           <a:solidFill>
                             <a:srgbClr val="10161F"/>
                           </a:solidFill>
@@ -6993,13 +7379,13 @@
                           <a:ea typeface="Pretendard" pitchFamily="34" charset="-122"/>
                           <a:cs typeface="Pretendard" pitchFamily="34" charset="-120"/>
                         </a:rPr>
-                        <a:t>관리비 </a:t>
+                        <a:t>63평(약 </a:t>
                       </a:r>
                       <a:pPr indent="0" marL="0">
                         <a:buNone/>
                       </a:pPr>
                       <a:r>
-                        <a:rPr lang="en-US" sz="1300" dirty="0">
+                        <a:rPr lang="en-US" sz="900" dirty="0">
                           <a:solidFill>
                             <a:srgbClr val="10161F"/>
                           </a:solidFill>
@@ -7007,37 +7393,9 @@
                           <a:ea typeface="Pretendard" pitchFamily="34" charset="-122"/>
                           <a:cs typeface="Pretendard" pitchFamily="34" charset="-120"/>
                         </a:rPr>
-                        <a:t>별도 </a:t>
+                        <a:t>208.3㎡)</a:t>
                       </a:r>
-                      <a:pPr indent="0" marL="0">
-                        <a:buNone/>
-                      </a:pPr>
-                      <a:r>
-                        <a:rPr lang="en-US" sz="1300" dirty="0">
-                          <a:solidFill>
-                            <a:srgbClr val="10161F"/>
-                          </a:solidFill>
-                          <a:latin typeface="Pretendard" pitchFamily="34" charset="0"/>
-                          <a:ea typeface="Pretendard" pitchFamily="34" charset="-122"/>
-                          <a:cs typeface="Pretendard" pitchFamily="34" charset="-120"/>
-                        </a:rPr>
-                        <a:t>(0만 </a:t>
-                      </a:r>
-                      <a:pPr indent="0" marL="0">
-                        <a:buNone/>
-                      </a:pPr>
-                      <a:r>
-                        <a:rPr lang="en-US" sz="1300" dirty="0">
-                          <a:solidFill>
-                            <a:srgbClr val="10161F"/>
-                          </a:solidFill>
-                          <a:latin typeface="Pretendard" pitchFamily="34" charset="0"/>
-                          <a:ea typeface="Pretendard" pitchFamily="34" charset="-122"/>
-                          <a:cs typeface="Pretendard" pitchFamily="34" charset="-120"/>
-                        </a:rPr>
-                        <a:t>원)</a:t>
-                      </a:r>
-                      <a:endParaRPr lang="en-US" sz="1300" dirty="0">
+                      <a:endParaRPr lang="en-US" sz="900" dirty="0">
                         <a:latin typeface="Pretendard" charset="0"/>
                         <a:ea typeface="Pretendard" charset="0"/>
                         <a:cs typeface="Pretendard" charset="0"/>
@@ -7086,8 +7444,6 @@
                     </a:solidFill>
                   </a:tcPr>
                 </a:tc>
-              </a:tr>
-              <a:tr h="438912">
                 <a:tc>
                   <a:txBody>
                     <a:bodyPr/>
@@ -7097,7 +7453,7 @@
                         <a:buNone/>
                       </a:pPr>
                       <a:r>
-                        <a:rPr lang="en-US" sz="1300" b="1" dirty="0">
+                        <a:rPr lang="en-US" sz="900" dirty="0">
                           <a:solidFill>
                             <a:srgbClr val="10161F"/>
                           </a:solidFill>
@@ -7105,13 +7461,67 @@
                           <a:ea typeface="Pretendard" pitchFamily="34" charset="-122"/>
                           <a:cs typeface="Pretendard" pitchFamily="34" charset="-120"/>
                         </a:rPr>
-                        <a:t>연 </a:t>
+                        <a:t>10,000만</a:t>
                       </a:r>
+                      <a:endParaRPr lang="en-US" sz="900" dirty="0">
+                        <a:latin typeface="Pretendard" charset="0"/>
+                        <a:ea typeface="Pretendard" charset="0"/>
+                        <a:cs typeface="Pretendard" charset="0"/>
+                      </a:endParaRPr>
+                    </a:p>
+                  </a:txBody>
+                  <a:tcPr marL="50800" marR="50800" marT="25400" marB="25400" anchor="ctr">
+                    <a:lnL w="3810" cap="flat" cmpd="sng" algn="ctr">
+                      <a:solidFill>
+                        <a:srgbClr val="CBD5E0"/>
+                      </a:solidFill>
+                      <a:prstDash val="solid"/>
+                      <a:round/>
+                      <a:headEnd type="none" w="med" len="med"/>
+                      <a:tailEnd type="none" w="med" len="med"/>
+                    </a:lnL>
+                    <a:lnR w="3810" cap="flat" cmpd="sng" algn="ctr">
+                      <a:solidFill>
+                        <a:srgbClr val="CBD5E0"/>
+                      </a:solidFill>
+                      <a:prstDash val="solid"/>
+                      <a:round/>
+                      <a:headEnd type="none" w="med" len="med"/>
+                      <a:tailEnd type="none" w="med" len="med"/>
+                    </a:lnR>
+                    <a:lnT w="3810" cap="flat" cmpd="sng" algn="ctr">
+                      <a:solidFill>
+                        <a:srgbClr val="CBD5E0"/>
+                      </a:solidFill>
+                      <a:prstDash val="solid"/>
+                      <a:round/>
+                      <a:headEnd type="none" w="med" len="med"/>
+                      <a:tailEnd type="none" w="med" len="med"/>
+                    </a:lnT>
+                    <a:lnB w="3810" cap="flat" cmpd="sng" algn="ctr">
+                      <a:solidFill>
+                        <a:srgbClr val="CBD5E0"/>
+                      </a:solidFill>
+                      <a:prstDash val="solid"/>
+                      <a:round/>
+                      <a:headEnd type="none" w="med" len="med"/>
+                      <a:tailEnd type="none" w="med" len="med"/>
+                    </a:lnB>
+                    <a:solidFill>
+                      <a:srgbClr val="F7FAFC"/>
+                    </a:solidFill>
+                  </a:tcPr>
+                </a:tc>
+                <a:tc>
+                  <a:txBody>
+                    <a:bodyPr/>
+                    <a:lstStyle/>
+                    <a:p>
                       <a:pPr indent="0" marL="0">
                         <a:buNone/>
                       </a:pPr>
                       <a:r>
-                        <a:rPr lang="en-US" sz="1300" b="1" dirty="0">
+                        <a:rPr lang="en-US" sz="900" dirty="0">
                           <a:solidFill>
                             <a:srgbClr val="10161F"/>
                           </a:solidFill>
@@ -7119,13 +7529,124 @@
                           <a:ea typeface="Pretendard" pitchFamily="34" charset="-122"/>
                           <a:cs typeface="Pretendard" pitchFamily="34" charset="-120"/>
                         </a:rPr>
-                        <a:t>임대 </a:t>
+                        <a:t>700만</a:t>
                       </a:r>
+                      <a:endParaRPr lang="en-US" sz="900" dirty="0">
+                        <a:latin typeface="Pretendard" charset="0"/>
+                        <a:ea typeface="Pretendard" charset="0"/>
+                        <a:cs typeface="Pretendard" charset="0"/>
+                      </a:endParaRPr>
+                    </a:p>
+                  </a:txBody>
+                  <a:tcPr marL="50800" marR="50800" marT="25400" marB="25400" anchor="ctr">
+                    <a:lnL w="3810" cap="flat" cmpd="sng" algn="ctr">
+                      <a:solidFill>
+                        <a:srgbClr val="CBD5E0"/>
+                      </a:solidFill>
+                      <a:prstDash val="solid"/>
+                      <a:round/>
+                      <a:headEnd type="none" w="med" len="med"/>
+                      <a:tailEnd type="none" w="med" len="med"/>
+                    </a:lnL>
+                    <a:lnR w="3810" cap="flat" cmpd="sng" algn="ctr">
+                      <a:solidFill>
+                        <a:srgbClr val="CBD5E0"/>
+                      </a:solidFill>
+                      <a:prstDash val="solid"/>
+                      <a:round/>
+                      <a:headEnd type="none" w="med" len="med"/>
+                      <a:tailEnd type="none" w="med" len="med"/>
+                    </a:lnR>
+                    <a:lnT w="3810" cap="flat" cmpd="sng" algn="ctr">
+                      <a:solidFill>
+                        <a:srgbClr val="CBD5E0"/>
+                      </a:solidFill>
+                      <a:prstDash val="solid"/>
+                      <a:round/>
+                      <a:headEnd type="none" w="med" len="med"/>
+                      <a:tailEnd type="none" w="med" len="med"/>
+                    </a:lnT>
+                    <a:lnB w="3810" cap="flat" cmpd="sng" algn="ctr">
+                      <a:solidFill>
+                        <a:srgbClr val="CBD5E0"/>
+                      </a:solidFill>
+                      <a:prstDash val="solid"/>
+                      <a:round/>
+                      <a:headEnd type="none" w="med" len="med"/>
+                      <a:tailEnd type="none" w="med" len="med"/>
+                    </a:lnB>
+                    <a:solidFill>
+                      <a:srgbClr val="F7FAFC"/>
+                    </a:solidFill>
+                  </a:tcPr>
+                </a:tc>
+                <a:tc>
+                  <a:txBody>
+                    <a:bodyPr/>
+                    <a:lstStyle/>
+                    <a:p>
+                      <a:pPr indent="0" marL="0">
+                        <a:buNone/>
+                      </a:pPr>
+                      <a:endParaRPr lang="en-US" sz="900" dirty="0">
+                        <a:latin typeface="Pretendard" charset="0"/>
+                        <a:ea typeface="Pretendard" charset="0"/>
+                        <a:cs typeface="Pretendard" charset="0"/>
+                      </a:endParaRPr>
+                    </a:p>
+                  </a:txBody>
+                  <a:tcPr marL="50800" marR="50800" marT="25400" marB="25400" anchor="ctr">
+                    <a:lnL w="3810" cap="flat" cmpd="sng" algn="ctr">
+                      <a:solidFill>
+                        <a:srgbClr val="CBD5E0"/>
+                      </a:solidFill>
+                      <a:prstDash val="solid"/>
+                      <a:round/>
+                      <a:headEnd type="none" w="med" len="med"/>
+                      <a:tailEnd type="none" w="med" len="med"/>
+                    </a:lnL>
+                    <a:lnR w="3810" cap="flat" cmpd="sng" algn="ctr">
+                      <a:solidFill>
+                        <a:srgbClr val="CBD5E0"/>
+                      </a:solidFill>
+                      <a:prstDash val="solid"/>
+                      <a:round/>
+                      <a:headEnd type="none" w="med" len="med"/>
+                      <a:tailEnd type="none" w="med" len="med"/>
+                    </a:lnR>
+                    <a:lnT w="3810" cap="flat" cmpd="sng" algn="ctr">
+                      <a:solidFill>
+                        <a:srgbClr val="CBD5E0"/>
+                      </a:solidFill>
+                      <a:prstDash val="solid"/>
+                      <a:round/>
+                      <a:headEnd type="none" w="med" len="med"/>
+                      <a:tailEnd type="none" w="med" len="med"/>
+                    </a:lnT>
+                    <a:lnB w="3810" cap="flat" cmpd="sng" algn="ctr">
+                      <a:solidFill>
+                        <a:srgbClr val="CBD5E0"/>
+                      </a:solidFill>
+                      <a:prstDash val="solid"/>
+                      <a:round/>
+                      <a:headEnd type="none" w="med" len="med"/>
+                      <a:tailEnd type="none" w="med" len="med"/>
+                    </a:lnB>
+                    <a:solidFill>
+                      <a:srgbClr val="F7FAFC"/>
+                    </a:solidFill>
+                  </a:tcPr>
+                </a:tc>
+                <a:tc>
+                  <a:txBody>
+                    <a:bodyPr/>
+                    <a:lstStyle/>
+                    <a:p>
                       <a:pPr indent="0" marL="0">
                         <a:buNone/>
                       </a:pPr>
                       <a:r>
-                        <a:rPr lang="en-US" sz="1300" b="1" dirty="0">
+                        <a:rPr lang="en-US" sz="900" dirty="0">
                           <a:solidFill>
                             <a:srgbClr val="10161F"/>
                           </a:solidFill>
@@ -7133,9 +7654,79 @@
                           <a:ea typeface="Pretendard" pitchFamily="34" charset="-122"/>
                           <a:cs typeface="Pretendard" pitchFamily="34" charset="-120"/>
                         </a:rPr>
-                        <a:t>수입</a:t>
+                        <a:t>미정</a:t>
                       </a:r>
-                      <a:endParaRPr lang="en-US" sz="1300" dirty="0">
+                      <a:endParaRPr lang="en-US" sz="900" dirty="0">
+                        <a:latin typeface="Pretendard" charset="0"/>
+                        <a:ea typeface="Pretendard" charset="0"/>
+                        <a:cs typeface="Pretendard" charset="0"/>
+                      </a:endParaRPr>
+                    </a:p>
+                  </a:txBody>
+                  <a:tcPr marL="50800" marR="50800" marT="25400" marB="25400" anchor="ctr">
+                    <a:lnL w="3810" cap="flat" cmpd="sng" algn="ctr">
+                      <a:solidFill>
+                        <a:srgbClr val="CBD5E0"/>
+                      </a:solidFill>
+                      <a:prstDash val="solid"/>
+                      <a:round/>
+                      <a:headEnd type="none" w="med" len="med"/>
+                      <a:tailEnd type="none" w="med" len="med"/>
+                    </a:lnL>
+                    <a:lnR w="3810" cap="flat" cmpd="sng" algn="ctr">
+                      <a:solidFill>
+                        <a:srgbClr val="CBD5E0"/>
+                      </a:solidFill>
+                      <a:prstDash val="solid"/>
+                      <a:round/>
+                      <a:headEnd type="none" w="med" len="med"/>
+                      <a:tailEnd type="none" w="med" len="med"/>
+                    </a:lnR>
+                    <a:lnT w="3810" cap="flat" cmpd="sng" algn="ctr">
+                      <a:solidFill>
+                        <a:srgbClr val="CBD5E0"/>
+                      </a:solidFill>
+                      <a:prstDash val="solid"/>
+                      <a:round/>
+                      <a:headEnd type="none" w="med" len="med"/>
+                      <a:tailEnd type="none" w="med" len="med"/>
+                    </a:lnT>
+                    <a:lnB w="3810" cap="flat" cmpd="sng" algn="ctr">
+                      <a:solidFill>
+                        <a:srgbClr val="CBD5E0"/>
+                      </a:solidFill>
+                      <a:prstDash val="solid"/>
+                      <a:round/>
+                      <a:headEnd type="none" w="med" len="med"/>
+                      <a:tailEnd type="none" w="med" len="med"/>
+                    </a:lnB>
+                    <a:solidFill>
+                      <a:srgbClr val="F7FAFC"/>
+                    </a:solidFill>
+                  </a:tcPr>
+                </a:tc>
+              </a:tr>
+              <a:tr h="347472">
+                <a:tc>
+                  <a:txBody>
+                    <a:bodyPr/>
+                    <a:lstStyle/>
+                    <a:p>
+                      <a:pPr indent="0" marL="0">
+                        <a:buNone/>
+                      </a:pPr>
+                      <a:r>
+                        <a:rPr lang="en-US" sz="900" b="1" dirty="0">
+                          <a:solidFill>
+                            <a:srgbClr val="10161F"/>
+                          </a:solidFill>
+                          <a:latin typeface="Pretendard" pitchFamily="34" charset="0"/>
+                          <a:ea typeface="Pretendard" pitchFamily="34" charset="-122"/>
+                          <a:cs typeface="Pretendard" pitchFamily="34" charset="-120"/>
+                        </a:rPr>
+                        <a:t>구분</a:t>
+                      </a:r>
+                      <a:endParaRPr lang="en-US" sz="900" dirty="0">
                         <a:latin typeface="Pretendard" charset="0"/>
                         <a:ea typeface="Pretendard" charset="0"/>
                         <a:cs typeface="Pretendard" charset="0"/>
@@ -7193,7 +7784,7 @@
                         <a:buNone/>
                       </a:pPr>
                       <a:r>
-                        <a:rPr lang="en-US" sz="1300" dirty="0">
+                        <a:rPr lang="en-US" sz="900" dirty="0">
                           <a:solidFill>
                             <a:srgbClr val="10161F"/>
                           </a:solidFill>
@@ -7201,13 +7792,13 @@
                           <a:ea typeface="Pretendard" pitchFamily="34" charset="-122"/>
                           <a:cs typeface="Pretendard" pitchFamily="34" charset="-120"/>
                         </a:rPr>
-                        <a:t>약 </a:t>
+                        <a:t>지표 </a:t>
                       </a:r>
                       <a:pPr indent="0" marL="0">
                         <a:buNone/>
                       </a:pPr>
                       <a:r>
-                        <a:rPr lang="en-US" sz="1300" dirty="0">
+                        <a:rPr lang="en-US" sz="900" dirty="0">
                           <a:solidFill>
                             <a:srgbClr val="10161F"/>
                           </a:solidFill>
@@ -7215,23 +7806,9 @@
                           <a:ea typeface="Pretendard" pitchFamily="34" charset="-122"/>
                           <a:cs typeface="Pretendard" pitchFamily="34" charset="-120"/>
                         </a:rPr>
-                        <a:t>2.8억 </a:t>
+                        <a:t>분석</a:t>
                       </a:r>
-                      <a:pPr indent="0" marL="0">
-                        <a:buNone/>
-                      </a:pPr>
-                      <a:r>
-                        <a:rPr lang="en-US" sz="1300" dirty="0">
-                          <a:solidFill>
-                            <a:srgbClr val="10161F"/>
-                          </a:solidFill>
-                          <a:latin typeface="Pretendard" pitchFamily="34" charset="0"/>
-                          <a:ea typeface="Pretendard" pitchFamily="34" charset="-122"/>
-                          <a:cs typeface="Pretendard" pitchFamily="34" charset="-120"/>
-                        </a:rPr>
-                        <a:t>원/년</a:t>
-                      </a:r>
-                      <a:endParaRPr lang="en-US" sz="1300" dirty="0">
+                      <a:endParaRPr lang="en-US" sz="900" dirty="0">
                         <a:latin typeface="Pretendard" charset="0"/>
                         <a:ea typeface="Pretendard" charset="0"/>
                         <a:cs typeface="Pretendard" charset="0"/>
@@ -7289,7 +7866,7 @@
                         <a:buNone/>
                       </a:pPr>
                       <a:r>
-                        <a:rPr lang="en-US" sz="1300" dirty="0">
+                        <a:rPr lang="en-US" sz="900" dirty="0">
                           <a:solidFill>
                             <a:srgbClr val="10161F"/>
                           </a:solidFill>
@@ -7297,51 +7874,9 @@
                           <a:ea typeface="Pretendard" pitchFamily="34" charset="-122"/>
                           <a:cs typeface="Pretendard" pitchFamily="34" charset="-120"/>
                         </a:rPr>
-                        <a:t>연간 </a:t>
+                        <a:t>비고</a:t>
                       </a:r>
-                      <a:pPr indent="0" marL="0">
-                        <a:buNone/>
-                      </a:pPr>
-                      <a:r>
-                        <a:rPr lang="en-US" sz="1300" dirty="0">
-                          <a:solidFill>
-                            <a:srgbClr val="10161F"/>
-                          </a:solidFill>
-                          <a:latin typeface="Pretendard" pitchFamily="34" charset="0"/>
-                          <a:ea typeface="Pretendard" pitchFamily="34" charset="-122"/>
-                          <a:cs typeface="Pretendard" pitchFamily="34" charset="-120"/>
-                        </a:rPr>
-                        <a:t>총 </a:t>
-                      </a:r>
-                      <a:pPr indent="0" marL="0">
-                        <a:buNone/>
-                      </a:pPr>
-                      <a:r>
-                        <a:rPr lang="en-US" sz="1300" dirty="0">
-                          <a:solidFill>
-                            <a:srgbClr val="10161F"/>
-                          </a:solidFill>
-                          <a:latin typeface="Pretendard" pitchFamily="34" charset="0"/>
-                          <a:ea typeface="Pretendard" pitchFamily="34" charset="-122"/>
-                          <a:cs typeface="Pretendard" pitchFamily="34" charset="-120"/>
-                        </a:rPr>
-                        <a:t>임대료 </a:t>
-                      </a:r>
-                      <a:pPr indent="0" marL="0">
-                        <a:buNone/>
-                      </a:pPr>
-                      <a:r>
-                        <a:rPr lang="en-US" sz="1300" dirty="0">
-                          <a:solidFill>
-                            <a:srgbClr val="10161F"/>
-                          </a:solidFill>
-                          <a:latin typeface="Pretendard" pitchFamily="34" charset="0"/>
-                          <a:ea typeface="Pretendard" pitchFamily="34" charset="-122"/>
-                          <a:cs typeface="Pretendard" pitchFamily="34" charset="-120"/>
-                        </a:rPr>
-                        <a:t>수입</a:t>
-                      </a:r>
-                      <a:endParaRPr lang="en-US" sz="1300" dirty="0">
+                      <a:endParaRPr lang="en-US" sz="900" dirty="0">
                         <a:latin typeface="Pretendard" charset="0"/>
                         <a:ea typeface="Pretendard" charset="0"/>
                         <a:cs typeface="Pretendard" charset="0"/>
@@ -7391,7 +7926,7 @@
                   </a:tcPr>
                 </a:tc>
               </a:tr>
-              <a:tr h="438912">
+              <a:tr h="347472">
                 <a:tc>
                   <a:txBody>
                     <a:bodyPr/>
@@ -7401,7 +7936,7 @@
                         <a:buNone/>
                       </a:pPr>
                       <a:r>
-                        <a:rPr lang="en-US" sz="1300" b="1" dirty="0">
+                        <a:rPr lang="en-US" sz="900" b="1" dirty="0">
                           <a:solidFill>
                             <a:srgbClr val="10161F"/>
                           </a:solidFill>
@@ -7409,13 +7944,13 @@
                           <a:ea typeface="Pretendard" pitchFamily="34" charset="-122"/>
                           <a:cs typeface="Pretendard" pitchFamily="34" charset="-120"/>
                         </a:rPr>
-                        <a:t>보증금 </a:t>
+                        <a:t>공실 </a:t>
                       </a:r>
                       <a:pPr indent="0" marL="0">
                         <a:buNone/>
                       </a:pPr>
                       <a:r>
-                        <a:rPr lang="en-US" sz="1300" b="1" dirty="0">
+                        <a:rPr lang="en-US" sz="900" b="1" dirty="0">
                           <a:solidFill>
                             <a:srgbClr val="10161F"/>
                           </a:solidFill>
@@ -7423,9 +7958,9 @@
                           <a:ea typeface="Pretendard" pitchFamily="34" charset="-122"/>
                           <a:cs typeface="Pretendard" pitchFamily="34" charset="-120"/>
                         </a:rPr>
-                        <a:t>총액</a:t>
+                        <a:t>현황</a:t>
                       </a:r>
-                      <a:endParaRPr lang="en-US" sz="1300" dirty="0">
+                      <a:endParaRPr lang="en-US" sz="900" dirty="0">
                         <a:latin typeface="Pretendard" charset="0"/>
                         <a:ea typeface="Pretendard" charset="0"/>
                         <a:cs typeface="Pretendard" charset="0"/>
@@ -7483,7 +8018,7 @@
                         <a:buNone/>
                       </a:pPr>
                       <a:r>
-                        <a:rPr lang="en-US" sz="1300" dirty="0">
+                        <a:rPr lang="en-US" sz="900" dirty="0">
                           <a:solidFill>
                             <a:srgbClr val="10161F"/>
                           </a:solidFill>
@@ -7491,13 +8026,13 @@
                           <a:ea typeface="Pretendard" pitchFamily="34" charset="-122"/>
                           <a:cs typeface="Pretendard" pitchFamily="34" charset="-120"/>
                         </a:rPr>
-                        <a:t>약 </a:t>
+                        <a:t>0.0% </a:t>
                       </a:r>
                       <a:pPr indent="0" marL="0">
                         <a:buNone/>
                       </a:pPr>
                       <a:r>
-                        <a:rPr lang="en-US" sz="1300" dirty="0">
+                        <a:rPr lang="en-US" sz="900" dirty="0">
                           <a:solidFill>
                             <a:srgbClr val="10161F"/>
                           </a:solidFill>
@@ -7505,13 +8040,13 @@
                           <a:ea typeface="Pretendard" pitchFamily="34" charset="-122"/>
                           <a:cs typeface="Pretendard" pitchFamily="34" charset="-120"/>
                         </a:rPr>
-                        <a:t>3.0억 </a:t>
+                        <a:t>(임대중 </a:t>
                       </a:r>
                       <a:pPr indent="0" marL="0">
                         <a:buNone/>
                       </a:pPr>
                       <a:r>
-                        <a:rPr lang="en-US" sz="1300" dirty="0">
+                        <a:rPr lang="en-US" sz="900" dirty="0">
                           <a:solidFill>
                             <a:srgbClr val="10161F"/>
                           </a:solidFill>
@@ -7519,9 +8054,51 @@
                           <a:ea typeface="Pretendard" pitchFamily="34" charset="-122"/>
                           <a:cs typeface="Pretendard" pitchFamily="34" charset="-120"/>
                         </a:rPr>
-                        <a:t>원</a:t>
+                        <a:t>2 </a:t>
                       </a:r>
-                      <a:endParaRPr lang="en-US" sz="1300" dirty="0">
+                      <a:pPr indent="0" marL="0">
+                        <a:buNone/>
+                      </a:pPr>
+                      <a:r>
+                        <a:rPr lang="en-US" sz="900" dirty="0">
+                          <a:solidFill>
+                            <a:srgbClr val="10161F"/>
+                          </a:solidFill>
+                          <a:latin typeface="Pretendard" pitchFamily="34" charset="0"/>
+                          <a:ea typeface="Pretendard" pitchFamily="34" charset="-122"/>
+                          <a:cs typeface="Pretendard" pitchFamily="34" charset="-120"/>
+                        </a:rPr>
+                        <a:t>· </a:t>
+                      </a:r>
+                      <a:pPr indent="0" marL="0">
+                        <a:buNone/>
+                      </a:pPr>
+                      <a:r>
+                        <a:rPr lang="en-US" sz="900" dirty="0">
+                          <a:solidFill>
+                            <a:srgbClr val="10161F"/>
+                          </a:solidFill>
+                          <a:latin typeface="Pretendard" pitchFamily="34" charset="0"/>
+                          <a:ea typeface="Pretendard" pitchFamily="34" charset="-122"/>
+                          <a:cs typeface="Pretendard" pitchFamily="34" charset="-120"/>
+                        </a:rPr>
+                        <a:t>공실 </a:t>
+                      </a:r>
+                      <a:pPr indent="0" marL="0">
+                        <a:buNone/>
+                      </a:pPr>
+                      <a:r>
+                        <a:rPr lang="en-US" sz="900" dirty="0">
+                          <a:solidFill>
+                            <a:srgbClr val="10161F"/>
+                          </a:solidFill>
+                          <a:latin typeface="Pretendard" pitchFamily="34" charset="0"/>
+                          <a:ea typeface="Pretendard" pitchFamily="34" charset="-122"/>
+                          <a:cs typeface="Pretendard" pitchFamily="34" charset="-120"/>
+                        </a:rPr>
+                        <a:t>0)</a:t>
+                      </a:r>
+                      <a:endParaRPr lang="en-US" sz="900" dirty="0">
                         <a:latin typeface="Pretendard" charset="0"/>
                         <a:ea typeface="Pretendard" charset="0"/>
                         <a:cs typeface="Pretendard" charset="0"/>
@@ -7579,7 +8156,7 @@
                         <a:buNone/>
                       </a:pPr>
                       <a:r>
-                        <a:rPr lang="en-US" sz="1300" dirty="0">
+                        <a:rPr lang="en-US" sz="900" dirty="0">
                           <a:solidFill>
                             <a:srgbClr val="10161F"/>
                           </a:solidFill>
@@ -7587,13 +8164,13 @@
                           <a:ea typeface="Pretendard" pitchFamily="34" charset="-122"/>
                           <a:cs typeface="Pretendard" pitchFamily="34" charset="-120"/>
                         </a:rPr>
-                        <a:t>임차인 </a:t>
+                        <a:t>전 </a:t>
                       </a:r>
                       <a:pPr indent="0" marL="0">
                         <a:buNone/>
                       </a:pPr>
                       <a:r>
-                        <a:rPr lang="en-US" sz="1300" dirty="0">
+                        <a:rPr lang="en-US" sz="900" dirty="0">
                           <a:solidFill>
                             <a:srgbClr val="10161F"/>
                           </a:solidFill>
@@ -7601,13 +8178,125 @@
                           <a:ea typeface="Pretendard" pitchFamily="34" charset="-122"/>
                           <a:cs typeface="Pretendard" pitchFamily="34" charset="-120"/>
                         </a:rPr>
-                        <a:t>보증금 </a:t>
+                        <a:t>층 </a:t>
                       </a:r>
                       <a:pPr indent="0" marL="0">
                         <a:buNone/>
                       </a:pPr>
                       <a:r>
-                        <a:rPr lang="en-US" sz="1300" dirty="0">
+                        <a:rPr lang="en-US" sz="900" dirty="0">
+                          <a:solidFill>
+                            <a:srgbClr val="10161F"/>
+                          </a:solidFill>
+                          <a:latin typeface="Pretendard" pitchFamily="34" charset="0"/>
+                          <a:ea typeface="Pretendard" pitchFamily="34" charset="-122"/>
+                          <a:cs typeface="Pretendard" pitchFamily="34" charset="-120"/>
+                        </a:rPr>
+                        <a:t>만실 </a:t>
+                      </a:r>
+                      <a:pPr indent="0" marL="0">
+                        <a:buNone/>
+                      </a:pPr>
+                      <a:r>
+                        <a:rPr lang="en-US" sz="900" dirty="0">
+                          <a:solidFill>
+                            <a:srgbClr val="10161F"/>
+                          </a:solidFill>
+                          <a:latin typeface="Pretendard" pitchFamily="34" charset="0"/>
+                          <a:ea typeface="Pretendard" pitchFamily="34" charset="-122"/>
+                          <a:cs typeface="Pretendard" pitchFamily="34" charset="-120"/>
+                        </a:rPr>
+                        <a:t>운영</a:t>
+                      </a:r>
+                      <a:endParaRPr lang="en-US" sz="900" dirty="0">
+                        <a:latin typeface="Pretendard" charset="0"/>
+                        <a:ea typeface="Pretendard" charset="0"/>
+                        <a:cs typeface="Pretendard" charset="0"/>
+                      </a:endParaRPr>
+                    </a:p>
+                  </a:txBody>
+                  <a:tcPr marL="50800" marR="50800" marT="25400" marB="25400" anchor="ctr">
+                    <a:lnL w="3810" cap="flat" cmpd="sng" algn="ctr">
+                      <a:solidFill>
+                        <a:srgbClr val="CBD5E0"/>
+                      </a:solidFill>
+                      <a:prstDash val="solid"/>
+                      <a:round/>
+                      <a:headEnd type="none" w="med" len="med"/>
+                      <a:tailEnd type="none" w="med" len="med"/>
+                    </a:lnL>
+                    <a:lnR w="3810" cap="flat" cmpd="sng" algn="ctr">
+                      <a:solidFill>
+                        <a:srgbClr val="CBD5E0"/>
+                      </a:solidFill>
+                      <a:prstDash val="solid"/>
+                      <a:round/>
+                      <a:headEnd type="none" w="med" len="med"/>
+                      <a:tailEnd type="none" w="med" len="med"/>
+                    </a:lnR>
+                    <a:lnT w="3810" cap="flat" cmpd="sng" algn="ctr">
+                      <a:solidFill>
+                        <a:srgbClr val="CBD5E0"/>
+                      </a:solidFill>
+                      <a:prstDash val="solid"/>
+                      <a:round/>
+                      <a:headEnd type="none" w="med" len="med"/>
+                      <a:tailEnd type="none" w="med" len="med"/>
+                    </a:lnT>
+                    <a:lnB w="3810" cap="flat" cmpd="sng" algn="ctr">
+                      <a:solidFill>
+                        <a:srgbClr val="CBD5E0"/>
+                      </a:solidFill>
+                      <a:prstDash val="solid"/>
+                      <a:round/>
+                      <a:headEnd type="none" w="med" len="med"/>
+                      <a:tailEnd type="none" w="med" len="med"/>
+                    </a:lnB>
+                    <a:solidFill>
+                      <a:srgbClr val="F7FAFC"/>
+                    </a:solidFill>
+                  </a:tcPr>
+                </a:tc>
+              </a:tr>
+              <a:tr h="347472">
+                <a:tc>
+                  <a:txBody>
+                    <a:bodyPr/>
+                    <a:lstStyle/>
+                    <a:p>
+                      <a:pPr indent="0" marL="0">
+                        <a:buNone/>
+                      </a:pPr>
+                      <a:r>
+                        <a:rPr lang="en-US" sz="900" b="1" dirty="0">
+                          <a:solidFill>
+                            <a:srgbClr val="10161F"/>
+                          </a:solidFill>
+                          <a:latin typeface="Pretendard" pitchFamily="34" charset="0"/>
+                          <a:ea typeface="Pretendard" pitchFamily="34" charset="-122"/>
+                          <a:cs typeface="Pretendard" pitchFamily="34" charset="-120"/>
+                        </a:rPr>
+                        <a:t>월 </a:t>
+                      </a:r>
+                      <a:pPr indent="0" marL="0">
+                        <a:buNone/>
+                      </a:pPr>
+                      <a:r>
+                        <a:rPr lang="en-US" sz="900" b="1" dirty="0">
+                          <a:solidFill>
+                            <a:srgbClr val="10161F"/>
+                          </a:solidFill>
+                          <a:latin typeface="Pretendard" pitchFamily="34" charset="0"/>
+                          <a:ea typeface="Pretendard" pitchFamily="34" charset="-122"/>
+                          <a:cs typeface="Pretendard" pitchFamily="34" charset="-120"/>
+                        </a:rPr>
+                        <a:t>임대료 </a:t>
+                      </a:r>
+                      <a:pPr indent="0" marL="0">
+                        <a:buNone/>
+                      </a:pPr>
+                      <a:r>
+                        <a:rPr lang="en-US" sz="900" b="1" dirty="0">
                           <a:solidFill>
                             <a:srgbClr val="10161F"/>
                           </a:solidFill>
@@ -7617,91 +8306,7 @@
                         </a:rPr>
                         <a:t>합계</a:t>
                       </a:r>
-                      <a:endParaRPr lang="en-US" sz="1300" dirty="0">
-                        <a:latin typeface="Pretendard" charset="0"/>
-                        <a:ea typeface="Pretendard" charset="0"/>
-                        <a:cs typeface="Pretendard" charset="0"/>
-                      </a:endParaRPr>
-                    </a:p>
-                  </a:txBody>
-                  <a:tcPr marL="50800" marR="50800" marT="25400" marB="25400" anchor="ctr">
-                    <a:lnL w="3810" cap="flat" cmpd="sng" algn="ctr">
-                      <a:solidFill>
-                        <a:srgbClr val="CBD5E0"/>
-                      </a:solidFill>
-                      <a:prstDash val="solid"/>
-                      <a:round/>
-                      <a:headEnd type="none" w="med" len="med"/>
-                      <a:tailEnd type="none" w="med" len="med"/>
-                    </a:lnL>
-                    <a:lnR w="3810" cap="flat" cmpd="sng" algn="ctr">
-                      <a:solidFill>
-                        <a:srgbClr val="CBD5E0"/>
-                      </a:solidFill>
-                      <a:prstDash val="solid"/>
-                      <a:round/>
-                      <a:headEnd type="none" w="med" len="med"/>
-                      <a:tailEnd type="none" w="med" len="med"/>
-                    </a:lnR>
-                    <a:lnT w="3810" cap="flat" cmpd="sng" algn="ctr">
-                      <a:solidFill>
-                        <a:srgbClr val="CBD5E0"/>
-                      </a:solidFill>
-                      <a:prstDash val="solid"/>
-                      <a:round/>
-                      <a:headEnd type="none" w="med" len="med"/>
-                      <a:tailEnd type="none" w="med" len="med"/>
-                    </a:lnT>
-                    <a:lnB w="3810" cap="flat" cmpd="sng" algn="ctr">
-                      <a:solidFill>
-                        <a:srgbClr val="CBD5E0"/>
-                      </a:solidFill>
-                      <a:prstDash val="solid"/>
-                      <a:round/>
-                      <a:headEnd type="none" w="med" len="med"/>
-                      <a:tailEnd type="none" w="med" len="med"/>
-                    </a:lnB>
-                    <a:solidFill>
-                      <a:srgbClr val="F7FAFC"/>
-                    </a:solidFill>
-                  </a:tcPr>
-                </a:tc>
-              </a:tr>
-              <a:tr h="438912">
-                <a:tc>
-                  <a:txBody>
-                    <a:bodyPr/>
-                    <a:lstStyle/>
-                    <a:p>
-                      <a:pPr indent="0" marL="0">
-                        <a:buNone/>
-                      </a:pPr>
-                      <a:r>
-                        <a:rPr lang="en-US" sz="1300" b="1" dirty="0">
-                          <a:solidFill>
-                            <a:srgbClr val="10161F"/>
-                          </a:solidFill>
-                          <a:latin typeface="Pretendard" pitchFamily="34" charset="0"/>
-                          <a:ea typeface="Pretendard" pitchFamily="34" charset="-122"/>
-                          <a:cs typeface="Pretendard" pitchFamily="34" charset="-120"/>
-                        </a:rPr>
-                        <a:t>임차인 </a:t>
-                      </a:r>
-                      <a:pPr indent="0" marL="0">
-                        <a:buNone/>
-                      </a:pPr>
-                      <a:r>
-                        <a:rPr lang="en-US" sz="1300" b="1" dirty="0">
-                          <a:solidFill>
-                            <a:srgbClr val="10161F"/>
-                          </a:solidFill>
-                          <a:latin typeface="Pretendard" pitchFamily="34" charset="0"/>
-                          <a:ea typeface="Pretendard" pitchFamily="34" charset="-122"/>
-                          <a:cs typeface="Pretendard" pitchFamily="34" charset="-120"/>
-                        </a:rPr>
-                        <a:t>정보</a:t>
-                      </a:r>
-                      <a:endParaRPr lang="en-US" sz="1300" dirty="0">
+                      <a:endParaRPr lang="en-US" sz="900" dirty="0">
                         <a:latin typeface="Pretendard" charset="0"/>
                         <a:ea typeface="Pretendard" charset="0"/>
                         <a:cs typeface="Pretendard" charset="0"/>
@@ -7759,7 +8364,7 @@
                         <a:buNone/>
                       </a:pPr>
                       <a:r>
-                        <a:rPr lang="en-US" sz="1300" dirty="0">
+                        <a:rPr lang="en-US" sz="900" dirty="0">
                           <a:solidFill>
                             <a:srgbClr val="10161F"/>
                           </a:solidFill>
@@ -7767,13 +8372,13 @@
                           <a:ea typeface="Pretendard" pitchFamily="34" charset="-122"/>
                           <a:cs typeface="Pretendard" pitchFamily="34" charset="-120"/>
                         </a:rPr>
-                        <a:t>실사 </a:t>
+                        <a:t>2,350만 </a:t>
                       </a:r>
                       <a:pPr indent="0" marL="0">
                         <a:buNone/>
                       </a:pPr>
                       <a:r>
-                        <a:rPr lang="en-US" sz="1300" dirty="0">
+                        <a:rPr lang="en-US" sz="900" dirty="0">
                           <a:solidFill>
                             <a:srgbClr val="10161F"/>
                           </a:solidFill>
@@ -7781,79 +8386,9 @@
                           <a:ea typeface="Pretendard" pitchFamily="34" charset="-122"/>
                           <a:cs typeface="Pretendard" pitchFamily="34" charset="-120"/>
                         </a:rPr>
-                        <a:t>및 </a:t>
+                        <a:t>원/월</a:t>
                       </a:r>
-                      <a:pPr indent="0" marL="0">
-                        <a:buNone/>
-                      </a:pPr>
-                      <a:r>
-                        <a:rPr lang="en-US" sz="1300" dirty="0">
-                          <a:solidFill>
-                            <a:srgbClr val="10161F"/>
-                          </a:solidFill>
-                          <a:latin typeface="Pretendard" pitchFamily="34" charset="0"/>
-                          <a:ea typeface="Pretendard" pitchFamily="34" charset="-122"/>
-                          <a:cs typeface="Pretendard" pitchFamily="34" charset="-120"/>
-                        </a:rPr>
-                        <a:t>NDA </a:t>
-                      </a:r>
-                      <a:pPr indent="0" marL="0">
-                        <a:buNone/>
-                      </a:pPr>
-                      <a:r>
-                        <a:rPr lang="en-US" sz="1300" dirty="0">
-                          <a:solidFill>
-                            <a:srgbClr val="10161F"/>
-                          </a:solidFill>
-                          <a:latin typeface="Pretendard" pitchFamily="34" charset="0"/>
-                          <a:ea typeface="Pretendard" pitchFamily="34" charset="-122"/>
-                          <a:cs typeface="Pretendard" pitchFamily="34" charset="-120"/>
-                        </a:rPr>
-                        <a:t>체결 </a:t>
-                      </a:r>
-                      <a:pPr indent="0" marL="0">
-                        <a:buNone/>
-                      </a:pPr>
-                      <a:r>
-                        <a:rPr lang="en-US" sz="1300" dirty="0">
-                          <a:solidFill>
-                            <a:srgbClr val="10161F"/>
-                          </a:solidFill>
-                          <a:latin typeface="Pretendard" pitchFamily="34" charset="0"/>
-                          <a:ea typeface="Pretendard" pitchFamily="34" charset="-122"/>
-                          <a:cs typeface="Pretendard" pitchFamily="34" charset="-120"/>
-                        </a:rPr>
-                        <a:t>후 </a:t>
-                      </a:r>
-                      <a:pPr indent="0" marL="0">
-                        <a:buNone/>
-                      </a:pPr>
-                      <a:r>
-                        <a:rPr lang="en-US" sz="1300" dirty="0">
-                          <a:solidFill>
-                            <a:srgbClr val="10161F"/>
-                          </a:solidFill>
-                          <a:latin typeface="Pretendard" pitchFamily="34" charset="0"/>
-                          <a:ea typeface="Pretendard" pitchFamily="34" charset="-122"/>
-                          <a:cs typeface="Pretendard" pitchFamily="34" charset="-120"/>
-                        </a:rPr>
-                        <a:t>상세 </a:t>
-                      </a:r>
-                      <a:pPr indent="0" marL="0">
-                        <a:buNone/>
-                      </a:pPr>
-                      <a:r>
-                        <a:rPr lang="en-US" sz="1300" dirty="0">
-                          <a:solidFill>
-                            <a:srgbClr val="10161F"/>
-                          </a:solidFill>
-                          <a:latin typeface="Pretendard" pitchFamily="34" charset="0"/>
-                          <a:ea typeface="Pretendard" pitchFamily="34" charset="-122"/>
-                          <a:cs typeface="Pretendard" pitchFamily="34" charset="-120"/>
-                        </a:rPr>
-                        <a:t>제공</a:t>
-                      </a:r>
-                      <a:endParaRPr lang="en-US" sz="1300" dirty="0">
+                      <a:endParaRPr lang="en-US" sz="900" dirty="0">
                         <a:latin typeface="Pretendard" charset="0"/>
                         <a:ea typeface="Pretendard" charset="0"/>
                         <a:cs typeface="Pretendard" charset="0"/>
@@ -7911,7 +8446,933 @@
                         <a:buNone/>
                       </a:pPr>
                       <a:r>
-                        <a:rPr lang="en-US" sz="1300" dirty="0">
+                        <a:rPr lang="en-US" sz="900" dirty="0">
+                          <a:solidFill>
+                            <a:srgbClr val="10161F"/>
+                          </a:solidFill>
+                          <a:latin typeface="Pretendard" pitchFamily="34" charset="0"/>
+                          <a:ea typeface="Pretendard" pitchFamily="34" charset="-122"/>
+                          <a:cs typeface="Pretendard" pitchFamily="34" charset="-120"/>
+                        </a:rPr>
+                        <a:t>관리비 </a:t>
+                      </a:r>
+                      <a:pPr indent="0" marL="0">
+                        <a:buNone/>
+                      </a:pPr>
+                      <a:r>
+                        <a:rPr lang="en-US" sz="900" dirty="0">
+                          <a:solidFill>
+                            <a:srgbClr val="10161F"/>
+                          </a:solidFill>
+                          <a:latin typeface="Pretendard" pitchFamily="34" charset="0"/>
+                          <a:ea typeface="Pretendard" pitchFamily="34" charset="-122"/>
+                          <a:cs typeface="Pretendard" pitchFamily="34" charset="-120"/>
+                        </a:rPr>
+                        <a:t>별도 </a:t>
+                      </a:r>
+                      <a:pPr indent="0" marL="0">
+                        <a:buNone/>
+                      </a:pPr>
+                      <a:r>
+                        <a:rPr lang="en-US" sz="900" dirty="0">
+                          <a:solidFill>
+                            <a:srgbClr val="10161F"/>
+                          </a:solidFill>
+                          <a:latin typeface="Pretendard" pitchFamily="34" charset="0"/>
+                          <a:ea typeface="Pretendard" pitchFamily="34" charset="-122"/>
+                          <a:cs typeface="Pretendard" pitchFamily="34" charset="-120"/>
+                        </a:rPr>
+                        <a:t>(0만 </a:t>
+                      </a:r>
+                      <a:pPr indent="0" marL="0">
+                        <a:buNone/>
+                      </a:pPr>
+                      <a:r>
+                        <a:rPr lang="en-US" sz="900" dirty="0">
+                          <a:solidFill>
+                            <a:srgbClr val="10161F"/>
+                          </a:solidFill>
+                          <a:latin typeface="Pretendard" pitchFamily="34" charset="0"/>
+                          <a:ea typeface="Pretendard" pitchFamily="34" charset="-122"/>
+                          <a:cs typeface="Pretendard" pitchFamily="34" charset="-120"/>
+                        </a:rPr>
+                        <a:t>원)</a:t>
+                      </a:r>
+                      <a:endParaRPr lang="en-US" sz="900" dirty="0">
+                        <a:latin typeface="Pretendard" charset="0"/>
+                        <a:ea typeface="Pretendard" charset="0"/>
+                        <a:cs typeface="Pretendard" charset="0"/>
+                      </a:endParaRPr>
+                    </a:p>
+                  </a:txBody>
+                  <a:tcPr marL="50800" marR="50800" marT="25400" marB="25400" anchor="ctr">
+                    <a:lnL w="3810" cap="flat" cmpd="sng" algn="ctr">
+                      <a:solidFill>
+                        <a:srgbClr val="CBD5E0"/>
+                      </a:solidFill>
+                      <a:prstDash val="solid"/>
+                      <a:round/>
+                      <a:headEnd type="none" w="med" len="med"/>
+                      <a:tailEnd type="none" w="med" len="med"/>
+                    </a:lnL>
+                    <a:lnR w="3810" cap="flat" cmpd="sng" algn="ctr">
+                      <a:solidFill>
+                        <a:srgbClr val="CBD5E0"/>
+                      </a:solidFill>
+                      <a:prstDash val="solid"/>
+                      <a:round/>
+                      <a:headEnd type="none" w="med" len="med"/>
+                      <a:tailEnd type="none" w="med" len="med"/>
+                    </a:lnR>
+                    <a:lnT w="3810" cap="flat" cmpd="sng" algn="ctr">
+                      <a:solidFill>
+                        <a:srgbClr val="CBD5E0"/>
+                      </a:solidFill>
+                      <a:prstDash val="solid"/>
+                      <a:round/>
+                      <a:headEnd type="none" w="med" len="med"/>
+                      <a:tailEnd type="none" w="med" len="med"/>
+                    </a:lnT>
+                    <a:lnB w="3810" cap="flat" cmpd="sng" algn="ctr">
+                      <a:solidFill>
+                        <a:srgbClr val="CBD5E0"/>
+                      </a:solidFill>
+                      <a:prstDash val="solid"/>
+                      <a:round/>
+                      <a:headEnd type="none" w="med" len="med"/>
+                      <a:tailEnd type="none" w="med" len="med"/>
+                    </a:lnB>
+                    <a:solidFill>
+                      <a:srgbClr val="FFFFFF"/>
+                    </a:solidFill>
+                  </a:tcPr>
+                </a:tc>
+              </a:tr>
+              <a:tr h="347472">
+                <a:tc>
+                  <a:txBody>
+                    <a:bodyPr/>
+                    <a:lstStyle/>
+                    <a:p>
+                      <a:pPr indent="0" marL="0">
+                        <a:buNone/>
+                      </a:pPr>
+                      <a:r>
+                        <a:rPr lang="en-US" sz="900" b="1" dirty="0">
+                          <a:solidFill>
+                            <a:srgbClr val="10161F"/>
+                          </a:solidFill>
+                          <a:latin typeface="Pretendard" pitchFamily="34" charset="0"/>
+                          <a:ea typeface="Pretendard" pitchFamily="34" charset="-122"/>
+                          <a:cs typeface="Pretendard" pitchFamily="34" charset="-120"/>
+                        </a:rPr>
+                        <a:t>연 </a:t>
+                      </a:r>
+                      <a:pPr indent="0" marL="0">
+                        <a:buNone/>
+                      </a:pPr>
+                      <a:r>
+                        <a:rPr lang="en-US" sz="900" b="1" dirty="0">
+                          <a:solidFill>
+                            <a:srgbClr val="10161F"/>
+                          </a:solidFill>
+                          <a:latin typeface="Pretendard" pitchFamily="34" charset="0"/>
+                          <a:ea typeface="Pretendard" pitchFamily="34" charset="-122"/>
+                          <a:cs typeface="Pretendard" pitchFamily="34" charset="-120"/>
+                        </a:rPr>
+                        <a:t>임대 </a:t>
+                      </a:r>
+                      <a:pPr indent="0" marL="0">
+                        <a:buNone/>
+                      </a:pPr>
+                      <a:r>
+                        <a:rPr lang="en-US" sz="900" b="1" dirty="0">
+                          <a:solidFill>
+                            <a:srgbClr val="10161F"/>
+                          </a:solidFill>
+                          <a:latin typeface="Pretendard" pitchFamily="34" charset="0"/>
+                          <a:ea typeface="Pretendard" pitchFamily="34" charset="-122"/>
+                          <a:cs typeface="Pretendard" pitchFamily="34" charset="-120"/>
+                        </a:rPr>
+                        <a:t>수입</a:t>
+                      </a:r>
+                      <a:endParaRPr lang="en-US" sz="900" dirty="0">
+                        <a:latin typeface="Pretendard" charset="0"/>
+                        <a:ea typeface="Pretendard" charset="0"/>
+                        <a:cs typeface="Pretendard" charset="0"/>
+                      </a:endParaRPr>
+                    </a:p>
+                  </a:txBody>
+                  <a:tcPr marL="50800" marR="50800" marT="25400" marB="25400" anchor="ctr">
+                    <a:lnL w="3810" cap="flat" cmpd="sng" algn="ctr">
+                      <a:solidFill>
+                        <a:srgbClr val="CBD5E0"/>
+                      </a:solidFill>
+                      <a:prstDash val="solid"/>
+                      <a:round/>
+                      <a:headEnd type="none" w="med" len="med"/>
+                      <a:tailEnd type="none" w="med" len="med"/>
+                    </a:lnL>
+                    <a:lnR w="3810" cap="flat" cmpd="sng" algn="ctr">
+                      <a:solidFill>
+                        <a:srgbClr val="CBD5E0"/>
+                      </a:solidFill>
+                      <a:prstDash val="solid"/>
+                      <a:round/>
+                      <a:headEnd type="none" w="med" len="med"/>
+                      <a:tailEnd type="none" w="med" len="med"/>
+                    </a:lnR>
+                    <a:lnT w="3810" cap="flat" cmpd="sng" algn="ctr">
+                      <a:solidFill>
+                        <a:srgbClr val="CBD5E0"/>
+                      </a:solidFill>
+                      <a:prstDash val="solid"/>
+                      <a:round/>
+                      <a:headEnd type="none" w="med" len="med"/>
+                      <a:tailEnd type="none" w="med" len="med"/>
+                    </a:lnT>
+                    <a:lnB w="3810" cap="flat" cmpd="sng" algn="ctr">
+                      <a:solidFill>
+                        <a:srgbClr val="CBD5E0"/>
+                      </a:solidFill>
+                      <a:prstDash val="solid"/>
+                      <a:round/>
+                      <a:headEnd type="none" w="med" len="med"/>
+                      <a:tailEnd type="none" w="med" len="med"/>
+                    </a:lnB>
+                    <a:solidFill>
+                      <a:srgbClr val="F7FAFC"/>
+                    </a:solidFill>
+                  </a:tcPr>
+                </a:tc>
+                <a:tc>
+                  <a:txBody>
+                    <a:bodyPr/>
+                    <a:lstStyle/>
+                    <a:p>
+                      <a:pPr indent="0" marL="0">
+                        <a:buNone/>
+                      </a:pPr>
+                      <a:r>
+                        <a:rPr lang="en-US" sz="900" dirty="0">
+                          <a:solidFill>
+                            <a:srgbClr val="10161F"/>
+                          </a:solidFill>
+                          <a:latin typeface="Pretendard" pitchFamily="34" charset="0"/>
+                          <a:ea typeface="Pretendard" pitchFamily="34" charset="-122"/>
+                          <a:cs typeface="Pretendard" pitchFamily="34" charset="-120"/>
+                        </a:rPr>
+                        <a:t>약 </a:t>
+                      </a:r>
+                      <a:pPr indent="0" marL="0">
+                        <a:buNone/>
+                      </a:pPr>
+                      <a:r>
+                        <a:rPr lang="en-US" sz="900" dirty="0">
+                          <a:solidFill>
+                            <a:srgbClr val="10161F"/>
+                          </a:solidFill>
+                          <a:latin typeface="Pretendard" pitchFamily="34" charset="0"/>
+                          <a:ea typeface="Pretendard" pitchFamily="34" charset="-122"/>
+                          <a:cs typeface="Pretendard" pitchFamily="34" charset="-120"/>
+                        </a:rPr>
+                        <a:t>2.8억 </a:t>
+                      </a:r>
+                      <a:pPr indent="0" marL="0">
+                        <a:buNone/>
+                      </a:pPr>
+                      <a:r>
+                        <a:rPr lang="en-US" sz="900" dirty="0">
+                          <a:solidFill>
+                            <a:srgbClr val="10161F"/>
+                          </a:solidFill>
+                          <a:latin typeface="Pretendard" pitchFamily="34" charset="0"/>
+                          <a:ea typeface="Pretendard" pitchFamily="34" charset="-122"/>
+                          <a:cs typeface="Pretendard" pitchFamily="34" charset="-120"/>
+                        </a:rPr>
+                        <a:t>원/년</a:t>
+                      </a:r>
+                      <a:endParaRPr lang="en-US" sz="900" dirty="0">
+                        <a:latin typeface="Pretendard" charset="0"/>
+                        <a:ea typeface="Pretendard" charset="0"/>
+                        <a:cs typeface="Pretendard" charset="0"/>
+                      </a:endParaRPr>
+                    </a:p>
+                  </a:txBody>
+                  <a:tcPr marL="50800" marR="50800" marT="25400" marB="25400" anchor="ctr">
+                    <a:lnL w="3810" cap="flat" cmpd="sng" algn="ctr">
+                      <a:solidFill>
+                        <a:srgbClr val="CBD5E0"/>
+                      </a:solidFill>
+                      <a:prstDash val="solid"/>
+                      <a:round/>
+                      <a:headEnd type="none" w="med" len="med"/>
+                      <a:tailEnd type="none" w="med" len="med"/>
+                    </a:lnL>
+                    <a:lnR w="3810" cap="flat" cmpd="sng" algn="ctr">
+                      <a:solidFill>
+                        <a:srgbClr val="CBD5E0"/>
+                      </a:solidFill>
+                      <a:prstDash val="solid"/>
+                      <a:round/>
+                      <a:headEnd type="none" w="med" len="med"/>
+                      <a:tailEnd type="none" w="med" len="med"/>
+                    </a:lnR>
+                    <a:lnT w="3810" cap="flat" cmpd="sng" algn="ctr">
+                      <a:solidFill>
+                        <a:srgbClr val="CBD5E0"/>
+                      </a:solidFill>
+                      <a:prstDash val="solid"/>
+                      <a:round/>
+                      <a:headEnd type="none" w="med" len="med"/>
+                      <a:tailEnd type="none" w="med" len="med"/>
+                    </a:lnT>
+                    <a:lnB w="3810" cap="flat" cmpd="sng" algn="ctr">
+                      <a:solidFill>
+                        <a:srgbClr val="CBD5E0"/>
+                      </a:solidFill>
+                      <a:prstDash val="solid"/>
+                      <a:round/>
+                      <a:headEnd type="none" w="med" len="med"/>
+                      <a:tailEnd type="none" w="med" len="med"/>
+                    </a:lnB>
+                    <a:solidFill>
+                      <a:srgbClr val="F7FAFC"/>
+                    </a:solidFill>
+                  </a:tcPr>
+                </a:tc>
+                <a:tc>
+                  <a:txBody>
+                    <a:bodyPr/>
+                    <a:lstStyle/>
+                    <a:p>
+                      <a:pPr indent="0" marL="0">
+                        <a:buNone/>
+                      </a:pPr>
+                      <a:r>
+                        <a:rPr lang="en-US" sz="900" dirty="0">
+                          <a:solidFill>
+                            <a:srgbClr val="10161F"/>
+                          </a:solidFill>
+                          <a:latin typeface="Pretendard" pitchFamily="34" charset="0"/>
+                          <a:ea typeface="Pretendard" pitchFamily="34" charset="-122"/>
+                          <a:cs typeface="Pretendard" pitchFamily="34" charset="-120"/>
+                        </a:rPr>
+                        <a:t>연간 </a:t>
+                      </a:r>
+                      <a:pPr indent="0" marL="0">
+                        <a:buNone/>
+                      </a:pPr>
+                      <a:r>
+                        <a:rPr lang="en-US" sz="900" dirty="0">
+                          <a:solidFill>
+                            <a:srgbClr val="10161F"/>
+                          </a:solidFill>
+                          <a:latin typeface="Pretendard" pitchFamily="34" charset="0"/>
+                          <a:ea typeface="Pretendard" pitchFamily="34" charset="-122"/>
+                          <a:cs typeface="Pretendard" pitchFamily="34" charset="-120"/>
+                        </a:rPr>
+                        <a:t>총 </a:t>
+                      </a:r>
+                      <a:pPr indent="0" marL="0">
+                        <a:buNone/>
+                      </a:pPr>
+                      <a:r>
+                        <a:rPr lang="en-US" sz="900" dirty="0">
+                          <a:solidFill>
+                            <a:srgbClr val="10161F"/>
+                          </a:solidFill>
+                          <a:latin typeface="Pretendard" pitchFamily="34" charset="0"/>
+                          <a:ea typeface="Pretendard" pitchFamily="34" charset="-122"/>
+                          <a:cs typeface="Pretendard" pitchFamily="34" charset="-120"/>
+                        </a:rPr>
+                        <a:t>임대료 </a:t>
+                      </a:r>
+                      <a:pPr indent="0" marL="0">
+                        <a:buNone/>
+                      </a:pPr>
+                      <a:r>
+                        <a:rPr lang="en-US" sz="900" dirty="0">
+                          <a:solidFill>
+                            <a:srgbClr val="10161F"/>
+                          </a:solidFill>
+                          <a:latin typeface="Pretendard" pitchFamily="34" charset="0"/>
+                          <a:ea typeface="Pretendard" pitchFamily="34" charset="-122"/>
+                          <a:cs typeface="Pretendard" pitchFamily="34" charset="-120"/>
+                        </a:rPr>
+                        <a:t>수입</a:t>
+                      </a:r>
+                      <a:endParaRPr lang="en-US" sz="900" dirty="0">
+                        <a:latin typeface="Pretendard" charset="0"/>
+                        <a:ea typeface="Pretendard" charset="0"/>
+                        <a:cs typeface="Pretendard" charset="0"/>
+                      </a:endParaRPr>
+                    </a:p>
+                  </a:txBody>
+                  <a:tcPr marL="50800" marR="50800" marT="25400" marB="25400" anchor="ctr">
+                    <a:lnL w="3810" cap="flat" cmpd="sng" algn="ctr">
+                      <a:solidFill>
+                        <a:srgbClr val="CBD5E0"/>
+                      </a:solidFill>
+                      <a:prstDash val="solid"/>
+                      <a:round/>
+                      <a:headEnd type="none" w="med" len="med"/>
+                      <a:tailEnd type="none" w="med" len="med"/>
+                    </a:lnL>
+                    <a:lnR w="3810" cap="flat" cmpd="sng" algn="ctr">
+                      <a:solidFill>
+                        <a:srgbClr val="CBD5E0"/>
+                      </a:solidFill>
+                      <a:prstDash val="solid"/>
+                      <a:round/>
+                      <a:headEnd type="none" w="med" len="med"/>
+                      <a:tailEnd type="none" w="med" len="med"/>
+                    </a:lnR>
+                    <a:lnT w="3810" cap="flat" cmpd="sng" algn="ctr">
+                      <a:solidFill>
+                        <a:srgbClr val="CBD5E0"/>
+                      </a:solidFill>
+                      <a:prstDash val="solid"/>
+                      <a:round/>
+                      <a:headEnd type="none" w="med" len="med"/>
+                      <a:tailEnd type="none" w="med" len="med"/>
+                    </a:lnT>
+                    <a:lnB w="3810" cap="flat" cmpd="sng" algn="ctr">
+                      <a:solidFill>
+                        <a:srgbClr val="CBD5E0"/>
+                      </a:solidFill>
+                      <a:prstDash val="solid"/>
+                      <a:round/>
+                      <a:headEnd type="none" w="med" len="med"/>
+                      <a:tailEnd type="none" w="med" len="med"/>
+                    </a:lnB>
+                    <a:solidFill>
+                      <a:srgbClr val="F7FAFC"/>
+                    </a:solidFill>
+                  </a:tcPr>
+                </a:tc>
+              </a:tr>
+              <a:tr h="347472">
+                <a:tc>
+                  <a:txBody>
+                    <a:bodyPr/>
+                    <a:lstStyle/>
+                    <a:p>
+                      <a:pPr indent="0" marL="0">
+                        <a:buNone/>
+                      </a:pPr>
+                      <a:r>
+                        <a:rPr lang="en-US" sz="900" b="1" dirty="0">
+                          <a:solidFill>
+                            <a:srgbClr val="10161F"/>
+                          </a:solidFill>
+                          <a:latin typeface="Pretendard" pitchFamily="34" charset="0"/>
+                          <a:ea typeface="Pretendard" pitchFamily="34" charset="-122"/>
+                          <a:cs typeface="Pretendard" pitchFamily="34" charset="-120"/>
+                        </a:rPr>
+                        <a:t>보증금 </a:t>
+                      </a:r>
+                      <a:pPr indent="0" marL="0">
+                        <a:buNone/>
+                      </a:pPr>
+                      <a:r>
+                        <a:rPr lang="en-US" sz="900" b="1" dirty="0">
+                          <a:solidFill>
+                            <a:srgbClr val="10161F"/>
+                          </a:solidFill>
+                          <a:latin typeface="Pretendard" pitchFamily="34" charset="0"/>
+                          <a:ea typeface="Pretendard" pitchFamily="34" charset="-122"/>
+                          <a:cs typeface="Pretendard" pitchFamily="34" charset="-120"/>
+                        </a:rPr>
+                        <a:t>총액</a:t>
+                      </a:r>
+                      <a:endParaRPr lang="en-US" sz="900" dirty="0">
+                        <a:latin typeface="Pretendard" charset="0"/>
+                        <a:ea typeface="Pretendard" charset="0"/>
+                        <a:cs typeface="Pretendard" charset="0"/>
+                      </a:endParaRPr>
+                    </a:p>
+                  </a:txBody>
+                  <a:tcPr marL="50800" marR="50800" marT="25400" marB="25400" anchor="ctr">
+                    <a:lnL w="3810" cap="flat" cmpd="sng" algn="ctr">
+                      <a:solidFill>
+                        <a:srgbClr val="CBD5E0"/>
+                      </a:solidFill>
+                      <a:prstDash val="solid"/>
+                      <a:round/>
+                      <a:headEnd type="none" w="med" len="med"/>
+                      <a:tailEnd type="none" w="med" len="med"/>
+                    </a:lnL>
+                    <a:lnR w="3810" cap="flat" cmpd="sng" algn="ctr">
+                      <a:solidFill>
+                        <a:srgbClr val="CBD5E0"/>
+                      </a:solidFill>
+                      <a:prstDash val="solid"/>
+                      <a:round/>
+                      <a:headEnd type="none" w="med" len="med"/>
+                      <a:tailEnd type="none" w="med" len="med"/>
+                    </a:lnR>
+                    <a:lnT w="3810" cap="flat" cmpd="sng" algn="ctr">
+                      <a:solidFill>
+                        <a:srgbClr val="CBD5E0"/>
+                      </a:solidFill>
+                      <a:prstDash val="solid"/>
+                      <a:round/>
+                      <a:headEnd type="none" w="med" len="med"/>
+                      <a:tailEnd type="none" w="med" len="med"/>
+                    </a:lnT>
+                    <a:lnB w="3810" cap="flat" cmpd="sng" algn="ctr">
+                      <a:solidFill>
+                        <a:srgbClr val="CBD5E0"/>
+                      </a:solidFill>
+                      <a:prstDash val="solid"/>
+                      <a:round/>
+                      <a:headEnd type="none" w="med" len="med"/>
+                      <a:tailEnd type="none" w="med" len="med"/>
+                    </a:lnB>
+                    <a:solidFill>
+                      <a:srgbClr val="FFFFFF"/>
+                    </a:solidFill>
+                  </a:tcPr>
+                </a:tc>
+                <a:tc>
+                  <a:txBody>
+                    <a:bodyPr/>
+                    <a:lstStyle/>
+                    <a:p>
+                      <a:pPr indent="0" marL="0">
+                        <a:buNone/>
+                      </a:pPr>
+                      <a:r>
+                        <a:rPr lang="en-US" sz="900" dirty="0">
+                          <a:solidFill>
+                            <a:srgbClr val="10161F"/>
+                          </a:solidFill>
+                          <a:latin typeface="Pretendard" pitchFamily="34" charset="0"/>
+                          <a:ea typeface="Pretendard" pitchFamily="34" charset="-122"/>
+                          <a:cs typeface="Pretendard" pitchFamily="34" charset="-120"/>
+                        </a:rPr>
+                        <a:t>약 </a:t>
+                      </a:r>
+                      <a:pPr indent="0" marL="0">
+                        <a:buNone/>
+                      </a:pPr>
+                      <a:r>
+                        <a:rPr lang="en-US" sz="900" dirty="0">
+                          <a:solidFill>
+                            <a:srgbClr val="10161F"/>
+                          </a:solidFill>
+                          <a:latin typeface="Pretendard" pitchFamily="34" charset="0"/>
+                          <a:ea typeface="Pretendard" pitchFamily="34" charset="-122"/>
+                          <a:cs typeface="Pretendard" pitchFamily="34" charset="-120"/>
+                        </a:rPr>
+                        <a:t>3.0억 </a:t>
+                      </a:r>
+                      <a:pPr indent="0" marL="0">
+                        <a:buNone/>
+                      </a:pPr>
+                      <a:r>
+                        <a:rPr lang="en-US" sz="900" dirty="0">
+                          <a:solidFill>
+                            <a:srgbClr val="10161F"/>
+                          </a:solidFill>
+                          <a:latin typeface="Pretendard" pitchFamily="34" charset="0"/>
+                          <a:ea typeface="Pretendard" pitchFamily="34" charset="-122"/>
+                          <a:cs typeface="Pretendard" pitchFamily="34" charset="-120"/>
+                        </a:rPr>
+                        <a:t>원</a:t>
+                      </a:r>
+                      <a:endParaRPr lang="en-US" sz="900" dirty="0">
+                        <a:latin typeface="Pretendard" charset="0"/>
+                        <a:ea typeface="Pretendard" charset="0"/>
+                        <a:cs typeface="Pretendard" charset="0"/>
+                      </a:endParaRPr>
+                    </a:p>
+                  </a:txBody>
+                  <a:tcPr marL="50800" marR="50800" marT="25400" marB="25400" anchor="ctr">
+                    <a:lnL w="3810" cap="flat" cmpd="sng" algn="ctr">
+                      <a:solidFill>
+                        <a:srgbClr val="CBD5E0"/>
+                      </a:solidFill>
+                      <a:prstDash val="solid"/>
+                      <a:round/>
+                      <a:headEnd type="none" w="med" len="med"/>
+                      <a:tailEnd type="none" w="med" len="med"/>
+                    </a:lnL>
+                    <a:lnR w="3810" cap="flat" cmpd="sng" algn="ctr">
+                      <a:solidFill>
+                        <a:srgbClr val="CBD5E0"/>
+                      </a:solidFill>
+                      <a:prstDash val="solid"/>
+                      <a:round/>
+                      <a:headEnd type="none" w="med" len="med"/>
+                      <a:tailEnd type="none" w="med" len="med"/>
+                    </a:lnR>
+                    <a:lnT w="3810" cap="flat" cmpd="sng" algn="ctr">
+                      <a:solidFill>
+                        <a:srgbClr val="CBD5E0"/>
+                      </a:solidFill>
+                      <a:prstDash val="solid"/>
+                      <a:round/>
+                      <a:headEnd type="none" w="med" len="med"/>
+                      <a:tailEnd type="none" w="med" len="med"/>
+                    </a:lnT>
+                    <a:lnB w="3810" cap="flat" cmpd="sng" algn="ctr">
+                      <a:solidFill>
+                        <a:srgbClr val="CBD5E0"/>
+                      </a:solidFill>
+                      <a:prstDash val="solid"/>
+                      <a:round/>
+                      <a:headEnd type="none" w="med" len="med"/>
+                      <a:tailEnd type="none" w="med" len="med"/>
+                    </a:lnB>
+                    <a:solidFill>
+                      <a:srgbClr val="FFFFFF"/>
+                    </a:solidFill>
+                  </a:tcPr>
+                </a:tc>
+                <a:tc>
+                  <a:txBody>
+                    <a:bodyPr/>
+                    <a:lstStyle/>
+                    <a:p>
+                      <a:pPr indent="0" marL="0">
+                        <a:buNone/>
+                      </a:pPr>
+                      <a:r>
+                        <a:rPr lang="en-US" sz="900" dirty="0">
+                          <a:solidFill>
+                            <a:srgbClr val="10161F"/>
+                          </a:solidFill>
+                          <a:latin typeface="Pretendard" pitchFamily="34" charset="0"/>
+                          <a:ea typeface="Pretendard" pitchFamily="34" charset="-122"/>
+                          <a:cs typeface="Pretendard" pitchFamily="34" charset="-120"/>
+                        </a:rPr>
+                        <a:t>임차인 </a:t>
+                      </a:r>
+                      <a:pPr indent="0" marL="0">
+                        <a:buNone/>
+                      </a:pPr>
+                      <a:r>
+                        <a:rPr lang="en-US" sz="900" dirty="0">
+                          <a:solidFill>
+                            <a:srgbClr val="10161F"/>
+                          </a:solidFill>
+                          <a:latin typeface="Pretendard" pitchFamily="34" charset="0"/>
+                          <a:ea typeface="Pretendard" pitchFamily="34" charset="-122"/>
+                          <a:cs typeface="Pretendard" pitchFamily="34" charset="-120"/>
+                        </a:rPr>
+                        <a:t>보증금 </a:t>
+                      </a:r>
+                      <a:pPr indent="0" marL="0">
+                        <a:buNone/>
+                      </a:pPr>
+                      <a:r>
+                        <a:rPr lang="en-US" sz="900" dirty="0">
+                          <a:solidFill>
+                            <a:srgbClr val="10161F"/>
+                          </a:solidFill>
+                          <a:latin typeface="Pretendard" pitchFamily="34" charset="0"/>
+                          <a:ea typeface="Pretendard" pitchFamily="34" charset="-122"/>
+                          <a:cs typeface="Pretendard" pitchFamily="34" charset="-120"/>
+                        </a:rPr>
+                        <a:t>합계</a:t>
+                      </a:r>
+                      <a:endParaRPr lang="en-US" sz="900" dirty="0">
+                        <a:latin typeface="Pretendard" charset="0"/>
+                        <a:ea typeface="Pretendard" charset="0"/>
+                        <a:cs typeface="Pretendard" charset="0"/>
+                      </a:endParaRPr>
+                    </a:p>
+                  </a:txBody>
+                  <a:tcPr marL="50800" marR="50800" marT="25400" marB="25400" anchor="ctr">
+                    <a:lnL w="3810" cap="flat" cmpd="sng" algn="ctr">
+                      <a:solidFill>
+                        <a:srgbClr val="CBD5E0"/>
+                      </a:solidFill>
+                      <a:prstDash val="solid"/>
+                      <a:round/>
+                      <a:headEnd type="none" w="med" len="med"/>
+                      <a:tailEnd type="none" w="med" len="med"/>
+                    </a:lnL>
+                    <a:lnR w="3810" cap="flat" cmpd="sng" algn="ctr">
+                      <a:solidFill>
+                        <a:srgbClr val="CBD5E0"/>
+                      </a:solidFill>
+                      <a:prstDash val="solid"/>
+                      <a:round/>
+                      <a:headEnd type="none" w="med" len="med"/>
+                      <a:tailEnd type="none" w="med" len="med"/>
+                    </a:lnR>
+                    <a:lnT w="3810" cap="flat" cmpd="sng" algn="ctr">
+                      <a:solidFill>
+                        <a:srgbClr val="CBD5E0"/>
+                      </a:solidFill>
+                      <a:prstDash val="solid"/>
+                      <a:round/>
+                      <a:headEnd type="none" w="med" len="med"/>
+                      <a:tailEnd type="none" w="med" len="med"/>
+                    </a:lnT>
+                    <a:lnB w="3810" cap="flat" cmpd="sng" algn="ctr">
+                      <a:solidFill>
+                        <a:srgbClr val="CBD5E0"/>
+                      </a:solidFill>
+                      <a:prstDash val="solid"/>
+                      <a:round/>
+                      <a:headEnd type="none" w="med" len="med"/>
+                      <a:tailEnd type="none" w="med" len="med"/>
+                    </a:lnB>
+                    <a:solidFill>
+                      <a:srgbClr val="FFFFFF"/>
+                    </a:solidFill>
+                  </a:tcPr>
+                </a:tc>
+              </a:tr>
+              <a:tr h="347472">
+                <a:tc>
+                  <a:txBody>
+                    <a:bodyPr/>
+                    <a:lstStyle/>
+                    <a:p>
+                      <a:pPr indent="0" marL="0">
+                        <a:buNone/>
+                      </a:pPr>
+                      <a:r>
+                        <a:rPr lang="en-US" sz="900" b="1" dirty="0">
+                          <a:solidFill>
+                            <a:srgbClr val="10161F"/>
+                          </a:solidFill>
+                          <a:latin typeface="Pretendard" pitchFamily="34" charset="0"/>
+                          <a:ea typeface="Pretendard" pitchFamily="34" charset="-122"/>
+                          <a:cs typeface="Pretendard" pitchFamily="34" charset="-120"/>
+                        </a:rPr>
+                        <a:t>임차인 </a:t>
+                      </a:r>
+                      <a:pPr indent="0" marL="0">
+                        <a:buNone/>
+                      </a:pPr>
+                      <a:r>
+                        <a:rPr lang="en-US" sz="900" b="1" dirty="0">
+                          <a:solidFill>
+                            <a:srgbClr val="10161F"/>
+                          </a:solidFill>
+                          <a:latin typeface="Pretendard" pitchFamily="34" charset="0"/>
+                          <a:ea typeface="Pretendard" pitchFamily="34" charset="-122"/>
+                          <a:cs typeface="Pretendard" pitchFamily="34" charset="-120"/>
+                        </a:rPr>
+                        <a:t>정보</a:t>
+                      </a:r>
+                      <a:endParaRPr lang="en-US" sz="900" dirty="0">
+                        <a:latin typeface="Pretendard" charset="0"/>
+                        <a:ea typeface="Pretendard" charset="0"/>
+                        <a:cs typeface="Pretendard" charset="0"/>
+                      </a:endParaRPr>
+                    </a:p>
+                  </a:txBody>
+                  <a:tcPr marL="50800" marR="50800" marT="25400" marB="25400" anchor="ctr">
+                    <a:lnL w="3810" cap="flat" cmpd="sng" algn="ctr">
+                      <a:solidFill>
+                        <a:srgbClr val="CBD5E0"/>
+                      </a:solidFill>
+                      <a:prstDash val="solid"/>
+                      <a:round/>
+                      <a:headEnd type="none" w="med" len="med"/>
+                      <a:tailEnd type="none" w="med" len="med"/>
+                    </a:lnL>
+                    <a:lnR w="3810" cap="flat" cmpd="sng" algn="ctr">
+                      <a:solidFill>
+                        <a:srgbClr val="CBD5E0"/>
+                      </a:solidFill>
+                      <a:prstDash val="solid"/>
+                      <a:round/>
+                      <a:headEnd type="none" w="med" len="med"/>
+                      <a:tailEnd type="none" w="med" len="med"/>
+                    </a:lnR>
+                    <a:lnT w="3810" cap="flat" cmpd="sng" algn="ctr">
+                      <a:solidFill>
+                        <a:srgbClr val="CBD5E0"/>
+                      </a:solidFill>
+                      <a:prstDash val="solid"/>
+                      <a:round/>
+                      <a:headEnd type="none" w="med" len="med"/>
+                      <a:tailEnd type="none" w="med" len="med"/>
+                    </a:lnT>
+                    <a:lnB w="3810" cap="flat" cmpd="sng" algn="ctr">
+                      <a:solidFill>
+                        <a:srgbClr val="CBD5E0"/>
+                      </a:solidFill>
+                      <a:prstDash val="solid"/>
+                      <a:round/>
+                      <a:headEnd type="none" w="med" len="med"/>
+                      <a:tailEnd type="none" w="med" len="med"/>
+                    </a:lnB>
+                    <a:solidFill>
+                      <a:srgbClr val="F7FAFC"/>
+                    </a:solidFill>
+                  </a:tcPr>
+                </a:tc>
+                <a:tc>
+                  <a:txBody>
+                    <a:bodyPr/>
+                    <a:lstStyle/>
+                    <a:p>
+                      <a:pPr indent="0" marL="0">
+                        <a:buNone/>
+                      </a:pPr>
+                      <a:r>
+                        <a:rPr lang="en-US" sz="900" dirty="0">
+                          <a:solidFill>
+                            <a:srgbClr val="10161F"/>
+                          </a:solidFill>
+                          <a:latin typeface="Pretendard" pitchFamily="34" charset="0"/>
+                          <a:ea typeface="Pretendard" pitchFamily="34" charset="-122"/>
+                          <a:cs typeface="Pretendard" pitchFamily="34" charset="-120"/>
+                        </a:rPr>
+                        <a:t>실사 </a:t>
+                      </a:r>
+                      <a:pPr indent="0" marL="0">
+                        <a:buNone/>
+                      </a:pPr>
+                      <a:r>
+                        <a:rPr lang="en-US" sz="900" dirty="0">
+                          <a:solidFill>
+                            <a:srgbClr val="10161F"/>
+                          </a:solidFill>
+                          <a:latin typeface="Pretendard" pitchFamily="34" charset="0"/>
+                          <a:ea typeface="Pretendard" pitchFamily="34" charset="-122"/>
+                          <a:cs typeface="Pretendard" pitchFamily="34" charset="-120"/>
+                        </a:rPr>
+                        <a:t>및 </a:t>
+                      </a:r>
+                      <a:pPr indent="0" marL="0">
+                        <a:buNone/>
+                      </a:pPr>
+                      <a:r>
+                        <a:rPr lang="en-US" sz="900" dirty="0">
+                          <a:solidFill>
+                            <a:srgbClr val="10161F"/>
+                          </a:solidFill>
+                          <a:latin typeface="Pretendard" pitchFamily="34" charset="0"/>
+                          <a:ea typeface="Pretendard" pitchFamily="34" charset="-122"/>
+                          <a:cs typeface="Pretendard" pitchFamily="34" charset="-120"/>
+                        </a:rPr>
+                        <a:t>NDA </a:t>
+                      </a:r>
+                      <a:pPr indent="0" marL="0">
+                        <a:buNone/>
+                      </a:pPr>
+                      <a:r>
+                        <a:rPr lang="en-US" sz="900" dirty="0">
+                          <a:solidFill>
+                            <a:srgbClr val="10161F"/>
+                          </a:solidFill>
+                          <a:latin typeface="Pretendard" pitchFamily="34" charset="0"/>
+                          <a:ea typeface="Pretendard" pitchFamily="34" charset="-122"/>
+                          <a:cs typeface="Pretendard" pitchFamily="34" charset="-120"/>
+                        </a:rPr>
+                        <a:t>체결 </a:t>
+                      </a:r>
+                      <a:pPr indent="0" marL="0">
+                        <a:buNone/>
+                      </a:pPr>
+                      <a:r>
+                        <a:rPr lang="en-US" sz="900" dirty="0">
+                          <a:solidFill>
+                            <a:srgbClr val="10161F"/>
+                          </a:solidFill>
+                          <a:latin typeface="Pretendard" pitchFamily="34" charset="0"/>
+                          <a:ea typeface="Pretendard" pitchFamily="34" charset="-122"/>
+                          <a:cs typeface="Pretendard" pitchFamily="34" charset="-120"/>
+                        </a:rPr>
+                        <a:t>후 </a:t>
+                      </a:r>
+                      <a:pPr indent="0" marL="0">
+                        <a:buNone/>
+                      </a:pPr>
+                      <a:r>
+                        <a:rPr lang="en-US" sz="900" dirty="0">
+                          <a:solidFill>
+                            <a:srgbClr val="10161F"/>
+                          </a:solidFill>
+                          <a:latin typeface="Pretendard" pitchFamily="34" charset="0"/>
+                          <a:ea typeface="Pretendard" pitchFamily="34" charset="-122"/>
+                          <a:cs typeface="Pretendard" pitchFamily="34" charset="-120"/>
+                        </a:rPr>
+                        <a:t>상세 </a:t>
+                      </a:r>
+                      <a:pPr indent="0" marL="0">
+                        <a:buNone/>
+                      </a:pPr>
+                      <a:r>
+                        <a:rPr lang="en-US" sz="900" dirty="0">
+                          <a:solidFill>
+                            <a:srgbClr val="10161F"/>
+                          </a:solidFill>
+                          <a:latin typeface="Pretendard" pitchFamily="34" charset="0"/>
+                          <a:ea typeface="Pretendard" pitchFamily="34" charset="-122"/>
+                          <a:cs typeface="Pretendard" pitchFamily="34" charset="-120"/>
+                        </a:rPr>
+                        <a:t>제공</a:t>
+                      </a:r>
+                      <a:endParaRPr lang="en-US" sz="900" dirty="0">
+                        <a:latin typeface="Pretendard" charset="0"/>
+                        <a:ea typeface="Pretendard" charset="0"/>
+                        <a:cs typeface="Pretendard" charset="0"/>
+                      </a:endParaRPr>
+                    </a:p>
+                  </a:txBody>
+                  <a:tcPr marL="50800" marR="50800" marT="25400" marB="25400" anchor="ctr">
+                    <a:lnL w="3810" cap="flat" cmpd="sng" algn="ctr">
+                      <a:solidFill>
+                        <a:srgbClr val="CBD5E0"/>
+                      </a:solidFill>
+                      <a:prstDash val="solid"/>
+                      <a:round/>
+                      <a:headEnd type="none" w="med" len="med"/>
+                      <a:tailEnd type="none" w="med" len="med"/>
+                    </a:lnL>
+                    <a:lnR w="3810" cap="flat" cmpd="sng" algn="ctr">
+                      <a:solidFill>
+                        <a:srgbClr val="CBD5E0"/>
+                      </a:solidFill>
+                      <a:prstDash val="solid"/>
+                      <a:round/>
+                      <a:headEnd type="none" w="med" len="med"/>
+                      <a:tailEnd type="none" w="med" len="med"/>
+                    </a:lnR>
+                    <a:lnT w="3810" cap="flat" cmpd="sng" algn="ctr">
+                      <a:solidFill>
+                        <a:srgbClr val="CBD5E0"/>
+                      </a:solidFill>
+                      <a:prstDash val="solid"/>
+                      <a:round/>
+                      <a:headEnd type="none" w="med" len="med"/>
+                      <a:tailEnd type="none" w="med" len="med"/>
+                    </a:lnT>
+                    <a:lnB w="3810" cap="flat" cmpd="sng" algn="ctr">
+                      <a:solidFill>
+                        <a:srgbClr val="CBD5E0"/>
+                      </a:solidFill>
+                      <a:prstDash val="solid"/>
+                      <a:round/>
+                      <a:headEnd type="none" w="med" len="med"/>
+                      <a:tailEnd type="none" w="med" len="med"/>
+                    </a:lnB>
+                    <a:solidFill>
+                      <a:srgbClr val="F7FAFC"/>
+                    </a:solidFill>
+                  </a:tcPr>
+                </a:tc>
+                <a:tc>
+                  <a:txBody>
+                    <a:bodyPr/>
+                    <a:lstStyle/>
+                    <a:p>
+                      <a:pPr indent="0" marL="0">
+                        <a:buNone/>
+                      </a:pPr>
+                      <a:r>
+                        <a:rPr lang="en-US" sz="900" dirty="0">
                           <a:solidFill>
                             <a:srgbClr val="10161F"/>
                           </a:solidFill>
@@ -7925,7 +9386,7 @@
                         <a:buNone/>
                       </a:pPr>
                       <a:r>
-                        <a:rPr lang="en-US" sz="1300" dirty="0">
+                        <a:rPr lang="en-US" sz="900" dirty="0">
                           <a:solidFill>
                             <a:srgbClr val="10161F"/>
                           </a:solidFill>
@@ -7939,7 +9400,7 @@
                         <a:buNone/>
                       </a:pPr>
                       <a:r>
-                        <a:rPr lang="en-US" sz="1300" dirty="0">
+                        <a:rPr lang="en-US" sz="900" dirty="0">
                           <a:solidFill>
                             <a:srgbClr val="10161F"/>
                           </a:solidFill>
@@ -7949,7 +9410,1503 @@
                         </a:rPr>
                         <a:t>처리</a:t>
                       </a:r>
-                      <a:endParaRPr lang="en-US" sz="1300" dirty="0">
+                      <a:endParaRPr lang="en-US" sz="900" dirty="0">
+                        <a:latin typeface="Pretendard" charset="0"/>
+                        <a:ea typeface="Pretendard" charset="0"/>
+                        <a:cs typeface="Pretendard" charset="0"/>
+                      </a:endParaRPr>
+                    </a:p>
+                  </a:txBody>
+                  <a:tcPr marL="50800" marR="50800" marT="25400" marB="25400" anchor="ctr">
+                    <a:lnL w="3810" cap="flat" cmpd="sng" algn="ctr">
+                      <a:solidFill>
+                        <a:srgbClr val="CBD5E0"/>
+                      </a:solidFill>
+                      <a:prstDash val="solid"/>
+                      <a:round/>
+                      <a:headEnd type="none" w="med" len="med"/>
+                      <a:tailEnd type="none" w="med" len="med"/>
+                    </a:lnL>
+                    <a:lnR w="3810" cap="flat" cmpd="sng" algn="ctr">
+                      <a:solidFill>
+                        <a:srgbClr val="CBD5E0"/>
+                      </a:solidFill>
+                      <a:prstDash val="solid"/>
+                      <a:round/>
+                      <a:headEnd type="none" w="med" len="med"/>
+                      <a:tailEnd type="none" w="med" len="med"/>
+                    </a:lnR>
+                    <a:lnT w="3810" cap="flat" cmpd="sng" algn="ctr">
+                      <a:solidFill>
+                        <a:srgbClr val="CBD5E0"/>
+                      </a:solidFill>
+                      <a:prstDash val="solid"/>
+                      <a:round/>
+                      <a:headEnd type="none" w="med" len="med"/>
+                      <a:tailEnd type="none" w="med" len="med"/>
+                    </a:lnT>
+                    <a:lnB w="3810" cap="flat" cmpd="sng" algn="ctr">
+                      <a:solidFill>
+                        <a:srgbClr val="CBD5E0"/>
+                      </a:solidFill>
+                      <a:prstDash val="solid"/>
+                      <a:round/>
+                      <a:headEnd type="none" w="med" len="med"/>
+                      <a:tailEnd type="none" w="med" len="med"/>
+                    </a:lnB>
+                    <a:solidFill>
+                      <a:srgbClr val="F7FAFC"/>
+                    </a:solidFill>
+                  </a:tcPr>
+                </a:tc>
+              </a:tr>
+              <a:tr h="347472">
+                <a:tc>
+                  <a:txBody>
+                    <a:bodyPr/>
+                    <a:lstStyle/>
+                    <a:p>
+                      <a:pPr indent="0" marL="0">
+                        <a:buNone/>
+                      </a:pPr>
+                      <a:r>
+                        <a:rPr lang="en-US" sz="900" b="1" dirty="0">
+                          <a:solidFill>
+                            <a:srgbClr val="10161F"/>
+                          </a:solidFill>
+                          <a:latin typeface="Pretendard" pitchFamily="34" charset="0"/>
+                          <a:ea typeface="Pretendard" pitchFamily="34" charset="-122"/>
+                          <a:cs typeface="Pretendard" pitchFamily="34" charset="-120"/>
+                        </a:rPr>
+                        <a:t>층수</a:t>
+                      </a:r>
+                      <a:endParaRPr lang="en-US" sz="900" dirty="0">
+                        <a:latin typeface="Pretendard" charset="0"/>
+                        <a:ea typeface="Pretendard" charset="0"/>
+                        <a:cs typeface="Pretendard" charset="0"/>
+                      </a:endParaRPr>
+                    </a:p>
+                  </a:txBody>
+                  <a:tcPr marL="50800" marR="50800" marT="25400" marB="25400" anchor="ctr">
+                    <a:lnL w="3810" cap="flat" cmpd="sng" algn="ctr">
+                      <a:solidFill>
+                        <a:srgbClr val="CBD5E0"/>
+                      </a:solidFill>
+                      <a:prstDash val="solid"/>
+                      <a:round/>
+                      <a:headEnd type="none" w="med" len="med"/>
+                      <a:tailEnd type="none" w="med" len="med"/>
+                    </a:lnL>
+                    <a:lnR w="3810" cap="flat" cmpd="sng" algn="ctr">
+                      <a:solidFill>
+                        <a:srgbClr val="CBD5E0"/>
+                      </a:solidFill>
+                      <a:prstDash val="solid"/>
+                      <a:round/>
+                      <a:headEnd type="none" w="med" len="med"/>
+                      <a:tailEnd type="none" w="med" len="med"/>
+                    </a:lnR>
+                    <a:lnT w="3810" cap="flat" cmpd="sng" algn="ctr">
+                      <a:solidFill>
+                        <a:srgbClr val="CBD5E0"/>
+                      </a:solidFill>
+                      <a:prstDash val="solid"/>
+                      <a:round/>
+                      <a:headEnd type="none" w="med" len="med"/>
+                      <a:tailEnd type="none" w="med" len="med"/>
+                    </a:lnT>
+                    <a:lnB w="3810" cap="flat" cmpd="sng" algn="ctr">
+                      <a:solidFill>
+                        <a:srgbClr val="CBD5E0"/>
+                      </a:solidFill>
+                      <a:prstDash val="solid"/>
+                      <a:round/>
+                      <a:headEnd type="none" w="med" len="med"/>
+                      <a:tailEnd type="none" w="med" len="med"/>
+                    </a:lnB>
+                    <a:solidFill>
+                      <a:srgbClr val="FFFFFF"/>
+                    </a:solidFill>
+                  </a:tcPr>
+                </a:tc>
+                <a:tc>
+                  <a:txBody>
+                    <a:bodyPr/>
+                    <a:lstStyle/>
+                    <a:p>
+                      <a:pPr indent="0" marL="0">
+                        <a:buNone/>
+                      </a:pPr>
+                      <a:r>
+                        <a:rPr lang="en-US" sz="900" dirty="0">
+                          <a:solidFill>
+                            <a:srgbClr val="10161F"/>
+                          </a:solidFill>
+                          <a:latin typeface="Pretendard" pitchFamily="34" charset="0"/>
+                          <a:ea typeface="Pretendard" pitchFamily="34" charset="-122"/>
+                          <a:cs typeface="Pretendard" pitchFamily="34" charset="-120"/>
+                        </a:rPr>
+                        <a:t>업종</a:t>
+                      </a:r>
+                      <a:endParaRPr lang="en-US" sz="900" dirty="0">
+                        <a:latin typeface="Pretendard" charset="0"/>
+                        <a:ea typeface="Pretendard" charset="0"/>
+                        <a:cs typeface="Pretendard" charset="0"/>
+                      </a:endParaRPr>
+                    </a:p>
+                  </a:txBody>
+                  <a:tcPr marL="50800" marR="50800" marT="25400" marB="25400" anchor="ctr">
+                    <a:lnL w="3810" cap="flat" cmpd="sng" algn="ctr">
+                      <a:solidFill>
+                        <a:srgbClr val="CBD5E0"/>
+                      </a:solidFill>
+                      <a:prstDash val="solid"/>
+                      <a:round/>
+                      <a:headEnd type="none" w="med" len="med"/>
+                      <a:tailEnd type="none" w="med" len="med"/>
+                    </a:lnL>
+                    <a:lnR w="3810" cap="flat" cmpd="sng" algn="ctr">
+                      <a:solidFill>
+                        <a:srgbClr val="CBD5E0"/>
+                      </a:solidFill>
+                      <a:prstDash val="solid"/>
+                      <a:round/>
+                      <a:headEnd type="none" w="med" len="med"/>
+                      <a:tailEnd type="none" w="med" len="med"/>
+                    </a:lnR>
+                    <a:lnT w="3810" cap="flat" cmpd="sng" algn="ctr">
+                      <a:solidFill>
+                        <a:srgbClr val="CBD5E0"/>
+                      </a:solidFill>
+                      <a:prstDash val="solid"/>
+                      <a:round/>
+                      <a:headEnd type="none" w="med" len="med"/>
+                      <a:tailEnd type="none" w="med" len="med"/>
+                    </a:lnT>
+                    <a:lnB w="3810" cap="flat" cmpd="sng" algn="ctr">
+                      <a:solidFill>
+                        <a:srgbClr val="CBD5E0"/>
+                      </a:solidFill>
+                      <a:prstDash val="solid"/>
+                      <a:round/>
+                      <a:headEnd type="none" w="med" len="med"/>
+                      <a:tailEnd type="none" w="med" len="med"/>
+                    </a:lnB>
+                    <a:solidFill>
+                      <a:srgbClr val="FFFFFF"/>
+                    </a:solidFill>
+                  </a:tcPr>
+                </a:tc>
+                <a:tc>
+                  <a:txBody>
+                    <a:bodyPr/>
+                    <a:lstStyle/>
+                    <a:p>
+                      <a:pPr indent="0" marL="0">
+                        <a:buNone/>
+                      </a:pPr>
+                      <a:r>
+                        <a:rPr lang="en-US" sz="900" dirty="0">
+                          <a:solidFill>
+                            <a:srgbClr val="10161F"/>
+                          </a:solidFill>
+                          <a:latin typeface="Pretendard" pitchFamily="34" charset="0"/>
+                          <a:ea typeface="Pretendard" pitchFamily="34" charset="-122"/>
+                          <a:cs typeface="Pretendard" pitchFamily="34" charset="-120"/>
+                        </a:rPr>
+                        <a:t>전용면적</a:t>
+                      </a:r>
+                      <a:endParaRPr lang="en-US" sz="900" dirty="0">
+                        <a:latin typeface="Pretendard" charset="0"/>
+                        <a:ea typeface="Pretendard" charset="0"/>
+                        <a:cs typeface="Pretendard" charset="0"/>
+                      </a:endParaRPr>
+                    </a:p>
+                  </a:txBody>
+                  <a:tcPr marL="50800" marR="50800" marT="25400" marB="25400" anchor="ctr">
+                    <a:lnL w="3810" cap="flat" cmpd="sng" algn="ctr">
+                      <a:solidFill>
+                        <a:srgbClr val="CBD5E0"/>
+                      </a:solidFill>
+                      <a:prstDash val="solid"/>
+                      <a:round/>
+                      <a:headEnd type="none" w="med" len="med"/>
+                      <a:tailEnd type="none" w="med" len="med"/>
+                    </a:lnL>
+                    <a:lnR w="3810" cap="flat" cmpd="sng" algn="ctr">
+                      <a:solidFill>
+                        <a:srgbClr val="CBD5E0"/>
+                      </a:solidFill>
+                      <a:prstDash val="solid"/>
+                      <a:round/>
+                      <a:headEnd type="none" w="med" len="med"/>
+                      <a:tailEnd type="none" w="med" len="med"/>
+                    </a:lnR>
+                    <a:lnT w="3810" cap="flat" cmpd="sng" algn="ctr">
+                      <a:solidFill>
+                        <a:srgbClr val="CBD5E0"/>
+                      </a:solidFill>
+                      <a:prstDash val="solid"/>
+                      <a:round/>
+                      <a:headEnd type="none" w="med" len="med"/>
+                      <a:tailEnd type="none" w="med" len="med"/>
+                    </a:lnT>
+                    <a:lnB w="3810" cap="flat" cmpd="sng" algn="ctr">
+                      <a:solidFill>
+                        <a:srgbClr val="CBD5E0"/>
+                      </a:solidFill>
+                      <a:prstDash val="solid"/>
+                      <a:round/>
+                      <a:headEnd type="none" w="med" len="med"/>
+                      <a:tailEnd type="none" w="med" len="med"/>
+                    </a:lnB>
+                    <a:solidFill>
+                      <a:srgbClr val="FFFFFF"/>
+                    </a:solidFill>
+                  </a:tcPr>
+                </a:tc>
+                <a:tc>
+                  <a:txBody>
+                    <a:bodyPr/>
+                    <a:lstStyle/>
+                    <a:p>
+                      <a:pPr indent="0" marL="0">
+                        <a:buNone/>
+                      </a:pPr>
+                      <a:r>
+                        <a:rPr lang="en-US" sz="900" dirty="0">
+                          <a:solidFill>
+                            <a:srgbClr val="10161F"/>
+                          </a:solidFill>
+                          <a:latin typeface="Pretendard" pitchFamily="34" charset="0"/>
+                          <a:ea typeface="Pretendard" pitchFamily="34" charset="-122"/>
+                          <a:cs typeface="Pretendard" pitchFamily="34" charset="-120"/>
+                        </a:rPr>
+                        <a:t>보증금</a:t>
+                      </a:r>
+                      <a:endParaRPr lang="en-US" sz="900" dirty="0">
+                        <a:latin typeface="Pretendard" charset="0"/>
+                        <a:ea typeface="Pretendard" charset="0"/>
+                        <a:cs typeface="Pretendard" charset="0"/>
+                      </a:endParaRPr>
+                    </a:p>
+                  </a:txBody>
+                  <a:tcPr marL="50800" marR="50800" marT="25400" marB="25400" anchor="ctr">
+                    <a:lnL w="3810" cap="flat" cmpd="sng" algn="ctr">
+                      <a:solidFill>
+                        <a:srgbClr val="CBD5E0"/>
+                      </a:solidFill>
+                      <a:prstDash val="solid"/>
+                      <a:round/>
+                      <a:headEnd type="none" w="med" len="med"/>
+                      <a:tailEnd type="none" w="med" len="med"/>
+                    </a:lnL>
+                    <a:lnR w="3810" cap="flat" cmpd="sng" algn="ctr">
+                      <a:solidFill>
+                        <a:srgbClr val="CBD5E0"/>
+                      </a:solidFill>
+                      <a:prstDash val="solid"/>
+                      <a:round/>
+                      <a:headEnd type="none" w="med" len="med"/>
+                      <a:tailEnd type="none" w="med" len="med"/>
+                    </a:lnR>
+                    <a:lnT w="3810" cap="flat" cmpd="sng" algn="ctr">
+                      <a:solidFill>
+                        <a:srgbClr val="CBD5E0"/>
+                      </a:solidFill>
+                      <a:prstDash val="solid"/>
+                      <a:round/>
+                      <a:headEnd type="none" w="med" len="med"/>
+                      <a:tailEnd type="none" w="med" len="med"/>
+                    </a:lnT>
+                    <a:lnB w="3810" cap="flat" cmpd="sng" algn="ctr">
+                      <a:solidFill>
+                        <a:srgbClr val="CBD5E0"/>
+                      </a:solidFill>
+                      <a:prstDash val="solid"/>
+                      <a:round/>
+                      <a:headEnd type="none" w="med" len="med"/>
+                      <a:tailEnd type="none" w="med" len="med"/>
+                    </a:lnB>
+                    <a:solidFill>
+                      <a:srgbClr val="FFFFFF"/>
+                    </a:solidFill>
+                  </a:tcPr>
+                </a:tc>
+                <a:tc>
+                  <a:txBody>
+                    <a:bodyPr/>
+                    <a:lstStyle/>
+                    <a:p>
+                      <a:pPr indent="0" marL="0">
+                        <a:buNone/>
+                      </a:pPr>
+                      <a:r>
+                        <a:rPr lang="en-US" sz="900" dirty="0">
+                          <a:solidFill>
+                            <a:srgbClr val="10161F"/>
+                          </a:solidFill>
+                          <a:latin typeface="Pretendard" pitchFamily="34" charset="0"/>
+                          <a:ea typeface="Pretendard" pitchFamily="34" charset="-122"/>
+                          <a:cs typeface="Pretendard" pitchFamily="34" charset="-120"/>
+                        </a:rPr>
+                        <a:t>월 </a:t>
+                      </a:r>
+                      <a:pPr indent="0" marL="0">
+                        <a:buNone/>
+                      </a:pPr>
+                      <a:r>
+                        <a:rPr lang="en-US" sz="900" dirty="0">
+                          <a:solidFill>
+                            <a:srgbClr val="10161F"/>
+                          </a:solidFill>
+                          <a:latin typeface="Pretendard" pitchFamily="34" charset="0"/>
+                          <a:ea typeface="Pretendard" pitchFamily="34" charset="-122"/>
+                          <a:cs typeface="Pretendard" pitchFamily="34" charset="-120"/>
+                        </a:rPr>
+                        <a:t>임대료</a:t>
+                      </a:r>
+                      <a:endParaRPr lang="en-US" sz="900" dirty="0">
+                        <a:latin typeface="Pretendard" charset="0"/>
+                        <a:ea typeface="Pretendard" charset="0"/>
+                        <a:cs typeface="Pretendard" charset="0"/>
+                      </a:endParaRPr>
+                    </a:p>
+                  </a:txBody>
+                  <a:tcPr marL="50800" marR="50800" marT="25400" marB="25400" anchor="ctr">
+                    <a:lnL w="3810" cap="flat" cmpd="sng" algn="ctr">
+                      <a:solidFill>
+                        <a:srgbClr val="CBD5E0"/>
+                      </a:solidFill>
+                      <a:prstDash val="solid"/>
+                      <a:round/>
+                      <a:headEnd type="none" w="med" len="med"/>
+                      <a:tailEnd type="none" w="med" len="med"/>
+                    </a:lnL>
+                    <a:lnR w="3810" cap="flat" cmpd="sng" algn="ctr">
+                      <a:solidFill>
+                        <a:srgbClr val="CBD5E0"/>
+                      </a:solidFill>
+                      <a:prstDash val="solid"/>
+                      <a:round/>
+                      <a:headEnd type="none" w="med" len="med"/>
+                      <a:tailEnd type="none" w="med" len="med"/>
+                    </a:lnR>
+                    <a:lnT w="3810" cap="flat" cmpd="sng" algn="ctr">
+                      <a:solidFill>
+                        <a:srgbClr val="CBD5E0"/>
+                      </a:solidFill>
+                      <a:prstDash val="solid"/>
+                      <a:round/>
+                      <a:headEnd type="none" w="med" len="med"/>
+                      <a:tailEnd type="none" w="med" len="med"/>
+                    </a:lnT>
+                    <a:lnB w="3810" cap="flat" cmpd="sng" algn="ctr">
+                      <a:solidFill>
+                        <a:srgbClr val="CBD5E0"/>
+                      </a:solidFill>
+                      <a:prstDash val="solid"/>
+                      <a:round/>
+                      <a:headEnd type="none" w="med" len="med"/>
+                      <a:tailEnd type="none" w="med" len="med"/>
+                    </a:lnB>
+                    <a:solidFill>
+                      <a:srgbClr val="FFFFFF"/>
+                    </a:solidFill>
+                  </a:tcPr>
+                </a:tc>
+                <a:tc>
+                  <a:txBody>
+                    <a:bodyPr/>
+                    <a:lstStyle/>
+                    <a:p>
+                      <a:pPr indent="0" marL="0">
+                        <a:buNone/>
+                      </a:pPr>
+                      <a:r>
+                        <a:rPr lang="en-US" sz="900" dirty="0">
+                          <a:solidFill>
+                            <a:srgbClr val="10161F"/>
+                          </a:solidFill>
+                          <a:latin typeface="Pretendard" pitchFamily="34" charset="0"/>
+                          <a:ea typeface="Pretendard" pitchFamily="34" charset="-122"/>
+                          <a:cs typeface="Pretendard" pitchFamily="34" charset="-120"/>
+                        </a:rPr>
+                        <a:t>관리비</a:t>
+                      </a:r>
+                      <a:endParaRPr lang="en-US" sz="900" dirty="0">
+                        <a:latin typeface="Pretendard" charset="0"/>
+                        <a:ea typeface="Pretendard" charset="0"/>
+                        <a:cs typeface="Pretendard" charset="0"/>
+                      </a:endParaRPr>
+                    </a:p>
+                  </a:txBody>
+                  <a:tcPr marL="50800" marR="50800" marT="25400" marB="25400" anchor="ctr">
+                    <a:lnL w="3810" cap="flat" cmpd="sng" algn="ctr">
+                      <a:solidFill>
+                        <a:srgbClr val="CBD5E0"/>
+                      </a:solidFill>
+                      <a:prstDash val="solid"/>
+                      <a:round/>
+                      <a:headEnd type="none" w="med" len="med"/>
+                      <a:tailEnd type="none" w="med" len="med"/>
+                    </a:lnL>
+                    <a:lnR w="3810" cap="flat" cmpd="sng" algn="ctr">
+                      <a:solidFill>
+                        <a:srgbClr val="CBD5E0"/>
+                      </a:solidFill>
+                      <a:prstDash val="solid"/>
+                      <a:round/>
+                      <a:headEnd type="none" w="med" len="med"/>
+                      <a:tailEnd type="none" w="med" len="med"/>
+                    </a:lnR>
+                    <a:lnT w="3810" cap="flat" cmpd="sng" algn="ctr">
+                      <a:solidFill>
+                        <a:srgbClr val="CBD5E0"/>
+                      </a:solidFill>
+                      <a:prstDash val="solid"/>
+                      <a:round/>
+                      <a:headEnd type="none" w="med" len="med"/>
+                      <a:tailEnd type="none" w="med" len="med"/>
+                    </a:lnT>
+                    <a:lnB w="3810" cap="flat" cmpd="sng" algn="ctr">
+                      <a:solidFill>
+                        <a:srgbClr val="CBD5E0"/>
+                      </a:solidFill>
+                      <a:prstDash val="solid"/>
+                      <a:round/>
+                      <a:headEnd type="none" w="med" len="med"/>
+                      <a:tailEnd type="none" w="med" len="med"/>
+                    </a:lnB>
+                    <a:solidFill>
+                      <a:srgbClr val="FFFFFF"/>
+                    </a:solidFill>
+                  </a:tcPr>
+                </a:tc>
+                <a:tc>
+                  <a:txBody>
+                    <a:bodyPr/>
+                    <a:lstStyle/>
+                    <a:p>
+                      <a:pPr indent="0" marL="0">
+                        <a:buNone/>
+                      </a:pPr>
+                      <a:r>
+                        <a:rPr lang="en-US" sz="900" dirty="0">
+                          <a:solidFill>
+                            <a:srgbClr val="10161F"/>
+                          </a:solidFill>
+                          <a:latin typeface="Pretendard" pitchFamily="34" charset="0"/>
+                          <a:ea typeface="Pretendard" pitchFamily="34" charset="-122"/>
+                          <a:cs typeface="Pretendard" pitchFamily="34" charset="-120"/>
+                        </a:rPr>
+                        <a:t>임대 </a:t>
+                      </a:r>
+                      <a:pPr indent="0" marL="0">
+                        <a:buNone/>
+                      </a:pPr>
+                      <a:r>
+                        <a:rPr lang="en-US" sz="900" dirty="0">
+                          <a:solidFill>
+                            <a:srgbClr val="10161F"/>
+                          </a:solidFill>
+                          <a:latin typeface="Pretendard" pitchFamily="34" charset="0"/>
+                          <a:ea typeface="Pretendard" pitchFamily="34" charset="-122"/>
+                          <a:cs typeface="Pretendard" pitchFamily="34" charset="-120"/>
+                        </a:rPr>
+                        <a:t>만기</a:t>
+                      </a:r>
+                      <a:endParaRPr lang="en-US" sz="900" dirty="0">
+                        <a:latin typeface="Pretendard" charset="0"/>
+                        <a:ea typeface="Pretendard" charset="0"/>
+                        <a:cs typeface="Pretendard" charset="0"/>
+                      </a:endParaRPr>
+                    </a:p>
+                  </a:txBody>
+                  <a:tcPr marL="50800" marR="50800" marT="25400" marB="25400" anchor="ctr">
+                    <a:lnL w="3810" cap="flat" cmpd="sng" algn="ctr">
+                      <a:solidFill>
+                        <a:srgbClr val="CBD5E0"/>
+                      </a:solidFill>
+                      <a:prstDash val="solid"/>
+                      <a:round/>
+                      <a:headEnd type="none" w="med" len="med"/>
+                      <a:tailEnd type="none" w="med" len="med"/>
+                    </a:lnL>
+                    <a:lnR w="3810" cap="flat" cmpd="sng" algn="ctr">
+                      <a:solidFill>
+                        <a:srgbClr val="CBD5E0"/>
+                      </a:solidFill>
+                      <a:prstDash val="solid"/>
+                      <a:round/>
+                      <a:headEnd type="none" w="med" len="med"/>
+                      <a:tailEnd type="none" w="med" len="med"/>
+                    </a:lnR>
+                    <a:lnT w="3810" cap="flat" cmpd="sng" algn="ctr">
+                      <a:solidFill>
+                        <a:srgbClr val="CBD5E0"/>
+                      </a:solidFill>
+                      <a:prstDash val="solid"/>
+                      <a:round/>
+                      <a:headEnd type="none" w="med" len="med"/>
+                      <a:tailEnd type="none" w="med" len="med"/>
+                    </a:lnT>
+                    <a:lnB w="3810" cap="flat" cmpd="sng" algn="ctr">
+                      <a:solidFill>
+                        <a:srgbClr val="CBD5E0"/>
+                      </a:solidFill>
+                      <a:prstDash val="solid"/>
+                      <a:round/>
+                      <a:headEnd type="none" w="med" len="med"/>
+                      <a:tailEnd type="none" w="med" len="med"/>
+                    </a:lnB>
+                    <a:solidFill>
+                      <a:srgbClr val="FFFFFF"/>
+                    </a:solidFill>
+                  </a:tcPr>
+                </a:tc>
+              </a:tr>
+              <a:tr h="347472">
+                <a:tc>
+                  <a:txBody>
+                    <a:bodyPr/>
+                    <a:lstStyle/>
+                    <a:p>
+                      <a:pPr indent="0" marL="0">
+                        <a:buNone/>
+                      </a:pPr>
+                      <a:r>
+                        <a:rPr lang="en-US" sz="900" b="1" dirty="0">
+                          <a:solidFill>
+                            <a:srgbClr val="10161F"/>
+                          </a:solidFill>
+                          <a:latin typeface="Pretendard" pitchFamily="34" charset="0"/>
+                          <a:ea typeface="Pretendard" pitchFamily="34" charset="-122"/>
+                          <a:cs typeface="Pretendard" pitchFamily="34" charset="-120"/>
+                        </a:rPr>
+                        <a:t>B1~2F</a:t>
+                      </a:r>
+                      <a:endParaRPr lang="en-US" sz="900" dirty="0">
+                        <a:latin typeface="Pretendard" charset="0"/>
+                        <a:ea typeface="Pretendard" charset="0"/>
+                        <a:cs typeface="Pretendard" charset="0"/>
+                      </a:endParaRPr>
+                    </a:p>
+                  </a:txBody>
+                  <a:tcPr marL="50800" marR="50800" marT="25400" marB="25400" anchor="ctr">
+                    <a:lnL w="3810" cap="flat" cmpd="sng" algn="ctr">
+                      <a:solidFill>
+                        <a:srgbClr val="CBD5E0"/>
+                      </a:solidFill>
+                      <a:prstDash val="solid"/>
+                      <a:round/>
+                      <a:headEnd type="none" w="med" len="med"/>
+                      <a:tailEnd type="none" w="med" len="med"/>
+                    </a:lnL>
+                    <a:lnR w="3810" cap="flat" cmpd="sng" algn="ctr">
+                      <a:solidFill>
+                        <a:srgbClr val="CBD5E0"/>
+                      </a:solidFill>
+                      <a:prstDash val="solid"/>
+                      <a:round/>
+                      <a:headEnd type="none" w="med" len="med"/>
+                      <a:tailEnd type="none" w="med" len="med"/>
+                    </a:lnR>
+                    <a:lnT w="3810" cap="flat" cmpd="sng" algn="ctr">
+                      <a:solidFill>
+                        <a:srgbClr val="CBD5E0"/>
+                      </a:solidFill>
+                      <a:prstDash val="solid"/>
+                      <a:round/>
+                      <a:headEnd type="none" w="med" len="med"/>
+                      <a:tailEnd type="none" w="med" len="med"/>
+                    </a:lnT>
+                    <a:lnB w="3810" cap="flat" cmpd="sng" algn="ctr">
+                      <a:solidFill>
+                        <a:srgbClr val="CBD5E0"/>
+                      </a:solidFill>
+                      <a:prstDash val="solid"/>
+                      <a:round/>
+                      <a:headEnd type="none" w="med" len="med"/>
+                      <a:tailEnd type="none" w="med" len="med"/>
+                    </a:lnB>
+                    <a:solidFill>
+                      <a:srgbClr val="F7FAFC"/>
+                    </a:solidFill>
+                  </a:tcPr>
+                </a:tc>
+                <a:tc>
+                  <a:txBody>
+                    <a:bodyPr/>
+                    <a:lstStyle/>
+                    <a:p>
+                      <a:pPr indent="0" marL="0">
+                        <a:buNone/>
+                      </a:pPr>
+                      <a:r>
+                        <a:rPr lang="en-US" sz="900" dirty="0">
+                          <a:solidFill>
+                            <a:srgbClr val="10161F"/>
+                          </a:solidFill>
+                          <a:latin typeface="Pretendard" pitchFamily="34" charset="0"/>
+                          <a:ea typeface="Pretendard" pitchFamily="34" charset="-122"/>
+                          <a:cs typeface="Pretendard" pitchFamily="34" charset="-120"/>
+                        </a:rPr>
+                        <a:t>F&amp;B </a:t>
+                      </a:r>
+                      <a:pPr indent="0" marL="0">
+                        <a:buNone/>
+                      </a:pPr>
+                      <a:r>
+                        <a:rPr lang="en-US" sz="900" dirty="0">
+                          <a:solidFill>
+                            <a:srgbClr val="10161F"/>
+                          </a:solidFill>
+                          <a:latin typeface="Pretendard" pitchFamily="34" charset="0"/>
+                          <a:ea typeface="Pretendard" pitchFamily="34" charset="-122"/>
+                          <a:cs typeface="Pretendard" pitchFamily="34" charset="-120"/>
+                        </a:rPr>
+                        <a:t>브런치펍</a:t>
+                      </a:r>
+                      <a:endParaRPr lang="en-US" sz="900" dirty="0">
+                        <a:latin typeface="Pretendard" charset="0"/>
+                        <a:ea typeface="Pretendard" charset="0"/>
+                        <a:cs typeface="Pretendard" charset="0"/>
+                      </a:endParaRPr>
+                    </a:p>
+                  </a:txBody>
+                  <a:tcPr marL="50800" marR="50800" marT="25400" marB="25400" anchor="ctr">
+                    <a:lnL w="3810" cap="flat" cmpd="sng" algn="ctr">
+                      <a:solidFill>
+                        <a:srgbClr val="CBD5E0"/>
+                      </a:solidFill>
+                      <a:prstDash val="solid"/>
+                      <a:round/>
+                      <a:headEnd type="none" w="med" len="med"/>
+                      <a:tailEnd type="none" w="med" len="med"/>
+                    </a:lnL>
+                    <a:lnR w="3810" cap="flat" cmpd="sng" algn="ctr">
+                      <a:solidFill>
+                        <a:srgbClr val="CBD5E0"/>
+                      </a:solidFill>
+                      <a:prstDash val="solid"/>
+                      <a:round/>
+                      <a:headEnd type="none" w="med" len="med"/>
+                      <a:tailEnd type="none" w="med" len="med"/>
+                    </a:lnR>
+                    <a:lnT w="3810" cap="flat" cmpd="sng" algn="ctr">
+                      <a:solidFill>
+                        <a:srgbClr val="CBD5E0"/>
+                      </a:solidFill>
+                      <a:prstDash val="solid"/>
+                      <a:round/>
+                      <a:headEnd type="none" w="med" len="med"/>
+                      <a:tailEnd type="none" w="med" len="med"/>
+                    </a:lnT>
+                    <a:lnB w="3810" cap="flat" cmpd="sng" algn="ctr">
+                      <a:solidFill>
+                        <a:srgbClr val="CBD5E0"/>
+                      </a:solidFill>
+                      <a:prstDash val="solid"/>
+                      <a:round/>
+                      <a:headEnd type="none" w="med" len="med"/>
+                      <a:tailEnd type="none" w="med" len="med"/>
+                    </a:lnB>
+                    <a:solidFill>
+                      <a:srgbClr val="F7FAFC"/>
+                    </a:solidFill>
+                  </a:tcPr>
+                </a:tc>
+                <a:tc>
+                  <a:txBody>
+                    <a:bodyPr/>
+                    <a:lstStyle/>
+                    <a:p>
+                      <a:pPr indent="0" marL="0">
+                        <a:buNone/>
+                      </a:pPr>
+                      <a:r>
+                        <a:rPr lang="en-US" sz="900" dirty="0">
+                          <a:solidFill>
+                            <a:srgbClr val="10161F"/>
+                          </a:solidFill>
+                          <a:latin typeface="Pretendard" pitchFamily="34" charset="0"/>
+                          <a:ea typeface="Pretendard" pitchFamily="34" charset="-122"/>
+                          <a:cs typeface="Pretendard" pitchFamily="34" charset="-120"/>
+                        </a:rPr>
+                        <a:t>95평(약 </a:t>
+                      </a:r>
+                      <a:pPr indent="0" marL="0">
+                        <a:buNone/>
+                      </a:pPr>
+                      <a:r>
+                        <a:rPr lang="en-US" sz="900" dirty="0">
+                          <a:solidFill>
+                            <a:srgbClr val="10161F"/>
+                          </a:solidFill>
+                          <a:latin typeface="Pretendard" pitchFamily="34" charset="0"/>
+                          <a:ea typeface="Pretendard" pitchFamily="34" charset="-122"/>
+                          <a:cs typeface="Pretendard" pitchFamily="34" charset="-120"/>
+                        </a:rPr>
+                        <a:t>314.1㎡)</a:t>
+                      </a:r>
+                      <a:endParaRPr lang="en-US" sz="900" dirty="0">
+                        <a:latin typeface="Pretendard" charset="0"/>
+                        <a:ea typeface="Pretendard" charset="0"/>
+                        <a:cs typeface="Pretendard" charset="0"/>
+                      </a:endParaRPr>
+                    </a:p>
+                  </a:txBody>
+                  <a:tcPr marL="50800" marR="50800" marT="25400" marB="25400" anchor="ctr">
+                    <a:lnL w="3810" cap="flat" cmpd="sng" algn="ctr">
+                      <a:solidFill>
+                        <a:srgbClr val="CBD5E0"/>
+                      </a:solidFill>
+                      <a:prstDash val="solid"/>
+                      <a:round/>
+                      <a:headEnd type="none" w="med" len="med"/>
+                      <a:tailEnd type="none" w="med" len="med"/>
+                    </a:lnL>
+                    <a:lnR w="3810" cap="flat" cmpd="sng" algn="ctr">
+                      <a:solidFill>
+                        <a:srgbClr val="CBD5E0"/>
+                      </a:solidFill>
+                      <a:prstDash val="solid"/>
+                      <a:round/>
+                      <a:headEnd type="none" w="med" len="med"/>
+                      <a:tailEnd type="none" w="med" len="med"/>
+                    </a:lnR>
+                    <a:lnT w="3810" cap="flat" cmpd="sng" algn="ctr">
+                      <a:solidFill>
+                        <a:srgbClr val="CBD5E0"/>
+                      </a:solidFill>
+                      <a:prstDash val="solid"/>
+                      <a:round/>
+                      <a:headEnd type="none" w="med" len="med"/>
+                      <a:tailEnd type="none" w="med" len="med"/>
+                    </a:lnT>
+                    <a:lnB w="3810" cap="flat" cmpd="sng" algn="ctr">
+                      <a:solidFill>
+                        <a:srgbClr val="CBD5E0"/>
+                      </a:solidFill>
+                      <a:prstDash val="solid"/>
+                      <a:round/>
+                      <a:headEnd type="none" w="med" len="med"/>
+                      <a:tailEnd type="none" w="med" len="med"/>
+                    </a:lnB>
+                    <a:solidFill>
+                      <a:srgbClr val="F7FAFC"/>
+                    </a:solidFill>
+                  </a:tcPr>
+                </a:tc>
+                <a:tc>
+                  <a:txBody>
+                    <a:bodyPr/>
+                    <a:lstStyle/>
+                    <a:p>
+                      <a:pPr indent="0" marL="0">
+                        <a:buNone/>
+                      </a:pPr>
+                      <a:r>
+                        <a:rPr lang="en-US" sz="900" dirty="0">
+                          <a:solidFill>
+                            <a:srgbClr val="10161F"/>
+                          </a:solidFill>
+                          <a:latin typeface="Pretendard" pitchFamily="34" charset="0"/>
+                          <a:ea typeface="Pretendard" pitchFamily="34" charset="-122"/>
+                          <a:cs typeface="Pretendard" pitchFamily="34" charset="-120"/>
+                        </a:rPr>
+                        <a:t>20,000만</a:t>
+                      </a:r>
+                      <a:endParaRPr lang="en-US" sz="900" dirty="0">
+                        <a:latin typeface="Pretendard" charset="0"/>
+                        <a:ea typeface="Pretendard" charset="0"/>
+                        <a:cs typeface="Pretendard" charset="0"/>
+                      </a:endParaRPr>
+                    </a:p>
+                  </a:txBody>
+                  <a:tcPr marL="50800" marR="50800" marT="25400" marB="25400" anchor="ctr">
+                    <a:lnL w="3810" cap="flat" cmpd="sng" algn="ctr">
+                      <a:solidFill>
+                        <a:srgbClr val="CBD5E0"/>
+                      </a:solidFill>
+                      <a:prstDash val="solid"/>
+                      <a:round/>
+                      <a:headEnd type="none" w="med" len="med"/>
+                      <a:tailEnd type="none" w="med" len="med"/>
+                    </a:lnL>
+                    <a:lnR w="3810" cap="flat" cmpd="sng" algn="ctr">
+                      <a:solidFill>
+                        <a:srgbClr val="CBD5E0"/>
+                      </a:solidFill>
+                      <a:prstDash val="solid"/>
+                      <a:round/>
+                      <a:headEnd type="none" w="med" len="med"/>
+                      <a:tailEnd type="none" w="med" len="med"/>
+                    </a:lnR>
+                    <a:lnT w="3810" cap="flat" cmpd="sng" algn="ctr">
+                      <a:solidFill>
+                        <a:srgbClr val="CBD5E0"/>
+                      </a:solidFill>
+                      <a:prstDash val="solid"/>
+                      <a:round/>
+                      <a:headEnd type="none" w="med" len="med"/>
+                      <a:tailEnd type="none" w="med" len="med"/>
+                    </a:lnT>
+                    <a:lnB w="3810" cap="flat" cmpd="sng" algn="ctr">
+                      <a:solidFill>
+                        <a:srgbClr val="CBD5E0"/>
+                      </a:solidFill>
+                      <a:prstDash val="solid"/>
+                      <a:round/>
+                      <a:headEnd type="none" w="med" len="med"/>
+                      <a:tailEnd type="none" w="med" len="med"/>
+                    </a:lnB>
+                    <a:solidFill>
+                      <a:srgbClr val="F7FAFC"/>
+                    </a:solidFill>
+                  </a:tcPr>
+                </a:tc>
+                <a:tc>
+                  <a:txBody>
+                    <a:bodyPr/>
+                    <a:lstStyle/>
+                    <a:p>
+                      <a:pPr indent="0" marL="0">
+                        <a:buNone/>
+                      </a:pPr>
+                      <a:r>
+                        <a:rPr lang="en-US" sz="900" dirty="0">
+                          <a:solidFill>
+                            <a:srgbClr val="10161F"/>
+                          </a:solidFill>
+                          <a:latin typeface="Pretendard" pitchFamily="34" charset="0"/>
+                          <a:ea typeface="Pretendard" pitchFamily="34" charset="-122"/>
+                          <a:cs typeface="Pretendard" pitchFamily="34" charset="-120"/>
+                        </a:rPr>
+                        <a:t>1,650만</a:t>
+                      </a:r>
+                      <a:endParaRPr lang="en-US" sz="900" dirty="0">
+                        <a:latin typeface="Pretendard" charset="0"/>
+                        <a:ea typeface="Pretendard" charset="0"/>
+                        <a:cs typeface="Pretendard" charset="0"/>
+                      </a:endParaRPr>
+                    </a:p>
+                  </a:txBody>
+                  <a:tcPr marL="50800" marR="50800" marT="25400" marB="25400" anchor="ctr">
+                    <a:lnL w="3810" cap="flat" cmpd="sng" algn="ctr">
+                      <a:solidFill>
+                        <a:srgbClr val="CBD5E0"/>
+                      </a:solidFill>
+                      <a:prstDash val="solid"/>
+                      <a:round/>
+                      <a:headEnd type="none" w="med" len="med"/>
+                      <a:tailEnd type="none" w="med" len="med"/>
+                    </a:lnL>
+                    <a:lnR w="3810" cap="flat" cmpd="sng" algn="ctr">
+                      <a:solidFill>
+                        <a:srgbClr val="CBD5E0"/>
+                      </a:solidFill>
+                      <a:prstDash val="solid"/>
+                      <a:round/>
+                      <a:headEnd type="none" w="med" len="med"/>
+                      <a:tailEnd type="none" w="med" len="med"/>
+                    </a:lnR>
+                    <a:lnT w="3810" cap="flat" cmpd="sng" algn="ctr">
+                      <a:solidFill>
+                        <a:srgbClr val="CBD5E0"/>
+                      </a:solidFill>
+                      <a:prstDash val="solid"/>
+                      <a:round/>
+                      <a:headEnd type="none" w="med" len="med"/>
+                      <a:tailEnd type="none" w="med" len="med"/>
+                    </a:lnT>
+                    <a:lnB w="3810" cap="flat" cmpd="sng" algn="ctr">
+                      <a:solidFill>
+                        <a:srgbClr val="CBD5E0"/>
+                      </a:solidFill>
+                      <a:prstDash val="solid"/>
+                      <a:round/>
+                      <a:headEnd type="none" w="med" len="med"/>
+                      <a:tailEnd type="none" w="med" len="med"/>
+                    </a:lnB>
+                    <a:solidFill>
+                      <a:srgbClr val="F7FAFC"/>
+                    </a:solidFill>
+                  </a:tcPr>
+                </a:tc>
+                <a:tc>
+                  <a:txBody>
+                    <a:bodyPr/>
+                    <a:lstStyle/>
+                    <a:p>
+                      <a:pPr indent="0" marL="0">
+                        <a:buNone/>
+                      </a:pPr>
+                      <a:endParaRPr lang="en-US" sz="900" dirty="0">
+                        <a:latin typeface="Pretendard" charset="0"/>
+                        <a:ea typeface="Pretendard" charset="0"/>
+                        <a:cs typeface="Pretendard" charset="0"/>
+                      </a:endParaRPr>
+                    </a:p>
+                  </a:txBody>
+                  <a:tcPr marL="50800" marR="50800" marT="25400" marB="25400" anchor="ctr">
+                    <a:lnL w="3810" cap="flat" cmpd="sng" algn="ctr">
+                      <a:solidFill>
+                        <a:srgbClr val="CBD5E0"/>
+                      </a:solidFill>
+                      <a:prstDash val="solid"/>
+                      <a:round/>
+                      <a:headEnd type="none" w="med" len="med"/>
+                      <a:tailEnd type="none" w="med" len="med"/>
+                    </a:lnL>
+                    <a:lnR w="3810" cap="flat" cmpd="sng" algn="ctr">
+                      <a:solidFill>
+                        <a:srgbClr val="CBD5E0"/>
+                      </a:solidFill>
+                      <a:prstDash val="solid"/>
+                      <a:round/>
+                      <a:headEnd type="none" w="med" len="med"/>
+                      <a:tailEnd type="none" w="med" len="med"/>
+                    </a:lnR>
+                    <a:lnT w="3810" cap="flat" cmpd="sng" algn="ctr">
+                      <a:solidFill>
+                        <a:srgbClr val="CBD5E0"/>
+                      </a:solidFill>
+                      <a:prstDash val="solid"/>
+                      <a:round/>
+                      <a:headEnd type="none" w="med" len="med"/>
+                      <a:tailEnd type="none" w="med" len="med"/>
+                    </a:lnT>
+                    <a:lnB w="3810" cap="flat" cmpd="sng" algn="ctr">
+                      <a:solidFill>
+                        <a:srgbClr val="CBD5E0"/>
+                      </a:solidFill>
+                      <a:prstDash val="solid"/>
+                      <a:round/>
+                      <a:headEnd type="none" w="med" len="med"/>
+                      <a:tailEnd type="none" w="med" len="med"/>
+                    </a:lnB>
+                    <a:solidFill>
+                      <a:srgbClr val="F7FAFC"/>
+                    </a:solidFill>
+                  </a:tcPr>
+                </a:tc>
+                <a:tc>
+                  <a:txBody>
+                    <a:bodyPr/>
+                    <a:lstStyle/>
+                    <a:p>
+                      <a:pPr indent="0" marL="0">
+                        <a:buNone/>
+                      </a:pPr>
+                      <a:r>
+                        <a:rPr lang="en-US" sz="900" dirty="0">
+                          <a:solidFill>
+                            <a:srgbClr val="10161F"/>
+                          </a:solidFill>
+                          <a:latin typeface="Pretendard" pitchFamily="34" charset="0"/>
+                          <a:ea typeface="Pretendard" pitchFamily="34" charset="-122"/>
+                          <a:cs typeface="Pretendard" pitchFamily="34" charset="-120"/>
+                        </a:rPr>
+                        <a:t>미정</a:t>
+                      </a:r>
+                      <a:endParaRPr lang="en-US" sz="900" dirty="0">
+                        <a:latin typeface="Pretendard" charset="0"/>
+                        <a:ea typeface="Pretendard" charset="0"/>
+                        <a:cs typeface="Pretendard" charset="0"/>
+                      </a:endParaRPr>
+                    </a:p>
+                  </a:txBody>
+                  <a:tcPr marL="50800" marR="50800" marT="25400" marB="25400" anchor="ctr">
+                    <a:lnL w="3810" cap="flat" cmpd="sng" algn="ctr">
+                      <a:solidFill>
+                        <a:srgbClr val="CBD5E0"/>
+                      </a:solidFill>
+                      <a:prstDash val="solid"/>
+                      <a:round/>
+                      <a:headEnd type="none" w="med" len="med"/>
+                      <a:tailEnd type="none" w="med" len="med"/>
+                    </a:lnL>
+                    <a:lnR w="3810" cap="flat" cmpd="sng" algn="ctr">
+                      <a:solidFill>
+                        <a:srgbClr val="CBD5E0"/>
+                      </a:solidFill>
+                      <a:prstDash val="solid"/>
+                      <a:round/>
+                      <a:headEnd type="none" w="med" len="med"/>
+                      <a:tailEnd type="none" w="med" len="med"/>
+                    </a:lnR>
+                    <a:lnT w="3810" cap="flat" cmpd="sng" algn="ctr">
+                      <a:solidFill>
+                        <a:srgbClr val="CBD5E0"/>
+                      </a:solidFill>
+                      <a:prstDash val="solid"/>
+                      <a:round/>
+                      <a:headEnd type="none" w="med" len="med"/>
+                      <a:tailEnd type="none" w="med" len="med"/>
+                    </a:lnT>
+                    <a:lnB w="3810" cap="flat" cmpd="sng" algn="ctr">
+                      <a:solidFill>
+                        <a:srgbClr val="CBD5E0"/>
+                      </a:solidFill>
+                      <a:prstDash val="solid"/>
+                      <a:round/>
+                      <a:headEnd type="none" w="med" len="med"/>
+                      <a:tailEnd type="none" w="med" len="med"/>
+                    </a:lnB>
+                    <a:solidFill>
+                      <a:srgbClr val="F7FAFC"/>
+                    </a:solidFill>
+                  </a:tcPr>
+                </a:tc>
+              </a:tr>
+              <a:tr h="347472">
+                <a:tc>
+                  <a:txBody>
+                    <a:bodyPr/>
+                    <a:lstStyle/>
+                    <a:p>
+                      <a:pPr indent="0" marL="0">
+                        <a:buNone/>
+                      </a:pPr>
+                      <a:r>
+                        <a:rPr lang="en-US" sz="900" b="1" dirty="0">
+                          <a:solidFill>
+                            <a:srgbClr val="10161F"/>
+                          </a:solidFill>
+                          <a:latin typeface="Pretendard" pitchFamily="34" charset="0"/>
+                          <a:ea typeface="Pretendard" pitchFamily="34" charset="-122"/>
+                          <a:cs typeface="Pretendard" pitchFamily="34" charset="-120"/>
+                        </a:rPr>
+                        <a:t>3F~4F</a:t>
+                      </a:r>
+                      <a:endParaRPr lang="en-US" sz="900" dirty="0">
+                        <a:latin typeface="Pretendard" charset="0"/>
+                        <a:ea typeface="Pretendard" charset="0"/>
+                        <a:cs typeface="Pretendard" charset="0"/>
+                      </a:endParaRPr>
+                    </a:p>
+                  </a:txBody>
+                  <a:tcPr marL="50800" marR="50800" marT="25400" marB="25400" anchor="ctr">
+                    <a:lnL w="3810" cap="flat" cmpd="sng" algn="ctr">
+                      <a:solidFill>
+                        <a:srgbClr val="CBD5E0"/>
+                      </a:solidFill>
+                      <a:prstDash val="solid"/>
+                      <a:round/>
+                      <a:headEnd type="none" w="med" len="med"/>
+                      <a:tailEnd type="none" w="med" len="med"/>
+                    </a:lnL>
+                    <a:lnR w="3810" cap="flat" cmpd="sng" algn="ctr">
+                      <a:solidFill>
+                        <a:srgbClr val="CBD5E0"/>
+                      </a:solidFill>
+                      <a:prstDash val="solid"/>
+                      <a:round/>
+                      <a:headEnd type="none" w="med" len="med"/>
+                      <a:tailEnd type="none" w="med" len="med"/>
+                    </a:lnR>
+                    <a:lnT w="3810" cap="flat" cmpd="sng" algn="ctr">
+                      <a:solidFill>
+                        <a:srgbClr val="CBD5E0"/>
+                      </a:solidFill>
+                      <a:prstDash val="solid"/>
+                      <a:round/>
+                      <a:headEnd type="none" w="med" len="med"/>
+                      <a:tailEnd type="none" w="med" len="med"/>
+                    </a:lnT>
+                    <a:lnB w="3810" cap="flat" cmpd="sng" algn="ctr">
+                      <a:solidFill>
+                        <a:srgbClr val="CBD5E0"/>
+                      </a:solidFill>
+                      <a:prstDash val="solid"/>
+                      <a:round/>
+                      <a:headEnd type="none" w="med" len="med"/>
+                      <a:tailEnd type="none" w="med" len="med"/>
+                    </a:lnB>
+                    <a:solidFill>
+                      <a:srgbClr val="FFFFFF"/>
+                    </a:solidFill>
+                  </a:tcPr>
+                </a:tc>
+                <a:tc>
+                  <a:txBody>
+                    <a:bodyPr/>
+                    <a:lstStyle/>
+                    <a:p>
+                      <a:pPr indent="0" marL="0">
+                        <a:buNone/>
+                      </a:pPr>
+                      <a:r>
+                        <a:rPr lang="en-US" sz="900" dirty="0">
+                          <a:solidFill>
+                            <a:srgbClr val="10161F"/>
+                          </a:solidFill>
+                          <a:latin typeface="Pretendard" pitchFamily="34" charset="0"/>
+                          <a:ea typeface="Pretendard" pitchFamily="34" charset="-122"/>
+                          <a:cs typeface="Pretendard" pitchFamily="34" charset="-120"/>
+                        </a:rPr>
+                        <a:t>디자인 </a:t>
+                      </a:r>
+                      <a:pPr indent="0" marL="0">
+                        <a:buNone/>
+                      </a:pPr>
+                      <a:r>
+                        <a:rPr lang="en-US" sz="900" dirty="0">
+                          <a:solidFill>
+                            <a:srgbClr val="10161F"/>
+                          </a:solidFill>
+                          <a:latin typeface="Pretendard" pitchFamily="34" charset="0"/>
+                          <a:ea typeface="Pretendard" pitchFamily="34" charset="-122"/>
+                          <a:cs typeface="Pretendard" pitchFamily="34" charset="-120"/>
+                        </a:rPr>
+                        <a:t>스튜디오</a:t>
+                      </a:r>
+                      <a:endParaRPr lang="en-US" sz="900" dirty="0">
+                        <a:latin typeface="Pretendard" charset="0"/>
+                        <a:ea typeface="Pretendard" charset="0"/>
+                        <a:cs typeface="Pretendard" charset="0"/>
+                      </a:endParaRPr>
+                    </a:p>
+                  </a:txBody>
+                  <a:tcPr marL="50800" marR="50800" marT="25400" marB="25400" anchor="ctr">
+                    <a:lnL w="3810" cap="flat" cmpd="sng" algn="ctr">
+                      <a:solidFill>
+                        <a:srgbClr val="CBD5E0"/>
+                      </a:solidFill>
+                      <a:prstDash val="solid"/>
+                      <a:round/>
+                      <a:headEnd type="none" w="med" len="med"/>
+                      <a:tailEnd type="none" w="med" len="med"/>
+                    </a:lnL>
+                    <a:lnR w="3810" cap="flat" cmpd="sng" algn="ctr">
+                      <a:solidFill>
+                        <a:srgbClr val="CBD5E0"/>
+                      </a:solidFill>
+                      <a:prstDash val="solid"/>
+                      <a:round/>
+                      <a:headEnd type="none" w="med" len="med"/>
+                      <a:tailEnd type="none" w="med" len="med"/>
+                    </a:lnR>
+                    <a:lnT w="3810" cap="flat" cmpd="sng" algn="ctr">
+                      <a:solidFill>
+                        <a:srgbClr val="CBD5E0"/>
+                      </a:solidFill>
+                      <a:prstDash val="solid"/>
+                      <a:round/>
+                      <a:headEnd type="none" w="med" len="med"/>
+                      <a:tailEnd type="none" w="med" len="med"/>
+                    </a:lnT>
+                    <a:lnB w="3810" cap="flat" cmpd="sng" algn="ctr">
+                      <a:solidFill>
+                        <a:srgbClr val="CBD5E0"/>
+                      </a:solidFill>
+                      <a:prstDash val="solid"/>
+                      <a:round/>
+                      <a:headEnd type="none" w="med" len="med"/>
+                      <a:tailEnd type="none" w="med" len="med"/>
+                    </a:lnB>
+                    <a:solidFill>
+                      <a:srgbClr val="FFFFFF"/>
+                    </a:solidFill>
+                  </a:tcPr>
+                </a:tc>
+                <a:tc>
+                  <a:txBody>
+                    <a:bodyPr/>
+                    <a:lstStyle/>
+                    <a:p>
+                      <a:pPr indent="0" marL="0">
+                        <a:buNone/>
+                      </a:pPr>
+                      <a:r>
+                        <a:rPr lang="en-US" sz="900" dirty="0">
+                          <a:solidFill>
+                            <a:srgbClr val="10161F"/>
+                          </a:solidFill>
+                          <a:latin typeface="Pretendard" pitchFamily="34" charset="0"/>
+                          <a:ea typeface="Pretendard" pitchFamily="34" charset="-122"/>
+                          <a:cs typeface="Pretendard" pitchFamily="34" charset="-120"/>
+                        </a:rPr>
+                        <a:t>63평(약 </a:t>
+                      </a:r>
+                      <a:pPr indent="0" marL="0">
+                        <a:buNone/>
+                      </a:pPr>
+                      <a:r>
+                        <a:rPr lang="en-US" sz="900" dirty="0">
+                          <a:solidFill>
+                            <a:srgbClr val="10161F"/>
+                          </a:solidFill>
+                          <a:latin typeface="Pretendard" pitchFamily="34" charset="0"/>
+                          <a:ea typeface="Pretendard" pitchFamily="34" charset="-122"/>
+                          <a:cs typeface="Pretendard" pitchFamily="34" charset="-120"/>
+                        </a:rPr>
+                        <a:t>208.3㎡)</a:t>
+                      </a:r>
+                      <a:endParaRPr lang="en-US" sz="900" dirty="0">
+                        <a:latin typeface="Pretendard" charset="0"/>
+                        <a:ea typeface="Pretendard" charset="0"/>
+                        <a:cs typeface="Pretendard" charset="0"/>
+                      </a:endParaRPr>
+                    </a:p>
+                  </a:txBody>
+                  <a:tcPr marL="50800" marR="50800" marT="25400" marB="25400" anchor="ctr">
+                    <a:lnL w="3810" cap="flat" cmpd="sng" algn="ctr">
+                      <a:solidFill>
+                        <a:srgbClr val="CBD5E0"/>
+                      </a:solidFill>
+                      <a:prstDash val="solid"/>
+                      <a:round/>
+                      <a:headEnd type="none" w="med" len="med"/>
+                      <a:tailEnd type="none" w="med" len="med"/>
+                    </a:lnL>
+                    <a:lnR w="3810" cap="flat" cmpd="sng" algn="ctr">
+                      <a:solidFill>
+                        <a:srgbClr val="CBD5E0"/>
+                      </a:solidFill>
+                      <a:prstDash val="solid"/>
+                      <a:round/>
+                      <a:headEnd type="none" w="med" len="med"/>
+                      <a:tailEnd type="none" w="med" len="med"/>
+                    </a:lnR>
+                    <a:lnT w="3810" cap="flat" cmpd="sng" algn="ctr">
+                      <a:solidFill>
+                        <a:srgbClr val="CBD5E0"/>
+                      </a:solidFill>
+                      <a:prstDash val="solid"/>
+                      <a:round/>
+                      <a:headEnd type="none" w="med" len="med"/>
+                      <a:tailEnd type="none" w="med" len="med"/>
+                    </a:lnT>
+                    <a:lnB w="3810" cap="flat" cmpd="sng" algn="ctr">
+                      <a:solidFill>
+                        <a:srgbClr val="CBD5E0"/>
+                      </a:solidFill>
+                      <a:prstDash val="solid"/>
+                      <a:round/>
+                      <a:headEnd type="none" w="med" len="med"/>
+                      <a:tailEnd type="none" w="med" len="med"/>
+                    </a:lnB>
+                    <a:solidFill>
+                      <a:srgbClr val="FFFFFF"/>
+                    </a:solidFill>
+                  </a:tcPr>
+                </a:tc>
+                <a:tc>
+                  <a:txBody>
+                    <a:bodyPr/>
+                    <a:lstStyle/>
+                    <a:p>
+                      <a:pPr indent="0" marL="0">
+                        <a:buNone/>
+                      </a:pPr>
+                      <a:r>
+                        <a:rPr lang="en-US" sz="900" dirty="0">
+                          <a:solidFill>
+                            <a:srgbClr val="10161F"/>
+                          </a:solidFill>
+                          <a:latin typeface="Pretendard" pitchFamily="34" charset="0"/>
+                          <a:ea typeface="Pretendard" pitchFamily="34" charset="-122"/>
+                          <a:cs typeface="Pretendard" pitchFamily="34" charset="-120"/>
+                        </a:rPr>
+                        <a:t>10,000만</a:t>
+                      </a:r>
+                      <a:endParaRPr lang="en-US" sz="900" dirty="0">
+                        <a:latin typeface="Pretendard" charset="0"/>
+                        <a:ea typeface="Pretendard" charset="0"/>
+                        <a:cs typeface="Pretendard" charset="0"/>
+                      </a:endParaRPr>
+                    </a:p>
+                  </a:txBody>
+                  <a:tcPr marL="50800" marR="50800" marT="25400" marB="25400" anchor="ctr">
+                    <a:lnL w="3810" cap="flat" cmpd="sng" algn="ctr">
+                      <a:solidFill>
+                        <a:srgbClr val="CBD5E0"/>
+                      </a:solidFill>
+                      <a:prstDash val="solid"/>
+                      <a:round/>
+                      <a:headEnd type="none" w="med" len="med"/>
+                      <a:tailEnd type="none" w="med" len="med"/>
+                    </a:lnL>
+                    <a:lnR w="3810" cap="flat" cmpd="sng" algn="ctr">
+                      <a:solidFill>
+                        <a:srgbClr val="CBD5E0"/>
+                      </a:solidFill>
+                      <a:prstDash val="solid"/>
+                      <a:round/>
+                      <a:headEnd type="none" w="med" len="med"/>
+                      <a:tailEnd type="none" w="med" len="med"/>
+                    </a:lnR>
+                    <a:lnT w="3810" cap="flat" cmpd="sng" algn="ctr">
+                      <a:solidFill>
+                        <a:srgbClr val="CBD5E0"/>
+                      </a:solidFill>
+                      <a:prstDash val="solid"/>
+                      <a:round/>
+                      <a:headEnd type="none" w="med" len="med"/>
+                      <a:tailEnd type="none" w="med" len="med"/>
+                    </a:lnT>
+                    <a:lnB w="3810" cap="flat" cmpd="sng" algn="ctr">
+                      <a:solidFill>
+                        <a:srgbClr val="CBD5E0"/>
+                      </a:solidFill>
+                      <a:prstDash val="solid"/>
+                      <a:round/>
+                      <a:headEnd type="none" w="med" len="med"/>
+                      <a:tailEnd type="none" w="med" len="med"/>
+                    </a:lnB>
+                    <a:solidFill>
+                      <a:srgbClr val="FFFFFF"/>
+                    </a:solidFill>
+                  </a:tcPr>
+                </a:tc>
+                <a:tc>
+                  <a:txBody>
+                    <a:bodyPr/>
+                    <a:lstStyle/>
+                    <a:p>
+                      <a:pPr indent="0" marL="0">
+                        <a:buNone/>
+                      </a:pPr>
+                      <a:r>
+                        <a:rPr lang="en-US" sz="900" dirty="0">
+                          <a:solidFill>
+                            <a:srgbClr val="10161F"/>
+                          </a:solidFill>
+                          <a:latin typeface="Pretendard" pitchFamily="34" charset="0"/>
+                          <a:ea typeface="Pretendard" pitchFamily="34" charset="-122"/>
+                          <a:cs typeface="Pretendard" pitchFamily="34" charset="-120"/>
+                        </a:rPr>
+                        <a:t>700만</a:t>
+                      </a:r>
+                      <a:endParaRPr lang="en-US" sz="900" dirty="0">
+                        <a:latin typeface="Pretendard" charset="0"/>
+                        <a:ea typeface="Pretendard" charset="0"/>
+                        <a:cs typeface="Pretendard" charset="0"/>
+                      </a:endParaRPr>
+                    </a:p>
+                  </a:txBody>
+                  <a:tcPr marL="50800" marR="50800" marT="25400" marB="25400" anchor="ctr">
+                    <a:lnL w="3810" cap="flat" cmpd="sng" algn="ctr">
+                      <a:solidFill>
+                        <a:srgbClr val="CBD5E0"/>
+                      </a:solidFill>
+                      <a:prstDash val="solid"/>
+                      <a:round/>
+                      <a:headEnd type="none" w="med" len="med"/>
+                      <a:tailEnd type="none" w="med" len="med"/>
+                    </a:lnL>
+                    <a:lnR w="3810" cap="flat" cmpd="sng" algn="ctr">
+                      <a:solidFill>
+                        <a:srgbClr val="CBD5E0"/>
+                      </a:solidFill>
+                      <a:prstDash val="solid"/>
+                      <a:round/>
+                      <a:headEnd type="none" w="med" len="med"/>
+                      <a:tailEnd type="none" w="med" len="med"/>
+                    </a:lnR>
+                    <a:lnT w="3810" cap="flat" cmpd="sng" algn="ctr">
+                      <a:solidFill>
+                        <a:srgbClr val="CBD5E0"/>
+                      </a:solidFill>
+                      <a:prstDash val="solid"/>
+                      <a:round/>
+                      <a:headEnd type="none" w="med" len="med"/>
+                      <a:tailEnd type="none" w="med" len="med"/>
+                    </a:lnT>
+                    <a:lnB w="3810" cap="flat" cmpd="sng" algn="ctr">
+                      <a:solidFill>
+                        <a:srgbClr val="CBD5E0"/>
+                      </a:solidFill>
+                      <a:prstDash val="solid"/>
+                      <a:round/>
+                      <a:headEnd type="none" w="med" len="med"/>
+                      <a:tailEnd type="none" w="med" len="med"/>
+                    </a:lnB>
+                    <a:solidFill>
+                      <a:srgbClr val="FFFFFF"/>
+                    </a:solidFill>
+                  </a:tcPr>
+                </a:tc>
+                <a:tc>
+                  <a:txBody>
+                    <a:bodyPr/>
+                    <a:lstStyle/>
+                    <a:p>
+                      <a:pPr indent="0" marL="0">
+                        <a:buNone/>
+                      </a:pPr>
+                      <a:endParaRPr lang="en-US" sz="900" dirty="0">
+                        <a:latin typeface="Pretendard" charset="0"/>
+                        <a:ea typeface="Pretendard" charset="0"/>
+                        <a:cs typeface="Pretendard" charset="0"/>
+                      </a:endParaRPr>
+                    </a:p>
+                  </a:txBody>
+                  <a:tcPr marL="50800" marR="50800" marT="25400" marB="25400" anchor="ctr">
+                    <a:lnL w="3810" cap="flat" cmpd="sng" algn="ctr">
+                      <a:solidFill>
+                        <a:srgbClr val="CBD5E0"/>
+                      </a:solidFill>
+                      <a:prstDash val="solid"/>
+                      <a:round/>
+                      <a:headEnd type="none" w="med" len="med"/>
+                      <a:tailEnd type="none" w="med" len="med"/>
+                    </a:lnL>
+                    <a:lnR w="3810" cap="flat" cmpd="sng" algn="ctr">
+                      <a:solidFill>
+                        <a:srgbClr val="CBD5E0"/>
+                      </a:solidFill>
+                      <a:prstDash val="solid"/>
+                      <a:round/>
+                      <a:headEnd type="none" w="med" len="med"/>
+                      <a:tailEnd type="none" w="med" len="med"/>
+                    </a:lnR>
+                    <a:lnT w="3810" cap="flat" cmpd="sng" algn="ctr">
+                      <a:solidFill>
+                        <a:srgbClr val="CBD5E0"/>
+                      </a:solidFill>
+                      <a:prstDash val="solid"/>
+                      <a:round/>
+                      <a:headEnd type="none" w="med" len="med"/>
+                      <a:tailEnd type="none" w="med" len="med"/>
+                    </a:lnT>
+                    <a:lnB w="3810" cap="flat" cmpd="sng" algn="ctr">
+                      <a:solidFill>
+                        <a:srgbClr val="CBD5E0"/>
+                      </a:solidFill>
+                      <a:prstDash val="solid"/>
+                      <a:round/>
+                      <a:headEnd type="none" w="med" len="med"/>
+                      <a:tailEnd type="none" w="med" len="med"/>
+                    </a:lnB>
+                    <a:solidFill>
+                      <a:srgbClr val="FFFFFF"/>
+                    </a:solidFill>
+                  </a:tcPr>
+                </a:tc>
+                <a:tc>
+                  <a:txBody>
+                    <a:bodyPr/>
+                    <a:lstStyle/>
+                    <a:p>
+                      <a:pPr indent="0" marL="0">
+                        <a:buNone/>
+                      </a:pPr>
+                      <a:r>
+                        <a:rPr lang="en-US" sz="900" dirty="0">
+                          <a:solidFill>
+                            <a:srgbClr val="10161F"/>
+                          </a:solidFill>
+                          <a:latin typeface="Pretendard" pitchFamily="34" charset="0"/>
+                          <a:ea typeface="Pretendard" pitchFamily="34" charset="-122"/>
+                          <a:cs typeface="Pretendard" pitchFamily="34" charset="-120"/>
+                        </a:rPr>
+                        <a:t>미정</a:t>
+                      </a:r>
+                      <a:endParaRPr lang="en-US" sz="900" dirty="0">
                         <a:latin typeface="Pretendard" charset="0"/>
                         <a:ea typeface="Pretendard" charset="0"/>
                         <a:cs typeface="Pretendard" charset="0"/>
@@ -8252,52 +11209,13 @@
       </p:sp>
       <p:sp>
         <p:nvSpPr>
-          <p:cNvPr id="6" name="Text 4"/>
+          <p:cNvPr id="6" name="Shape 4"/>
           <p:cNvSpPr/>
           <p:nvPr/>
         </p:nvSpPr>
         <p:spPr>
           <a:xfrm>
             <a:off x="566928" y="1325880"/>
-            <a:ext cx="11057839" cy="237744"/>
-          </a:xfrm>
-          <a:prstGeom prst="rect">
-            <a:avLst/>
-          </a:prstGeom>
-          <a:noFill/>
-          <a:ln/>
-        </p:spPr>
-        <p:txBody>
-          <a:bodyPr wrap="square" lIns="0" tIns="0" rIns="0" bIns="0" rtlCol="0" anchor="ctr"/>
-          <a:lstStyle/>
-          <a:p>
-            <a:pPr indent="0" marL="0">
-              <a:buNone/>
-            </a:pPr>
-            <a:r>
-              <a:rPr lang="en-US" sz="1100" b="1" dirty="0">
-                <a:solidFill>
-                  <a:srgbClr val="10161F"/>
-                </a:solidFill>
-                <a:latin typeface="Pretendard" pitchFamily="34" charset="0"/>
-                <a:ea typeface="Pretendard" pitchFamily="34" charset="-122"/>
-                <a:cs typeface="Pretendard" pitchFamily="34" charset="-120"/>
-              </a:rPr>
-              <a:t>층별 임대 현황</a:t>
-            </a:r>
-            <a:endParaRPr lang="en-US" sz="1100" dirty="0"/>
-          </a:p>
-        </p:txBody>
-      </p:sp>
-      <p:sp>
-        <p:nvSpPr>
-          <p:cNvPr id="7" name="Shape 5"/>
-          <p:cNvSpPr/>
-          <p:nvPr/>
-        </p:nvSpPr>
-        <p:spPr>
-          <a:xfrm>
-            <a:off x="566928" y="1737360"/>
             <a:ext cx="11057839" cy="0"/>
           </a:xfrm>
           <a:prstGeom prst="line">
@@ -8314,13 +11232,13 @@
       </p:sp>
       <p:sp>
         <p:nvSpPr>
-          <p:cNvPr id="8" name="Shape 6"/>
-          <p:cNvSpPr/>
-          <p:nvPr/>
-        </p:nvSpPr>
-        <p:spPr>
-          <a:xfrm>
-            <a:off x="566928" y="1965960"/>
+          <p:cNvPr id="7" name="Shape 5"/>
+          <p:cNvSpPr/>
+          <p:nvPr/>
+        </p:nvSpPr>
+        <p:spPr>
+          <a:xfrm>
+            <a:off x="566928" y="1554480"/>
             <a:ext cx="3576218" cy="1188720"/>
           </a:xfrm>
           <a:prstGeom prst="roundRect">
@@ -8341,13 +11259,13 @@
       </p:sp>
       <p:sp>
         <p:nvSpPr>
-          <p:cNvPr id="9" name="Text 7"/>
-          <p:cNvSpPr/>
-          <p:nvPr/>
-        </p:nvSpPr>
-        <p:spPr>
-          <a:xfrm>
-            <a:off x="731520" y="2093976"/>
+          <p:cNvPr id="8" name="Text 6"/>
+          <p:cNvSpPr/>
+          <p:nvPr/>
+        </p:nvSpPr>
+        <p:spPr>
+          <a:xfrm>
+            <a:off x="731520" y="1682496"/>
             <a:ext cx="3247034" cy="201168"/>
           </a:xfrm>
           <a:prstGeom prst="rect">
@@ -8380,13 +11298,13 @@
       </p:sp>
       <p:sp>
         <p:nvSpPr>
-          <p:cNvPr id="10" name="Text 8"/>
-          <p:cNvSpPr/>
-          <p:nvPr/>
-        </p:nvSpPr>
-        <p:spPr>
-          <a:xfrm>
-            <a:off x="731520" y="2276856"/>
+          <p:cNvPr id="9" name="Text 7"/>
+          <p:cNvSpPr/>
+          <p:nvPr/>
+        </p:nvSpPr>
+        <p:spPr>
+          <a:xfrm>
+            <a:off x="731520" y="1865376"/>
             <a:ext cx="3247034" cy="402336"/>
           </a:xfrm>
           <a:prstGeom prst="rect">
@@ -8421,13 +11339,13 @@
       </p:sp>
       <p:sp>
         <p:nvSpPr>
-          <p:cNvPr id="11" name="Text 9"/>
-          <p:cNvSpPr/>
-          <p:nvPr/>
-        </p:nvSpPr>
-        <p:spPr>
-          <a:xfrm>
-            <a:off x="731520" y="2642616"/>
+          <p:cNvPr id="10" name="Text 8"/>
+          <p:cNvSpPr/>
+          <p:nvPr/>
+        </p:nvSpPr>
+        <p:spPr>
+          <a:xfrm>
+            <a:off x="731520" y="2231136"/>
             <a:ext cx="3247034" cy="164592"/>
           </a:xfrm>
           <a:prstGeom prst="rect">
@@ -8460,13 +11378,13 @@
       </p:sp>
       <p:sp>
         <p:nvSpPr>
-          <p:cNvPr id="12" name="Shape 10"/>
-          <p:cNvSpPr/>
-          <p:nvPr/>
-        </p:nvSpPr>
-        <p:spPr>
-          <a:xfrm>
-            <a:off x="4307738" y="1965960"/>
+          <p:cNvPr id="11" name="Shape 9"/>
+          <p:cNvSpPr/>
+          <p:nvPr/>
+        </p:nvSpPr>
+        <p:spPr>
+          <a:xfrm>
+            <a:off x="4307738" y="1554480"/>
             <a:ext cx="3576218" cy="1188720"/>
           </a:xfrm>
           <a:prstGeom prst="roundRect">
@@ -8487,13 +11405,13 @@
       </p:sp>
       <p:sp>
         <p:nvSpPr>
-          <p:cNvPr id="13" name="Text 11"/>
-          <p:cNvSpPr/>
-          <p:nvPr/>
-        </p:nvSpPr>
-        <p:spPr>
-          <a:xfrm>
-            <a:off x="4472330" y="2093976"/>
+          <p:cNvPr id="12" name="Text 10"/>
+          <p:cNvSpPr/>
+          <p:nvPr/>
+        </p:nvSpPr>
+        <p:spPr>
+          <a:xfrm>
+            <a:off x="4472330" y="1682496"/>
             <a:ext cx="3247034" cy="201168"/>
           </a:xfrm>
           <a:prstGeom prst="rect">
@@ -8526,13 +11444,13 @@
       </p:sp>
       <p:sp>
         <p:nvSpPr>
-          <p:cNvPr id="14" name="Text 12"/>
-          <p:cNvSpPr/>
-          <p:nvPr/>
-        </p:nvSpPr>
-        <p:spPr>
-          <a:xfrm>
-            <a:off x="4472330" y="2276856"/>
+          <p:cNvPr id="13" name="Text 11"/>
+          <p:cNvSpPr/>
+          <p:nvPr/>
+        </p:nvSpPr>
+        <p:spPr>
+          <a:xfrm>
+            <a:off x="4472330" y="1865376"/>
             <a:ext cx="3247034" cy="402336"/>
           </a:xfrm>
           <a:prstGeom prst="rect">
@@ -8567,13 +11485,13 @@
       </p:sp>
       <p:sp>
         <p:nvSpPr>
-          <p:cNvPr id="15" name="Text 13"/>
-          <p:cNvSpPr/>
-          <p:nvPr/>
-        </p:nvSpPr>
-        <p:spPr>
-          <a:xfrm>
-            <a:off x="4472330" y="2642616"/>
+          <p:cNvPr id="14" name="Text 12"/>
+          <p:cNvSpPr/>
+          <p:nvPr/>
+        </p:nvSpPr>
+        <p:spPr>
+          <a:xfrm>
+            <a:off x="4472330" y="2231136"/>
             <a:ext cx="3247034" cy="164592"/>
           </a:xfrm>
           <a:prstGeom prst="rect">
@@ -8606,13 +11524,13 @@
       </p:sp>
       <p:sp>
         <p:nvSpPr>
-          <p:cNvPr id="16" name="Shape 14"/>
-          <p:cNvSpPr/>
-          <p:nvPr/>
-        </p:nvSpPr>
-        <p:spPr>
-          <a:xfrm>
-            <a:off x="8048549" y="1965960"/>
+          <p:cNvPr id="15" name="Shape 13"/>
+          <p:cNvSpPr/>
+          <p:nvPr/>
+        </p:nvSpPr>
+        <p:spPr>
+          <a:xfrm>
+            <a:off x="8048549" y="1554480"/>
             <a:ext cx="3576218" cy="1188720"/>
           </a:xfrm>
           <a:prstGeom prst="roundRect">
@@ -8633,13 +11551,159 @@
       </p:sp>
       <p:sp>
         <p:nvSpPr>
+          <p:cNvPr id="16" name="Text 14"/>
+          <p:cNvSpPr/>
+          <p:nvPr/>
+        </p:nvSpPr>
+        <p:spPr>
+          <a:xfrm>
+            <a:off x="8213141" y="1682496"/>
+            <a:ext cx="3247034" cy="201168"/>
+          </a:xfrm>
+          <a:prstGeom prst="rect">
+            <a:avLst/>
+          </a:prstGeom>
+          <a:noFill/>
+          <a:ln/>
+        </p:spPr>
+        <p:txBody>
+          <a:bodyPr wrap="square" lIns="0" tIns="0" rIns="0" bIns="0" rtlCol="0" anchor="ctr"/>
+          <a:lstStyle/>
+          <a:p>
+            <a:pPr indent="0" marL="0">
+              <a:buNone/>
+            </a:pPr>
+            <a:r>
+              <a:rPr lang="en-US" sz="950" dirty="0">
+                <a:solidFill>
+                  <a:srgbClr val="718096"/>
+                </a:solidFill>
+                <a:latin typeface="Pretendard" pitchFamily="34" charset="0"/>
+                <a:ea typeface="Pretendard" pitchFamily="34" charset="-122"/>
+                <a:cs typeface="Pretendard" pitchFamily="34" charset="-120"/>
+              </a:rPr>
+              <a:t>구분</a:t>
+            </a:r>
+            <a:endParaRPr lang="en-US" sz="950" dirty="0"/>
+          </a:p>
+        </p:txBody>
+      </p:sp>
+      <p:sp>
+        <p:nvSpPr>
           <p:cNvPr id="17" name="Text 15"/>
           <p:cNvSpPr/>
           <p:nvPr/>
         </p:nvSpPr>
         <p:spPr>
           <a:xfrm>
-            <a:off x="8213141" y="2093976"/>
+            <a:off x="8213141" y="1865376"/>
+            <a:ext cx="3247034" cy="402336"/>
+          </a:xfrm>
+          <a:prstGeom prst="rect">
+            <a:avLst/>
+          </a:prstGeom>
+          <a:noFill/>
+          <a:ln/>
+        </p:spPr>
+        <p:txBody>
+          <a:bodyPr wrap="square" lIns="0" tIns="0" rIns="0" bIns="0" rtlCol="0" anchor="ctr">
+            <a:normAutofit/>
+          </a:bodyPr>
+          <a:lstStyle/>
+          <a:p>
+            <a:pPr indent="0" marL="0">
+              <a:buNone/>
+            </a:pPr>
+            <a:r>
+              <a:rPr lang="en-US" sz="2200" b="1" dirty="0">
+                <a:solidFill>
+                  <a:srgbClr val="10161F"/>
+                </a:solidFill>
+                <a:latin typeface="Pretendard" pitchFamily="34" charset="0"/>
+                <a:ea typeface="Pretendard" pitchFamily="34" charset="-122"/>
+                <a:cs typeface="Pretendard" pitchFamily="34" charset="-120"/>
+              </a:rPr>
+              <a:t>지표 분석</a:t>
+            </a:r>
+            <a:endParaRPr lang="en-US" sz="2200" dirty="0"/>
+          </a:p>
+        </p:txBody>
+      </p:sp>
+      <p:sp>
+        <p:nvSpPr>
+          <p:cNvPr id="18" name="Text 16"/>
+          <p:cNvSpPr/>
+          <p:nvPr/>
+        </p:nvSpPr>
+        <p:spPr>
+          <a:xfrm>
+            <a:off x="8213141" y="2231136"/>
+            <a:ext cx="3247034" cy="164592"/>
+          </a:xfrm>
+          <a:prstGeom prst="rect">
+            <a:avLst/>
+          </a:prstGeom>
+          <a:noFill/>
+          <a:ln/>
+        </p:spPr>
+        <p:txBody>
+          <a:bodyPr wrap="square" lIns="0" tIns="0" rIns="0" bIns="0" rtlCol="0" anchor="ctr"/>
+          <a:lstStyle/>
+          <a:p>
+            <a:pPr indent="0" marL="0">
+              <a:buNone/>
+            </a:pPr>
+            <a:r>
+              <a:rPr lang="en-US" sz="880" dirty="0">
+                <a:solidFill>
+                  <a:srgbClr val="718096"/>
+                </a:solidFill>
+                <a:latin typeface="Pretendard" pitchFamily="34" charset="0"/>
+                <a:ea typeface="Pretendard" pitchFamily="34" charset="-122"/>
+                <a:cs typeface="Pretendard" pitchFamily="34" charset="-120"/>
+              </a:rPr>
+              <a:t>비고</a:t>
+            </a:r>
+            <a:endParaRPr lang="en-US" sz="880" dirty="0"/>
+          </a:p>
+        </p:txBody>
+      </p:sp>
+      <p:sp>
+        <p:nvSpPr>
+          <p:cNvPr id="19" name="Shape 17"/>
+          <p:cNvSpPr/>
+          <p:nvPr/>
+        </p:nvSpPr>
+        <p:spPr>
+          <a:xfrm>
+            <a:off x="566928" y="2907792"/>
+            <a:ext cx="3576218" cy="1051560"/>
+          </a:xfrm>
+          <a:prstGeom prst="roundRect">
+            <a:avLst>
+              <a:gd name="adj" fmla="val 5217"/>
+            </a:avLst>
+          </a:prstGeom>
+          <a:solidFill>
+            <a:srgbClr val="F7FAFC"/>
+          </a:solidFill>
+          <a:ln w="6350">
+            <a:solidFill>
+              <a:srgbClr val="CBD5E0"/>
+            </a:solidFill>
+            <a:prstDash val="solid"/>
+          </a:ln>
+        </p:spPr>
+      </p:sp>
+      <p:sp>
+        <p:nvSpPr>
+          <p:cNvPr id="20" name="Text 18"/>
+          <p:cNvSpPr/>
+          <p:nvPr/>
+        </p:nvSpPr>
+        <p:spPr>
+          <a:xfrm>
+            <a:off x="731520" y="3035808"/>
             <a:ext cx="3247034" cy="201168"/>
           </a:xfrm>
           <a:prstGeom prst="rect">
@@ -8672,13 +11736,13 @@
       </p:sp>
       <p:sp>
         <p:nvSpPr>
-          <p:cNvPr id="18" name="Text 16"/>
-          <p:cNvSpPr/>
-          <p:nvPr/>
-        </p:nvSpPr>
-        <p:spPr>
-          <a:xfrm>
-            <a:off x="8213141" y="2276856"/>
+          <p:cNvPr id="21" name="Text 19"/>
+          <p:cNvSpPr/>
+          <p:nvPr/>
+        </p:nvSpPr>
+        <p:spPr>
+          <a:xfrm>
+            <a:off x="731520" y="3218688"/>
             <a:ext cx="3247034" cy="402336"/>
           </a:xfrm>
           <a:prstGeom prst="rect">
@@ -8697,7 +11761,7 @@
               <a:buNone/>
             </a:pPr>
             <a:r>
-              <a:rPr lang="en-US" sz="2200" b="1" dirty="0">
+              <a:rPr lang="en-US" sz="1800" b="1" dirty="0">
                 <a:solidFill>
                   <a:srgbClr val="10161F"/>
                 </a:solidFill>
@@ -8705,21 +11769,21 @@
                 <a:ea typeface="Pretendard" pitchFamily="34" charset="-122"/>
                 <a:cs typeface="Pretendard" pitchFamily="34" charset="-120"/>
               </a:rPr>
-              <a:t>0.0% (2개 호실 임대 중 / 총 2실)</a:t>
-            </a:r>
-            <a:endParaRPr lang="en-US" sz="2200" dirty="0"/>
-          </a:p>
-        </p:txBody>
-      </p:sp>
-      <p:sp>
-        <p:nvSpPr>
-          <p:cNvPr id="19" name="Text 17"/>
-          <p:cNvSpPr/>
-          <p:nvPr/>
-        </p:nvSpPr>
-        <p:spPr>
-          <a:xfrm>
-            <a:off x="8213141" y="2642616"/>
+              <a:t>0.0% (임대중 2 · 공실 0)</a:t>
+            </a:r>
+            <a:endParaRPr lang="en-US" sz="1800" dirty="0"/>
+          </a:p>
+        </p:txBody>
+      </p:sp>
+      <p:sp>
+        <p:nvSpPr>
+          <p:cNvPr id="22" name="Text 20"/>
+          <p:cNvSpPr/>
+          <p:nvPr/>
+        </p:nvSpPr>
+        <p:spPr>
+          <a:xfrm>
+            <a:off x="731520" y="3584448"/>
             <a:ext cx="3247034" cy="164592"/>
           </a:xfrm>
           <a:prstGeom prst="rect">
@@ -8744,7 +11808,7 @@
                 <a:ea typeface="Pretendard" pitchFamily="34" charset="-122"/>
                 <a:cs typeface="Pretendard" pitchFamily="34" charset="-120"/>
               </a:rPr>
-              <a:t>공실 0실</a:t>
+              <a:t>전 층 만실 운영</a:t>
             </a:r>
             <a:endParaRPr lang="en-US" sz="880" dirty="0"/>
           </a:p>
@@ -8752,13 +11816,13 @@
       </p:sp>
       <p:sp>
         <p:nvSpPr>
-          <p:cNvPr id="20" name="Shape 18"/>
-          <p:cNvSpPr/>
-          <p:nvPr/>
-        </p:nvSpPr>
-        <p:spPr>
-          <a:xfrm>
-            <a:off x="566928" y="3319272"/>
+          <p:cNvPr id="23" name="Shape 21"/>
+          <p:cNvSpPr/>
+          <p:nvPr/>
+        </p:nvSpPr>
+        <p:spPr>
+          <a:xfrm>
+            <a:off x="4307738" y="2907792"/>
             <a:ext cx="3576218" cy="1051560"/>
           </a:xfrm>
           <a:prstGeom prst="roundRect">
@@ -8779,13 +11843,13 @@
       </p:sp>
       <p:sp>
         <p:nvSpPr>
-          <p:cNvPr id="21" name="Text 19"/>
-          <p:cNvSpPr/>
-          <p:nvPr/>
-        </p:nvSpPr>
-        <p:spPr>
-          <a:xfrm>
-            <a:off x="731520" y="3447288"/>
+          <p:cNvPr id="24" name="Text 22"/>
+          <p:cNvSpPr/>
+          <p:nvPr/>
+        </p:nvSpPr>
+        <p:spPr>
+          <a:xfrm>
+            <a:off x="4472330" y="3035808"/>
             <a:ext cx="3247034" cy="201168"/>
           </a:xfrm>
           <a:prstGeom prst="rect">
@@ -8818,13 +11882,13 @@
       </p:sp>
       <p:sp>
         <p:nvSpPr>
-          <p:cNvPr id="22" name="Text 20"/>
-          <p:cNvSpPr/>
-          <p:nvPr/>
-        </p:nvSpPr>
-        <p:spPr>
-          <a:xfrm>
-            <a:off x="731520" y="3630168"/>
+          <p:cNvPr id="25" name="Text 23"/>
+          <p:cNvSpPr/>
+          <p:nvPr/>
+        </p:nvSpPr>
+        <p:spPr>
+          <a:xfrm>
+            <a:off x="4472330" y="3218688"/>
             <a:ext cx="3247034" cy="402336"/>
           </a:xfrm>
           <a:prstGeom prst="rect">
@@ -8859,13 +11923,13 @@
       </p:sp>
       <p:sp>
         <p:nvSpPr>
-          <p:cNvPr id="23" name="Text 21"/>
-          <p:cNvSpPr/>
-          <p:nvPr/>
-        </p:nvSpPr>
-        <p:spPr>
-          <a:xfrm>
-            <a:off x="731520" y="3995928"/>
+          <p:cNvPr id="26" name="Text 24"/>
+          <p:cNvSpPr/>
+          <p:nvPr/>
+        </p:nvSpPr>
+        <p:spPr>
+          <a:xfrm>
+            <a:off x="4472330" y="3584448"/>
             <a:ext cx="3247034" cy="164592"/>
           </a:xfrm>
           <a:prstGeom prst="rect">
@@ -8898,13 +11962,13 @@
       </p:sp>
       <p:sp>
         <p:nvSpPr>
-          <p:cNvPr id="24" name="Shape 22"/>
-          <p:cNvSpPr/>
-          <p:nvPr/>
-        </p:nvSpPr>
-        <p:spPr>
-          <a:xfrm>
-            <a:off x="4307738" y="3319272"/>
+          <p:cNvPr id="27" name="Shape 25"/>
+          <p:cNvSpPr/>
+          <p:nvPr/>
+        </p:nvSpPr>
+        <p:spPr>
+          <a:xfrm>
+            <a:off x="8048549" y="2907792"/>
             <a:ext cx="3576218" cy="1051560"/>
           </a:xfrm>
           <a:prstGeom prst="roundRect">
@@ -8925,13 +11989,13 @@
       </p:sp>
       <p:sp>
         <p:nvSpPr>
-          <p:cNvPr id="25" name="Text 23"/>
-          <p:cNvSpPr/>
-          <p:nvPr/>
-        </p:nvSpPr>
-        <p:spPr>
-          <a:xfrm>
-            <a:off x="4472330" y="3447288"/>
+          <p:cNvPr id="28" name="Text 26"/>
+          <p:cNvSpPr/>
+          <p:nvPr/>
+        </p:nvSpPr>
+        <p:spPr>
+          <a:xfrm>
+            <a:off x="8213141" y="3035808"/>
             <a:ext cx="3247034" cy="201168"/>
           </a:xfrm>
           <a:prstGeom prst="rect">
@@ -8964,13 +12028,13 @@
       </p:sp>
       <p:sp>
         <p:nvSpPr>
-          <p:cNvPr id="26" name="Text 24"/>
-          <p:cNvSpPr/>
-          <p:nvPr/>
-        </p:nvSpPr>
-        <p:spPr>
-          <a:xfrm>
-            <a:off x="4472330" y="3630168"/>
+          <p:cNvPr id="29" name="Text 27"/>
+          <p:cNvSpPr/>
+          <p:nvPr/>
+        </p:nvSpPr>
+        <p:spPr>
+          <a:xfrm>
+            <a:off x="8213141" y="3218688"/>
             <a:ext cx="3247034" cy="402336"/>
           </a:xfrm>
           <a:prstGeom prst="rect">
@@ -9005,13 +12069,13 @@
       </p:sp>
       <p:sp>
         <p:nvSpPr>
-          <p:cNvPr id="27" name="Text 25"/>
-          <p:cNvSpPr/>
-          <p:nvPr/>
-        </p:nvSpPr>
-        <p:spPr>
-          <a:xfrm>
-            <a:off x="4472330" y="3995928"/>
+          <p:cNvPr id="30" name="Text 28"/>
+          <p:cNvSpPr/>
+          <p:nvPr/>
+        </p:nvSpPr>
+        <p:spPr>
+          <a:xfrm>
+            <a:off x="8213141" y="3584448"/>
             <a:ext cx="3247034" cy="164592"/>
           </a:xfrm>
           <a:prstGeom prst="rect">
@@ -9044,159 +12108,13 @@
       </p:sp>
       <p:sp>
         <p:nvSpPr>
-          <p:cNvPr id="28" name="Shape 26"/>
-          <p:cNvSpPr/>
-          <p:nvPr/>
-        </p:nvSpPr>
-        <p:spPr>
-          <a:xfrm>
-            <a:off x="8048549" y="3319272"/>
-            <a:ext cx="3576218" cy="1051560"/>
-          </a:xfrm>
-          <a:prstGeom prst="roundRect">
-            <a:avLst>
-              <a:gd name="adj" fmla="val 5217"/>
-            </a:avLst>
-          </a:prstGeom>
-          <a:solidFill>
-            <a:srgbClr val="F7FAFC"/>
-          </a:solidFill>
-          <a:ln w="6350">
-            <a:solidFill>
-              <a:srgbClr val="CBD5E0"/>
-            </a:solidFill>
-            <a:prstDash val="solid"/>
-          </a:ln>
-        </p:spPr>
-      </p:sp>
-      <p:sp>
-        <p:nvSpPr>
-          <p:cNvPr id="29" name="Text 27"/>
-          <p:cNvSpPr/>
-          <p:nvPr/>
-        </p:nvSpPr>
-        <p:spPr>
-          <a:xfrm>
-            <a:off x="8213141" y="3447288"/>
-            <a:ext cx="3247034" cy="201168"/>
-          </a:xfrm>
-          <a:prstGeom prst="rect">
-            <a:avLst/>
-          </a:prstGeom>
-          <a:noFill/>
-          <a:ln/>
-        </p:spPr>
-        <p:txBody>
-          <a:bodyPr wrap="square" lIns="0" tIns="0" rIns="0" bIns="0" rtlCol="0" anchor="ctr"/>
-          <a:lstStyle/>
-          <a:p>
-            <a:pPr indent="0" marL="0">
-              <a:buNone/>
-            </a:pPr>
-            <a:r>
-              <a:rPr lang="en-US" sz="950" dirty="0">
-                <a:solidFill>
-                  <a:srgbClr val="718096"/>
-                </a:solidFill>
-                <a:latin typeface="Pretendard" pitchFamily="34" charset="0"/>
-                <a:ea typeface="Pretendard" pitchFamily="34" charset="-122"/>
-                <a:cs typeface="Pretendard" pitchFamily="34" charset="-120"/>
-              </a:rPr>
-              <a:t>보증금 총액</a:t>
-            </a:r>
-            <a:endParaRPr lang="en-US" sz="950" dirty="0"/>
-          </a:p>
-        </p:txBody>
-      </p:sp>
-      <p:sp>
-        <p:nvSpPr>
-          <p:cNvPr id="30" name="Text 28"/>
-          <p:cNvSpPr/>
-          <p:nvPr/>
-        </p:nvSpPr>
-        <p:spPr>
-          <a:xfrm>
-            <a:off x="8213141" y="3630168"/>
-            <a:ext cx="3247034" cy="402336"/>
-          </a:xfrm>
-          <a:prstGeom prst="rect">
-            <a:avLst/>
-          </a:prstGeom>
-          <a:noFill/>
-          <a:ln/>
-        </p:spPr>
-        <p:txBody>
-          <a:bodyPr wrap="square" lIns="0" tIns="0" rIns="0" bIns="0" rtlCol="0" anchor="ctr">
-            <a:normAutofit/>
-          </a:bodyPr>
-          <a:lstStyle/>
-          <a:p>
-            <a:pPr indent="0" marL="0">
-              <a:buNone/>
-            </a:pPr>
-            <a:r>
-              <a:rPr lang="en-US" sz="1800" b="1" dirty="0">
-                <a:solidFill>
-                  <a:srgbClr val="10161F"/>
-                </a:solidFill>
-                <a:latin typeface="Pretendard" pitchFamily="34" charset="0"/>
-                <a:ea typeface="Pretendard" pitchFamily="34" charset="-122"/>
-                <a:cs typeface="Pretendard" pitchFamily="34" charset="-120"/>
-              </a:rPr>
-              <a:t>약 3.0억 원</a:t>
-            </a:r>
-            <a:endParaRPr lang="en-US" sz="1800" dirty="0"/>
-          </a:p>
-        </p:txBody>
-      </p:sp>
-      <p:sp>
-        <p:nvSpPr>
-          <p:cNvPr id="31" name="Text 29"/>
-          <p:cNvSpPr/>
-          <p:nvPr/>
-        </p:nvSpPr>
-        <p:spPr>
-          <a:xfrm>
-            <a:off x="8213141" y="3995928"/>
-            <a:ext cx="3247034" cy="164592"/>
-          </a:xfrm>
-          <a:prstGeom prst="rect">
-            <a:avLst/>
-          </a:prstGeom>
-          <a:noFill/>
-          <a:ln/>
-        </p:spPr>
-        <p:txBody>
-          <a:bodyPr wrap="square" lIns="0" tIns="0" rIns="0" bIns="0" rtlCol="0" anchor="ctr"/>
-          <a:lstStyle/>
-          <a:p>
-            <a:pPr indent="0" marL="0">
-              <a:buNone/>
-            </a:pPr>
-            <a:r>
-              <a:rPr lang="en-US" sz="880" dirty="0">
-                <a:solidFill>
-                  <a:srgbClr val="718096"/>
-                </a:solidFill>
-                <a:latin typeface="Pretendard" pitchFamily="34" charset="0"/>
-                <a:ea typeface="Pretendard" pitchFamily="34" charset="-122"/>
-                <a:cs typeface="Pretendard" pitchFamily="34" charset="-120"/>
-              </a:rPr>
-              <a:t>임차인 보증금 합계</a:t>
-            </a:r>
-            <a:endParaRPr lang="en-US" sz="880" dirty="0"/>
-          </a:p>
-        </p:txBody>
-      </p:sp>
-      <p:sp>
-        <p:nvSpPr>
-          <p:cNvPr id="32" name="Shape 30"/>
-          <p:cNvSpPr/>
-          <p:nvPr/>
-        </p:nvSpPr>
-        <p:spPr>
-          <a:xfrm>
-            <a:off x="566928" y="4626864"/>
+          <p:cNvPr id="31" name="Shape 29"/>
+          <p:cNvSpPr/>
+          <p:nvPr/>
+        </p:nvSpPr>
+        <p:spPr>
+          <a:xfrm>
+            <a:off x="566928" y="4215384"/>
             <a:ext cx="11057839" cy="1280160"/>
           </a:xfrm>
           <a:prstGeom prst="roundRect">
@@ -9212,13 +12130,13 @@
       </p:sp>
       <p:sp>
         <p:nvSpPr>
-          <p:cNvPr id="33" name="Shape 31"/>
-          <p:cNvSpPr/>
-          <p:nvPr/>
-        </p:nvSpPr>
-        <p:spPr>
-          <a:xfrm>
-            <a:off x="566928" y="4681728"/>
+          <p:cNvPr id="32" name="Shape 30"/>
+          <p:cNvSpPr/>
+          <p:nvPr/>
+        </p:nvSpPr>
+        <p:spPr>
+          <a:xfrm>
+            <a:off x="566928" y="4270248"/>
             <a:ext cx="36576" cy="1170432"/>
           </a:xfrm>
           <a:prstGeom prst="rect">
@@ -9232,13 +12150,13 @@
       </p:sp>
       <p:sp>
         <p:nvSpPr>
-          <p:cNvPr id="34" name="Text 32"/>
-          <p:cNvSpPr/>
-          <p:nvPr/>
-        </p:nvSpPr>
-        <p:spPr>
-          <a:xfrm>
-            <a:off x="749808" y="4736592"/>
+          <p:cNvPr id="33" name="Text 31"/>
+          <p:cNvSpPr/>
+          <p:nvPr/>
+        </p:nvSpPr>
+        <p:spPr>
+          <a:xfrm>
+            <a:off x="749808" y="4325112"/>
             <a:ext cx="10728655" cy="201168"/>
           </a:xfrm>
           <a:prstGeom prst="rect">
@@ -9271,13 +12189,13 @@
       </p:sp>
       <p:sp>
         <p:nvSpPr>
-          <p:cNvPr id="35" name="Text 33"/>
-          <p:cNvSpPr/>
-          <p:nvPr/>
-        </p:nvSpPr>
-        <p:spPr>
-          <a:xfrm>
-            <a:off x="749808" y="4956048"/>
+          <p:cNvPr id="34" name="Text 32"/>
+          <p:cNvSpPr/>
+          <p:nvPr/>
+        </p:nvSpPr>
+        <p:spPr>
+          <a:xfrm>
+            <a:off x="749808" y="4544568"/>
             <a:ext cx="10728655" cy="877824"/>
           </a:xfrm>
           <a:prstGeom prst="rect">
@@ -9305,7 +12223,7 @@
                 <a:ea typeface="Pretendard" pitchFamily="34" charset="-122"/>
                 <a:cs typeface="Pretendard" pitchFamily="34" charset="-120"/>
               </a:rPr>
-              <a:t>{"ok":true,"mocked":true,"extractedFields":{"area_signal":"역삼","asset_type":"오피스빌딩","price_band":"300억","size_signal":"3000평(약 9917.4㎡)"},"extractedFacts":{"region":"역삼","exactAddressCandidate":"역삼동 742-1","assetType":"오피스빌딩","priceText":"300억","sizeText":"3000평(약 9917.4㎡)","currentUse":"오피스","currentUseSignal":"근린생활시설","leaseSignal":"임대중","vacancySignal":"공실없음","tenantNames":["쿠팡","네이버"],"unitRentTexts":["301호: 1500만"],"sellerMotivationText":"자산 효율화","brokerNotes":["초역세권 매물"]},"detectedSensitiveFields":["exact_address","tenant_name"],"ambiguousFields":[],"warnings":[],"areaSignal":"역삼","assetType":"오피스빌딩","priceBand":"300억","sizeSignal":"3000평(약 9917.4㎡)","dealType":"매각","buildingName":"역삼 센트럴타워","exactAddress":"역삼동 742-1","totalFloorArea":9917.3,"buildYear":2015,"currentUseSignal":"근린생활시설","vacancySignal":"공실 없음","fitSummary":"초역세권 근생 빌딩으로 시행/사옥 매입에 최적화","cautionSummary":"주요 임차 업종 만기 조율 필요","hiddenFields":["exact_address","seller_motivation"],"confidence":{"areaSignal":"confirmed","assetType":"confirmed","priceBand":"ai_hypothesis","fitSummary":"ai_hypothesis"},"missingData":["sizeSignal"],"boundaryNote":"본 자료는 실거래 통계 기반 참고치입니다.","buyerType":"법인 사옥형","budgetRange":{"min":50,"max":80,"display":"50억~80억"},"preferredRegions":["강남","성수"],"assetTypes":["꼬마빌딩","사옥용"],"purchasePurpose":"사옥용 매입","mustHave":["초역세권","주차"],"niceToHave":["테라스","루프탑"],"riskTolerance":"medium","financingNote":"자본금 50% 준비","missingQuestions":["구체적인 입주 시기가 언제인가요?","선호하는 수익률이 있나요?"],"privacyNotes":["연락처 비공개"],"fitReasons":["매수자 예산(50-80억)에 부합하는 매물입니다.","요청하신 성수/강남 권역에 해당합니다."],"cautionReasons":["요청한 용도와 달리 명도 협의가 다소 필요합니다."],"recommendedNextAction":"현장 답사 제안","kakaoMessage":"안녕하세요! 요청하신 조건에 부합하는 추천 매물이 있어 안내해 드립니다. 확인해보시고 피드백 부탁드립니다.","title":"강남 역삼역 초역세권 오피스 사옥용 빌딩 매각","shortSummary":"역삼역 도보 5분 거리의 준신축급 대형 오피스빌딩입니다.","dealPoints":["초역세권","사옥 최적"],"cautionPoints":["명도 조율 필요"],"hiddenInfoNotice":["보증금 및 지번은 인가 후 확인 가능"],"gateMessage":"G1 등급 등록이 필요합니다.","kakaoText":"강남 역삼역 오피스 빌딩 매각 안내입니다.","exactUnitCandidate":"101호","floor":"1층","areaSqmText":"150㎡","spaceType":"office","depositText":"5000만","monthlyRentText":"400만","maintenanceFeeText":"50만","availableFromText":"즉시입주","leaseTermMonthsText":"24","incentivesText":"렌트프리 2개월","restrictions":[],"landlordIdentity":"김성수","currentTenant":"스타트업","vacancyReason":"이전 확장","rentNegotiation":"협의 가능","region":"성수동","areaSqm":150,"deposit":5000,"monthlyRent":400,"maintenanceFee":50,"availableFrom":"즉시입주","leaseTermMonths":24,"incentives":{"rentFreeMonths":2,"interiorSupport":"일부 인테리어 지원","freeRentDetail":"렌트프리 2개월 지원"},"shortSummaryLease":"성수역 도보 5분 거리 1층 리테일 상가 매물입니다."}</a:t>
+              <a:t>아래 수치는 AI 추정값으로 참고용이며, 투자 결정의 근거로 사용할 수 없습니다. ### [참고] 핵심 현금흐름 3줄 요약 (내 돈 &amp; 월 순수익) ### 층별 임대 현황</a:t>
             </a:r>
             <a:endParaRPr lang="en-US" sz="930" dirty="0"/>
           </a:p>
@@ -9313,7 +12231,7 @@
       </p:sp>
       <p:sp>
         <p:nvSpPr>
-          <p:cNvPr id="36" name="Text 34"/>
+          <p:cNvPr id="35" name="Text 33"/>
           <p:cNvSpPr/>
           <p:nvPr/>
         </p:nvSpPr>
@@ -9352,7 +12270,7 @@
       </p:sp>
       <p:sp>
         <p:nvSpPr>
-          <p:cNvPr id="37" name="Text 35"/>
+          <p:cNvPr id="36" name="Text 34"/>
           <p:cNvSpPr/>
           <p:nvPr/>
         </p:nvSpPr>
@@ -9567,11 +12485,11 @@
         <p:spPr>
           <a:xfrm>
             <a:off x="566928" y="1417320"/>
-            <a:ext cx="11057839" cy="3657600"/>
+            <a:ext cx="3515258" cy="3657600"/>
           </a:xfrm>
           <a:prstGeom prst="roundRect">
             <a:avLst>
-              <a:gd name="adj" fmla="val 1500"/>
+              <a:gd name="adj" fmla="val 1561"/>
             </a:avLst>
           </a:prstGeom>
           <a:solidFill>
@@ -9594,7 +12512,7 @@
         <p:spPr>
           <a:xfrm>
             <a:off x="566928" y="1417320"/>
-            <a:ext cx="11057839" cy="45720"/>
+            <a:ext cx="3515258" cy="45720"/>
           </a:xfrm>
           <a:prstGeom prst="rect">
             <a:avLst/>
@@ -9614,7 +12532,7 @@
         <p:spPr>
           <a:xfrm>
             <a:off x="795528" y="1618488"/>
-            <a:ext cx="10600639" cy="292608"/>
+            <a:ext cx="3058058" cy="292608"/>
           </a:xfrm>
           <a:prstGeom prst="rect">
             <a:avLst/>
@@ -9638,7 +12556,7 @@
                 <a:ea typeface="Pretendard" pitchFamily="34" charset="-122"/>
                 <a:cs typeface="Pretendard" pitchFamily="34" charset="-120"/>
               </a:rPr>
-              <a:t>용도 리스크</a:t>
+              <a:t>건물 물리적 상태</a:t>
             </a:r>
             <a:endParaRPr lang="en-US" sz="1350" dirty="0"/>
           </a:p>
@@ -9653,7 +12571,7 @@
         <p:spPr>
           <a:xfrm>
             <a:off x="795528" y="1947672"/>
-            <a:ext cx="10600639" cy="365760"/>
+            <a:ext cx="3058058" cy="365760"/>
           </a:xfrm>
           <a:prstGeom prst="rect">
             <a:avLst/>
@@ -9679,7 +12597,7 @@
                 <a:ea typeface="Pretendard" pitchFamily="34" charset="-122"/>
                 <a:cs typeface="Pretendard" pitchFamily="34" charset="-120"/>
               </a:rPr>
-              <a:t>—</a:t>
+              <a:t>준공연도 확인 필요, 구조 확인 필요</a:t>
             </a:r>
             <a:endParaRPr lang="en-US" sz="1250" dirty="0"/>
           </a:p>
@@ -9694,7 +12612,7 @@
         <p:spPr>
           <a:xfrm>
             <a:off x="795528" y="2377440"/>
-            <a:ext cx="10600639" cy="2606040"/>
+            <a:ext cx="3058058" cy="2606040"/>
           </a:xfrm>
           <a:prstGeom prst="rect">
             <a:avLst/>
@@ -9724,10 +12642,58 @@
                 <a:ea typeface="Pretendard" pitchFamily="34" charset="-122"/>
                 <a:cs typeface="Pretendard" pitchFamily="34" charset="-120"/>
               </a:rPr>
-              <a:t>{"ok":true,"mocked":true,"extractedFields":{"area_signal":"역삼","asset_type":"오피스빌딩","price_band":"300억","size_signal":"3000평(약 9917.4㎡)"},"extractedFacts":{"region":"역삼","exactAddressCandidate":"역삼동 7</a:t>
+              <a:t>누수</a:t>
             </a:r>
             <a:endParaRPr lang="en-US" sz="1100" dirty="0"/>
           </a:p>
+          <a:p>
+            <a:pPr marL="342900" indent="-342900">
+              <a:lnSpc>
+                <a:spcPct val="125000"/>
+              </a:lnSpc>
+              <a:spcBef>
+                <a:spcPts val="600"/>
+              </a:spcBef>
+              <a:buSzPct val="100000"/>
+              <a:buChar char="•"/>
+            </a:pPr>
+            <a:r>
+              <a:rPr lang="en-US" sz="1100" dirty="0">
+                <a:solidFill>
+                  <a:srgbClr val="10161F"/>
+                </a:solidFill>
+                <a:latin typeface="Pretendard" pitchFamily="34" charset="0"/>
+                <a:ea typeface="Pretendard" pitchFamily="34" charset="-122"/>
+                <a:cs typeface="Pretendard" pitchFamily="34" charset="-120"/>
+              </a:rPr>
+              <a:t>균열</a:t>
+            </a:r>
+            <a:endParaRPr lang="en-US" sz="1100" dirty="0"/>
+          </a:p>
+          <a:p>
+            <a:pPr marL="342900" indent="-342900">
+              <a:lnSpc>
+                <a:spcPct val="125000"/>
+              </a:lnSpc>
+              <a:spcBef>
+                <a:spcPts val="600"/>
+              </a:spcBef>
+              <a:buSzPct val="100000"/>
+              <a:buChar char="•"/>
+            </a:pPr>
+            <a:r>
+              <a:rPr lang="en-US" sz="1100" dirty="0">
+                <a:solidFill>
+                  <a:srgbClr val="10161F"/>
+                </a:solidFill>
+                <a:latin typeface="Pretendard" pitchFamily="34" charset="0"/>
+                <a:ea typeface="Pretendard" pitchFamily="34" charset="-122"/>
+                <a:cs typeface="Pretendard" pitchFamily="34" charset="-120"/>
+              </a:rPr>
+              <a:t>설비 노후 여부 현장 점검 필요</a:t>
+            </a:r>
+            <a:endParaRPr lang="en-US" sz="1100" dirty="0"/>
+          </a:p>
         </p:txBody>
       </p:sp>
       <p:sp>
@@ -9738,12 +12704,12 @@
         </p:nvSpPr>
         <p:spPr>
           <a:xfrm>
-            <a:off x="566928" y="5193792"/>
-            <a:ext cx="11057839" cy="621792"/>
+            <a:off x="4338218" y="1417320"/>
+            <a:ext cx="3515258" cy="3657600"/>
           </a:xfrm>
           <a:prstGeom prst="roundRect">
             <a:avLst>
-              <a:gd name="adj" fmla="val 8824"/>
+              <a:gd name="adj" fmla="val 1561"/>
             </a:avLst>
           </a:prstGeom>
           <a:solidFill>
@@ -9759,7 +12725,351 @@
       </p:sp>
       <p:sp>
         <p:nvSpPr>
-          <p:cNvPr id="12" name="Text 10"/>
+          <p:cNvPr id="12" name="Shape 10"/>
+          <p:cNvSpPr/>
+          <p:nvPr/>
+        </p:nvSpPr>
+        <p:spPr>
+          <a:xfrm>
+            <a:off x="4338218" y="1417320"/>
+            <a:ext cx="3515258" cy="45720"/>
+          </a:xfrm>
+          <a:prstGeom prst="rect">
+            <a:avLst/>
+          </a:prstGeom>
+          <a:solidFill>
+            <a:srgbClr val="B98A2E"/>
+          </a:solidFill>
+          <a:ln/>
+        </p:spPr>
+      </p:sp>
+      <p:sp>
+        <p:nvSpPr>
+          <p:cNvPr id="13" name="Text 11"/>
+          <p:cNvSpPr/>
+          <p:nvPr/>
+        </p:nvSpPr>
+        <p:spPr>
+          <a:xfrm>
+            <a:off x="4566818" y="1618488"/>
+            <a:ext cx="3058058" cy="292608"/>
+          </a:xfrm>
+          <a:prstGeom prst="rect">
+            <a:avLst/>
+          </a:prstGeom>
+          <a:noFill/>
+          <a:ln/>
+        </p:spPr>
+        <p:txBody>
+          <a:bodyPr wrap="square" lIns="0" tIns="0" rIns="0" bIns="0" rtlCol="0" anchor="ctr"/>
+          <a:lstStyle/>
+          <a:p>
+            <a:pPr indent="0" marL="0">
+              <a:buNone/>
+            </a:pPr>
+            <a:r>
+              <a:rPr lang="en-US" sz="1350" b="1" dirty="0">
+                <a:solidFill>
+                  <a:srgbClr val="977024"/>
+                </a:solidFill>
+                <a:latin typeface="Pretendard" pitchFamily="34" charset="0"/>
+                <a:ea typeface="Pretendard" pitchFamily="34" charset="-122"/>
+                <a:cs typeface="Pretendard" pitchFamily="34" charset="-120"/>
+              </a:rPr>
+              <a:t>승강기 및 설비</a:t>
+            </a:r>
+            <a:endParaRPr lang="en-US" sz="1350" dirty="0"/>
+          </a:p>
+        </p:txBody>
+      </p:sp>
+      <p:sp>
+        <p:nvSpPr>
+          <p:cNvPr id="14" name="Text 12"/>
+          <p:cNvSpPr/>
+          <p:nvPr/>
+        </p:nvSpPr>
+        <p:spPr>
+          <a:xfrm>
+            <a:off x="4566818" y="1947672"/>
+            <a:ext cx="3058058" cy="365760"/>
+          </a:xfrm>
+          <a:prstGeom prst="rect">
+            <a:avLst/>
+          </a:prstGeom>
+          <a:noFill/>
+          <a:ln/>
+        </p:spPr>
+        <p:txBody>
+          <a:bodyPr wrap="square" lIns="0" tIns="0" rIns="0" bIns="0" rtlCol="0" anchor="ctr">
+            <a:normAutofit/>
+          </a:bodyPr>
+          <a:lstStyle/>
+          <a:p>
+            <a:pPr indent="0" marL="0">
+              <a:buNone/>
+            </a:pPr>
+            <a:r>
+              <a:rPr lang="en-US" sz="1250" b="1" dirty="0">
+                <a:solidFill>
+                  <a:srgbClr val="10161F"/>
+                </a:solidFill>
+                <a:latin typeface="Pretendard" pitchFamily="34" charset="0"/>
+                <a:ea typeface="Pretendard" pitchFamily="34" charset="-122"/>
+                <a:cs typeface="Pretendard" pitchFamily="34" charset="-120"/>
+              </a:rPr>
+              <a:t>승강기 정보 확인 필요</a:t>
+            </a:r>
+            <a:endParaRPr lang="en-US" sz="1250" dirty="0"/>
+          </a:p>
+        </p:txBody>
+      </p:sp>
+      <p:sp>
+        <p:nvSpPr>
+          <p:cNvPr id="15" name="Text 13"/>
+          <p:cNvSpPr/>
+          <p:nvPr/>
+        </p:nvSpPr>
+        <p:spPr>
+          <a:xfrm>
+            <a:off x="4566818" y="2377440"/>
+            <a:ext cx="3058058" cy="2606040"/>
+          </a:xfrm>
+          <a:prstGeom prst="rect">
+            <a:avLst/>
+          </a:prstGeom>
+          <a:noFill/>
+          <a:ln/>
+        </p:spPr>
+        <p:txBody>
+          <a:bodyPr wrap="square" lIns="0" tIns="0" rIns="0" bIns="0" rtlCol="0" anchor="t">
+            <a:normAutofit/>
+          </a:bodyPr>
+          <a:lstStyle/>
+          <a:p>
+            <a:pPr marL="342900" indent="-342900">
+              <a:lnSpc>
+                <a:spcPct val="125000"/>
+              </a:lnSpc>
+              <a:buSzPct val="100000"/>
+              <a:buChar char="•"/>
+            </a:pPr>
+            <a:r>
+              <a:rPr lang="en-US" sz="1100" dirty="0">
+                <a:solidFill>
+                  <a:srgbClr val="10161F"/>
+                </a:solidFill>
+                <a:latin typeface="Pretendard" pitchFamily="34" charset="0"/>
+                <a:ea typeface="Pretendard" pitchFamily="34" charset="-122"/>
+                <a:cs typeface="Pretendard" pitchFamily="34" charset="-120"/>
+              </a:rPr>
+              <a:t>정기검사 이력, 냉난방 설비 상태 확인 필요</a:t>
+            </a:r>
+            <a:endParaRPr lang="en-US" sz="1100" dirty="0"/>
+          </a:p>
+        </p:txBody>
+      </p:sp>
+      <p:sp>
+        <p:nvSpPr>
+          <p:cNvPr id="16" name="Shape 14"/>
+          <p:cNvSpPr/>
+          <p:nvPr/>
+        </p:nvSpPr>
+        <p:spPr>
+          <a:xfrm>
+            <a:off x="8109509" y="1417320"/>
+            <a:ext cx="3515258" cy="3657600"/>
+          </a:xfrm>
+          <a:prstGeom prst="roundRect">
+            <a:avLst>
+              <a:gd name="adj" fmla="val 1561"/>
+            </a:avLst>
+          </a:prstGeom>
+          <a:solidFill>
+            <a:srgbClr val="F7FAFC"/>
+          </a:solidFill>
+          <a:ln w="6350">
+            <a:solidFill>
+              <a:srgbClr val="CBD5E0"/>
+            </a:solidFill>
+            <a:prstDash val="solid"/>
+          </a:ln>
+        </p:spPr>
+      </p:sp>
+      <p:sp>
+        <p:nvSpPr>
+          <p:cNvPr id="17" name="Shape 15"/>
+          <p:cNvSpPr/>
+          <p:nvPr/>
+        </p:nvSpPr>
+        <p:spPr>
+          <a:xfrm>
+            <a:off x="8109509" y="1417320"/>
+            <a:ext cx="3515258" cy="45720"/>
+          </a:xfrm>
+          <a:prstGeom prst="rect">
+            <a:avLst/>
+          </a:prstGeom>
+          <a:solidFill>
+            <a:srgbClr val="B98A2E"/>
+          </a:solidFill>
+          <a:ln/>
+        </p:spPr>
+      </p:sp>
+      <p:sp>
+        <p:nvSpPr>
+          <p:cNvPr id="18" name="Text 16"/>
+          <p:cNvSpPr/>
+          <p:nvPr/>
+        </p:nvSpPr>
+        <p:spPr>
+          <a:xfrm>
+            <a:off x="8338109" y="1618488"/>
+            <a:ext cx="3058058" cy="292608"/>
+          </a:xfrm>
+          <a:prstGeom prst="rect">
+            <a:avLst/>
+          </a:prstGeom>
+          <a:noFill/>
+          <a:ln/>
+        </p:spPr>
+        <p:txBody>
+          <a:bodyPr wrap="square" lIns="0" tIns="0" rIns="0" bIns="0" rtlCol="0" anchor="ctr"/>
+          <a:lstStyle/>
+          <a:p>
+            <a:pPr indent="0" marL="0">
+              <a:buNone/>
+            </a:pPr>
+            <a:r>
+              <a:rPr lang="en-US" sz="1350" b="1" dirty="0">
+                <a:solidFill>
+                  <a:srgbClr val="977024"/>
+                </a:solidFill>
+                <a:latin typeface="Pretendard" pitchFamily="34" charset="0"/>
+                <a:ea typeface="Pretendard" pitchFamily="34" charset="-122"/>
+                <a:cs typeface="Pretendard" pitchFamily="34" charset="-120"/>
+              </a:rPr>
+              <a:t>임차인 이탈 위험</a:t>
+            </a:r>
+            <a:endParaRPr lang="en-US" sz="1350" dirty="0"/>
+          </a:p>
+        </p:txBody>
+      </p:sp>
+      <p:sp>
+        <p:nvSpPr>
+          <p:cNvPr id="19" name="Text 17"/>
+          <p:cNvSpPr/>
+          <p:nvPr/>
+        </p:nvSpPr>
+        <p:spPr>
+          <a:xfrm>
+            <a:off x="8338109" y="1947672"/>
+            <a:ext cx="3058058" cy="365760"/>
+          </a:xfrm>
+          <a:prstGeom prst="rect">
+            <a:avLst/>
+          </a:prstGeom>
+          <a:noFill/>
+          <a:ln/>
+        </p:spPr>
+        <p:txBody>
+          <a:bodyPr wrap="square" lIns="0" tIns="0" rIns="0" bIns="0" rtlCol="0" anchor="ctr">
+            <a:normAutofit/>
+          </a:bodyPr>
+          <a:lstStyle/>
+          <a:p>
+            <a:pPr indent="0" marL="0">
+              <a:buNone/>
+            </a:pPr>
+            <a:r>
+              <a:rPr lang="en-US" sz="1250" b="1" dirty="0">
+                <a:solidFill>
+                  <a:srgbClr val="10161F"/>
+                </a:solidFill>
+                <a:latin typeface="Pretendard" pitchFamily="34" charset="0"/>
+                <a:ea typeface="Pretendard" pitchFamily="34" charset="-122"/>
+                <a:cs typeface="Pretendard" pitchFamily="34" charset="-120"/>
+              </a:rPr>
+              <a:t>임대차 계약 현황 LOI 접수 후 열람</a:t>
+            </a:r>
+            <a:endParaRPr lang="en-US" sz="1250" dirty="0"/>
+          </a:p>
+        </p:txBody>
+      </p:sp>
+      <p:sp>
+        <p:nvSpPr>
+          <p:cNvPr id="20" name="Text 18"/>
+          <p:cNvSpPr/>
+          <p:nvPr/>
+        </p:nvSpPr>
+        <p:spPr>
+          <a:xfrm>
+            <a:off x="8338109" y="2377440"/>
+            <a:ext cx="3058058" cy="2606040"/>
+          </a:xfrm>
+          <a:prstGeom prst="rect">
+            <a:avLst/>
+          </a:prstGeom>
+          <a:noFill/>
+          <a:ln/>
+        </p:spPr>
+        <p:txBody>
+          <a:bodyPr wrap="square" lIns="0" tIns="0" rIns="0" bIns="0" rtlCol="0" anchor="t">
+            <a:normAutofit/>
+          </a:bodyPr>
+          <a:lstStyle/>
+          <a:p>
+            <a:pPr marL="342900" indent="-342900">
+              <a:lnSpc>
+                <a:spcPct val="125000"/>
+              </a:lnSpc>
+              <a:buSzPct val="100000"/>
+              <a:buChar char="•"/>
+            </a:pPr>
+            <a:r>
+              <a:rPr lang="en-US" sz="1100" dirty="0">
+                <a:solidFill>
+                  <a:srgbClr val="10161F"/>
+                </a:solidFill>
+                <a:latin typeface="Pretendard" pitchFamily="34" charset="0"/>
+                <a:ea typeface="Pretendard" pitchFamily="34" charset="-122"/>
+                <a:cs typeface="Pretendard" pitchFamily="34" charset="-120"/>
+              </a:rPr>
+              <a:t>잔여 계약기간(WALE), 임차인 신용도 확인 필요</a:t>
+            </a:r>
+            <a:endParaRPr lang="en-US" sz="1100" dirty="0"/>
+          </a:p>
+        </p:txBody>
+      </p:sp>
+      <p:sp>
+        <p:nvSpPr>
+          <p:cNvPr id="21" name="Shape 19"/>
+          <p:cNvSpPr/>
+          <p:nvPr/>
+        </p:nvSpPr>
+        <p:spPr>
+          <a:xfrm>
+            <a:off x="566928" y="5193792"/>
+            <a:ext cx="11057839" cy="621792"/>
+          </a:xfrm>
+          <a:prstGeom prst="roundRect">
+            <a:avLst>
+              <a:gd name="adj" fmla="val 8824"/>
+            </a:avLst>
+          </a:prstGeom>
+          <a:solidFill>
+            <a:srgbClr val="F7FAFC"/>
+          </a:solidFill>
+          <a:ln w="6350">
+            <a:solidFill>
+              <a:srgbClr val="CBD5E0"/>
+            </a:solidFill>
+            <a:prstDash val="solid"/>
+          </a:ln>
+        </p:spPr>
+      </p:sp>
+      <p:sp>
+        <p:nvSpPr>
+          <p:cNvPr id="22" name="Text 20"/>
           <p:cNvSpPr/>
           <p:nvPr/>
         </p:nvSpPr>
@@ -9798,7 +13108,7 @@
       </p:sp>
       <p:sp>
         <p:nvSpPr>
-          <p:cNvPr id="13" name="Text 11"/>
+          <p:cNvPr id="23" name="Text 21"/>
           <p:cNvSpPr/>
           <p:nvPr/>
         </p:nvSpPr>
@@ -9837,7 +13147,7 @@
       </p:sp>
       <p:sp>
         <p:nvSpPr>
-          <p:cNvPr id="14" name="Text 12"/>
+          <p:cNvPr id="24" name="Text 22"/>
           <p:cNvSpPr/>
           <p:nvPr/>
         </p:nvSpPr>
@@ -10045,53 +13355,14 @@
       </p:sp>
       <p:sp>
         <p:nvSpPr>
-          <p:cNvPr id="6" name="Text 4"/>
-          <p:cNvSpPr/>
-          <p:nvPr/>
-        </p:nvSpPr>
-        <p:spPr>
-          <a:xfrm>
-            <a:off x="1133856" y="1005840"/>
-            <a:ext cx="10490911" cy="237744"/>
-          </a:xfrm>
-          <a:prstGeom prst="rect">
-            <a:avLst/>
-          </a:prstGeom>
-          <a:noFill/>
-          <a:ln/>
-        </p:spPr>
-        <p:txBody>
-          <a:bodyPr wrap="square" lIns="0" tIns="0" rIns="0" bIns="0" rtlCol="0" anchor="ctr"/>
-          <a:lstStyle/>
-          <a:p>
-            <a:pPr indent="0" marL="0">
-              <a:buNone/>
-            </a:pPr>
-            <a:r>
-              <a:rPr lang="en-US" sz="1100" dirty="0">
-                <a:solidFill>
-                  <a:srgbClr val="718096"/>
-                </a:solidFill>
-                <a:latin typeface="Pretendard" pitchFamily="34" charset="0"/>
-                <a:ea typeface="Pretendard" pitchFamily="34" charset="-122"/>
-                <a:cs typeface="Pretendard" pitchFamily="34" charset="-120"/>
-              </a:rPr>
-              <a:t>3대 핵심 투자 포인트 (Investment Highlights)</a:t>
-            </a:r>
-            <a:endParaRPr lang="en-US" sz="1100" dirty="0"/>
-          </a:p>
-        </p:txBody>
-      </p:sp>
-      <p:sp>
-        <p:nvSpPr>
-          <p:cNvPr id="7" name="Shape 5"/>
-          <p:cNvSpPr/>
-          <p:nvPr/>
-        </p:nvSpPr>
-        <p:spPr>
-          <a:xfrm>
-            <a:off x="566928" y="1481328"/>
-            <a:ext cx="3472586" cy="2560320"/>
+          <p:cNvPr id="6" name="Shape 4"/>
+          <p:cNvSpPr/>
+          <p:nvPr/>
+        </p:nvSpPr>
+        <p:spPr>
+          <a:xfrm>
+            <a:off x="566928" y="1325880"/>
+            <a:ext cx="5368900" cy="2560320"/>
           </a:xfrm>
           <a:prstGeom prst="roundRect">
             <a:avLst>
@@ -10111,14 +13382,14 @@
       </p:sp>
       <p:sp>
         <p:nvSpPr>
-          <p:cNvPr id="8" name="Shape 6"/>
-          <p:cNvSpPr/>
-          <p:nvPr/>
-        </p:nvSpPr>
-        <p:spPr>
-          <a:xfrm>
-            <a:off x="566928" y="1481328"/>
-            <a:ext cx="3472586" cy="54864"/>
+          <p:cNvPr id="7" name="Shape 5"/>
+          <p:cNvSpPr/>
+          <p:nvPr/>
+        </p:nvSpPr>
+        <p:spPr>
+          <a:xfrm>
+            <a:off x="566928" y="1325880"/>
+            <a:ext cx="5368900" cy="54864"/>
           </a:xfrm>
           <a:prstGeom prst="rect">
             <a:avLst/>
@@ -10131,13 +13402,13 @@
       </p:sp>
       <p:sp>
         <p:nvSpPr>
-          <p:cNvPr id="9" name="Shape 7"/>
-          <p:cNvSpPr/>
-          <p:nvPr/>
-        </p:nvSpPr>
-        <p:spPr>
-          <a:xfrm>
-            <a:off x="795528" y="1755648"/>
+          <p:cNvPr id="8" name="Shape 6"/>
+          <p:cNvSpPr/>
+          <p:nvPr/>
+        </p:nvSpPr>
+        <p:spPr>
+          <a:xfrm>
+            <a:off x="795528" y="1600200"/>
             <a:ext cx="475488" cy="292608"/>
           </a:xfrm>
           <a:prstGeom prst="roundRect">
@@ -10153,13 +13424,13 @@
       </p:sp>
       <p:sp>
         <p:nvSpPr>
-          <p:cNvPr id="10" name="Text 8"/>
-          <p:cNvSpPr/>
-          <p:nvPr/>
-        </p:nvSpPr>
-        <p:spPr>
-          <a:xfrm>
-            <a:off x="795528" y="1755648"/>
+          <p:cNvPr id="9" name="Text 7"/>
+          <p:cNvSpPr/>
+          <p:nvPr/>
+        </p:nvSpPr>
+        <p:spPr>
+          <a:xfrm>
+            <a:off x="795528" y="1600200"/>
             <a:ext cx="475488" cy="292608"/>
           </a:xfrm>
           <a:prstGeom prst="rect">
@@ -10192,14 +13463,14 @@
       </p:sp>
       <p:sp>
         <p:nvSpPr>
-          <p:cNvPr id="11" name="Text 9"/>
-          <p:cNvSpPr/>
-          <p:nvPr/>
-        </p:nvSpPr>
-        <p:spPr>
-          <a:xfrm>
-            <a:off x="795528" y="2194560"/>
-            <a:ext cx="3015386" cy="365760"/>
+          <p:cNvPr id="10" name="Text 8"/>
+          <p:cNvSpPr/>
+          <p:nvPr/>
+        </p:nvSpPr>
+        <p:spPr>
+          <a:xfrm>
+            <a:off x="795528" y="2039112"/>
+            <a:ext cx="4911700" cy="365760"/>
           </a:xfrm>
           <a:prstGeom prst="rect">
             <a:avLst/>
@@ -10223,7 +13494,7 @@
                 <a:ea typeface="Pretendard" pitchFamily="34" charset="-122"/>
                 <a:cs typeface="Pretendard" pitchFamily="34" charset="-120"/>
               </a:rPr>
-              <a:t>원금 안전판 확보</a:t>
+              <a:t>확실한 월 현금흐름</a:t>
             </a:r>
             <a:endParaRPr lang="en-US" sz="1500" dirty="0"/>
           </a:p>
@@ -10231,14 +13502,14 @@
       </p:sp>
       <p:sp>
         <p:nvSpPr>
-          <p:cNvPr id="12" name="Shape 10"/>
-          <p:cNvSpPr/>
-          <p:nvPr/>
-        </p:nvSpPr>
-        <p:spPr>
-          <a:xfrm>
-            <a:off x="795528" y="2624328"/>
-            <a:ext cx="3015386" cy="0"/>
+          <p:cNvPr id="11" name="Shape 9"/>
+          <p:cNvSpPr/>
+          <p:nvPr/>
+        </p:nvSpPr>
+        <p:spPr>
+          <a:xfrm>
+            <a:off x="795528" y="2468880"/>
+            <a:ext cx="4911700" cy="0"/>
           </a:xfrm>
           <a:prstGeom prst="line">
             <a:avLst/>
@@ -10254,14 +13525,14 @@
       </p:sp>
       <p:sp>
         <p:nvSpPr>
-          <p:cNvPr id="13" name="Text 11"/>
-          <p:cNvSpPr/>
-          <p:nvPr/>
-        </p:nvSpPr>
-        <p:spPr>
-          <a:xfrm>
-            <a:off x="795528" y="2779776"/>
-            <a:ext cx="3015386" cy="1051560"/>
+          <p:cNvPr id="12" name="Text 10"/>
+          <p:cNvSpPr/>
+          <p:nvPr/>
+        </p:nvSpPr>
+        <p:spPr>
+          <a:xfrm>
+            <a:off x="795528" y="2624328"/>
+            <a:ext cx="4911700" cy="1051560"/>
           </a:xfrm>
           <a:prstGeom prst="rect">
             <a:avLst/>
@@ -10288,7 +13559,7 @@
                 <a:ea typeface="Pretendard" pitchFamily="34" charset="-122"/>
                 <a:cs typeface="Pretendard" pitchFamily="34" charset="-120"/>
               </a:rPr>
-              <a:t>마포권역의 핵심 입지로, 우량한 대지 지분 가치가 하방 경직성을 강력히 지지합니다.</a:t>
+              <a:t>임대차 현황 및 공실률을 반영한 순영업소득(NOI) 분석은 수익분석 섹션을 참조하시기 바랍니다.</a:t>
             </a:r>
             <a:endParaRPr lang="en-US" sz="1200" dirty="0"/>
           </a:p>
@@ -10296,14 +13567,14 @@
       </p:sp>
       <p:sp>
         <p:nvSpPr>
-          <p:cNvPr id="14" name="Shape 12"/>
-          <p:cNvSpPr/>
-          <p:nvPr/>
-        </p:nvSpPr>
-        <p:spPr>
-          <a:xfrm>
-            <a:off x="4359554" y="1481328"/>
-            <a:ext cx="3472586" cy="2560320"/>
+          <p:cNvPr id="13" name="Shape 11"/>
+          <p:cNvSpPr/>
+          <p:nvPr/>
+        </p:nvSpPr>
+        <p:spPr>
+          <a:xfrm>
+            <a:off x="6255868" y="1325880"/>
+            <a:ext cx="5368900" cy="2560320"/>
           </a:xfrm>
           <a:prstGeom prst="roundRect">
             <a:avLst>
@@ -10323,14 +13594,14 @@
       </p:sp>
       <p:sp>
         <p:nvSpPr>
-          <p:cNvPr id="15" name="Shape 13"/>
-          <p:cNvSpPr/>
-          <p:nvPr/>
-        </p:nvSpPr>
-        <p:spPr>
-          <a:xfrm>
-            <a:off x="4359554" y="1481328"/>
-            <a:ext cx="3472586" cy="54864"/>
+          <p:cNvPr id="14" name="Shape 12"/>
+          <p:cNvSpPr/>
+          <p:nvPr/>
+        </p:nvSpPr>
+        <p:spPr>
+          <a:xfrm>
+            <a:off x="6255868" y="1325880"/>
+            <a:ext cx="5368900" cy="54864"/>
           </a:xfrm>
           <a:prstGeom prst="rect">
             <a:avLst/>
@@ -10343,13 +13614,13 @@
       </p:sp>
       <p:sp>
         <p:nvSpPr>
-          <p:cNvPr id="16" name="Shape 14"/>
-          <p:cNvSpPr/>
-          <p:nvPr/>
-        </p:nvSpPr>
-        <p:spPr>
-          <a:xfrm>
-            <a:off x="4588154" y="1755648"/>
+          <p:cNvPr id="15" name="Shape 13"/>
+          <p:cNvSpPr/>
+          <p:nvPr/>
+        </p:nvSpPr>
+        <p:spPr>
+          <a:xfrm>
+            <a:off x="6484468" y="1600200"/>
             <a:ext cx="475488" cy="292608"/>
           </a:xfrm>
           <a:prstGeom prst="roundRect">
@@ -10365,13 +13636,13 @@
       </p:sp>
       <p:sp>
         <p:nvSpPr>
-          <p:cNvPr id="17" name="Text 15"/>
-          <p:cNvSpPr/>
-          <p:nvPr/>
-        </p:nvSpPr>
-        <p:spPr>
-          <a:xfrm>
-            <a:off x="4588154" y="1755648"/>
+          <p:cNvPr id="16" name="Text 14"/>
+          <p:cNvSpPr/>
+          <p:nvPr/>
+        </p:nvSpPr>
+        <p:spPr>
+          <a:xfrm>
+            <a:off x="6484468" y="1600200"/>
             <a:ext cx="475488" cy="292608"/>
           </a:xfrm>
           <a:prstGeom prst="rect">
@@ -10404,226 +13675,14 @@
       </p:sp>
       <p:sp>
         <p:nvSpPr>
-          <p:cNvPr id="18" name="Text 16"/>
-          <p:cNvSpPr/>
-          <p:nvPr/>
-        </p:nvSpPr>
-        <p:spPr>
-          <a:xfrm>
-            <a:off x="4588154" y="2194560"/>
-            <a:ext cx="3015386" cy="365760"/>
-          </a:xfrm>
-          <a:prstGeom prst="rect">
-            <a:avLst/>
-          </a:prstGeom>
-          <a:noFill/>
-          <a:ln/>
-        </p:spPr>
-        <p:txBody>
-          <a:bodyPr wrap="square" lIns="0" tIns="0" rIns="0" bIns="0" rtlCol="0" anchor="t"/>
-          <a:lstStyle/>
-          <a:p>
-            <a:pPr indent="0" marL="0">
-              <a:buNone/>
-            </a:pPr>
-            <a:r>
-              <a:rPr lang="en-US" sz="1500" b="1" dirty="0">
-                <a:solidFill>
-                  <a:srgbClr val="10161F"/>
-                </a:solidFill>
-                <a:latin typeface="Pretendard" pitchFamily="34" charset="0"/>
-                <a:ea typeface="Pretendard" pitchFamily="34" charset="-122"/>
-                <a:cs typeface="Pretendard" pitchFamily="34" charset="-120"/>
-              </a:rPr>
-              <a:t>확실한 월 현금흐름</a:t>
-            </a:r>
-            <a:endParaRPr lang="en-US" sz="1500" dirty="0"/>
-          </a:p>
-        </p:txBody>
-      </p:sp>
-      <p:sp>
-        <p:nvSpPr>
-          <p:cNvPr id="19" name="Shape 17"/>
-          <p:cNvSpPr/>
-          <p:nvPr/>
-        </p:nvSpPr>
-        <p:spPr>
-          <a:xfrm>
-            <a:off x="4588154" y="2624328"/>
-            <a:ext cx="3015386" cy="0"/>
-          </a:xfrm>
-          <a:prstGeom prst="line">
-            <a:avLst/>
-          </a:prstGeom>
-          <a:noFill/>
-          <a:ln w="6350">
-            <a:solidFill>
-              <a:srgbClr val="CBD5E0"/>
-            </a:solidFill>
-            <a:prstDash val="solid"/>
-          </a:ln>
-        </p:spPr>
-      </p:sp>
-      <p:sp>
-        <p:nvSpPr>
-          <p:cNvPr id="20" name="Text 18"/>
-          <p:cNvSpPr/>
-          <p:nvPr/>
-        </p:nvSpPr>
-        <p:spPr>
-          <a:xfrm>
-            <a:off x="4588154" y="2779776"/>
-            <a:ext cx="3015386" cy="1051560"/>
-          </a:xfrm>
-          <a:prstGeom prst="rect">
-            <a:avLst/>
-          </a:prstGeom>
-          <a:noFill/>
-          <a:ln/>
-        </p:spPr>
-        <p:txBody>
-          <a:bodyPr wrap="square" lIns="0" tIns="0" rIns="0" bIns="0" rtlCol="0" anchor="t"/>
-          <a:lstStyle/>
-          <a:p>
-            <a:pPr indent="0" marL="0">
-              <a:lnSpc>
-                <a:spcPct val="130000"/>
-              </a:lnSpc>
-              <a:buNone/>
-            </a:pPr>
-            <a:r>
-              <a:rPr lang="en-US" sz="1200" dirty="0">
-                <a:solidFill>
-                  <a:srgbClr val="10161F"/>
-                </a:solidFill>
-                <a:latin typeface="Pretendard" pitchFamily="34" charset="0"/>
-                <a:ea typeface="Pretendard" pitchFamily="34" charset="-122"/>
-                <a:cs typeface="Pretendard" pitchFamily="34" charset="-120"/>
-              </a:rPr>
-              <a:t>우량 테넌트 만실 운영 및 장기 임대차 구조를 기반으로 매월 안정적인 순영업소득(NOI) 창출이 기대됩니다.</a:t>
-            </a:r>
-            <a:endParaRPr lang="en-US" sz="1200" dirty="0"/>
-          </a:p>
-        </p:txBody>
-      </p:sp>
-      <p:sp>
-        <p:nvSpPr>
-          <p:cNvPr id="21" name="Shape 19"/>
-          <p:cNvSpPr/>
-          <p:nvPr/>
-        </p:nvSpPr>
-        <p:spPr>
-          <a:xfrm>
-            <a:off x="8152181" y="1481328"/>
-            <a:ext cx="3472586" cy="2560320"/>
-          </a:xfrm>
-          <a:prstGeom prst="roundRect">
-            <a:avLst>
-              <a:gd name="adj" fmla="val 2857"/>
-            </a:avLst>
-          </a:prstGeom>
-          <a:solidFill>
-            <a:srgbClr val="F7FAFC"/>
-          </a:solidFill>
-          <a:ln w="10160">
-            <a:solidFill>
-              <a:srgbClr val="CBD5E0"/>
-            </a:solidFill>
-            <a:prstDash val="solid"/>
-          </a:ln>
-        </p:spPr>
-      </p:sp>
-      <p:sp>
-        <p:nvSpPr>
-          <p:cNvPr id="22" name="Shape 20"/>
-          <p:cNvSpPr/>
-          <p:nvPr/>
-        </p:nvSpPr>
-        <p:spPr>
-          <a:xfrm>
-            <a:off x="8152181" y="1481328"/>
-            <a:ext cx="3472586" cy="54864"/>
-          </a:xfrm>
-          <a:prstGeom prst="rect">
-            <a:avLst/>
-          </a:prstGeom>
-          <a:solidFill>
-            <a:srgbClr val="B98A2E"/>
-          </a:solidFill>
-          <a:ln/>
-        </p:spPr>
-      </p:sp>
-      <p:sp>
-        <p:nvSpPr>
-          <p:cNvPr id="23" name="Shape 21"/>
-          <p:cNvSpPr/>
-          <p:nvPr/>
-        </p:nvSpPr>
-        <p:spPr>
-          <a:xfrm>
-            <a:off x="8380781" y="1755648"/>
-            <a:ext cx="475488" cy="292608"/>
-          </a:xfrm>
-          <a:prstGeom prst="roundRect">
-            <a:avLst>
-              <a:gd name="adj" fmla="val 12500"/>
-            </a:avLst>
-          </a:prstGeom>
-          <a:solidFill>
-            <a:srgbClr val="D9B668"/>
-          </a:solidFill>
-          <a:ln/>
-        </p:spPr>
-      </p:sp>
-      <p:sp>
-        <p:nvSpPr>
-          <p:cNvPr id="24" name="Text 22"/>
-          <p:cNvSpPr/>
-          <p:nvPr/>
-        </p:nvSpPr>
-        <p:spPr>
-          <a:xfrm>
-            <a:off x="8380781" y="1755648"/>
-            <a:ext cx="475488" cy="292608"/>
-          </a:xfrm>
-          <a:prstGeom prst="rect">
-            <a:avLst/>
-          </a:prstGeom>
-          <a:noFill/>
-          <a:ln/>
-        </p:spPr>
-        <p:txBody>
-          <a:bodyPr wrap="square" lIns="0" tIns="0" rIns="0" bIns="0" rtlCol="0" anchor="ctr"/>
-          <a:lstStyle/>
-          <a:p>
-            <a:pPr algn="ctr" indent="0" marL="0">
-              <a:buNone/>
-            </a:pPr>
-            <a:r>
-              <a:rPr lang="en-US" sz="1100" b="1" dirty="0">
-                <a:solidFill>
-                  <a:srgbClr val="977024"/>
-                </a:solidFill>
-                <a:latin typeface="Arial" pitchFamily="34" charset="0"/>
-                <a:ea typeface="Arial" pitchFamily="34" charset="-122"/>
-                <a:cs typeface="Arial" pitchFamily="34" charset="-120"/>
-              </a:rPr>
-              <a:t>03</a:t>
-            </a:r>
-            <a:endParaRPr lang="en-US" sz="1100" dirty="0"/>
-          </a:p>
-        </p:txBody>
-      </p:sp>
-      <p:sp>
-        <p:nvSpPr>
-          <p:cNvPr id="25" name="Text 23"/>
-          <p:cNvSpPr/>
-          <p:nvPr/>
-        </p:nvSpPr>
-        <p:spPr>
-          <a:xfrm>
-            <a:off x="8380781" y="2194560"/>
-            <a:ext cx="3015386" cy="365760"/>
+          <p:cNvPr id="17" name="Text 15"/>
+          <p:cNvSpPr/>
+          <p:nvPr/>
+        </p:nvSpPr>
+        <p:spPr>
+          <a:xfrm>
+            <a:off x="6484468" y="2039112"/>
+            <a:ext cx="4911700" cy="365760"/>
           </a:xfrm>
           <a:prstGeom prst="rect">
             <a:avLst/>
@@ -10655,14 +13714,14 @@
       </p:sp>
       <p:sp>
         <p:nvSpPr>
-          <p:cNvPr id="26" name="Shape 24"/>
-          <p:cNvSpPr/>
-          <p:nvPr/>
-        </p:nvSpPr>
-        <p:spPr>
-          <a:xfrm>
-            <a:off x="8380781" y="2624328"/>
-            <a:ext cx="3015386" cy="0"/>
+          <p:cNvPr id="18" name="Shape 16"/>
+          <p:cNvSpPr/>
+          <p:nvPr/>
+        </p:nvSpPr>
+        <p:spPr>
+          <a:xfrm>
+            <a:off x="6484468" y="2468880"/>
+            <a:ext cx="4911700" cy="0"/>
           </a:xfrm>
           <a:prstGeom prst="line">
             <a:avLst/>
@@ -10678,14 +13737,14 @@
       </p:sp>
       <p:sp>
         <p:nvSpPr>
-          <p:cNvPr id="27" name="Text 25"/>
-          <p:cNvSpPr/>
-          <p:nvPr/>
-        </p:nvSpPr>
-        <p:spPr>
-          <a:xfrm>
-            <a:off x="8380781" y="2779776"/>
-            <a:ext cx="3015386" cy="1051560"/>
+          <p:cNvPr id="19" name="Text 17"/>
+          <p:cNvSpPr/>
+          <p:nvPr/>
+        </p:nvSpPr>
+        <p:spPr>
+          <a:xfrm>
+            <a:off x="6484468" y="2624328"/>
+            <a:ext cx="4911700" cy="1051560"/>
           </a:xfrm>
           <a:prstGeom prst="rect">
             <a:avLst/>
@@ -10712,7 +13771,7 @@
                 <a:ea typeface="Pretendard" pitchFamily="34" charset="-122"/>
                 <a:cs typeface="Pretendard" pitchFamily="34" charset="-120"/>
               </a:rPr>
-              <a:t>현행 공법 여력을 활용한 밸류업 기회와 더불어 향후 권역 지가 상승에 따른 시세차익 실현이 유력합니다.</a:t>
+              <a:t>현행 공법 여력을 활용한 밸류업 기회와 더불어 향후 권역 지가 상승에 따른 시세차익 실현이 유력합니다. ### 예상 매수자 유형 (AI 분석)</a:t>
             </a:r>
             <a:endParaRPr lang="en-US" sz="1200" dirty="0"/>
           </a:p>
@@ -10733,7 +13792,7 @@
           </p:nvPr>
         </p:nvGraphicFramePr>
         <p:xfrm>
-          <a:off x="566928" y="4178808"/>
+          <a:off x="566928" y="4023360"/>
           <a:ext cx="11057839" cy="914400"/>
         </p:xfrm>
         <a:graphic>
@@ -11037,7 +14096,7 @@
                           <a:ea typeface="Pretendard" pitchFamily="34" charset="-122"/>
                           <a:cs typeface="Pretendard" pitchFamily="34" charset="-120"/>
                         </a:rPr>
-                        <a:t>★★★★★</a:t>
+                        <a:t>최적합</a:t>
                       </a:r>
                       <a:endParaRPr lang="en-US" sz="1050" dirty="0">
                         <a:latin typeface="Pretendard" charset="0"/>
@@ -11327,7 +14386,7 @@
                           <a:ea typeface="Pretendard" pitchFamily="34" charset="-122"/>
                           <a:cs typeface="Pretendard" pitchFamily="34" charset="-120"/>
                         </a:rPr>
-                        <a:t>★★★★</a:t>
+                        <a:t>적합</a:t>
                       </a:r>
                       <a:endParaRPr lang="en-US" sz="1050" dirty="0">
                         <a:latin typeface="Pretendard" charset="0"/>
@@ -11561,7 +14620,7 @@
                           <a:ea typeface="Pretendard" pitchFamily="34" charset="-122"/>
                           <a:cs typeface="Pretendard" pitchFamily="34" charset="-120"/>
                         </a:rPr>
-                        <a:t>★★★</a:t>
+                        <a:t>검토</a:t>
                       </a:r>
                       <a:endParaRPr lang="en-US" sz="1050" dirty="0">
                         <a:latin typeface="Pretendard" charset="0"/>
@@ -11729,13 +14788,13 @@
       </p:graphicFrame>
       <p:sp>
         <p:nvSpPr>
-          <p:cNvPr id="29" name="Shape 26"/>
-          <p:cNvSpPr/>
-          <p:nvPr/>
-        </p:nvSpPr>
-        <p:spPr>
-          <a:xfrm>
-            <a:off x="566928" y="5678424"/>
+          <p:cNvPr id="21" name="Shape 18"/>
+          <p:cNvSpPr/>
+          <p:nvPr/>
+        </p:nvSpPr>
+        <p:spPr>
+          <a:xfrm>
+            <a:off x="566928" y="5522976"/>
             <a:ext cx="11057839" cy="804672"/>
           </a:xfrm>
           <a:prstGeom prst="roundRect">
@@ -11756,13 +14815,13 @@
       </p:sp>
       <p:sp>
         <p:nvSpPr>
-          <p:cNvPr id="30" name="Text 27"/>
-          <p:cNvSpPr/>
-          <p:nvPr/>
-        </p:nvSpPr>
-        <p:spPr>
-          <a:xfrm>
-            <a:off x="749808" y="5788152"/>
+          <p:cNvPr id="22" name="Text 19"/>
+          <p:cNvSpPr/>
+          <p:nvPr/>
+        </p:nvSpPr>
+        <p:spPr>
+          <a:xfrm>
+            <a:off x="749808" y="5632704"/>
             <a:ext cx="1691640" cy="256032"/>
           </a:xfrm>
           <a:prstGeom prst="rect">
@@ -11795,13 +14854,13 @@
       </p:sp>
       <p:sp>
         <p:nvSpPr>
-          <p:cNvPr id="31" name="Text 28"/>
-          <p:cNvSpPr/>
-          <p:nvPr/>
-        </p:nvSpPr>
-        <p:spPr>
-          <a:xfrm>
-            <a:off x="2487168" y="5751576"/>
+          <p:cNvPr id="23" name="Text 20"/>
+          <p:cNvSpPr/>
+          <p:nvPr/>
+        </p:nvSpPr>
+        <p:spPr>
+          <a:xfrm>
+            <a:off x="2487168" y="5596128"/>
             <a:ext cx="8954719" cy="658368"/>
           </a:xfrm>
           <a:prstGeom prst="rect">
@@ -11829,7 +14888,7 @@
                 <a:ea typeface="Pretendard" pitchFamily="34" charset="-122"/>
                 <a:cs typeface="Pretendard" pitchFamily="34" charset="-120"/>
               </a:rPr>
-              <a:t>[참고] 종합 가치 제안: 마포권역 핵심 상권의 희소성 높은 우량 자산으로, 안정적인 임대 수익과 향후 공법상 밸류업 및 권역 지가 상승에 따른 자본 이득(Capital Gain)을 동시에 실현할 수 있는 전략적 매물입니다.</a:t>
+              <a:t>[참고] 종합 가치 제안: 마포권역 소재 꼬마빌딩으로, 입지 및 자산 특성에 대한 상세 분석은 본문을 참조하시기 바랍니다. ### 3대 핵심 투자 포인트 (Investment Highlights) • 원금 안전판 확보: 마포권역 소재 자산으로, 대지 지분 가치 및 입지 경쟁력에 대한 분석은 자산 개요 섹션을 참조하시기 바랍니다.</a:t>
             </a:r>
             <a:endParaRPr lang="en-US" sz="1100" dirty="0"/>
           </a:p>
@@ -11837,7 +14896,7 @@
       </p:sp>
       <p:sp>
         <p:nvSpPr>
-          <p:cNvPr id="32" name="Text 29"/>
+          <p:cNvPr id="24" name="Text 21"/>
           <p:cNvSpPr/>
           <p:nvPr/>
         </p:nvSpPr>
@@ -11876,7 +14935,7 @@
       </p:sp>
       <p:sp>
         <p:nvSpPr>
-          <p:cNvPr id="33" name="Text 30"/>
+          <p:cNvPr id="25" name="Text 22"/>
           <p:cNvSpPr/>
           <p:nvPr/>
         </p:nvSpPr>
@@ -12118,7 +15177,7 @@
         <p:spPr>
           <a:xfrm>
             <a:off x="786384" y="1792224"/>
-            <a:ext cx="384048" cy="384048"/>
+            <a:ext cx="438912" cy="438912"/>
           </a:xfrm>
           <a:prstGeom prst="ellipse">
             <a:avLst/>
@@ -12138,7 +15197,7 @@
         <p:spPr>
           <a:xfrm>
             <a:off x="786384" y="1792224"/>
-            <a:ext cx="384048" cy="384048"/>
+            <a:ext cx="438912" cy="438912"/>
           </a:xfrm>
           <a:prstGeom prst="rect">
             <a:avLst/>
@@ -12154,7 +15213,7 @@
               <a:buNone/>
             </a:pPr>
             <a:r>
-              <a:rPr lang="en-US" sz="1300" b="1" dirty="0">
+              <a:rPr lang="en-US" sz="1400" b="1" dirty="0">
                 <a:solidFill>
                   <a:srgbClr val="FFFFFF"/>
                 </a:solidFill>
@@ -12162,9 +15221,9 @@
                 <a:ea typeface="Arial" pitchFamily="34" charset="-122"/>
                 <a:cs typeface="Arial" pitchFamily="34" charset="-120"/>
               </a:rPr>
-              <a:t>STEP 1</a:t>
-            </a:r>
-            <a:endParaRPr lang="en-US" sz="1300" dirty="0"/>
+              <a:t>01</a:t>
+            </a:r>
+            <a:endParaRPr lang="en-US" sz="1400" dirty="0"/>
           </a:p>
         </p:txBody>
       </p:sp>
@@ -12201,7 +15260,7 @@
                 <a:ea typeface="Pretendard" pitchFamily="34" charset="-122"/>
                 <a:cs typeface="Pretendard" pitchFamily="34" charset="-120"/>
               </a:rPr>
-              <a:t>{"ok"</a:t>
+              <a:t>1단계</a:t>
             </a:r>
             <a:endParaRPr lang="en-US" sz="1600" dirty="0"/>
           </a:p>
@@ -12240,7 +15299,24 @@
                 <a:ea typeface="Pretendard" pitchFamily="34" charset="-122"/>
                 <a:cs typeface="Pretendard" pitchFamily="34" charset="-120"/>
               </a:rPr>
-              <a:t>true,"mocked":true,"extractedFields":{"area_signal":"역삼","asset_type":"오피스빌딩","price_band":"300억","size_signal":"3000평(약 9917.4㎡)"},"extractedFacts":{"region":"역삼","exactAddressCandidate":"역삼동 742-1","assetType":"오피스빌딩","priceText":"300억","sizeText":"3000평(약 9917.4㎡)","currentUse":"오피스","currentUseSignal":"근린생활시설","leaseSignal":"임대중","vacancySignal":"공실없음","tenantNames":["쿠팡","네이버"],"unitRentTexts":["301호: 1500만"],"sellerMotivationText":"자산 효율화","brokerNotes":["초역세권 매물"]},"detectedSensitiveFields":["exact_address","tenant_name"],"ambiguousFields":[],"warnings":[],"areaSignal":"역삼","assetType":"오피스빌딩","priceBand":"300억","sizeSignal":"3000평(약 9917.4㎡)","dealType":"매각","buildingName":"역삼 센트럴타워","exactAddress":"역삼동 742-1","totalFloorArea":9917.3,"buildYear":2015,"currentUseSignal":"근린생활시설","vacancySignal":"공실 없음","fitSummary":"초역세권 근생 빌딩으로 시행/사옥 매입에 최적화","cautionSummary":"주요 임차 업종 만기 조율 필요","hiddenFields":["exact_address","seller_motivation"],"confidence":{"areaSignal":"confirmed","assetType":"confirmed","priceBand":"ai_hypothesis","fitSummary":"ai_hypothesis"},"missingData":["sizeSignal"],"boundaryNote":"본 자료는 실거래 통계 기반 참고치입니다.","buyerType":"법인 사옥형","budgetRange":{"min":50,"max":80,"display":"50억~80억"},"preferredRegions":["강남","성수"],"assetTypes":["꼬마빌딩","사옥용"],"purchasePurpose":"사옥용 매입","mustHave":["초역세권","주차"],"niceToHave":["테라스","루프탑"],"riskTolerance":"medium","financingNote":"자본금 50% 준비","missingQuestions":["구체적인 입주 시기가 언제인가요?","선호하는 수익률이 있나요?"],"privacyNotes":["연락처 비공개"],"fitReasons":["매수자 예산(50-80억)에 부합하는 매물입니다.","요청하신 성수/강남 권역에 해당합니다."],"cautionReasons":["요청한 용도와 달리 명도 협의가 다소 필요합니다."],"recommendedNextAction":"현장 답사 제안","kakaoMessage":"안녕하세요! 요청하신 조건에 부합하는 추천 매물이 있어 안내해 드립니다. 확인해보시고 피드백 부탁드립니다.","title":"강남 역삼역 초역세권 오피스 사옥용 빌딩 매각","shortSummary":"역삼역 도보 5분 거리의 준신축급 대형 오피스빌딩입니다.","dealPoints":["초역세권","사옥 최적"],"cautionPoints":["명도 조율 필요"],"hiddenInfoNotice":["보증금 및 지번은 인가 후 확인 가능"],"gateMessage":"G1 등급 등록이 필요합니다.","kakaoText":"강남 역삼역 오피스 빌딩 매각 안내입니다.","exactUnitCandidate":"101호","floor":"1층","areaSqmText":"150㎡","spaceType":"office","depositText":"5000만","monthlyRentText":"400만","maintenanceFeeText":"50만","availableFromText":"즉시입주","leaseTermMonthsText":"24","incentivesText":"렌트프리 2개월","restrictions":[],"landlordIdentity":"김성수","currentTenant":"스타트업","vacancyReason":"이전 확장","rentNegotiation":"협의 가능","region":"성수동","areaSqm":150,"deposit":5000,"monthlyRent":400,"maintenanceFee":50,"availableFrom":"즉시입주","leaseTermMonths":24,"incentives":{"rentFreeMonths":2,"interiorSupport":"일부 인테리어 지원","freeRentDetail":"렌트프리 2개월 지원"},"shortSummaryLease":"성수역 도보 5분 거리 1층 리테일 상가 매물입니다."}</a:t>
+              <a:t>{"ok"</a:t>
+            </a:r>
+            <a:endParaRPr lang="en-US" sz="1100" dirty="0"/>
+          </a:p>
+          <a:p>
+            <a:pPr indent="0" marL="0">
+              <a:buNone/>
+            </a:pPr>
+            <a:r>
+              <a:rPr lang="en-US" sz="1100" dirty="0">
+                <a:solidFill>
+                  <a:srgbClr val="10161F"/>
+                </a:solidFill>
+                <a:latin typeface="Pretendard" pitchFamily="34" charset="0"/>
+                <a:ea typeface="Pretendard" pitchFamily="34" charset="-122"/>
+                <a:cs typeface="Pretendard" pitchFamily="34" charset="-120"/>
+              </a:rPr>
+              <a:t>true,"mocked":true,"extractedFields":{"area_signal":"역삼","asset_type":"오피스빌딩","price_band":"300억","size_signal":"3000평(약 9917.4㎡)"},"extractedFacts":{"region":"역삼","exactAddressCandidate":"역삼동 742-1","assetType":"오피스빌딩","priceText":"300억","sizeText":"3000평(약 9917.4㎡)","currentUse":"오피스","currentUseSignal":"근린생활시설","leaseSignal":"임대중","vacancySignal":"공실없음","tenantNames":["쿠팡","네이버"],"unitRentTexts":["301호: 1500만"],"sellerMotivationText":"자산 효율화","brokerNotes":["초역세권 매물"]},"detectedSensitiveFields":["exact_address","tenant_name"],"ambiguousFields":[],"warnings":[],"areaSignal":"역삼","assetType":"오피스빌딩","priceBand":"300억","sizeSignal":"3000평(약 9917.4㎡)","dealType":"매각","buildingName":"역삼 센트럴타워","exactAddress":"역삼동 742-1","totalFloorArea":9917.3,"buildYear":2015,"currentUseSignal":"근린생활시설","vacancySignal":"공실 없음","fitSummary":"초역세권 근생 빌딩으로 시행/사옥 매입에 최적화","cautionSummary":"주요 임차인 만기 조율 필요","hiddenFields":["exact_address","seller_motivation"],"confidence":{"areaSignal":"confirmed","assetType":"confirmed","priceBand":"ai_hypothesis","fitSummary":"ai_hypothesis"},"missingData":["sizeSignal"],"boundaryNote":"본 자료는 실거래 통계 기반 참고치입니다.","buyerType":"법인 사옥형","budgetRange":{"min":50,"max":80,"display":"50억~80억"},"preferredRegions":["강남","성수"],"assetTypes":["꼬마빌딩","사옥용"],"purchasePurpose":"사옥용 매입","mustHave":["초역세권","주차"],"niceToHave":["테라스","루프탑"],"riskTolerance":"medium","financingNote":"자본금 50% 준비","missingQuestions":["구체적인 입주 시기가 언제인가요?","선호하는 수익률이 있나요?"],"privacyNotes":["연락처 비공개"],"fitReasons":["매수자 예산(50-80억)에 부합하는 매물입니다.","요청하신 성수/강남 권역에 해당합니다."],"cautionReasons":["요청한 용도와 달리 명도 협의가 다소 필요합니다."],"recommendedNextAction":"현장 답사 제안","kakaoMessage":"안녕하세요! 요청하신 조건에 부합하는 추천 매물이 있어 안내해 드립니다. 확인해보시고 피드백 부탁드립니다.","title":"강남 역삼역 초역세권 오피스 사옥용 빌딩 매각","shortSummary":"역삼역 도보 5분 거리의 준신축급 대형 오피스빌딩입니다.","dealPoints":["초역세권","사옥 최적"],"cautionPoints":["명도 조율 필요"],"hiddenInfoNotice":["보증금 및 지번은 인가 후 확인 가능"],"gateMessage":"G1 등급 등록이 필요합니다.","kakaoText":"강남 역삼역 오피스 빌딩 매각 안내입니다.","exactUnitCandidate":"101호","floor":"1층","areaSqmText":"150㎡","spaceType":"office","depositText":"5000만","monthlyRentText":"400만","maintenanceFeeText":"50만","availableFromText":"즉시입주","leaseTermMonthsText":"24","incentivesText":"렌트프리 2개월","restrictions":[],"landlordIdentity":"김성수","currentTenant":"스타트업","vacancyReason":"이전 확장","rentNegotiation":"협의 가능","region":"성수동","areaSqm":150,"deposit":5000,"monthlyRent":400,"maintenanceFee":50,"availableFrom":"즉시입주","leaseTermMonths":24,"incentives":{"rentFreeMonths":2,"interiorSupport":"일부 인테리어 지원","freeRentDetail":"렌트프리 2개월 지원"},"shortSummaryLease":"성수역 도보 5분 거리 1층 리테일 상가 매물입니다."}</a:t>
             </a:r>
             <a:endParaRPr lang="en-US" sz="1100" dirty="0"/>
           </a:p>

--- a/docs/test/stress/e2e-outputs/income_case02_hongdae_fnb_basic.pptx
+++ b/docs/test/stress/e2e-outputs/income_case02_hongdae_fnb_basic.pptx
@@ -15,9 +15,10 @@
     <p:sldId id="263" r:id="rId9"/>
     <p:sldId id="264" r:id="rId10"/>
     <p:sldId id="265" r:id="rId11"/>
+    <p:sldId id="266" r:id="rId12"/>
   </p:sldIdLst>
   <p:notesMasterIdLst>
-    <p:notesMasterId r:id="rId12"/>
+    <p:notesMasterId r:id="rId13"/>
   </p:notesMasterIdLst>
   <p:sldSz cx="12192000" cy="6858000"/>
   <p:notesSz cx="6858000" cy="12192000"/>
@@ -623,6 +624,94 @@
             <a:fld id="{F7021451-1387-4CA6-816F-3879F97B5CBC}" type="slidenum">
               <a:rPr lang="en-US"/>
               <a:t>10</a:t>
+            </a:fld>
+            <a:endParaRPr lang="en-US"/>
+          </a:p>
+        </p:txBody>
+      </p:sp>
+    </p:spTree>
+    <p:extLst>
+      <p:ext uri="{BB962C8B-B14F-4D97-AF65-F5344CB8AC3E}">
+        <p14:creationId xmlns:p14="http://schemas.microsoft.com/office/powerpoint/2010/main" val="1024086991"/>
+      </p:ext>
+    </p:extLst>
+  </p:cSld>
+  <p:clrMapOvr>
+    <a:masterClrMapping/>
+  </p:clrMapOvr>
+</p:notes>
+</file>
+
+<file path=ppt/notesSlides/notesSlide11.xml><?xml version="1.0" encoding="utf-8"?>
+<p:notes xmlns:a="http://schemas.openxmlformats.org/drawingml/2006/main" xmlns:r="http://schemas.openxmlformats.org/officeDocument/2006/relationships" xmlns:p="http://schemas.openxmlformats.org/presentationml/2006/main">
+  <p:cSld>
+    <p:spTree>
+      <p:nvGrpSpPr>
+        <p:cNvPr id="1" name=""/>
+        <p:cNvGrpSpPr/>
+        <p:nvPr/>
+      </p:nvGrpSpPr>
+      <p:grpSpPr>
+        <a:xfrm>
+          <a:off x="0" y="0"/>
+          <a:ext cx="0" cy="0"/>
+          <a:chOff x="0" y="0"/>
+          <a:chExt cx="0" cy="0"/>
+        </a:xfrm>
+      </p:grpSpPr>
+      <p:sp>
+        <p:nvSpPr>
+          <p:cNvPr id="2" name="Slide Image Placeholder 1"/>
+          <p:cNvSpPr>
+            <a:spLocks noGrp="1" noRot="1" noChangeAspect="1"/>
+          </p:cNvSpPr>
+          <p:nvPr>
+            <p:ph type="sldImg"/>
+          </p:nvPr>
+        </p:nvSpPr>
+        <p:spPr/>
+      </p:sp>
+      <p:sp>
+        <p:nvSpPr>
+          <p:cNvPr id="3" name="Notes Placeholder 2"/>
+          <p:cNvSpPr>
+            <a:spLocks noGrp="1"/>
+          </p:cNvSpPr>
+          <p:nvPr>
+            <p:ph type="body" idx="1"/>
+          </p:nvPr>
+        </p:nvSpPr>
+        <p:spPr/>
+        <p:txBody>
+          <a:bodyPr/>
+          <a:lstStyle/>
+          <a:p>
+            <a:r>
+              <a:rPr lang="en-US" dirty="0"/>
+              <a:t/>
+            </a:r>
+            <a:endParaRPr lang="en-US" dirty="0"/>
+          </a:p>
+        </p:txBody>
+      </p:sp>
+      <p:sp>
+        <p:nvSpPr>
+          <p:cNvPr id="4" name="Slide Number Placeholder 3"/>
+          <p:cNvSpPr>
+            <a:spLocks noGrp="1"/>
+          </p:cNvSpPr>
+          <p:nvPr>
+            <p:ph type="sldNum" sz="quarter" idx="10"/>
+          </p:nvPr>
+        </p:nvSpPr>
+        <p:spPr/>
+        <p:txBody>
+          <a:bodyPr/>
+          <a:lstStyle/>
+          <a:p>
+            <a:fld id="{F7021451-1387-4CA6-816F-3879F97B5CBC}" type="slidenum">
+              <a:rPr lang="en-US"/>
+              <a:t>11</a:t>
             </a:fld>
             <a:endParaRPr lang="en-US"/>
           </a:p>
@@ -2297,6 +2386,434 @@
     <p:bg>
       <p:bgPr>
         <a:solidFill>
+          <a:srgbClr val="FFFFFF"/>
+        </a:solidFill>
+      </p:bgPr>
+    </p:bg>
+    <p:spTree>
+      <p:nvGrpSpPr>
+        <p:cNvPr id="1" name=""/>
+        <p:cNvGrpSpPr/>
+        <p:nvPr/>
+      </p:nvGrpSpPr>
+      <p:grpSpPr>
+        <a:xfrm>
+          <a:off x="0" y="0"/>
+          <a:ext cx="0" cy="0"/>
+          <a:chOff x="0" y="0"/>
+          <a:chExt cx="0" cy="0"/>
+        </a:xfrm>
+      </p:grpSpPr>
+      <p:sp>
+        <p:nvSpPr>
+          <p:cNvPr id="2" name="Shape 0"/>
+          <p:cNvSpPr/>
+          <p:nvPr/>
+        </p:nvSpPr>
+        <p:spPr>
+          <a:xfrm>
+            <a:off x="566928" y="457200"/>
+            <a:ext cx="384048" cy="384048"/>
+          </a:xfrm>
+          <a:prstGeom prst="ellipse">
+            <a:avLst/>
+          </a:prstGeom>
+          <a:solidFill>
+            <a:srgbClr val="B98A2E"/>
+          </a:solidFill>
+          <a:ln/>
+        </p:spPr>
+      </p:sp>
+      <p:sp>
+        <p:nvSpPr>
+          <p:cNvPr id="3" name="Text 1"/>
+          <p:cNvSpPr/>
+          <p:nvPr/>
+        </p:nvSpPr>
+        <p:spPr>
+          <a:xfrm>
+            <a:off x="566928" y="457200"/>
+            <a:ext cx="384048" cy="384048"/>
+          </a:xfrm>
+          <a:prstGeom prst="rect">
+            <a:avLst/>
+          </a:prstGeom>
+          <a:noFill/>
+          <a:ln/>
+        </p:spPr>
+        <p:txBody>
+          <a:bodyPr wrap="square" lIns="0" tIns="0" rIns="0" bIns="0" rtlCol="0" anchor="ctr"/>
+          <a:lstStyle/>
+          <a:p>
+            <a:pPr algn="ctr" indent="0" marL="0">
+              <a:buNone/>
+            </a:pPr>
+            <a:r>
+              <a:rPr lang="en-US" sz="1300" b="1" dirty="0">
+                <a:solidFill>
+                  <a:srgbClr val="FFFFFF"/>
+                </a:solidFill>
+                <a:latin typeface="Arial" pitchFamily="34" charset="0"/>
+                <a:ea typeface="Arial" pitchFamily="34" charset="-122"/>
+                <a:cs typeface="Arial" pitchFamily="34" charset="-120"/>
+              </a:rPr>
+              <a:t>10</a:t>
+            </a:r>
+            <a:endParaRPr lang="en-US" sz="1300" dirty="0"/>
+          </a:p>
+        </p:txBody>
+      </p:sp>
+      <p:sp>
+        <p:nvSpPr>
+          <p:cNvPr id="4" name="Text 2"/>
+          <p:cNvSpPr/>
+          <p:nvPr/>
+        </p:nvSpPr>
+        <p:spPr>
+          <a:xfrm>
+            <a:off x="1133856" y="457200"/>
+            <a:ext cx="10490911" cy="182880"/>
+          </a:xfrm>
+          <a:prstGeom prst="rect">
+            <a:avLst/>
+          </a:prstGeom>
+          <a:noFill/>
+          <a:ln/>
+        </p:spPr>
+        <p:txBody>
+          <a:bodyPr wrap="square" lIns="0" tIns="0" rIns="0" bIns="0" rtlCol="0" anchor="ctr"/>
+          <a:lstStyle/>
+          <a:p>
+            <a:pPr indent="0" marL="0">
+              <a:buNone/>
+            </a:pPr>
+            <a:r>
+              <a:rPr lang="en-US" sz="950" b="1" spc="200" kern="0" dirty="0">
+                <a:solidFill>
+                  <a:srgbClr val="B98A2E"/>
+                </a:solidFill>
+                <a:latin typeface="Arial" pitchFamily="34" charset="0"/>
+                <a:ea typeface="Arial" pitchFamily="34" charset="-122"/>
+                <a:cs typeface="Arial" pitchFamily="34" charset="-120"/>
+              </a:rPr>
+              <a:t>Process</a:t>
+            </a:r>
+            <a:endParaRPr lang="en-US" sz="950" dirty="0"/>
+          </a:p>
+        </p:txBody>
+      </p:sp>
+      <p:sp>
+        <p:nvSpPr>
+          <p:cNvPr id="5" name="Text 3"/>
+          <p:cNvSpPr/>
+          <p:nvPr/>
+        </p:nvSpPr>
+        <p:spPr>
+          <a:xfrm>
+            <a:off x="1133856" y="640080"/>
+            <a:ext cx="10490911" cy="365760"/>
+          </a:xfrm>
+          <a:prstGeom prst="rect">
+            <a:avLst/>
+          </a:prstGeom>
+          <a:noFill/>
+          <a:ln/>
+        </p:spPr>
+        <p:txBody>
+          <a:bodyPr wrap="square" lIns="0" tIns="0" rIns="0" bIns="0" rtlCol="0" anchor="ctr"/>
+          <a:lstStyle/>
+          <a:p>
+            <a:pPr indent="0" marL="0">
+              <a:buNone/>
+            </a:pPr>
+            <a:r>
+              <a:rPr lang="en-US" sz="2300" b="1" dirty="0">
+                <a:solidFill>
+                  <a:srgbClr val="10161F"/>
+                </a:solidFill>
+                <a:latin typeface="Pretendard" pitchFamily="34" charset="0"/>
+                <a:ea typeface="Pretendard" pitchFamily="34" charset="-122"/>
+                <a:cs typeface="Pretendard" pitchFamily="34" charset="-120"/>
+              </a:rPr>
+              <a:t>검토 후 다음 단계는 무엇인가</a:t>
+            </a:r>
+            <a:endParaRPr lang="en-US" sz="2300" dirty="0"/>
+          </a:p>
+        </p:txBody>
+      </p:sp>
+      <p:sp>
+        <p:nvSpPr>
+          <p:cNvPr id="6" name="Shape 4"/>
+          <p:cNvSpPr/>
+          <p:nvPr/>
+        </p:nvSpPr>
+        <p:spPr>
+          <a:xfrm>
+            <a:off x="566928" y="1572768"/>
+            <a:ext cx="11057839" cy="3200400"/>
+          </a:xfrm>
+          <a:prstGeom prst="roundRect">
+            <a:avLst>
+              <a:gd name="adj" fmla="val 1714"/>
+            </a:avLst>
+          </a:prstGeom>
+          <a:solidFill>
+            <a:srgbClr val="F7FAFC"/>
+          </a:solidFill>
+          <a:ln w="6350">
+            <a:solidFill>
+              <a:srgbClr val="CBD5E0"/>
+            </a:solidFill>
+            <a:prstDash val="solid"/>
+          </a:ln>
+        </p:spPr>
+      </p:sp>
+      <p:sp>
+        <p:nvSpPr>
+          <p:cNvPr id="7" name="Shape 5"/>
+          <p:cNvSpPr/>
+          <p:nvPr/>
+        </p:nvSpPr>
+        <p:spPr>
+          <a:xfrm>
+            <a:off x="786384" y="1792224"/>
+            <a:ext cx="438912" cy="438912"/>
+          </a:xfrm>
+          <a:prstGeom prst="ellipse">
+            <a:avLst/>
+          </a:prstGeom>
+          <a:solidFill>
+            <a:srgbClr val="B98A2E"/>
+          </a:solidFill>
+          <a:ln/>
+        </p:spPr>
+      </p:sp>
+      <p:sp>
+        <p:nvSpPr>
+          <p:cNvPr id="8" name="Text 6"/>
+          <p:cNvSpPr/>
+          <p:nvPr/>
+        </p:nvSpPr>
+        <p:spPr>
+          <a:xfrm>
+            <a:off x="786384" y="1792224"/>
+            <a:ext cx="438912" cy="438912"/>
+          </a:xfrm>
+          <a:prstGeom prst="rect">
+            <a:avLst/>
+          </a:prstGeom>
+          <a:noFill/>
+          <a:ln/>
+        </p:spPr>
+        <p:txBody>
+          <a:bodyPr wrap="square" lIns="0" tIns="0" rIns="0" bIns="0" rtlCol="0" anchor="ctr"/>
+          <a:lstStyle/>
+          <a:p>
+            <a:pPr algn="ctr" indent="0" marL="0">
+              <a:buNone/>
+            </a:pPr>
+            <a:r>
+              <a:rPr lang="en-US" sz="1400" b="1" dirty="0">
+                <a:solidFill>
+                  <a:srgbClr val="FFFFFF"/>
+                </a:solidFill>
+                <a:latin typeface="Arial" pitchFamily="34" charset="0"/>
+                <a:ea typeface="Arial" pitchFamily="34" charset="-122"/>
+                <a:cs typeface="Arial" pitchFamily="34" charset="-120"/>
+              </a:rPr>
+              <a:t>01</a:t>
+            </a:r>
+            <a:endParaRPr lang="en-US" sz="1400" dirty="0"/>
+          </a:p>
+        </p:txBody>
+      </p:sp>
+      <p:sp>
+        <p:nvSpPr>
+          <p:cNvPr id="9" name="Text 7"/>
+          <p:cNvSpPr/>
+          <p:nvPr/>
+        </p:nvSpPr>
+        <p:spPr>
+          <a:xfrm>
+            <a:off x="786384" y="2304288"/>
+            <a:ext cx="10618927" cy="365760"/>
+          </a:xfrm>
+          <a:prstGeom prst="rect">
+            <a:avLst/>
+          </a:prstGeom>
+          <a:noFill/>
+          <a:ln/>
+        </p:spPr>
+        <p:txBody>
+          <a:bodyPr wrap="square" rtlCol="0" anchor="ctr"/>
+          <a:lstStyle/>
+          <a:p>
+            <a:pPr indent="0" marL="0">
+              <a:buNone/>
+            </a:pPr>
+            <a:r>
+              <a:rPr lang="en-US" sz="1600" b="1" dirty="0">
+                <a:solidFill>
+                  <a:srgbClr val="10161F"/>
+                </a:solidFill>
+                <a:latin typeface="Pretendard" pitchFamily="34" charset="0"/>
+                <a:ea typeface="Pretendard" pitchFamily="34" charset="-122"/>
+                <a:cs typeface="Pretendard" pitchFamily="34" charset="-120"/>
+              </a:rPr>
+              <a:t>1단계</a:t>
+            </a:r>
+            <a:endParaRPr lang="en-US" sz="1600" dirty="0"/>
+          </a:p>
+        </p:txBody>
+      </p:sp>
+      <p:sp>
+        <p:nvSpPr>
+          <p:cNvPr id="10" name="Text 8"/>
+          <p:cNvSpPr/>
+          <p:nvPr/>
+        </p:nvSpPr>
+        <p:spPr>
+          <a:xfrm>
+            <a:off x="786384" y="2761488"/>
+            <a:ext cx="10618927" cy="1828800"/>
+          </a:xfrm>
+          <a:prstGeom prst="rect">
+            <a:avLst/>
+          </a:prstGeom>
+          <a:noFill/>
+          <a:ln/>
+        </p:spPr>
+        <p:txBody>
+          <a:bodyPr wrap="square" rtlCol="0" anchor="t"/>
+          <a:lstStyle/>
+          <a:p>
+            <a:pPr indent="0" marL="0">
+              <a:buNone/>
+            </a:pPr>
+            <a:r>
+              <a:rPr lang="en-US" sz="1100" dirty="0">
+                <a:solidFill>
+                  <a:srgbClr val="10161F"/>
+                </a:solidFill>
+                <a:latin typeface="Pretendard" pitchFamily="34" charset="0"/>
+                <a:ea typeface="Pretendard" pitchFamily="34" charset="-122"/>
+                <a:cs typeface="Pretendard" pitchFamily="34" charset="-120"/>
+              </a:rPr>
+              <a:t>{"ok"</a:t>
+            </a:r>
+            <a:endParaRPr lang="en-US" sz="1100" dirty="0"/>
+          </a:p>
+          <a:p>
+            <a:pPr indent="0" marL="0">
+              <a:buNone/>
+            </a:pPr>
+            <a:r>
+              <a:rPr lang="en-US" sz="1100" dirty="0">
+                <a:solidFill>
+                  <a:srgbClr val="10161F"/>
+                </a:solidFill>
+                <a:latin typeface="Pretendard" pitchFamily="34" charset="0"/>
+                <a:ea typeface="Pretendard" pitchFamily="34" charset="-122"/>
+                <a:cs typeface="Pretendard" pitchFamily="34" charset="-120"/>
+              </a:rPr>
+              <a:t>true,"mocked":true,"extractedFields":{"area_signal":"역삼","asset_type":"오피스빌딩","price_band":"300억","size_signal":"3000평(약 9917.4㎡)"},"extractedFacts":{"region":"역삼","exactAddressCandidate":"역삼동 742-1","assetType":"오피스빌딩","priceText":"300억","sizeText":"3000평(약 9917.4㎡)","currentUse":"오피스","currentUseSignal":"근린생활시설","leaseSignal":"임대중","vacancySignal":"공실없음","tenantNames":["쿠팡","네이버"],"unitRentTexts":["301호: 1500만"],"sellerMotivationText":"자산 효율화","brokerNotes":["초역세권 매물"]},"detectedSensitiveFields":["exact_address","tenant_name"],"ambiguousFields":[],"warnings":[],"areaSignal":"역삼","assetType":"오피스빌딩","priceBand":"300억","sizeSignal":"3000평(약 9917.4㎡)","dealType":"매각","buildingName":"역삼 센트럴타워","exactAddress":"역삼동 742-1","totalFloorArea":9917.3,"buildYear":2015,"currentUseSignal":"근린생활시설","vacancySignal":"공실 없음","fitSummary":"초역세권 근생 빌딩으로 시행/사옥 매입에 최적화","cautionSummary":"주요 임차인 만기 조율 필요","hiddenFields":["exact_address","seller_motivation"],"confidence":{"areaSignal":"confirmed","assetType":"confirmed","priceBand":"ai_hypothesis","fitSummary":"ai_hypothesis"},"missingData":["sizeSignal"],"boundaryNote":"본 자료는 실거래 통계 기반 참고치입니다.","buyerType":"법인 사옥형","budgetRange":{"min":50,"max":80,"display":"50억~80억"},"preferredRegions":["강남","성수"],"assetTypes":["꼬마빌딩","사옥용"],"purchasePurpose":"사옥용 매입","mustHave":["초역세권","주차"],"niceToHave":["테라스","루프탑"],"riskTolerance":"medium","financingNote":"자본금 50% 준비","missingQuestions":["구체적인 입주 시기가 언제인가요?","선호하는 수익률이 있나요?"],"privacyNotes":["연락처 비공개"],"fitReasons":["매수자 예산(50-80억)에 부합하는 매물입니다.","요청하신 성수/강남 권역에 해당합니다."],"cautionReasons":["요청한 용도와 달리 명도 협의가 다소 필요합니다."],"recommendedNextAction":"현장 답사 제안","kakaoMessage":"안녕하세요! 요청하신 조건에 부합하는 추천 매물이 있어 안내해 드립니다. 확인해보시고 피드백 부탁드립니다.","title":"강남 역삼역 초역세권 오피스 사옥용 빌딩 매각","shortSummary":"역삼역 도보 5분 거리의 준신축급 대형 오피스빌딩입니다.","dealPoints":["초역세권","사옥 최적"],"cautionPoints":["명도 조율 필요"],"hiddenInfoNotice":["보증금 및 지번은 인가 후 확인 가능"],"gateMessage":"G1 등급 등록이 필요합니다.","kakaoText":"강남 역삼역 오피스 빌딩 매각 안내입니다.","exactUnitCandidate":"101호","floor":"1층","areaSqmText":"150㎡","spaceType":"office","depositText":"5000만","monthlyRentText":"400만","maintenanceFeeText":"50만","availableFromText":"즉시입주","leaseTermMonthsText":"24","incentivesText":"렌트프리 2개월","restrictions":[],"landlordIdentity":"김성수","currentTenant":"스타트업","vacancyReason":"이전 확장","rentNegotiation":"협의 가능","region":"성수동","areaSqm":150,"deposit":5000,"monthlyRent":400,"maintenanceFee":50,"availableFrom":"즉시입주","leaseTermMonths":24,"incentives":{"rentFreeMonths":2,"interiorSupport":"일부 인테리어 지원","freeRentDetail":"렌트프리 2개월 지원"},"shortSummaryLease":"성수역 도보 5분 거리 1층 리테일 상가 매물입니다."}</a:t>
+            </a:r>
+            <a:endParaRPr lang="en-US" sz="1100" dirty="0"/>
+          </a:p>
+        </p:txBody>
+      </p:sp>
+      <p:sp>
+        <p:nvSpPr>
+          <p:cNvPr id="11" name="Text 9"/>
+          <p:cNvSpPr/>
+          <p:nvPr/>
+        </p:nvSpPr>
+        <p:spPr>
+          <a:xfrm>
+            <a:off x="566928" y="6382512"/>
+            <a:ext cx="7315200" cy="219456"/>
+          </a:xfrm>
+          <a:prstGeom prst="rect">
+            <a:avLst/>
+          </a:prstGeom>
+          <a:noFill/>
+          <a:ln/>
+        </p:spPr>
+        <p:txBody>
+          <a:bodyPr wrap="square" lIns="0" tIns="0" rIns="0" bIns="0" rtlCol="0" anchor="ctr"/>
+          <a:lstStyle/>
+          <a:p>
+            <a:pPr indent="0" marL="0">
+              <a:buNone/>
+            </a:pPr>
+            <a:r>
+              <a:rPr lang="en-US" sz="800" dirty="0">
+                <a:solidFill>
+                  <a:srgbClr val="718096"/>
+                </a:solidFill>
+                <a:latin typeface="Pretendard" pitchFamily="34" charset="0"/>
+                <a:ea typeface="Pretendard" pitchFamily="34" charset="-122"/>
+                <a:cs typeface="Pretendard" pitchFamily="34" charset="-120"/>
+              </a:rPr>
+              <a:t>크리딜   |   </a:t>
+            </a:r>
+            <a:endParaRPr lang="en-US" sz="800" dirty="0"/>
+          </a:p>
+        </p:txBody>
+      </p:sp>
+      <p:sp>
+        <p:nvSpPr>
+          <p:cNvPr id="12" name="Text 10"/>
+          <p:cNvSpPr/>
+          <p:nvPr/>
+        </p:nvSpPr>
+        <p:spPr>
+          <a:xfrm>
+            <a:off x="10710367" y="6382512"/>
+            <a:ext cx="914400" cy="219456"/>
+          </a:xfrm>
+          <a:prstGeom prst="rect">
+            <a:avLst/>
+          </a:prstGeom>
+          <a:noFill/>
+          <a:ln/>
+        </p:spPr>
+        <p:txBody>
+          <a:bodyPr wrap="square" lIns="0" tIns="0" rIns="0" bIns="0" rtlCol="0" anchor="ctr"/>
+          <a:lstStyle/>
+          <a:p>
+            <a:pPr algn="r" indent="0" marL="0">
+              <a:buNone/>
+            </a:pPr>
+            <a:r>
+              <a:rPr lang="en-US" sz="900" b="1" dirty="0">
+                <a:solidFill>
+                  <a:srgbClr val="B98A2E"/>
+                </a:solidFill>
+                <a:latin typeface="Arial" pitchFamily="34" charset="0"/>
+                <a:ea typeface="Arial" pitchFamily="34" charset="-122"/>
+                <a:cs typeface="Arial" pitchFamily="34" charset="-120"/>
+              </a:rPr>
+              <a:t>10</a:t>
+            </a:r>
+            <a:endParaRPr lang="en-US" sz="900" dirty="0"/>
+          </a:p>
+        </p:txBody>
+      </p:sp>
+    </p:spTree>
+  </p:cSld>
+  <p:clrMapOvr>
+    <a:masterClrMapping/>
+  </p:clrMapOvr>
+</p:sld>
+</file>
+
+<file path=ppt/slides/slide11.xml><?xml version="1.0" encoding="utf-8"?>
+<p:sld xmlns:a="http://schemas.openxmlformats.org/drawingml/2006/main" xmlns:r="http://schemas.openxmlformats.org/officeDocument/2006/relationships" xmlns:p="http://schemas.openxmlformats.org/presentationml/2006/main">
+  <p:cSld name="Slide 11">
+    <p:bg>
+      <p:bgPr>
+        <a:solidFill>
           <a:srgbClr val="10161F"/>
         </a:solidFill>
       </p:bgPr>
@@ -2368,7 +2885,7 @@
                 <a:ea typeface="Arial" pitchFamily="34" charset="-122"/>
                 <a:cs typeface="Arial" pitchFamily="34" charset="-120"/>
               </a:rPr>
-              <a:t>10</a:t>
+              <a:t>11</a:t>
             </a:r>
             <a:endParaRPr lang="en-US" sz="1300" dirty="0"/>
           </a:p>
@@ -3780,7 +4297,7 @@
                 <a:ea typeface="Arial" pitchFamily="34" charset="-122"/>
                 <a:cs typeface="Arial" pitchFamily="34" charset="-120"/>
               </a:rPr>
-              <a:t>10</a:t>
+              <a:t>11</a:t>
             </a:r>
             <a:endParaRPr lang="en-US" sz="900" dirty="0"/>
           </a:p>
@@ -4291,7 +4808,7 @@
                 <a:ea typeface="Pretendard" pitchFamily="34" charset="-122"/>
                 <a:cs typeface="Pretendard" pitchFamily="34" charset="-120"/>
               </a:rPr>
-              <a:t>연 순수익률(Cap Rate)</a:t>
+              <a:t>연 수익률(Cap Rate, 기준: NOI)</a:t>
             </a:r>
             <a:endParaRPr lang="en-US" sz="950" dirty="0"/>
           </a:p>
@@ -5187,7 +5704,7 @@
                 <a:ea typeface="Pretendard" pitchFamily="34" charset="-122"/>
                 <a:cs typeface="Pretendard" pitchFamily="34" charset="-120"/>
               </a:rPr>
-              <a:t>교통 접근성 상세 정보는 담당 브로커를 통해 확인하</a:t>
+              <a:t>교통 접근성</a:t>
             </a:r>
             <a:endParaRPr lang="en-US" sz="1300" dirty="0"/>
           </a:p>
@@ -5220,70 +5737,16 @@
               </a:lnSpc>
               <a:buNone/>
             </a:pPr>
-            <a:endParaRPr lang="en-US" sz="1300" dirty="0"/>
-          </a:p>
-        </p:txBody>
-      </p:sp>
-      <p:sp>
-        <p:nvSpPr>
-          <p:cNvPr id="9" name="Shape 6"/>
-          <p:cNvSpPr/>
-          <p:nvPr/>
-        </p:nvSpPr>
-        <p:spPr>
-          <a:xfrm>
-            <a:off x="6053328" y="1975104"/>
-            <a:ext cx="5571439" cy="0"/>
-          </a:xfrm>
-          <a:prstGeom prst="line">
-            <a:avLst/>
-          </a:prstGeom>
-          <a:noFill/>
-          <a:ln w="3810">
-            <a:solidFill>
-              <a:srgbClr val="CBD5E0"/>
-            </a:solidFill>
-            <a:prstDash val="solid"/>
-          </a:ln>
-        </p:spPr>
-      </p:sp>
-      <p:sp>
-        <p:nvSpPr>
-          <p:cNvPr id="10" name="Text 7"/>
-          <p:cNvSpPr/>
-          <p:nvPr/>
-        </p:nvSpPr>
-        <p:spPr>
-          <a:xfrm>
-            <a:off x="6053328" y="1975104"/>
-            <a:ext cx="2117147" cy="493776"/>
-          </a:xfrm>
-          <a:prstGeom prst="rect">
-            <a:avLst/>
-          </a:prstGeom>
-          <a:noFill/>
-          <a:ln/>
-        </p:spPr>
-        <p:txBody>
-          <a:bodyPr wrap="square" lIns="0" tIns="0" rIns="0" bIns="0" rtlCol="0" anchor="ctr"/>
-          <a:lstStyle/>
-          <a:p>
-            <a:pPr indent="0" marL="0">
-              <a:lnSpc>
-                <a:spcPct val="120000"/>
-              </a:lnSpc>
-              <a:buNone/>
-            </a:pPr>
-            <a:r>
-              <a:rPr lang="en-US" sz="1300" dirty="0">
-                <a:solidFill>
-                  <a:srgbClr val="718096"/>
+            <a:r>
+              <a:rPr lang="en-US" sz="1300" b="1" dirty="0">
+                <a:solidFill>
+                  <a:srgbClr val="10161F"/>
                 </a:solidFill>
                 <a:latin typeface="Pretendard" pitchFamily="34" charset="0"/>
                 <a:ea typeface="Pretendard" pitchFamily="34" charset="-122"/>
                 <a:cs typeface="Pretendard" pitchFamily="34" charset="-120"/>
               </a:rPr>
-              <a:t>[건물] 주변 상권</a:t>
+              <a:t>{"ok":true,"mocked":true,"extractedFields":{"area_signal":"역삼","asset_type":"오피스빌딩","price_band":"300억","size_signal":"3000평(약 9917.</a:t>
             </a:r>
             <a:endParaRPr lang="en-US" sz="1300" dirty="0"/>
           </a:p>
@@ -5291,14 +5754,14 @@
       </p:sp>
       <p:sp>
         <p:nvSpPr>
-          <p:cNvPr id="11" name="Text 8"/>
-          <p:cNvSpPr/>
-          <p:nvPr/>
-        </p:nvSpPr>
-        <p:spPr>
-          <a:xfrm>
-            <a:off x="8170475" y="1975104"/>
-            <a:ext cx="3454292" cy="493776"/>
+          <p:cNvPr id="9" name="Text 6"/>
+          <p:cNvSpPr/>
+          <p:nvPr/>
+        </p:nvSpPr>
+        <p:spPr>
+          <a:xfrm>
+            <a:off x="566928" y="6382512"/>
+            <a:ext cx="7315200" cy="219456"/>
           </a:xfrm>
           <a:prstGeom prst="rect">
             <a:avLst/>
@@ -5311,59 +5774,33 @@
           <a:lstStyle/>
           <a:p>
             <a:pPr indent="0" marL="0">
-              <a:lnSpc>
-                <a:spcPct val="120000"/>
-              </a:lnSpc>
-              <a:buNone/>
-            </a:pPr>
-            <a:r>
-              <a:rPr lang="en-US" sz="1300" b="1" dirty="0">
-                <a:solidFill>
-                  <a:srgbClr val="10161F"/>
+              <a:buNone/>
+            </a:pPr>
+            <a:r>
+              <a:rPr lang="en-US" sz="800" dirty="0">
+                <a:solidFill>
+                  <a:srgbClr val="718096"/>
                 </a:solidFill>
                 <a:latin typeface="Pretendard" pitchFamily="34" charset="0"/>
                 <a:ea typeface="Pretendard" pitchFamily="34" charset="-122"/>
                 <a:cs typeface="Pretendard" pitchFamily="34" charset="-120"/>
               </a:rPr>
-              <a:t>마포권역 내 주요 비즈니스 및 유동인구 풍부한 상권 입지 ### [성장] 입지 평가</a:t>
-            </a:r>
-            <a:endParaRPr lang="en-US" sz="1300" dirty="0"/>
-          </a:p>
-        </p:txBody>
-      </p:sp>
-      <p:sp>
-        <p:nvSpPr>
-          <p:cNvPr id="12" name="Shape 9"/>
-          <p:cNvSpPr/>
-          <p:nvPr/>
-        </p:nvSpPr>
-        <p:spPr>
-          <a:xfrm>
-            <a:off x="6053328" y="2468880"/>
-            <a:ext cx="5571439" cy="0"/>
-          </a:xfrm>
-          <a:prstGeom prst="line">
-            <a:avLst/>
-          </a:prstGeom>
-          <a:noFill/>
-          <a:ln w="3810">
-            <a:solidFill>
-              <a:srgbClr val="CBD5E0"/>
-            </a:solidFill>
-            <a:prstDash val="solid"/>
-          </a:ln>
-        </p:spPr>
-      </p:sp>
-      <p:sp>
-        <p:nvSpPr>
-          <p:cNvPr id="13" name="Text 10"/>
-          <p:cNvSpPr/>
-          <p:nvPr/>
-        </p:nvSpPr>
-        <p:spPr>
-          <a:xfrm>
-            <a:off x="6053328" y="2468880"/>
-            <a:ext cx="2117147" cy="493776"/>
+              <a:t>크리딜   |   </a:t>
+            </a:r>
+            <a:endParaRPr lang="en-US" sz="800" dirty="0"/>
+          </a:p>
+        </p:txBody>
+      </p:sp>
+      <p:sp>
+        <p:nvSpPr>
+          <p:cNvPr id="10" name="Text 7"/>
+          <p:cNvSpPr/>
+          <p:nvPr/>
+        </p:nvSpPr>
+        <p:spPr>
+          <a:xfrm>
+            <a:off x="10710367" y="6382512"/>
+            <a:ext cx="914400" cy="219456"/>
           </a:xfrm>
           <a:prstGeom prst="rect">
             <a:avLst/>
@@ -5375,133 +5812,60 @@
           <a:bodyPr wrap="square" lIns="0" tIns="0" rIns="0" bIns="0" rtlCol="0" anchor="ctr"/>
           <a:lstStyle/>
           <a:p>
+            <a:pPr algn="r" indent="0" marL="0">
+              <a:buNone/>
+            </a:pPr>
+            <a:r>
+              <a:rPr lang="en-US" sz="900" b="1" dirty="0">
+                <a:solidFill>
+                  <a:srgbClr val="B98A2E"/>
+                </a:solidFill>
+                <a:latin typeface="Arial" pitchFamily="34" charset="0"/>
+                <a:ea typeface="Arial" pitchFamily="34" charset="-122"/>
+                <a:cs typeface="Arial" pitchFamily="34" charset="-120"/>
+              </a:rPr>
+              <a:t>3</a:t>
+            </a:r>
+            <a:endParaRPr lang="en-US" sz="900" dirty="0"/>
+          </a:p>
+        </p:txBody>
+      </p:sp>
+      <p:sp>
+        <p:nvSpPr>
+          <p:cNvPr id="11" name="Text 8"/>
+          <p:cNvSpPr/>
+          <p:nvPr/>
+        </p:nvSpPr>
+        <p:spPr>
+          <a:xfrm>
+            <a:off x="566928" y="1481328"/>
+            <a:ext cx="11057839" cy="9692640"/>
+          </a:xfrm>
+          <a:prstGeom prst="rect">
+            <a:avLst/>
+          </a:prstGeom>
+          <a:noFill/>
+          <a:ln/>
+        </p:spPr>
+        <p:txBody>
+          <a:bodyPr wrap="square" lIns="0" tIns="0" rIns="0" bIns="0" rtlCol="0" anchor="t"/>
+          <a:lstStyle/>
+          <a:p>
             <a:pPr indent="0" marL="0">
-              <a:lnSpc>
-                <a:spcPct val="120000"/>
-              </a:lnSpc>
-              <a:buNone/>
-            </a:pPr>
-            <a:r>
-              <a:rPr lang="en-US" sz="1300" dirty="0">
-                <a:solidFill>
-                  <a:srgbClr val="718096"/>
+              <a:buNone/>
+            </a:pPr>
+            <a:r>
+              <a:rPr lang="en-US" sz="1000" dirty="0">
+                <a:solidFill>
+                  <a:srgbClr val="10161F"/>
                 </a:solidFill>
                 <a:latin typeface="Pretendard" pitchFamily="34" charset="0"/>
                 <a:ea typeface="Pretendard" pitchFamily="34" charset="-122"/>
                 <a:cs typeface="Pretendard" pitchFamily="34" charset="-120"/>
               </a:rPr>
-              <a:t>마포권역 내 위치하며 접근성과 가시성이 양호한 입지</a:t>
-            </a:r>
-            <a:endParaRPr lang="en-US" sz="1300" dirty="0"/>
-          </a:p>
-        </p:txBody>
-      </p:sp>
-      <p:sp>
-        <p:nvSpPr>
-          <p:cNvPr id="14" name="Text 11"/>
-          <p:cNvSpPr/>
-          <p:nvPr/>
-        </p:nvSpPr>
-        <p:spPr>
-          <a:xfrm>
-            <a:off x="8170475" y="2468880"/>
-            <a:ext cx="3454292" cy="493776"/>
-          </a:xfrm>
-          <a:prstGeom prst="rect">
-            <a:avLst/>
-          </a:prstGeom>
-          <a:noFill/>
-          <a:ln/>
-        </p:spPr>
-        <p:txBody>
-          <a:bodyPr wrap="square" lIns="0" tIns="0" rIns="0" bIns="0" rtlCol="0" anchor="ctr"/>
-          <a:lstStyle/>
-          <a:p>
-            <a:pPr indent="0" marL="0">
-              <a:lnSpc>
-                <a:spcPct val="120000"/>
-              </a:lnSpc>
-              <a:buNone/>
-            </a:pPr>
-            <a:endParaRPr lang="en-US" sz="1300" dirty="0"/>
-          </a:p>
-        </p:txBody>
-      </p:sp>
-      <p:sp>
-        <p:nvSpPr>
-          <p:cNvPr id="15" name="Text 12"/>
-          <p:cNvSpPr/>
-          <p:nvPr/>
-        </p:nvSpPr>
-        <p:spPr>
-          <a:xfrm>
-            <a:off x="566928" y="6382512"/>
-            <a:ext cx="7315200" cy="219456"/>
-          </a:xfrm>
-          <a:prstGeom prst="rect">
-            <a:avLst/>
-          </a:prstGeom>
-          <a:noFill/>
-          <a:ln/>
-        </p:spPr>
-        <p:txBody>
-          <a:bodyPr wrap="square" lIns="0" tIns="0" rIns="0" bIns="0" rtlCol="0" anchor="ctr"/>
-          <a:lstStyle/>
-          <a:p>
-            <a:pPr indent="0" marL="0">
-              <a:buNone/>
-            </a:pPr>
-            <a:r>
-              <a:rPr lang="en-US" sz="800" dirty="0">
-                <a:solidFill>
-                  <a:srgbClr val="718096"/>
-                </a:solidFill>
-                <a:latin typeface="Pretendard" pitchFamily="34" charset="0"/>
-                <a:ea typeface="Pretendard" pitchFamily="34" charset="-122"/>
-                <a:cs typeface="Pretendard" pitchFamily="34" charset="-120"/>
-              </a:rPr>
-              <a:t>크리딜   |   </a:t>
-            </a:r>
-            <a:endParaRPr lang="en-US" sz="800" dirty="0"/>
-          </a:p>
-        </p:txBody>
-      </p:sp>
-      <p:sp>
-        <p:nvSpPr>
-          <p:cNvPr id="16" name="Text 13"/>
-          <p:cNvSpPr/>
-          <p:nvPr/>
-        </p:nvSpPr>
-        <p:spPr>
-          <a:xfrm>
-            <a:off x="10710367" y="6382512"/>
-            <a:ext cx="914400" cy="219456"/>
-          </a:xfrm>
-          <a:prstGeom prst="rect">
-            <a:avLst/>
-          </a:prstGeom>
-          <a:noFill/>
-          <a:ln/>
-        </p:spPr>
-        <p:txBody>
-          <a:bodyPr wrap="square" lIns="0" tIns="0" rIns="0" bIns="0" rtlCol="0" anchor="ctr"/>
-          <a:lstStyle/>
-          <a:p>
-            <a:pPr algn="r" indent="0" marL="0">
-              <a:buNone/>
-            </a:pPr>
-            <a:r>
-              <a:rPr lang="en-US" sz="900" b="1" dirty="0">
-                <a:solidFill>
-                  <a:srgbClr val="B98A2E"/>
-                </a:solidFill>
-                <a:latin typeface="Arial" pitchFamily="34" charset="0"/>
-                <a:ea typeface="Arial" pitchFamily="34" charset="-122"/>
-                <a:cs typeface="Arial" pitchFamily="34" charset="-120"/>
-              </a:rPr>
-              <a:t>3</a:t>
-            </a:r>
-            <a:endParaRPr lang="en-US" sz="900" dirty="0"/>
+              <a:t>{"ok":true,"mocked":true,"extractedFields":{"area_signal":"역삼","asset_type":"오피스빌딩","price_band":"300억","size_signal":"3000평(약 9917.4㎡)"},"extractedFacts":{"region":"역삼","exactAddressCandidate":"역삼동 742-1","assetType":"오피스빌딩","priceText":"300억","sizeText":"3000평(약 9917.4㎡)","currentUse":"오피스","currentUseSignal":"근린생활시설","leaseSignal":"임대중","vacancySignal":"공실없음","tenantNames":["쿠팡","네이버"],"unitRentTexts":["301호: 1500만"],"sellerMotivationText":"자산 효율화","brokerNotes":["초역세권 매물"]},"detectedSensitiveFields":["exact_address","tenant_name"],"ambiguousFields":[],"warnings":[],"areaSignal":"역삼","assetType":"오피스빌딩","priceBand":"300억","sizeSignal":"3000평(약 9917.4㎡)","dealType":"매각","buildingName":"역삼 센트럴타워","exactAddress":"역삼동 742-1","totalFloorArea":9917.3,"buildYear":2015,"currentUseSignal":"근린생활시설","vacancySignal":"공실 없음","fitSummary":"초역세권 근생 빌딩으로 시행/사옥 매입에 최적화","cautionSummary":"주요 임차인 만기 조율 필요","hiddenFields":["exact_address","seller_motivation"],"confidence":{"areaSignal":"confirmed","assetType":"confirmed","priceBand":"ai_hypothesis","fitSummary":"ai_hypothesis"},"missingData":["sizeSignal"],"boundaryNote":"본 자료는 실거래 통계 기반 참고치입니다.","buyerType":"법인 사옥형","budgetRange":{"min":50,"max":80,"display":"50억~80억"},"preferredRegions":["강남","성수"],"assetTypes":["꼬마빌딩","사옥용"],"purchasePurpose":"사옥용 매입","mustHave":["초역세권","주차"],"niceToHave":["테라스","루프탑"],"riskTolerance":"medium","financingNote":"자본금 50% 준비","missingQuestions":["구체적인 입주 시기가 언제인가요?","선호하는 수익률이 있나요?"],"privacyNotes":["연락처 비공개"],"fitReasons":["매수자 예산(50-80억)에 부합하는 매물입니다.","요청하신 성수/강남 권역에 해당합니다."],"cautionReasons":["요청한 용도와 달리 명도 협의가 다소 필요합니다."],"recommendedNextAction":"현장 답사 제안","kakaoMessage":"안녕하세요! 요청하신 조건에 부합하는 추천 매물이 있어 안내해 드립니다. 확인해보시고 피드백 부탁드립니다.","title":"강남 역삼역 초역세권 오피스 사옥용 빌딩 매각","shortSummary":"역삼역 도보 5분 거리의 준신축급 대형 오피스빌딩입니다.","dealPoints":["초역세권","사옥 최적"],"cautionPoints":["명도 조율 필요"],"hiddenInfoNotice":["보증금 및 지번은 인가 후 확인 가능"],"gateMessage":"G1 등급 등록이 필요합니다.","kakaoText":"강남 역삼역 오피스 빌딩 매각 안내입니다.","exactUnitCandidate":"101호","floor":"1층","areaSqmText":"150㎡","spaceType":"office","depositText":"5000만","monthlyRentText":"400만","maintenanceFeeText":"50만","availableFromText":"즉시입주","leaseTermMonthsText":"24","incentivesText":"렌트프리 2개월","restrictions":[],"landlordIdentity":"김성수","currentTenant":"스타트업","vacancyReason":"이전 확장","rentNegotiation":"협의 가능","region":"성수동","areaSqm":150,"deposit":5000,"monthlyRent":400,"maintenanceFee":50,"availableFrom":"즉시입주","leaseTermMonths":24,"incentives":{"rentFreeMonths":2,"interiorSupport":"일부 인테리어 지원","freeRentDetail":"렌트프리 2개월 지원"},"shortSummaryLease":"성수역 도보 5분 거리 1층 리테일 상가 매물입니다."}</a:t>
+            </a:r>
+            <a:endParaRPr lang="en-US" sz="1000" dirty="0"/>
           </a:p>
         </p:txBody>
       </p:sp>
@@ -6210,7 +6574,7 @@
                 <a:gridCol w="1675430"/>
                 <a:gridCol w="1675430"/>
               </a:tblGrid>
-              <a:tr h="347472">
+              <a:tr h="438912">
                 <a:tc>
                   <a:txBody>
                     <a:bodyPr/>
@@ -6220,7 +6584,7 @@
                         <a:buNone/>
                       </a:pPr>
                       <a:r>
-                        <a:rPr lang="en-US" sz="900" b="1" dirty="0">
+                        <a:rPr lang="en-US" sz="1000" b="1" dirty="0">
                           <a:solidFill>
                             <a:srgbClr val="718096"/>
                           </a:solidFill>
@@ -6230,7 +6594,7 @@
                         </a:rPr>
                         <a:t>층수</a:t>
                       </a:r>
-                      <a:endParaRPr lang="en-US" sz="900" dirty="0">
+                      <a:endParaRPr lang="en-US" sz="1000" dirty="0">
                         <a:latin typeface="Pretendard" charset="0"/>
                         <a:ea typeface="Pretendard" charset="0"/>
                         <a:cs typeface="Pretendard" charset="0"/>
@@ -6288,7 +6652,7 @@
                         <a:buNone/>
                       </a:pPr>
                       <a:r>
-                        <a:rPr lang="en-US" sz="900" b="1" dirty="0">
+                        <a:rPr lang="en-US" sz="1000" b="1" dirty="0">
                           <a:solidFill>
                             <a:srgbClr val="718096"/>
                           </a:solidFill>
@@ -6298,7 +6662,7 @@
                         </a:rPr>
                         <a:t>업종</a:t>
                       </a:r>
-                      <a:endParaRPr lang="en-US" sz="900" dirty="0">
+                      <a:endParaRPr lang="en-US" sz="1000" dirty="0">
                         <a:latin typeface="Pretendard" charset="0"/>
                         <a:ea typeface="Pretendard" charset="0"/>
                         <a:cs typeface="Pretendard" charset="0"/>
@@ -6356,7 +6720,7 @@
                         <a:buNone/>
                       </a:pPr>
                       <a:r>
-                        <a:rPr lang="en-US" sz="900" b="1" dirty="0">
+                        <a:rPr lang="en-US" sz="1000" b="1" dirty="0">
                           <a:solidFill>
                             <a:srgbClr val="718096"/>
                           </a:solidFill>
@@ -6366,7 +6730,7 @@
                         </a:rPr>
                         <a:t>전용면적</a:t>
                       </a:r>
-                      <a:endParaRPr lang="en-US" sz="900" dirty="0">
+                      <a:endParaRPr lang="en-US" sz="1000" dirty="0">
                         <a:latin typeface="Pretendard" charset="0"/>
                         <a:ea typeface="Pretendard" charset="0"/>
                         <a:cs typeface="Pretendard" charset="0"/>
@@ -6424,7 +6788,7 @@
                         <a:buNone/>
                       </a:pPr>
                       <a:r>
-                        <a:rPr lang="en-US" sz="900" b="1" dirty="0">
+                        <a:rPr lang="en-US" sz="1000" b="1" dirty="0">
                           <a:solidFill>
                             <a:srgbClr val="718096"/>
                           </a:solidFill>
@@ -6434,7 +6798,7 @@
                         </a:rPr>
                         <a:t>보증금</a:t>
                       </a:r>
-                      <a:endParaRPr lang="en-US" sz="900" dirty="0">
+                      <a:endParaRPr lang="en-US" sz="1000" dirty="0">
                         <a:latin typeface="Pretendard" charset="0"/>
                         <a:ea typeface="Pretendard" charset="0"/>
                         <a:cs typeface="Pretendard" charset="0"/>
@@ -6492,7 +6856,7 @@
                         <a:buNone/>
                       </a:pPr>
                       <a:r>
-                        <a:rPr lang="en-US" sz="900" b="1" dirty="0">
+                        <a:rPr lang="en-US" sz="1000" b="1" dirty="0">
                           <a:solidFill>
                             <a:srgbClr val="718096"/>
                           </a:solidFill>
@@ -6506,7 +6870,7 @@
                         <a:buNone/>
                       </a:pPr>
                       <a:r>
-                        <a:rPr lang="en-US" sz="900" b="1" dirty="0">
+                        <a:rPr lang="en-US" sz="1000" b="1" dirty="0">
                           <a:solidFill>
                             <a:srgbClr val="718096"/>
                           </a:solidFill>
@@ -6516,7 +6880,7 @@
                         </a:rPr>
                         <a:t>임대료</a:t>
                       </a:r>
-                      <a:endParaRPr lang="en-US" sz="900" dirty="0">
+                      <a:endParaRPr lang="en-US" sz="1000" dirty="0">
                         <a:latin typeface="Pretendard" charset="0"/>
                         <a:ea typeface="Pretendard" charset="0"/>
                         <a:cs typeface="Pretendard" charset="0"/>
@@ -6574,7 +6938,7 @@
                         <a:buNone/>
                       </a:pPr>
                       <a:r>
-                        <a:rPr lang="en-US" sz="900" b="1" dirty="0">
+                        <a:rPr lang="en-US" sz="1000" b="1" dirty="0">
                           <a:solidFill>
                             <a:srgbClr val="718096"/>
                           </a:solidFill>
@@ -6584,7 +6948,7 @@
                         </a:rPr>
                         <a:t>관리비</a:t>
                       </a:r>
-                      <a:endParaRPr lang="en-US" sz="900" dirty="0">
+                      <a:endParaRPr lang="en-US" sz="1000" dirty="0">
                         <a:latin typeface="Pretendard" charset="0"/>
                         <a:ea typeface="Pretendard" charset="0"/>
                         <a:cs typeface="Pretendard" charset="0"/>
@@ -6642,7 +7006,7 @@
                         <a:buNone/>
                       </a:pPr>
                       <a:r>
-                        <a:rPr lang="en-US" sz="900" b="1" dirty="0">
+                        <a:rPr lang="en-US" sz="1000" b="1" dirty="0">
                           <a:solidFill>
                             <a:srgbClr val="718096"/>
                           </a:solidFill>
@@ -6656,7 +7020,7 @@
                         <a:buNone/>
                       </a:pPr>
                       <a:r>
-                        <a:rPr lang="en-US" sz="900" b="1" dirty="0">
+                        <a:rPr lang="en-US" sz="1000" b="1" dirty="0">
                           <a:solidFill>
                             <a:srgbClr val="718096"/>
                           </a:solidFill>
@@ -6666,7 +7030,7 @@
                         </a:rPr>
                         <a:t>만기</a:t>
                       </a:r>
-                      <a:endParaRPr lang="en-US" sz="900" dirty="0">
+                      <a:endParaRPr lang="en-US" sz="1000" dirty="0">
                         <a:latin typeface="Pretendard" charset="0"/>
                         <a:ea typeface="Pretendard" charset="0"/>
                         <a:cs typeface="Pretendard" charset="0"/>
@@ -6716,7 +7080,7 @@
                   </a:tcPr>
                 </a:tc>
               </a:tr>
-              <a:tr h="347472">
+              <a:tr h="438912">
                 <a:tc>
                   <a:txBody>
                     <a:bodyPr/>
@@ -6726,7 +7090,7 @@
                         <a:buNone/>
                       </a:pPr>
                       <a:r>
-                        <a:rPr lang="en-US" sz="900" b="1" dirty="0">
+                        <a:rPr lang="en-US" sz="1000" b="1" dirty="0">
                           <a:solidFill>
                             <a:srgbClr val="10161F"/>
                           </a:solidFill>
@@ -6736,7 +7100,7 @@
                         </a:rPr>
                         <a:t>B1~2F</a:t>
                       </a:r>
-                      <a:endParaRPr lang="en-US" sz="900" dirty="0">
+                      <a:endParaRPr lang="en-US" sz="1000" dirty="0">
                         <a:latin typeface="Pretendard" charset="0"/>
                         <a:ea typeface="Pretendard" charset="0"/>
                         <a:cs typeface="Pretendard" charset="0"/>
@@ -6794,7 +7158,7 @@
                         <a:buNone/>
                       </a:pPr>
                       <a:r>
-                        <a:rPr lang="en-US" sz="900" dirty="0">
+                        <a:rPr lang="en-US" sz="1000" dirty="0">
                           <a:solidFill>
                             <a:srgbClr val="10161F"/>
                           </a:solidFill>
@@ -6808,7 +7172,7 @@
                         <a:buNone/>
                       </a:pPr>
                       <a:r>
-                        <a:rPr lang="en-US" sz="900" dirty="0">
+                        <a:rPr lang="en-US" sz="1000" dirty="0">
                           <a:solidFill>
                             <a:srgbClr val="10161F"/>
                           </a:solidFill>
@@ -6818,7 +7182,7 @@
                         </a:rPr>
                         <a:t>브런치펍</a:t>
                       </a:r>
-                      <a:endParaRPr lang="en-US" sz="900" dirty="0">
+                      <a:endParaRPr lang="en-US" sz="1000" dirty="0">
                         <a:latin typeface="Pretendard" charset="0"/>
                         <a:ea typeface="Pretendard" charset="0"/>
                         <a:cs typeface="Pretendard" charset="0"/>
@@ -6876,7 +7240,7 @@
                         <a:buNone/>
                       </a:pPr>
                       <a:r>
-                        <a:rPr lang="en-US" sz="900" dirty="0">
+                        <a:rPr lang="en-US" sz="1000" dirty="0">
                           <a:solidFill>
                             <a:srgbClr val="10161F"/>
                           </a:solidFill>
@@ -6890,7 +7254,7 @@
                         <a:buNone/>
                       </a:pPr>
                       <a:r>
-                        <a:rPr lang="en-US" sz="900" dirty="0">
+                        <a:rPr lang="en-US" sz="1000" dirty="0">
                           <a:solidFill>
                             <a:srgbClr val="10161F"/>
                           </a:solidFill>
@@ -6900,7 +7264,7 @@
                         </a:rPr>
                         <a:t>314.1㎡)</a:t>
                       </a:r>
-                      <a:endParaRPr lang="en-US" sz="900" dirty="0">
+                      <a:endParaRPr lang="en-US" sz="1000" dirty="0">
                         <a:latin typeface="Pretendard" charset="0"/>
                         <a:ea typeface="Pretendard" charset="0"/>
                         <a:cs typeface="Pretendard" charset="0"/>
@@ -6958,7 +7322,7 @@
                         <a:buNone/>
                       </a:pPr>
                       <a:r>
-                        <a:rPr lang="en-US" sz="900" dirty="0">
+                        <a:rPr lang="en-US" sz="1000" dirty="0">
                           <a:solidFill>
                             <a:srgbClr val="10161F"/>
                           </a:solidFill>
@@ -6968,7 +7332,7 @@
                         </a:rPr>
                         <a:t>20,000만</a:t>
                       </a:r>
-                      <a:endParaRPr lang="en-US" sz="900" dirty="0">
+                      <a:endParaRPr lang="en-US" sz="1000" dirty="0">
                         <a:latin typeface="Pretendard" charset="0"/>
                         <a:ea typeface="Pretendard" charset="0"/>
                         <a:cs typeface="Pretendard" charset="0"/>
@@ -7026,7 +7390,7 @@
                         <a:buNone/>
                       </a:pPr>
                       <a:r>
-                        <a:rPr lang="en-US" sz="900" dirty="0">
+                        <a:rPr lang="en-US" sz="1000" dirty="0">
                           <a:solidFill>
                             <a:srgbClr val="10161F"/>
                           </a:solidFill>
@@ -7036,7 +7400,7 @@
                         </a:rPr>
                         <a:t>1,650만</a:t>
                       </a:r>
-                      <a:endParaRPr lang="en-US" sz="900" dirty="0">
+                      <a:endParaRPr lang="en-US" sz="1000" dirty="0">
                         <a:latin typeface="Pretendard" charset="0"/>
                         <a:ea typeface="Pretendard" charset="0"/>
                         <a:cs typeface="Pretendard" charset="0"/>
@@ -7093,7 +7457,7 @@
                       <a:pPr indent="0" marL="0">
                         <a:buNone/>
                       </a:pPr>
-                      <a:endParaRPr lang="en-US" sz="900" dirty="0">
+                      <a:endParaRPr lang="en-US" sz="1000" dirty="0">
                         <a:latin typeface="Pretendard" charset="0"/>
                         <a:ea typeface="Pretendard" charset="0"/>
                         <a:cs typeface="Pretendard" charset="0"/>
@@ -7151,7 +7515,7 @@
                         <a:buNone/>
                       </a:pPr>
                       <a:r>
-                        <a:rPr lang="en-US" sz="900" dirty="0">
+                        <a:rPr lang="en-US" sz="1000" dirty="0">
                           <a:solidFill>
                             <a:srgbClr val="10161F"/>
                           </a:solidFill>
@@ -7161,7 +7525,7 @@
                         </a:rPr>
                         <a:t>미정</a:t>
                       </a:r>
-                      <a:endParaRPr lang="en-US" sz="900" dirty="0">
+                      <a:endParaRPr lang="en-US" sz="1000" dirty="0">
                         <a:latin typeface="Pretendard" charset="0"/>
                         <a:ea typeface="Pretendard" charset="0"/>
                         <a:cs typeface="Pretendard" charset="0"/>
@@ -7211,7 +7575,7 @@
                   </a:tcPr>
                 </a:tc>
               </a:tr>
-              <a:tr h="347472">
+              <a:tr h="438912">
                 <a:tc>
                   <a:txBody>
                     <a:bodyPr/>
@@ -7221,7 +7585,7 @@
                         <a:buNone/>
                       </a:pPr>
                       <a:r>
-                        <a:rPr lang="en-US" sz="900" b="1" dirty="0">
+                        <a:rPr lang="en-US" sz="1000" b="1" dirty="0">
                           <a:solidFill>
                             <a:srgbClr val="10161F"/>
                           </a:solidFill>
@@ -7231,7 +7595,7 @@
                         </a:rPr>
                         <a:t>3F~4F</a:t>
                       </a:r>
-                      <a:endParaRPr lang="en-US" sz="900" dirty="0">
+                      <a:endParaRPr lang="en-US" sz="1000" dirty="0">
                         <a:latin typeface="Pretendard" charset="0"/>
                         <a:ea typeface="Pretendard" charset="0"/>
                         <a:cs typeface="Pretendard" charset="0"/>
@@ -7289,7 +7653,7 @@
                         <a:buNone/>
                       </a:pPr>
                       <a:r>
-                        <a:rPr lang="en-US" sz="900" dirty="0">
+                        <a:rPr lang="en-US" sz="1000" dirty="0">
                           <a:solidFill>
                             <a:srgbClr val="10161F"/>
                           </a:solidFill>
@@ -7303,7 +7667,7 @@
                         <a:buNone/>
                       </a:pPr>
                       <a:r>
-                        <a:rPr lang="en-US" sz="900" dirty="0">
+                        <a:rPr lang="en-US" sz="1000" dirty="0">
                           <a:solidFill>
                             <a:srgbClr val="10161F"/>
                           </a:solidFill>
@@ -7313,7 +7677,7 @@
                         </a:rPr>
                         <a:t>스튜디오</a:t>
                       </a:r>
-                      <a:endParaRPr lang="en-US" sz="900" dirty="0">
+                      <a:endParaRPr lang="en-US" sz="1000" dirty="0">
                         <a:latin typeface="Pretendard" charset="0"/>
                         <a:ea typeface="Pretendard" charset="0"/>
                         <a:cs typeface="Pretendard" charset="0"/>
@@ -7371,7 +7735,7 @@
                         <a:buNone/>
                       </a:pPr>
                       <a:r>
-                        <a:rPr lang="en-US" sz="900" dirty="0">
+                        <a:rPr lang="en-US" sz="1000" dirty="0">
                           <a:solidFill>
                             <a:srgbClr val="10161F"/>
                           </a:solidFill>
@@ -7385,7 +7749,7 @@
                         <a:buNone/>
                       </a:pPr>
                       <a:r>
-                        <a:rPr lang="en-US" sz="900" dirty="0">
+                        <a:rPr lang="en-US" sz="1000" dirty="0">
                           <a:solidFill>
                             <a:srgbClr val="10161F"/>
                           </a:solidFill>
@@ -7395,7 +7759,7 @@
                         </a:rPr>
                         <a:t>208.3㎡)</a:t>
                       </a:r>
-                      <a:endParaRPr lang="en-US" sz="900" dirty="0">
+                      <a:endParaRPr lang="en-US" sz="1000" dirty="0">
                         <a:latin typeface="Pretendard" charset="0"/>
                         <a:ea typeface="Pretendard" charset="0"/>
                         <a:cs typeface="Pretendard" charset="0"/>
@@ -7453,7 +7817,7 @@
                         <a:buNone/>
                       </a:pPr>
                       <a:r>
-                        <a:rPr lang="en-US" sz="900" dirty="0">
+                        <a:rPr lang="en-US" sz="1000" dirty="0">
                           <a:solidFill>
                             <a:srgbClr val="10161F"/>
                           </a:solidFill>
@@ -7463,7 +7827,7 @@
                         </a:rPr>
                         <a:t>10,000만</a:t>
                       </a:r>
-                      <a:endParaRPr lang="en-US" sz="900" dirty="0">
+                      <a:endParaRPr lang="en-US" sz="1000" dirty="0">
                         <a:latin typeface="Pretendard" charset="0"/>
                         <a:ea typeface="Pretendard" charset="0"/>
                         <a:cs typeface="Pretendard" charset="0"/>
@@ -7521,7 +7885,7 @@
                         <a:buNone/>
                       </a:pPr>
                       <a:r>
-                        <a:rPr lang="en-US" sz="900" dirty="0">
+                        <a:rPr lang="en-US" sz="1000" dirty="0">
                           <a:solidFill>
                             <a:srgbClr val="10161F"/>
                           </a:solidFill>
@@ -7531,7 +7895,7 @@
                         </a:rPr>
                         <a:t>700만</a:t>
                       </a:r>
-                      <a:endParaRPr lang="en-US" sz="900" dirty="0">
+                      <a:endParaRPr lang="en-US" sz="1000" dirty="0">
                         <a:latin typeface="Pretendard" charset="0"/>
                         <a:ea typeface="Pretendard" charset="0"/>
                         <a:cs typeface="Pretendard" charset="0"/>
@@ -7588,7 +7952,7 @@
                       <a:pPr indent="0" marL="0">
                         <a:buNone/>
                       </a:pPr>
-                      <a:endParaRPr lang="en-US" sz="900" dirty="0">
+                      <a:endParaRPr lang="en-US" sz="1000" dirty="0">
                         <a:latin typeface="Pretendard" charset="0"/>
                         <a:ea typeface="Pretendard" charset="0"/>
                         <a:cs typeface="Pretendard" charset="0"/>
@@ -7646,7 +8010,7 @@
                         <a:buNone/>
                       </a:pPr>
                       <a:r>
-                        <a:rPr lang="en-US" sz="900" dirty="0">
+                        <a:rPr lang="en-US" sz="1000" dirty="0">
                           <a:solidFill>
                             <a:srgbClr val="10161F"/>
                           </a:solidFill>
@@ -7656,7 +8020,7 @@
                         </a:rPr>
                         <a:t>미정</a:t>
                       </a:r>
-                      <a:endParaRPr lang="en-US" sz="900" dirty="0">
+                      <a:endParaRPr lang="en-US" sz="1000" dirty="0">
                         <a:latin typeface="Pretendard" charset="0"/>
                         <a:ea typeface="Pretendard" charset="0"/>
                         <a:cs typeface="Pretendard" charset="0"/>
@@ -7706,7 +8070,7 @@
                   </a:tcPr>
                 </a:tc>
               </a:tr>
-              <a:tr h="347472">
+              <a:tr h="438912">
                 <a:tc>
                   <a:txBody>
                     <a:bodyPr/>
@@ -7716,7 +8080,7 @@
                         <a:buNone/>
                       </a:pPr>
                       <a:r>
-                        <a:rPr lang="en-US" sz="900" b="1" dirty="0">
+                        <a:rPr lang="en-US" sz="1000" b="1" dirty="0">
                           <a:solidFill>
                             <a:srgbClr val="10161F"/>
                           </a:solidFill>
@@ -7726,7 +8090,7 @@
                         </a:rPr>
                         <a:t>구분</a:t>
                       </a:r>
-                      <a:endParaRPr lang="en-US" sz="900" dirty="0">
+                      <a:endParaRPr lang="en-US" sz="1000" dirty="0">
                         <a:latin typeface="Pretendard" charset="0"/>
                         <a:ea typeface="Pretendard" charset="0"/>
                         <a:cs typeface="Pretendard" charset="0"/>
@@ -7784,7 +8148,7 @@
                         <a:buNone/>
                       </a:pPr>
                       <a:r>
-                        <a:rPr lang="en-US" sz="900" dirty="0">
+                        <a:rPr lang="en-US" sz="1000" dirty="0">
                           <a:solidFill>
                             <a:srgbClr val="10161F"/>
                           </a:solidFill>
@@ -7798,7 +8162,7 @@
                         <a:buNone/>
                       </a:pPr>
                       <a:r>
-                        <a:rPr lang="en-US" sz="900" dirty="0">
+                        <a:rPr lang="en-US" sz="1000" dirty="0">
                           <a:solidFill>
                             <a:srgbClr val="10161F"/>
                           </a:solidFill>
@@ -7808,7 +8172,7 @@
                         </a:rPr>
                         <a:t>분석</a:t>
                       </a:r>
-                      <a:endParaRPr lang="en-US" sz="900" dirty="0">
+                      <a:endParaRPr lang="en-US" sz="1000" dirty="0">
                         <a:latin typeface="Pretendard" charset="0"/>
                         <a:ea typeface="Pretendard" charset="0"/>
                         <a:cs typeface="Pretendard" charset="0"/>
@@ -7866,7 +8230,7 @@
                         <a:buNone/>
                       </a:pPr>
                       <a:r>
-                        <a:rPr lang="en-US" sz="900" dirty="0">
+                        <a:rPr lang="en-US" sz="1000" dirty="0">
                           <a:solidFill>
                             <a:srgbClr val="10161F"/>
                           </a:solidFill>
@@ -7876,7 +8240,7 @@
                         </a:rPr>
                         <a:t>비고</a:t>
                       </a:r>
-                      <a:endParaRPr lang="en-US" sz="900" dirty="0">
+                      <a:endParaRPr lang="en-US" sz="1000" dirty="0">
                         <a:latin typeface="Pretendard" charset="0"/>
                         <a:ea typeface="Pretendard" charset="0"/>
                         <a:cs typeface="Pretendard" charset="0"/>
@@ -7926,7 +8290,7 @@
                   </a:tcPr>
                 </a:tc>
               </a:tr>
-              <a:tr h="347472">
+              <a:tr h="438912">
                 <a:tc>
                   <a:txBody>
                     <a:bodyPr/>
@@ -7936,7 +8300,7 @@
                         <a:buNone/>
                       </a:pPr>
                       <a:r>
-                        <a:rPr lang="en-US" sz="900" b="1" dirty="0">
+                        <a:rPr lang="en-US" sz="1000" b="1" dirty="0">
                           <a:solidFill>
                             <a:srgbClr val="10161F"/>
                           </a:solidFill>
@@ -7950,7 +8314,7 @@
                         <a:buNone/>
                       </a:pPr>
                       <a:r>
-                        <a:rPr lang="en-US" sz="900" b="1" dirty="0">
+                        <a:rPr lang="en-US" sz="1000" b="1" dirty="0">
                           <a:solidFill>
                             <a:srgbClr val="10161F"/>
                           </a:solidFill>
@@ -7960,7 +8324,7 @@
                         </a:rPr>
                         <a:t>현황</a:t>
                       </a:r>
-                      <a:endParaRPr lang="en-US" sz="900" dirty="0">
+                      <a:endParaRPr lang="en-US" sz="1000" dirty="0">
                         <a:latin typeface="Pretendard" charset="0"/>
                         <a:ea typeface="Pretendard" charset="0"/>
                         <a:cs typeface="Pretendard" charset="0"/>
@@ -8018,7 +8382,7 @@
                         <a:buNone/>
                       </a:pPr>
                       <a:r>
-                        <a:rPr lang="en-US" sz="900" dirty="0">
+                        <a:rPr lang="en-US" sz="1000" dirty="0">
                           <a:solidFill>
                             <a:srgbClr val="10161F"/>
                           </a:solidFill>
@@ -8032,7 +8396,7 @@
                         <a:buNone/>
                       </a:pPr>
                       <a:r>
-                        <a:rPr lang="en-US" sz="900" dirty="0">
+                        <a:rPr lang="en-US" sz="1000" dirty="0">
                           <a:solidFill>
                             <a:srgbClr val="10161F"/>
                           </a:solidFill>
@@ -8046,7 +8410,7 @@
                         <a:buNone/>
                       </a:pPr>
                       <a:r>
-                        <a:rPr lang="en-US" sz="900" dirty="0">
+                        <a:rPr lang="en-US" sz="1000" dirty="0">
                           <a:solidFill>
                             <a:srgbClr val="10161F"/>
                           </a:solidFill>
@@ -8060,7 +8424,7 @@
                         <a:buNone/>
                       </a:pPr>
                       <a:r>
-                        <a:rPr lang="en-US" sz="900" dirty="0">
+                        <a:rPr lang="en-US" sz="1000" dirty="0">
                           <a:solidFill>
                             <a:srgbClr val="10161F"/>
                           </a:solidFill>
@@ -8074,7 +8438,7 @@
                         <a:buNone/>
                       </a:pPr>
                       <a:r>
-                        <a:rPr lang="en-US" sz="900" dirty="0">
+                        <a:rPr lang="en-US" sz="1000" dirty="0">
                           <a:solidFill>
                             <a:srgbClr val="10161F"/>
                           </a:solidFill>
@@ -8088,7 +8452,7 @@
                         <a:buNone/>
                       </a:pPr>
                       <a:r>
-                        <a:rPr lang="en-US" sz="900" dirty="0">
+                        <a:rPr lang="en-US" sz="1000" dirty="0">
                           <a:solidFill>
                             <a:srgbClr val="10161F"/>
                           </a:solidFill>
@@ -8098,7 +8462,7 @@
                         </a:rPr>
                         <a:t>0)</a:t>
                       </a:r>
-                      <a:endParaRPr lang="en-US" sz="900" dirty="0">
+                      <a:endParaRPr lang="en-US" sz="1000" dirty="0">
                         <a:latin typeface="Pretendard" charset="0"/>
                         <a:ea typeface="Pretendard" charset="0"/>
                         <a:cs typeface="Pretendard" charset="0"/>
@@ -8156,7 +8520,7 @@
                         <a:buNone/>
                       </a:pPr>
                       <a:r>
-                        <a:rPr lang="en-US" sz="900" dirty="0">
+                        <a:rPr lang="en-US" sz="1000" dirty="0">
                           <a:solidFill>
                             <a:srgbClr val="10161F"/>
                           </a:solidFill>
@@ -8170,7 +8534,7 @@
                         <a:buNone/>
                       </a:pPr>
                       <a:r>
-                        <a:rPr lang="en-US" sz="900" dirty="0">
+                        <a:rPr lang="en-US" sz="1000" dirty="0">
                           <a:solidFill>
                             <a:srgbClr val="10161F"/>
                           </a:solidFill>
@@ -8184,7 +8548,7 @@
                         <a:buNone/>
                       </a:pPr>
                       <a:r>
-                        <a:rPr lang="en-US" sz="900" dirty="0">
+                        <a:rPr lang="en-US" sz="1000" dirty="0">
                           <a:solidFill>
                             <a:srgbClr val="10161F"/>
                           </a:solidFill>
@@ -8198,7 +8562,7 @@
                         <a:buNone/>
                       </a:pPr>
                       <a:r>
-                        <a:rPr lang="en-US" sz="900" dirty="0">
+                        <a:rPr lang="en-US" sz="1000" dirty="0">
                           <a:solidFill>
                             <a:srgbClr val="10161F"/>
                           </a:solidFill>
@@ -8208,7 +8572,7 @@
                         </a:rPr>
                         <a:t>운영</a:t>
                       </a:r>
-                      <a:endParaRPr lang="en-US" sz="900" dirty="0">
+                      <a:endParaRPr lang="en-US" sz="1000" dirty="0">
                         <a:latin typeface="Pretendard" charset="0"/>
                         <a:ea typeface="Pretendard" charset="0"/>
                         <a:cs typeface="Pretendard" charset="0"/>
@@ -8258,7 +8622,7 @@
                   </a:tcPr>
                 </a:tc>
               </a:tr>
-              <a:tr h="347472">
+              <a:tr h="438912">
                 <a:tc>
                   <a:txBody>
                     <a:bodyPr/>
@@ -8268,7 +8632,7 @@
                         <a:buNone/>
                       </a:pPr>
                       <a:r>
-                        <a:rPr lang="en-US" sz="900" b="1" dirty="0">
+                        <a:rPr lang="en-US" sz="1000" b="1" dirty="0">
                           <a:solidFill>
                             <a:srgbClr val="10161F"/>
                           </a:solidFill>
@@ -8282,7 +8646,7 @@
                         <a:buNone/>
                       </a:pPr>
                       <a:r>
-                        <a:rPr lang="en-US" sz="900" b="1" dirty="0">
+                        <a:rPr lang="en-US" sz="1000" b="1" dirty="0">
                           <a:solidFill>
                             <a:srgbClr val="10161F"/>
                           </a:solidFill>
@@ -8296,7 +8660,7 @@
                         <a:buNone/>
                       </a:pPr>
                       <a:r>
-                        <a:rPr lang="en-US" sz="900" b="1" dirty="0">
+                        <a:rPr lang="en-US" sz="1000" b="1" dirty="0">
                           <a:solidFill>
                             <a:srgbClr val="10161F"/>
                           </a:solidFill>
@@ -8306,7 +8670,7 @@
                         </a:rPr>
                         <a:t>합계</a:t>
                       </a:r>
-                      <a:endParaRPr lang="en-US" sz="900" dirty="0">
+                      <a:endParaRPr lang="en-US" sz="1000" dirty="0">
                         <a:latin typeface="Pretendard" charset="0"/>
                         <a:ea typeface="Pretendard" charset="0"/>
                         <a:cs typeface="Pretendard" charset="0"/>
@@ -8364,7 +8728,7 @@
                         <a:buNone/>
                       </a:pPr>
                       <a:r>
-                        <a:rPr lang="en-US" sz="900" dirty="0">
+                        <a:rPr lang="en-US" sz="1000" dirty="0">
                           <a:solidFill>
                             <a:srgbClr val="10161F"/>
                           </a:solidFill>
@@ -8378,7 +8742,7 @@
                         <a:buNone/>
                       </a:pPr>
                       <a:r>
-                        <a:rPr lang="en-US" sz="900" dirty="0">
+                        <a:rPr lang="en-US" sz="1000" dirty="0">
                           <a:solidFill>
                             <a:srgbClr val="10161F"/>
                           </a:solidFill>
@@ -8388,7 +8752,7 @@
                         </a:rPr>
                         <a:t>원/월</a:t>
                       </a:r>
-                      <a:endParaRPr lang="en-US" sz="900" dirty="0">
+                      <a:endParaRPr lang="en-US" sz="1000" dirty="0">
                         <a:latin typeface="Pretendard" charset="0"/>
                         <a:ea typeface="Pretendard" charset="0"/>
                         <a:cs typeface="Pretendard" charset="0"/>
@@ -8446,7 +8810,7 @@
                         <a:buNone/>
                       </a:pPr>
                       <a:r>
-                        <a:rPr lang="en-US" sz="900" dirty="0">
+                        <a:rPr lang="en-US" sz="1000" dirty="0">
                           <a:solidFill>
                             <a:srgbClr val="10161F"/>
                           </a:solidFill>
@@ -8460,7 +8824,7 @@
                         <a:buNone/>
                       </a:pPr>
                       <a:r>
-                        <a:rPr lang="en-US" sz="900" dirty="0">
+                        <a:rPr lang="en-US" sz="1000" dirty="0">
                           <a:solidFill>
                             <a:srgbClr val="10161F"/>
                           </a:solidFill>
@@ -8474,7 +8838,7 @@
                         <a:buNone/>
                       </a:pPr>
                       <a:r>
-                        <a:rPr lang="en-US" sz="900" dirty="0">
+                        <a:rPr lang="en-US" sz="1000" dirty="0">
                           <a:solidFill>
                             <a:srgbClr val="10161F"/>
                           </a:solidFill>
@@ -8488,7 +8852,7 @@
                         <a:buNone/>
                       </a:pPr>
                       <a:r>
-                        <a:rPr lang="en-US" sz="900" dirty="0">
+                        <a:rPr lang="en-US" sz="1000" dirty="0">
                           <a:solidFill>
                             <a:srgbClr val="10161F"/>
                           </a:solidFill>
@@ -8498,7 +8862,7 @@
                         </a:rPr>
                         <a:t>원)</a:t>
                       </a:r>
-                      <a:endParaRPr lang="en-US" sz="900" dirty="0">
+                      <a:endParaRPr lang="en-US" sz="1000" dirty="0">
                         <a:latin typeface="Pretendard" charset="0"/>
                         <a:ea typeface="Pretendard" charset="0"/>
                         <a:cs typeface="Pretendard" charset="0"/>
@@ -8548,7 +8912,7 @@
                   </a:tcPr>
                 </a:tc>
               </a:tr>
-              <a:tr h="347472">
+              <a:tr h="438912">
                 <a:tc>
                   <a:txBody>
                     <a:bodyPr/>
@@ -8558,7 +8922,7 @@
                         <a:buNone/>
                       </a:pPr>
                       <a:r>
-                        <a:rPr lang="en-US" sz="900" b="1" dirty="0">
+                        <a:rPr lang="en-US" sz="1000" b="1" dirty="0">
                           <a:solidFill>
                             <a:srgbClr val="10161F"/>
                           </a:solidFill>
@@ -8572,7 +8936,7 @@
                         <a:buNone/>
                       </a:pPr>
                       <a:r>
-                        <a:rPr lang="en-US" sz="900" b="1" dirty="0">
+                        <a:rPr lang="en-US" sz="1000" b="1" dirty="0">
                           <a:solidFill>
                             <a:srgbClr val="10161F"/>
                           </a:solidFill>
@@ -8586,7 +8950,7 @@
                         <a:buNone/>
                       </a:pPr>
                       <a:r>
-                        <a:rPr lang="en-US" sz="900" b="1" dirty="0">
+                        <a:rPr lang="en-US" sz="1000" b="1" dirty="0">
                           <a:solidFill>
                             <a:srgbClr val="10161F"/>
                           </a:solidFill>
@@ -8596,7 +8960,7 @@
                         </a:rPr>
                         <a:t>수입</a:t>
                       </a:r>
-                      <a:endParaRPr lang="en-US" sz="900" dirty="0">
+                      <a:endParaRPr lang="en-US" sz="1000" dirty="0">
                         <a:latin typeface="Pretendard" charset="0"/>
                         <a:ea typeface="Pretendard" charset="0"/>
                         <a:cs typeface="Pretendard" charset="0"/>
@@ -8654,7 +9018,7 @@
                         <a:buNone/>
                       </a:pPr>
                       <a:r>
-                        <a:rPr lang="en-US" sz="900" dirty="0">
+                        <a:rPr lang="en-US" sz="1000" dirty="0">
                           <a:solidFill>
                             <a:srgbClr val="10161F"/>
                           </a:solidFill>
@@ -8668,7 +9032,7 @@
                         <a:buNone/>
                       </a:pPr>
                       <a:r>
-                        <a:rPr lang="en-US" sz="900" dirty="0">
+                        <a:rPr lang="en-US" sz="1000" dirty="0">
                           <a:solidFill>
                             <a:srgbClr val="10161F"/>
                           </a:solidFill>
@@ -8682,7 +9046,7 @@
                         <a:buNone/>
                       </a:pPr>
                       <a:r>
-                        <a:rPr lang="en-US" sz="900" dirty="0">
+                        <a:rPr lang="en-US" sz="1000" dirty="0">
                           <a:solidFill>
                             <a:srgbClr val="10161F"/>
                           </a:solidFill>
@@ -8692,7 +9056,7 @@
                         </a:rPr>
                         <a:t>원/년</a:t>
                       </a:r>
-                      <a:endParaRPr lang="en-US" sz="900" dirty="0">
+                      <a:endParaRPr lang="en-US" sz="1000" dirty="0">
                         <a:latin typeface="Pretendard" charset="0"/>
                         <a:ea typeface="Pretendard" charset="0"/>
                         <a:cs typeface="Pretendard" charset="0"/>
@@ -8750,7 +9114,7 @@
                         <a:buNone/>
                       </a:pPr>
                       <a:r>
-                        <a:rPr lang="en-US" sz="900" dirty="0">
+                        <a:rPr lang="en-US" sz="1000" dirty="0">
                           <a:solidFill>
                             <a:srgbClr val="10161F"/>
                           </a:solidFill>
@@ -8764,7 +9128,7 @@
                         <a:buNone/>
                       </a:pPr>
                       <a:r>
-                        <a:rPr lang="en-US" sz="900" dirty="0">
+                        <a:rPr lang="en-US" sz="1000" dirty="0">
                           <a:solidFill>
                             <a:srgbClr val="10161F"/>
                           </a:solidFill>
@@ -8778,7 +9142,7 @@
                         <a:buNone/>
                       </a:pPr>
                       <a:r>
-                        <a:rPr lang="en-US" sz="900" dirty="0">
+                        <a:rPr lang="en-US" sz="1000" dirty="0">
                           <a:solidFill>
                             <a:srgbClr val="10161F"/>
                           </a:solidFill>
@@ -8792,7 +9156,7 @@
                         <a:buNone/>
                       </a:pPr>
                       <a:r>
-                        <a:rPr lang="en-US" sz="900" dirty="0">
+                        <a:rPr lang="en-US" sz="1000" dirty="0">
                           <a:solidFill>
                             <a:srgbClr val="10161F"/>
                           </a:solidFill>
@@ -8802,7 +9166,7 @@
                         </a:rPr>
                         <a:t>수입</a:t>
                       </a:r>
-                      <a:endParaRPr lang="en-US" sz="900" dirty="0">
+                      <a:endParaRPr lang="en-US" sz="1000" dirty="0">
                         <a:latin typeface="Pretendard" charset="0"/>
                         <a:ea typeface="Pretendard" charset="0"/>
                         <a:cs typeface="Pretendard" charset="0"/>
@@ -8852,7 +9216,7 @@
                   </a:tcPr>
                 </a:tc>
               </a:tr>
-              <a:tr h="347472">
+              <a:tr h="438912">
                 <a:tc>
                   <a:txBody>
                     <a:bodyPr/>
@@ -8862,7 +9226,7 @@
                         <a:buNone/>
                       </a:pPr>
                       <a:r>
-                        <a:rPr lang="en-US" sz="900" b="1" dirty="0">
+                        <a:rPr lang="en-US" sz="1000" b="1" dirty="0">
                           <a:solidFill>
                             <a:srgbClr val="10161F"/>
                           </a:solidFill>
@@ -8876,7 +9240,7 @@
                         <a:buNone/>
                       </a:pPr>
                       <a:r>
-                        <a:rPr lang="en-US" sz="900" b="1" dirty="0">
+                        <a:rPr lang="en-US" sz="1000" b="1" dirty="0">
                           <a:solidFill>
                             <a:srgbClr val="10161F"/>
                           </a:solidFill>
@@ -8886,7 +9250,7 @@
                         </a:rPr>
                         <a:t>총액</a:t>
                       </a:r>
-                      <a:endParaRPr lang="en-US" sz="900" dirty="0">
+                      <a:endParaRPr lang="en-US" sz="1000" dirty="0">
                         <a:latin typeface="Pretendard" charset="0"/>
                         <a:ea typeface="Pretendard" charset="0"/>
                         <a:cs typeface="Pretendard" charset="0"/>
@@ -8944,7 +9308,7 @@
                         <a:buNone/>
                       </a:pPr>
                       <a:r>
-                        <a:rPr lang="en-US" sz="900" dirty="0">
+                        <a:rPr lang="en-US" sz="1000" dirty="0">
                           <a:solidFill>
                             <a:srgbClr val="10161F"/>
                           </a:solidFill>
@@ -8958,7 +9322,7 @@
                         <a:buNone/>
                       </a:pPr>
                       <a:r>
-                        <a:rPr lang="en-US" sz="900" dirty="0">
+                        <a:rPr lang="en-US" sz="1000" dirty="0">
                           <a:solidFill>
                             <a:srgbClr val="10161F"/>
                           </a:solidFill>
@@ -8972,7 +9336,7 @@
                         <a:buNone/>
                       </a:pPr>
                       <a:r>
-                        <a:rPr lang="en-US" sz="900" dirty="0">
+                        <a:rPr lang="en-US" sz="1000" dirty="0">
                           <a:solidFill>
                             <a:srgbClr val="10161F"/>
                           </a:solidFill>
@@ -8982,7 +9346,7 @@
                         </a:rPr>
                         <a:t>원</a:t>
                       </a:r>
-                      <a:endParaRPr lang="en-US" sz="900" dirty="0">
+                      <a:endParaRPr lang="en-US" sz="1000" dirty="0">
                         <a:latin typeface="Pretendard" charset="0"/>
                         <a:ea typeface="Pretendard" charset="0"/>
                         <a:cs typeface="Pretendard" charset="0"/>
@@ -9040,7 +9404,7 @@
                         <a:buNone/>
                       </a:pPr>
                       <a:r>
-                        <a:rPr lang="en-US" sz="900" dirty="0">
+                        <a:rPr lang="en-US" sz="1000" dirty="0">
                           <a:solidFill>
                             <a:srgbClr val="10161F"/>
                           </a:solidFill>
@@ -9054,7 +9418,7 @@
                         <a:buNone/>
                       </a:pPr>
                       <a:r>
-                        <a:rPr lang="en-US" sz="900" dirty="0">
+                        <a:rPr lang="en-US" sz="1000" dirty="0">
                           <a:solidFill>
                             <a:srgbClr val="10161F"/>
                           </a:solidFill>
@@ -9068,7 +9432,7 @@
                         <a:buNone/>
                       </a:pPr>
                       <a:r>
-                        <a:rPr lang="en-US" sz="900" dirty="0">
+                        <a:rPr lang="en-US" sz="1000" dirty="0">
                           <a:solidFill>
                             <a:srgbClr val="10161F"/>
                           </a:solidFill>
@@ -9078,7 +9442,7 @@
                         </a:rPr>
                         <a:t>합계</a:t>
                       </a:r>
-                      <a:endParaRPr lang="en-US" sz="900" dirty="0">
+                      <a:endParaRPr lang="en-US" sz="1000" dirty="0">
                         <a:latin typeface="Pretendard" charset="0"/>
                         <a:ea typeface="Pretendard" charset="0"/>
                         <a:cs typeface="Pretendard" charset="0"/>
@@ -9128,7 +9492,7 @@
                   </a:tcPr>
                 </a:tc>
               </a:tr>
-              <a:tr h="347472">
+              <a:tr h="438912">
                 <a:tc>
                   <a:txBody>
                     <a:bodyPr/>
@@ -9138,7 +9502,7 @@
                         <a:buNone/>
                       </a:pPr>
                       <a:r>
-                        <a:rPr lang="en-US" sz="900" b="1" dirty="0">
+                        <a:rPr lang="en-US" sz="1000" b="1" dirty="0">
                           <a:solidFill>
                             <a:srgbClr val="10161F"/>
                           </a:solidFill>
@@ -9152,7 +9516,7 @@
                         <a:buNone/>
                       </a:pPr>
                       <a:r>
-                        <a:rPr lang="en-US" sz="900" b="1" dirty="0">
+                        <a:rPr lang="en-US" sz="1000" b="1" dirty="0">
                           <a:solidFill>
                             <a:srgbClr val="10161F"/>
                           </a:solidFill>
@@ -9162,7 +9526,7 @@
                         </a:rPr>
                         <a:t>정보</a:t>
                       </a:r>
-                      <a:endParaRPr lang="en-US" sz="900" dirty="0">
+                      <a:endParaRPr lang="en-US" sz="1000" dirty="0">
                         <a:latin typeface="Pretendard" charset="0"/>
                         <a:ea typeface="Pretendard" charset="0"/>
                         <a:cs typeface="Pretendard" charset="0"/>
@@ -9220,7 +9584,7 @@
                         <a:buNone/>
                       </a:pPr>
                       <a:r>
-                        <a:rPr lang="en-US" sz="900" dirty="0">
+                        <a:rPr lang="en-US" sz="1000" dirty="0">
                           <a:solidFill>
                             <a:srgbClr val="10161F"/>
                           </a:solidFill>
@@ -9234,7 +9598,7 @@
                         <a:buNone/>
                       </a:pPr>
                       <a:r>
-                        <a:rPr lang="en-US" sz="900" dirty="0">
+                        <a:rPr lang="en-US" sz="1000" dirty="0">
                           <a:solidFill>
                             <a:srgbClr val="10161F"/>
                           </a:solidFill>
@@ -9248,7 +9612,7 @@
                         <a:buNone/>
                       </a:pPr>
                       <a:r>
-                        <a:rPr lang="en-US" sz="900" dirty="0">
+                        <a:rPr lang="en-US" sz="1000" dirty="0">
                           <a:solidFill>
                             <a:srgbClr val="10161F"/>
                           </a:solidFill>
@@ -9262,7 +9626,7 @@
                         <a:buNone/>
                       </a:pPr>
                       <a:r>
-                        <a:rPr lang="en-US" sz="900" dirty="0">
+                        <a:rPr lang="en-US" sz="1000" dirty="0">
                           <a:solidFill>
                             <a:srgbClr val="10161F"/>
                           </a:solidFill>
@@ -9276,7 +9640,7 @@
                         <a:buNone/>
                       </a:pPr>
                       <a:r>
-                        <a:rPr lang="en-US" sz="900" dirty="0">
+                        <a:rPr lang="en-US" sz="1000" dirty="0">
                           <a:solidFill>
                             <a:srgbClr val="10161F"/>
                           </a:solidFill>
@@ -9290,7 +9654,7 @@
                         <a:buNone/>
                       </a:pPr>
                       <a:r>
-                        <a:rPr lang="en-US" sz="900" dirty="0">
+                        <a:rPr lang="en-US" sz="1000" dirty="0">
                           <a:solidFill>
                             <a:srgbClr val="10161F"/>
                           </a:solidFill>
@@ -9304,7 +9668,7 @@
                         <a:buNone/>
                       </a:pPr>
                       <a:r>
-                        <a:rPr lang="en-US" sz="900" dirty="0">
+                        <a:rPr lang="en-US" sz="1000" dirty="0">
                           <a:solidFill>
                             <a:srgbClr val="10161F"/>
                           </a:solidFill>
@@ -9314,7 +9678,7 @@
                         </a:rPr>
                         <a:t>제공</a:t>
                       </a:r>
-                      <a:endParaRPr lang="en-US" sz="900" dirty="0">
+                      <a:endParaRPr lang="en-US" sz="1000" dirty="0">
                         <a:latin typeface="Pretendard" charset="0"/>
                         <a:ea typeface="Pretendard" charset="0"/>
                         <a:cs typeface="Pretendard" charset="0"/>
@@ -9372,7 +9736,7 @@
                         <a:buNone/>
                       </a:pPr>
                       <a:r>
-                        <a:rPr lang="en-US" sz="900" dirty="0">
+                        <a:rPr lang="en-US" sz="1000" dirty="0">
                           <a:solidFill>
                             <a:srgbClr val="10161F"/>
                           </a:solidFill>
@@ -9386,7 +9750,7 @@
                         <a:buNone/>
                       </a:pPr>
                       <a:r>
-                        <a:rPr lang="en-US" sz="900" dirty="0">
+                        <a:rPr lang="en-US" sz="1000" dirty="0">
                           <a:solidFill>
                             <a:srgbClr val="10161F"/>
                           </a:solidFill>
@@ -9400,7 +9764,7 @@
                         <a:buNone/>
                       </a:pPr>
                       <a:r>
-                        <a:rPr lang="en-US" sz="900" dirty="0">
+                        <a:rPr lang="en-US" sz="1000" dirty="0">
                           <a:solidFill>
                             <a:srgbClr val="10161F"/>
                           </a:solidFill>
@@ -9410,7 +9774,7 @@
                         </a:rPr>
                         <a:t>처리</a:t>
                       </a:r>
-                      <a:endParaRPr lang="en-US" sz="900" dirty="0">
+                      <a:endParaRPr lang="en-US" sz="1000" dirty="0">
                         <a:latin typeface="Pretendard" charset="0"/>
                         <a:ea typeface="Pretendard" charset="0"/>
                         <a:cs typeface="Pretendard" charset="0"/>
@@ -9456,1502 +9820,6 @@
                     </a:lnB>
                     <a:solidFill>
                       <a:srgbClr val="F7FAFC"/>
-                    </a:solidFill>
-                  </a:tcPr>
-                </a:tc>
-              </a:tr>
-              <a:tr h="347472">
-                <a:tc>
-                  <a:txBody>
-                    <a:bodyPr/>
-                    <a:lstStyle/>
-                    <a:p>
-                      <a:pPr indent="0" marL="0">
-                        <a:buNone/>
-                      </a:pPr>
-                      <a:r>
-                        <a:rPr lang="en-US" sz="900" b="1" dirty="0">
-                          <a:solidFill>
-                            <a:srgbClr val="10161F"/>
-                          </a:solidFill>
-                          <a:latin typeface="Pretendard" pitchFamily="34" charset="0"/>
-                          <a:ea typeface="Pretendard" pitchFamily="34" charset="-122"/>
-                          <a:cs typeface="Pretendard" pitchFamily="34" charset="-120"/>
-                        </a:rPr>
-                        <a:t>층수</a:t>
-                      </a:r>
-                      <a:endParaRPr lang="en-US" sz="900" dirty="0">
-                        <a:latin typeface="Pretendard" charset="0"/>
-                        <a:ea typeface="Pretendard" charset="0"/>
-                        <a:cs typeface="Pretendard" charset="0"/>
-                      </a:endParaRPr>
-                    </a:p>
-                  </a:txBody>
-                  <a:tcPr marL="50800" marR="50800" marT="25400" marB="25400" anchor="ctr">
-                    <a:lnL w="3810" cap="flat" cmpd="sng" algn="ctr">
-                      <a:solidFill>
-                        <a:srgbClr val="CBD5E0"/>
-                      </a:solidFill>
-                      <a:prstDash val="solid"/>
-                      <a:round/>
-                      <a:headEnd type="none" w="med" len="med"/>
-                      <a:tailEnd type="none" w="med" len="med"/>
-                    </a:lnL>
-                    <a:lnR w="3810" cap="flat" cmpd="sng" algn="ctr">
-                      <a:solidFill>
-                        <a:srgbClr val="CBD5E0"/>
-                      </a:solidFill>
-                      <a:prstDash val="solid"/>
-                      <a:round/>
-                      <a:headEnd type="none" w="med" len="med"/>
-                      <a:tailEnd type="none" w="med" len="med"/>
-                    </a:lnR>
-                    <a:lnT w="3810" cap="flat" cmpd="sng" algn="ctr">
-                      <a:solidFill>
-                        <a:srgbClr val="CBD5E0"/>
-                      </a:solidFill>
-                      <a:prstDash val="solid"/>
-                      <a:round/>
-                      <a:headEnd type="none" w="med" len="med"/>
-                      <a:tailEnd type="none" w="med" len="med"/>
-                    </a:lnT>
-                    <a:lnB w="3810" cap="flat" cmpd="sng" algn="ctr">
-                      <a:solidFill>
-                        <a:srgbClr val="CBD5E0"/>
-                      </a:solidFill>
-                      <a:prstDash val="solid"/>
-                      <a:round/>
-                      <a:headEnd type="none" w="med" len="med"/>
-                      <a:tailEnd type="none" w="med" len="med"/>
-                    </a:lnB>
-                    <a:solidFill>
-                      <a:srgbClr val="FFFFFF"/>
-                    </a:solidFill>
-                  </a:tcPr>
-                </a:tc>
-                <a:tc>
-                  <a:txBody>
-                    <a:bodyPr/>
-                    <a:lstStyle/>
-                    <a:p>
-                      <a:pPr indent="0" marL="0">
-                        <a:buNone/>
-                      </a:pPr>
-                      <a:r>
-                        <a:rPr lang="en-US" sz="900" dirty="0">
-                          <a:solidFill>
-                            <a:srgbClr val="10161F"/>
-                          </a:solidFill>
-                          <a:latin typeface="Pretendard" pitchFamily="34" charset="0"/>
-                          <a:ea typeface="Pretendard" pitchFamily="34" charset="-122"/>
-                          <a:cs typeface="Pretendard" pitchFamily="34" charset="-120"/>
-                        </a:rPr>
-                        <a:t>업종</a:t>
-                      </a:r>
-                      <a:endParaRPr lang="en-US" sz="900" dirty="0">
-                        <a:latin typeface="Pretendard" charset="0"/>
-                        <a:ea typeface="Pretendard" charset="0"/>
-                        <a:cs typeface="Pretendard" charset="0"/>
-                      </a:endParaRPr>
-                    </a:p>
-                  </a:txBody>
-                  <a:tcPr marL="50800" marR="50800" marT="25400" marB="25400" anchor="ctr">
-                    <a:lnL w="3810" cap="flat" cmpd="sng" algn="ctr">
-                      <a:solidFill>
-                        <a:srgbClr val="CBD5E0"/>
-                      </a:solidFill>
-                      <a:prstDash val="solid"/>
-                      <a:round/>
-                      <a:headEnd type="none" w="med" len="med"/>
-                      <a:tailEnd type="none" w="med" len="med"/>
-                    </a:lnL>
-                    <a:lnR w="3810" cap="flat" cmpd="sng" algn="ctr">
-                      <a:solidFill>
-                        <a:srgbClr val="CBD5E0"/>
-                      </a:solidFill>
-                      <a:prstDash val="solid"/>
-                      <a:round/>
-                      <a:headEnd type="none" w="med" len="med"/>
-                      <a:tailEnd type="none" w="med" len="med"/>
-                    </a:lnR>
-                    <a:lnT w="3810" cap="flat" cmpd="sng" algn="ctr">
-                      <a:solidFill>
-                        <a:srgbClr val="CBD5E0"/>
-                      </a:solidFill>
-                      <a:prstDash val="solid"/>
-                      <a:round/>
-                      <a:headEnd type="none" w="med" len="med"/>
-                      <a:tailEnd type="none" w="med" len="med"/>
-                    </a:lnT>
-                    <a:lnB w="3810" cap="flat" cmpd="sng" algn="ctr">
-                      <a:solidFill>
-                        <a:srgbClr val="CBD5E0"/>
-                      </a:solidFill>
-                      <a:prstDash val="solid"/>
-                      <a:round/>
-                      <a:headEnd type="none" w="med" len="med"/>
-                      <a:tailEnd type="none" w="med" len="med"/>
-                    </a:lnB>
-                    <a:solidFill>
-                      <a:srgbClr val="FFFFFF"/>
-                    </a:solidFill>
-                  </a:tcPr>
-                </a:tc>
-                <a:tc>
-                  <a:txBody>
-                    <a:bodyPr/>
-                    <a:lstStyle/>
-                    <a:p>
-                      <a:pPr indent="0" marL="0">
-                        <a:buNone/>
-                      </a:pPr>
-                      <a:r>
-                        <a:rPr lang="en-US" sz="900" dirty="0">
-                          <a:solidFill>
-                            <a:srgbClr val="10161F"/>
-                          </a:solidFill>
-                          <a:latin typeface="Pretendard" pitchFamily="34" charset="0"/>
-                          <a:ea typeface="Pretendard" pitchFamily="34" charset="-122"/>
-                          <a:cs typeface="Pretendard" pitchFamily="34" charset="-120"/>
-                        </a:rPr>
-                        <a:t>전용면적</a:t>
-                      </a:r>
-                      <a:endParaRPr lang="en-US" sz="900" dirty="0">
-                        <a:latin typeface="Pretendard" charset="0"/>
-                        <a:ea typeface="Pretendard" charset="0"/>
-                        <a:cs typeface="Pretendard" charset="0"/>
-                      </a:endParaRPr>
-                    </a:p>
-                  </a:txBody>
-                  <a:tcPr marL="50800" marR="50800" marT="25400" marB="25400" anchor="ctr">
-                    <a:lnL w="3810" cap="flat" cmpd="sng" algn="ctr">
-                      <a:solidFill>
-                        <a:srgbClr val="CBD5E0"/>
-                      </a:solidFill>
-                      <a:prstDash val="solid"/>
-                      <a:round/>
-                      <a:headEnd type="none" w="med" len="med"/>
-                      <a:tailEnd type="none" w="med" len="med"/>
-                    </a:lnL>
-                    <a:lnR w="3810" cap="flat" cmpd="sng" algn="ctr">
-                      <a:solidFill>
-                        <a:srgbClr val="CBD5E0"/>
-                      </a:solidFill>
-                      <a:prstDash val="solid"/>
-                      <a:round/>
-                      <a:headEnd type="none" w="med" len="med"/>
-                      <a:tailEnd type="none" w="med" len="med"/>
-                    </a:lnR>
-                    <a:lnT w="3810" cap="flat" cmpd="sng" algn="ctr">
-                      <a:solidFill>
-                        <a:srgbClr val="CBD5E0"/>
-                      </a:solidFill>
-                      <a:prstDash val="solid"/>
-                      <a:round/>
-                      <a:headEnd type="none" w="med" len="med"/>
-                      <a:tailEnd type="none" w="med" len="med"/>
-                    </a:lnT>
-                    <a:lnB w="3810" cap="flat" cmpd="sng" algn="ctr">
-                      <a:solidFill>
-                        <a:srgbClr val="CBD5E0"/>
-                      </a:solidFill>
-                      <a:prstDash val="solid"/>
-                      <a:round/>
-                      <a:headEnd type="none" w="med" len="med"/>
-                      <a:tailEnd type="none" w="med" len="med"/>
-                    </a:lnB>
-                    <a:solidFill>
-                      <a:srgbClr val="FFFFFF"/>
-                    </a:solidFill>
-                  </a:tcPr>
-                </a:tc>
-                <a:tc>
-                  <a:txBody>
-                    <a:bodyPr/>
-                    <a:lstStyle/>
-                    <a:p>
-                      <a:pPr indent="0" marL="0">
-                        <a:buNone/>
-                      </a:pPr>
-                      <a:r>
-                        <a:rPr lang="en-US" sz="900" dirty="0">
-                          <a:solidFill>
-                            <a:srgbClr val="10161F"/>
-                          </a:solidFill>
-                          <a:latin typeface="Pretendard" pitchFamily="34" charset="0"/>
-                          <a:ea typeface="Pretendard" pitchFamily="34" charset="-122"/>
-                          <a:cs typeface="Pretendard" pitchFamily="34" charset="-120"/>
-                        </a:rPr>
-                        <a:t>보증금</a:t>
-                      </a:r>
-                      <a:endParaRPr lang="en-US" sz="900" dirty="0">
-                        <a:latin typeface="Pretendard" charset="0"/>
-                        <a:ea typeface="Pretendard" charset="0"/>
-                        <a:cs typeface="Pretendard" charset="0"/>
-                      </a:endParaRPr>
-                    </a:p>
-                  </a:txBody>
-                  <a:tcPr marL="50800" marR="50800" marT="25400" marB="25400" anchor="ctr">
-                    <a:lnL w="3810" cap="flat" cmpd="sng" algn="ctr">
-                      <a:solidFill>
-                        <a:srgbClr val="CBD5E0"/>
-                      </a:solidFill>
-                      <a:prstDash val="solid"/>
-                      <a:round/>
-                      <a:headEnd type="none" w="med" len="med"/>
-                      <a:tailEnd type="none" w="med" len="med"/>
-                    </a:lnL>
-                    <a:lnR w="3810" cap="flat" cmpd="sng" algn="ctr">
-                      <a:solidFill>
-                        <a:srgbClr val="CBD5E0"/>
-                      </a:solidFill>
-                      <a:prstDash val="solid"/>
-                      <a:round/>
-                      <a:headEnd type="none" w="med" len="med"/>
-                      <a:tailEnd type="none" w="med" len="med"/>
-                    </a:lnR>
-                    <a:lnT w="3810" cap="flat" cmpd="sng" algn="ctr">
-                      <a:solidFill>
-                        <a:srgbClr val="CBD5E0"/>
-                      </a:solidFill>
-                      <a:prstDash val="solid"/>
-                      <a:round/>
-                      <a:headEnd type="none" w="med" len="med"/>
-                      <a:tailEnd type="none" w="med" len="med"/>
-                    </a:lnT>
-                    <a:lnB w="3810" cap="flat" cmpd="sng" algn="ctr">
-                      <a:solidFill>
-                        <a:srgbClr val="CBD5E0"/>
-                      </a:solidFill>
-                      <a:prstDash val="solid"/>
-                      <a:round/>
-                      <a:headEnd type="none" w="med" len="med"/>
-                      <a:tailEnd type="none" w="med" len="med"/>
-                    </a:lnB>
-                    <a:solidFill>
-                      <a:srgbClr val="FFFFFF"/>
-                    </a:solidFill>
-                  </a:tcPr>
-                </a:tc>
-                <a:tc>
-                  <a:txBody>
-                    <a:bodyPr/>
-                    <a:lstStyle/>
-                    <a:p>
-                      <a:pPr indent="0" marL="0">
-                        <a:buNone/>
-                      </a:pPr>
-                      <a:r>
-                        <a:rPr lang="en-US" sz="900" dirty="0">
-                          <a:solidFill>
-                            <a:srgbClr val="10161F"/>
-                          </a:solidFill>
-                          <a:latin typeface="Pretendard" pitchFamily="34" charset="0"/>
-                          <a:ea typeface="Pretendard" pitchFamily="34" charset="-122"/>
-                          <a:cs typeface="Pretendard" pitchFamily="34" charset="-120"/>
-                        </a:rPr>
-                        <a:t>월 </a:t>
-                      </a:r>
-                      <a:pPr indent="0" marL="0">
-                        <a:buNone/>
-                      </a:pPr>
-                      <a:r>
-                        <a:rPr lang="en-US" sz="900" dirty="0">
-                          <a:solidFill>
-                            <a:srgbClr val="10161F"/>
-                          </a:solidFill>
-                          <a:latin typeface="Pretendard" pitchFamily="34" charset="0"/>
-                          <a:ea typeface="Pretendard" pitchFamily="34" charset="-122"/>
-                          <a:cs typeface="Pretendard" pitchFamily="34" charset="-120"/>
-                        </a:rPr>
-                        <a:t>임대료</a:t>
-                      </a:r>
-                      <a:endParaRPr lang="en-US" sz="900" dirty="0">
-                        <a:latin typeface="Pretendard" charset="0"/>
-                        <a:ea typeface="Pretendard" charset="0"/>
-                        <a:cs typeface="Pretendard" charset="0"/>
-                      </a:endParaRPr>
-                    </a:p>
-                  </a:txBody>
-                  <a:tcPr marL="50800" marR="50800" marT="25400" marB="25400" anchor="ctr">
-                    <a:lnL w="3810" cap="flat" cmpd="sng" algn="ctr">
-                      <a:solidFill>
-                        <a:srgbClr val="CBD5E0"/>
-                      </a:solidFill>
-                      <a:prstDash val="solid"/>
-                      <a:round/>
-                      <a:headEnd type="none" w="med" len="med"/>
-                      <a:tailEnd type="none" w="med" len="med"/>
-                    </a:lnL>
-                    <a:lnR w="3810" cap="flat" cmpd="sng" algn="ctr">
-                      <a:solidFill>
-                        <a:srgbClr val="CBD5E0"/>
-                      </a:solidFill>
-                      <a:prstDash val="solid"/>
-                      <a:round/>
-                      <a:headEnd type="none" w="med" len="med"/>
-                      <a:tailEnd type="none" w="med" len="med"/>
-                    </a:lnR>
-                    <a:lnT w="3810" cap="flat" cmpd="sng" algn="ctr">
-                      <a:solidFill>
-                        <a:srgbClr val="CBD5E0"/>
-                      </a:solidFill>
-                      <a:prstDash val="solid"/>
-                      <a:round/>
-                      <a:headEnd type="none" w="med" len="med"/>
-                      <a:tailEnd type="none" w="med" len="med"/>
-                    </a:lnT>
-                    <a:lnB w="3810" cap="flat" cmpd="sng" algn="ctr">
-                      <a:solidFill>
-                        <a:srgbClr val="CBD5E0"/>
-                      </a:solidFill>
-                      <a:prstDash val="solid"/>
-                      <a:round/>
-                      <a:headEnd type="none" w="med" len="med"/>
-                      <a:tailEnd type="none" w="med" len="med"/>
-                    </a:lnB>
-                    <a:solidFill>
-                      <a:srgbClr val="FFFFFF"/>
-                    </a:solidFill>
-                  </a:tcPr>
-                </a:tc>
-                <a:tc>
-                  <a:txBody>
-                    <a:bodyPr/>
-                    <a:lstStyle/>
-                    <a:p>
-                      <a:pPr indent="0" marL="0">
-                        <a:buNone/>
-                      </a:pPr>
-                      <a:r>
-                        <a:rPr lang="en-US" sz="900" dirty="0">
-                          <a:solidFill>
-                            <a:srgbClr val="10161F"/>
-                          </a:solidFill>
-                          <a:latin typeface="Pretendard" pitchFamily="34" charset="0"/>
-                          <a:ea typeface="Pretendard" pitchFamily="34" charset="-122"/>
-                          <a:cs typeface="Pretendard" pitchFamily="34" charset="-120"/>
-                        </a:rPr>
-                        <a:t>관리비</a:t>
-                      </a:r>
-                      <a:endParaRPr lang="en-US" sz="900" dirty="0">
-                        <a:latin typeface="Pretendard" charset="0"/>
-                        <a:ea typeface="Pretendard" charset="0"/>
-                        <a:cs typeface="Pretendard" charset="0"/>
-                      </a:endParaRPr>
-                    </a:p>
-                  </a:txBody>
-                  <a:tcPr marL="50800" marR="50800" marT="25400" marB="25400" anchor="ctr">
-                    <a:lnL w="3810" cap="flat" cmpd="sng" algn="ctr">
-                      <a:solidFill>
-                        <a:srgbClr val="CBD5E0"/>
-                      </a:solidFill>
-                      <a:prstDash val="solid"/>
-                      <a:round/>
-                      <a:headEnd type="none" w="med" len="med"/>
-                      <a:tailEnd type="none" w="med" len="med"/>
-                    </a:lnL>
-                    <a:lnR w="3810" cap="flat" cmpd="sng" algn="ctr">
-                      <a:solidFill>
-                        <a:srgbClr val="CBD5E0"/>
-                      </a:solidFill>
-                      <a:prstDash val="solid"/>
-                      <a:round/>
-                      <a:headEnd type="none" w="med" len="med"/>
-                      <a:tailEnd type="none" w="med" len="med"/>
-                    </a:lnR>
-                    <a:lnT w="3810" cap="flat" cmpd="sng" algn="ctr">
-                      <a:solidFill>
-                        <a:srgbClr val="CBD5E0"/>
-                      </a:solidFill>
-                      <a:prstDash val="solid"/>
-                      <a:round/>
-                      <a:headEnd type="none" w="med" len="med"/>
-                      <a:tailEnd type="none" w="med" len="med"/>
-                    </a:lnT>
-                    <a:lnB w="3810" cap="flat" cmpd="sng" algn="ctr">
-                      <a:solidFill>
-                        <a:srgbClr val="CBD5E0"/>
-                      </a:solidFill>
-                      <a:prstDash val="solid"/>
-                      <a:round/>
-                      <a:headEnd type="none" w="med" len="med"/>
-                      <a:tailEnd type="none" w="med" len="med"/>
-                    </a:lnB>
-                    <a:solidFill>
-                      <a:srgbClr val="FFFFFF"/>
-                    </a:solidFill>
-                  </a:tcPr>
-                </a:tc>
-                <a:tc>
-                  <a:txBody>
-                    <a:bodyPr/>
-                    <a:lstStyle/>
-                    <a:p>
-                      <a:pPr indent="0" marL="0">
-                        <a:buNone/>
-                      </a:pPr>
-                      <a:r>
-                        <a:rPr lang="en-US" sz="900" dirty="0">
-                          <a:solidFill>
-                            <a:srgbClr val="10161F"/>
-                          </a:solidFill>
-                          <a:latin typeface="Pretendard" pitchFamily="34" charset="0"/>
-                          <a:ea typeface="Pretendard" pitchFamily="34" charset="-122"/>
-                          <a:cs typeface="Pretendard" pitchFamily="34" charset="-120"/>
-                        </a:rPr>
-                        <a:t>임대 </a:t>
-                      </a:r>
-                      <a:pPr indent="0" marL="0">
-                        <a:buNone/>
-                      </a:pPr>
-                      <a:r>
-                        <a:rPr lang="en-US" sz="900" dirty="0">
-                          <a:solidFill>
-                            <a:srgbClr val="10161F"/>
-                          </a:solidFill>
-                          <a:latin typeface="Pretendard" pitchFamily="34" charset="0"/>
-                          <a:ea typeface="Pretendard" pitchFamily="34" charset="-122"/>
-                          <a:cs typeface="Pretendard" pitchFamily="34" charset="-120"/>
-                        </a:rPr>
-                        <a:t>만기</a:t>
-                      </a:r>
-                      <a:endParaRPr lang="en-US" sz="900" dirty="0">
-                        <a:latin typeface="Pretendard" charset="0"/>
-                        <a:ea typeface="Pretendard" charset="0"/>
-                        <a:cs typeface="Pretendard" charset="0"/>
-                      </a:endParaRPr>
-                    </a:p>
-                  </a:txBody>
-                  <a:tcPr marL="50800" marR="50800" marT="25400" marB="25400" anchor="ctr">
-                    <a:lnL w="3810" cap="flat" cmpd="sng" algn="ctr">
-                      <a:solidFill>
-                        <a:srgbClr val="CBD5E0"/>
-                      </a:solidFill>
-                      <a:prstDash val="solid"/>
-                      <a:round/>
-                      <a:headEnd type="none" w="med" len="med"/>
-                      <a:tailEnd type="none" w="med" len="med"/>
-                    </a:lnL>
-                    <a:lnR w="3810" cap="flat" cmpd="sng" algn="ctr">
-                      <a:solidFill>
-                        <a:srgbClr val="CBD5E0"/>
-                      </a:solidFill>
-                      <a:prstDash val="solid"/>
-                      <a:round/>
-                      <a:headEnd type="none" w="med" len="med"/>
-                      <a:tailEnd type="none" w="med" len="med"/>
-                    </a:lnR>
-                    <a:lnT w="3810" cap="flat" cmpd="sng" algn="ctr">
-                      <a:solidFill>
-                        <a:srgbClr val="CBD5E0"/>
-                      </a:solidFill>
-                      <a:prstDash val="solid"/>
-                      <a:round/>
-                      <a:headEnd type="none" w="med" len="med"/>
-                      <a:tailEnd type="none" w="med" len="med"/>
-                    </a:lnT>
-                    <a:lnB w="3810" cap="flat" cmpd="sng" algn="ctr">
-                      <a:solidFill>
-                        <a:srgbClr val="CBD5E0"/>
-                      </a:solidFill>
-                      <a:prstDash val="solid"/>
-                      <a:round/>
-                      <a:headEnd type="none" w="med" len="med"/>
-                      <a:tailEnd type="none" w="med" len="med"/>
-                    </a:lnB>
-                    <a:solidFill>
-                      <a:srgbClr val="FFFFFF"/>
-                    </a:solidFill>
-                  </a:tcPr>
-                </a:tc>
-              </a:tr>
-              <a:tr h="347472">
-                <a:tc>
-                  <a:txBody>
-                    <a:bodyPr/>
-                    <a:lstStyle/>
-                    <a:p>
-                      <a:pPr indent="0" marL="0">
-                        <a:buNone/>
-                      </a:pPr>
-                      <a:r>
-                        <a:rPr lang="en-US" sz="900" b="1" dirty="0">
-                          <a:solidFill>
-                            <a:srgbClr val="10161F"/>
-                          </a:solidFill>
-                          <a:latin typeface="Pretendard" pitchFamily="34" charset="0"/>
-                          <a:ea typeface="Pretendard" pitchFamily="34" charset="-122"/>
-                          <a:cs typeface="Pretendard" pitchFamily="34" charset="-120"/>
-                        </a:rPr>
-                        <a:t>B1~2F</a:t>
-                      </a:r>
-                      <a:endParaRPr lang="en-US" sz="900" dirty="0">
-                        <a:latin typeface="Pretendard" charset="0"/>
-                        <a:ea typeface="Pretendard" charset="0"/>
-                        <a:cs typeface="Pretendard" charset="0"/>
-                      </a:endParaRPr>
-                    </a:p>
-                  </a:txBody>
-                  <a:tcPr marL="50800" marR="50800" marT="25400" marB="25400" anchor="ctr">
-                    <a:lnL w="3810" cap="flat" cmpd="sng" algn="ctr">
-                      <a:solidFill>
-                        <a:srgbClr val="CBD5E0"/>
-                      </a:solidFill>
-                      <a:prstDash val="solid"/>
-                      <a:round/>
-                      <a:headEnd type="none" w="med" len="med"/>
-                      <a:tailEnd type="none" w="med" len="med"/>
-                    </a:lnL>
-                    <a:lnR w="3810" cap="flat" cmpd="sng" algn="ctr">
-                      <a:solidFill>
-                        <a:srgbClr val="CBD5E0"/>
-                      </a:solidFill>
-                      <a:prstDash val="solid"/>
-                      <a:round/>
-                      <a:headEnd type="none" w="med" len="med"/>
-                      <a:tailEnd type="none" w="med" len="med"/>
-                    </a:lnR>
-                    <a:lnT w="3810" cap="flat" cmpd="sng" algn="ctr">
-                      <a:solidFill>
-                        <a:srgbClr val="CBD5E0"/>
-                      </a:solidFill>
-                      <a:prstDash val="solid"/>
-                      <a:round/>
-                      <a:headEnd type="none" w="med" len="med"/>
-                      <a:tailEnd type="none" w="med" len="med"/>
-                    </a:lnT>
-                    <a:lnB w="3810" cap="flat" cmpd="sng" algn="ctr">
-                      <a:solidFill>
-                        <a:srgbClr val="CBD5E0"/>
-                      </a:solidFill>
-                      <a:prstDash val="solid"/>
-                      <a:round/>
-                      <a:headEnd type="none" w="med" len="med"/>
-                      <a:tailEnd type="none" w="med" len="med"/>
-                    </a:lnB>
-                    <a:solidFill>
-                      <a:srgbClr val="F7FAFC"/>
-                    </a:solidFill>
-                  </a:tcPr>
-                </a:tc>
-                <a:tc>
-                  <a:txBody>
-                    <a:bodyPr/>
-                    <a:lstStyle/>
-                    <a:p>
-                      <a:pPr indent="0" marL="0">
-                        <a:buNone/>
-                      </a:pPr>
-                      <a:r>
-                        <a:rPr lang="en-US" sz="900" dirty="0">
-                          <a:solidFill>
-                            <a:srgbClr val="10161F"/>
-                          </a:solidFill>
-                          <a:latin typeface="Pretendard" pitchFamily="34" charset="0"/>
-                          <a:ea typeface="Pretendard" pitchFamily="34" charset="-122"/>
-                          <a:cs typeface="Pretendard" pitchFamily="34" charset="-120"/>
-                        </a:rPr>
-                        <a:t>F&amp;B </a:t>
-                      </a:r>
-                      <a:pPr indent="0" marL="0">
-                        <a:buNone/>
-                      </a:pPr>
-                      <a:r>
-                        <a:rPr lang="en-US" sz="900" dirty="0">
-                          <a:solidFill>
-                            <a:srgbClr val="10161F"/>
-                          </a:solidFill>
-                          <a:latin typeface="Pretendard" pitchFamily="34" charset="0"/>
-                          <a:ea typeface="Pretendard" pitchFamily="34" charset="-122"/>
-                          <a:cs typeface="Pretendard" pitchFamily="34" charset="-120"/>
-                        </a:rPr>
-                        <a:t>브런치펍</a:t>
-                      </a:r>
-                      <a:endParaRPr lang="en-US" sz="900" dirty="0">
-                        <a:latin typeface="Pretendard" charset="0"/>
-                        <a:ea typeface="Pretendard" charset="0"/>
-                        <a:cs typeface="Pretendard" charset="0"/>
-                      </a:endParaRPr>
-                    </a:p>
-                  </a:txBody>
-                  <a:tcPr marL="50800" marR="50800" marT="25400" marB="25400" anchor="ctr">
-                    <a:lnL w="3810" cap="flat" cmpd="sng" algn="ctr">
-                      <a:solidFill>
-                        <a:srgbClr val="CBD5E0"/>
-                      </a:solidFill>
-                      <a:prstDash val="solid"/>
-                      <a:round/>
-                      <a:headEnd type="none" w="med" len="med"/>
-                      <a:tailEnd type="none" w="med" len="med"/>
-                    </a:lnL>
-                    <a:lnR w="3810" cap="flat" cmpd="sng" algn="ctr">
-                      <a:solidFill>
-                        <a:srgbClr val="CBD5E0"/>
-                      </a:solidFill>
-                      <a:prstDash val="solid"/>
-                      <a:round/>
-                      <a:headEnd type="none" w="med" len="med"/>
-                      <a:tailEnd type="none" w="med" len="med"/>
-                    </a:lnR>
-                    <a:lnT w="3810" cap="flat" cmpd="sng" algn="ctr">
-                      <a:solidFill>
-                        <a:srgbClr val="CBD5E0"/>
-                      </a:solidFill>
-                      <a:prstDash val="solid"/>
-                      <a:round/>
-                      <a:headEnd type="none" w="med" len="med"/>
-                      <a:tailEnd type="none" w="med" len="med"/>
-                    </a:lnT>
-                    <a:lnB w="3810" cap="flat" cmpd="sng" algn="ctr">
-                      <a:solidFill>
-                        <a:srgbClr val="CBD5E0"/>
-                      </a:solidFill>
-                      <a:prstDash val="solid"/>
-                      <a:round/>
-                      <a:headEnd type="none" w="med" len="med"/>
-                      <a:tailEnd type="none" w="med" len="med"/>
-                    </a:lnB>
-                    <a:solidFill>
-                      <a:srgbClr val="F7FAFC"/>
-                    </a:solidFill>
-                  </a:tcPr>
-                </a:tc>
-                <a:tc>
-                  <a:txBody>
-                    <a:bodyPr/>
-                    <a:lstStyle/>
-                    <a:p>
-                      <a:pPr indent="0" marL="0">
-                        <a:buNone/>
-                      </a:pPr>
-                      <a:r>
-                        <a:rPr lang="en-US" sz="900" dirty="0">
-                          <a:solidFill>
-                            <a:srgbClr val="10161F"/>
-                          </a:solidFill>
-                          <a:latin typeface="Pretendard" pitchFamily="34" charset="0"/>
-                          <a:ea typeface="Pretendard" pitchFamily="34" charset="-122"/>
-                          <a:cs typeface="Pretendard" pitchFamily="34" charset="-120"/>
-                        </a:rPr>
-                        <a:t>95평(약 </a:t>
-                      </a:r>
-                      <a:pPr indent="0" marL="0">
-                        <a:buNone/>
-                      </a:pPr>
-                      <a:r>
-                        <a:rPr lang="en-US" sz="900" dirty="0">
-                          <a:solidFill>
-                            <a:srgbClr val="10161F"/>
-                          </a:solidFill>
-                          <a:latin typeface="Pretendard" pitchFamily="34" charset="0"/>
-                          <a:ea typeface="Pretendard" pitchFamily="34" charset="-122"/>
-                          <a:cs typeface="Pretendard" pitchFamily="34" charset="-120"/>
-                        </a:rPr>
-                        <a:t>314.1㎡)</a:t>
-                      </a:r>
-                      <a:endParaRPr lang="en-US" sz="900" dirty="0">
-                        <a:latin typeface="Pretendard" charset="0"/>
-                        <a:ea typeface="Pretendard" charset="0"/>
-                        <a:cs typeface="Pretendard" charset="0"/>
-                      </a:endParaRPr>
-                    </a:p>
-                  </a:txBody>
-                  <a:tcPr marL="50800" marR="50800" marT="25400" marB="25400" anchor="ctr">
-                    <a:lnL w="3810" cap="flat" cmpd="sng" algn="ctr">
-                      <a:solidFill>
-                        <a:srgbClr val="CBD5E0"/>
-                      </a:solidFill>
-                      <a:prstDash val="solid"/>
-                      <a:round/>
-                      <a:headEnd type="none" w="med" len="med"/>
-                      <a:tailEnd type="none" w="med" len="med"/>
-                    </a:lnL>
-                    <a:lnR w="3810" cap="flat" cmpd="sng" algn="ctr">
-                      <a:solidFill>
-                        <a:srgbClr val="CBD5E0"/>
-                      </a:solidFill>
-                      <a:prstDash val="solid"/>
-                      <a:round/>
-                      <a:headEnd type="none" w="med" len="med"/>
-                      <a:tailEnd type="none" w="med" len="med"/>
-                    </a:lnR>
-                    <a:lnT w="3810" cap="flat" cmpd="sng" algn="ctr">
-                      <a:solidFill>
-                        <a:srgbClr val="CBD5E0"/>
-                      </a:solidFill>
-                      <a:prstDash val="solid"/>
-                      <a:round/>
-                      <a:headEnd type="none" w="med" len="med"/>
-                      <a:tailEnd type="none" w="med" len="med"/>
-                    </a:lnT>
-                    <a:lnB w="3810" cap="flat" cmpd="sng" algn="ctr">
-                      <a:solidFill>
-                        <a:srgbClr val="CBD5E0"/>
-                      </a:solidFill>
-                      <a:prstDash val="solid"/>
-                      <a:round/>
-                      <a:headEnd type="none" w="med" len="med"/>
-                      <a:tailEnd type="none" w="med" len="med"/>
-                    </a:lnB>
-                    <a:solidFill>
-                      <a:srgbClr val="F7FAFC"/>
-                    </a:solidFill>
-                  </a:tcPr>
-                </a:tc>
-                <a:tc>
-                  <a:txBody>
-                    <a:bodyPr/>
-                    <a:lstStyle/>
-                    <a:p>
-                      <a:pPr indent="0" marL="0">
-                        <a:buNone/>
-                      </a:pPr>
-                      <a:r>
-                        <a:rPr lang="en-US" sz="900" dirty="0">
-                          <a:solidFill>
-                            <a:srgbClr val="10161F"/>
-                          </a:solidFill>
-                          <a:latin typeface="Pretendard" pitchFamily="34" charset="0"/>
-                          <a:ea typeface="Pretendard" pitchFamily="34" charset="-122"/>
-                          <a:cs typeface="Pretendard" pitchFamily="34" charset="-120"/>
-                        </a:rPr>
-                        <a:t>20,000만</a:t>
-                      </a:r>
-                      <a:endParaRPr lang="en-US" sz="900" dirty="0">
-                        <a:latin typeface="Pretendard" charset="0"/>
-                        <a:ea typeface="Pretendard" charset="0"/>
-                        <a:cs typeface="Pretendard" charset="0"/>
-                      </a:endParaRPr>
-                    </a:p>
-                  </a:txBody>
-                  <a:tcPr marL="50800" marR="50800" marT="25400" marB="25400" anchor="ctr">
-                    <a:lnL w="3810" cap="flat" cmpd="sng" algn="ctr">
-                      <a:solidFill>
-                        <a:srgbClr val="CBD5E0"/>
-                      </a:solidFill>
-                      <a:prstDash val="solid"/>
-                      <a:round/>
-                      <a:headEnd type="none" w="med" len="med"/>
-                      <a:tailEnd type="none" w="med" len="med"/>
-                    </a:lnL>
-                    <a:lnR w="3810" cap="flat" cmpd="sng" algn="ctr">
-                      <a:solidFill>
-                        <a:srgbClr val="CBD5E0"/>
-                      </a:solidFill>
-                      <a:prstDash val="solid"/>
-                      <a:round/>
-                      <a:headEnd type="none" w="med" len="med"/>
-                      <a:tailEnd type="none" w="med" len="med"/>
-                    </a:lnR>
-                    <a:lnT w="3810" cap="flat" cmpd="sng" algn="ctr">
-                      <a:solidFill>
-                        <a:srgbClr val="CBD5E0"/>
-                      </a:solidFill>
-                      <a:prstDash val="solid"/>
-                      <a:round/>
-                      <a:headEnd type="none" w="med" len="med"/>
-                      <a:tailEnd type="none" w="med" len="med"/>
-                    </a:lnT>
-                    <a:lnB w="3810" cap="flat" cmpd="sng" algn="ctr">
-                      <a:solidFill>
-                        <a:srgbClr val="CBD5E0"/>
-                      </a:solidFill>
-                      <a:prstDash val="solid"/>
-                      <a:round/>
-                      <a:headEnd type="none" w="med" len="med"/>
-                      <a:tailEnd type="none" w="med" len="med"/>
-                    </a:lnB>
-                    <a:solidFill>
-                      <a:srgbClr val="F7FAFC"/>
-                    </a:solidFill>
-                  </a:tcPr>
-                </a:tc>
-                <a:tc>
-                  <a:txBody>
-                    <a:bodyPr/>
-                    <a:lstStyle/>
-                    <a:p>
-                      <a:pPr indent="0" marL="0">
-                        <a:buNone/>
-                      </a:pPr>
-                      <a:r>
-                        <a:rPr lang="en-US" sz="900" dirty="0">
-                          <a:solidFill>
-                            <a:srgbClr val="10161F"/>
-                          </a:solidFill>
-                          <a:latin typeface="Pretendard" pitchFamily="34" charset="0"/>
-                          <a:ea typeface="Pretendard" pitchFamily="34" charset="-122"/>
-                          <a:cs typeface="Pretendard" pitchFamily="34" charset="-120"/>
-                        </a:rPr>
-                        <a:t>1,650만</a:t>
-                      </a:r>
-                      <a:endParaRPr lang="en-US" sz="900" dirty="0">
-                        <a:latin typeface="Pretendard" charset="0"/>
-                        <a:ea typeface="Pretendard" charset="0"/>
-                        <a:cs typeface="Pretendard" charset="0"/>
-                      </a:endParaRPr>
-                    </a:p>
-                  </a:txBody>
-                  <a:tcPr marL="50800" marR="50800" marT="25400" marB="25400" anchor="ctr">
-                    <a:lnL w="3810" cap="flat" cmpd="sng" algn="ctr">
-                      <a:solidFill>
-                        <a:srgbClr val="CBD5E0"/>
-                      </a:solidFill>
-                      <a:prstDash val="solid"/>
-                      <a:round/>
-                      <a:headEnd type="none" w="med" len="med"/>
-                      <a:tailEnd type="none" w="med" len="med"/>
-                    </a:lnL>
-                    <a:lnR w="3810" cap="flat" cmpd="sng" algn="ctr">
-                      <a:solidFill>
-                        <a:srgbClr val="CBD5E0"/>
-                      </a:solidFill>
-                      <a:prstDash val="solid"/>
-                      <a:round/>
-                      <a:headEnd type="none" w="med" len="med"/>
-                      <a:tailEnd type="none" w="med" len="med"/>
-                    </a:lnR>
-                    <a:lnT w="3810" cap="flat" cmpd="sng" algn="ctr">
-                      <a:solidFill>
-                        <a:srgbClr val="CBD5E0"/>
-                      </a:solidFill>
-                      <a:prstDash val="solid"/>
-                      <a:round/>
-                      <a:headEnd type="none" w="med" len="med"/>
-                      <a:tailEnd type="none" w="med" len="med"/>
-                    </a:lnT>
-                    <a:lnB w="3810" cap="flat" cmpd="sng" algn="ctr">
-                      <a:solidFill>
-                        <a:srgbClr val="CBD5E0"/>
-                      </a:solidFill>
-                      <a:prstDash val="solid"/>
-                      <a:round/>
-                      <a:headEnd type="none" w="med" len="med"/>
-                      <a:tailEnd type="none" w="med" len="med"/>
-                    </a:lnB>
-                    <a:solidFill>
-                      <a:srgbClr val="F7FAFC"/>
-                    </a:solidFill>
-                  </a:tcPr>
-                </a:tc>
-                <a:tc>
-                  <a:txBody>
-                    <a:bodyPr/>
-                    <a:lstStyle/>
-                    <a:p>
-                      <a:pPr indent="0" marL="0">
-                        <a:buNone/>
-                      </a:pPr>
-                      <a:endParaRPr lang="en-US" sz="900" dirty="0">
-                        <a:latin typeface="Pretendard" charset="0"/>
-                        <a:ea typeface="Pretendard" charset="0"/>
-                        <a:cs typeface="Pretendard" charset="0"/>
-                      </a:endParaRPr>
-                    </a:p>
-                  </a:txBody>
-                  <a:tcPr marL="50800" marR="50800" marT="25400" marB="25400" anchor="ctr">
-                    <a:lnL w="3810" cap="flat" cmpd="sng" algn="ctr">
-                      <a:solidFill>
-                        <a:srgbClr val="CBD5E0"/>
-                      </a:solidFill>
-                      <a:prstDash val="solid"/>
-                      <a:round/>
-                      <a:headEnd type="none" w="med" len="med"/>
-                      <a:tailEnd type="none" w="med" len="med"/>
-                    </a:lnL>
-                    <a:lnR w="3810" cap="flat" cmpd="sng" algn="ctr">
-                      <a:solidFill>
-                        <a:srgbClr val="CBD5E0"/>
-                      </a:solidFill>
-                      <a:prstDash val="solid"/>
-                      <a:round/>
-                      <a:headEnd type="none" w="med" len="med"/>
-                      <a:tailEnd type="none" w="med" len="med"/>
-                    </a:lnR>
-                    <a:lnT w="3810" cap="flat" cmpd="sng" algn="ctr">
-                      <a:solidFill>
-                        <a:srgbClr val="CBD5E0"/>
-                      </a:solidFill>
-                      <a:prstDash val="solid"/>
-                      <a:round/>
-                      <a:headEnd type="none" w="med" len="med"/>
-                      <a:tailEnd type="none" w="med" len="med"/>
-                    </a:lnT>
-                    <a:lnB w="3810" cap="flat" cmpd="sng" algn="ctr">
-                      <a:solidFill>
-                        <a:srgbClr val="CBD5E0"/>
-                      </a:solidFill>
-                      <a:prstDash val="solid"/>
-                      <a:round/>
-                      <a:headEnd type="none" w="med" len="med"/>
-                      <a:tailEnd type="none" w="med" len="med"/>
-                    </a:lnB>
-                    <a:solidFill>
-                      <a:srgbClr val="F7FAFC"/>
-                    </a:solidFill>
-                  </a:tcPr>
-                </a:tc>
-                <a:tc>
-                  <a:txBody>
-                    <a:bodyPr/>
-                    <a:lstStyle/>
-                    <a:p>
-                      <a:pPr indent="0" marL="0">
-                        <a:buNone/>
-                      </a:pPr>
-                      <a:r>
-                        <a:rPr lang="en-US" sz="900" dirty="0">
-                          <a:solidFill>
-                            <a:srgbClr val="10161F"/>
-                          </a:solidFill>
-                          <a:latin typeface="Pretendard" pitchFamily="34" charset="0"/>
-                          <a:ea typeface="Pretendard" pitchFamily="34" charset="-122"/>
-                          <a:cs typeface="Pretendard" pitchFamily="34" charset="-120"/>
-                        </a:rPr>
-                        <a:t>미정</a:t>
-                      </a:r>
-                      <a:endParaRPr lang="en-US" sz="900" dirty="0">
-                        <a:latin typeface="Pretendard" charset="0"/>
-                        <a:ea typeface="Pretendard" charset="0"/>
-                        <a:cs typeface="Pretendard" charset="0"/>
-                      </a:endParaRPr>
-                    </a:p>
-                  </a:txBody>
-                  <a:tcPr marL="50800" marR="50800" marT="25400" marB="25400" anchor="ctr">
-                    <a:lnL w="3810" cap="flat" cmpd="sng" algn="ctr">
-                      <a:solidFill>
-                        <a:srgbClr val="CBD5E0"/>
-                      </a:solidFill>
-                      <a:prstDash val="solid"/>
-                      <a:round/>
-                      <a:headEnd type="none" w="med" len="med"/>
-                      <a:tailEnd type="none" w="med" len="med"/>
-                    </a:lnL>
-                    <a:lnR w="3810" cap="flat" cmpd="sng" algn="ctr">
-                      <a:solidFill>
-                        <a:srgbClr val="CBD5E0"/>
-                      </a:solidFill>
-                      <a:prstDash val="solid"/>
-                      <a:round/>
-                      <a:headEnd type="none" w="med" len="med"/>
-                      <a:tailEnd type="none" w="med" len="med"/>
-                    </a:lnR>
-                    <a:lnT w="3810" cap="flat" cmpd="sng" algn="ctr">
-                      <a:solidFill>
-                        <a:srgbClr val="CBD5E0"/>
-                      </a:solidFill>
-                      <a:prstDash val="solid"/>
-                      <a:round/>
-                      <a:headEnd type="none" w="med" len="med"/>
-                      <a:tailEnd type="none" w="med" len="med"/>
-                    </a:lnT>
-                    <a:lnB w="3810" cap="flat" cmpd="sng" algn="ctr">
-                      <a:solidFill>
-                        <a:srgbClr val="CBD5E0"/>
-                      </a:solidFill>
-                      <a:prstDash val="solid"/>
-                      <a:round/>
-                      <a:headEnd type="none" w="med" len="med"/>
-                      <a:tailEnd type="none" w="med" len="med"/>
-                    </a:lnB>
-                    <a:solidFill>
-                      <a:srgbClr val="F7FAFC"/>
-                    </a:solidFill>
-                  </a:tcPr>
-                </a:tc>
-              </a:tr>
-              <a:tr h="347472">
-                <a:tc>
-                  <a:txBody>
-                    <a:bodyPr/>
-                    <a:lstStyle/>
-                    <a:p>
-                      <a:pPr indent="0" marL="0">
-                        <a:buNone/>
-                      </a:pPr>
-                      <a:r>
-                        <a:rPr lang="en-US" sz="900" b="1" dirty="0">
-                          <a:solidFill>
-                            <a:srgbClr val="10161F"/>
-                          </a:solidFill>
-                          <a:latin typeface="Pretendard" pitchFamily="34" charset="0"/>
-                          <a:ea typeface="Pretendard" pitchFamily="34" charset="-122"/>
-                          <a:cs typeface="Pretendard" pitchFamily="34" charset="-120"/>
-                        </a:rPr>
-                        <a:t>3F~4F</a:t>
-                      </a:r>
-                      <a:endParaRPr lang="en-US" sz="900" dirty="0">
-                        <a:latin typeface="Pretendard" charset="0"/>
-                        <a:ea typeface="Pretendard" charset="0"/>
-                        <a:cs typeface="Pretendard" charset="0"/>
-                      </a:endParaRPr>
-                    </a:p>
-                  </a:txBody>
-                  <a:tcPr marL="50800" marR="50800" marT="25400" marB="25400" anchor="ctr">
-                    <a:lnL w="3810" cap="flat" cmpd="sng" algn="ctr">
-                      <a:solidFill>
-                        <a:srgbClr val="CBD5E0"/>
-                      </a:solidFill>
-                      <a:prstDash val="solid"/>
-                      <a:round/>
-                      <a:headEnd type="none" w="med" len="med"/>
-                      <a:tailEnd type="none" w="med" len="med"/>
-                    </a:lnL>
-                    <a:lnR w="3810" cap="flat" cmpd="sng" algn="ctr">
-                      <a:solidFill>
-                        <a:srgbClr val="CBD5E0"/>
-                      </a:solidFill>
-                      <a:prstDash val="solid"/>
-                      <a:round/>
-                      <a:headEnd type="none" w="med" len="med"/>
-                      <a:tailEnd type="none" w="med" len="med"/>
-                    </a:lnR>
-                    <a:lnT w="3810" cap="flat" cmpd="sng" algn="ctr">
-                      <a:solidFill>
-                        <a:srgbClr val="CBD5E0"/>
-                      </a:solidFill>
-                      <a:prstDash val="solid"/>
-                      <a:round/>
-                      <a:headEnd type="none" w="med" len="med"/>
-                      <a:tailEnd type="none" w="med" len="med"/>
-                    </a:lnT>
-                    <a:lnB w="3810" cap="flat" cmpd="sng" algn="ctr">
-                      <a:solidFill>
-                        <a:srgbClr val="CBD5E0"/>
-                      </a:solidFill>
-                      <a:prstDash val="solid"/>
-                      <a:round/>
-                      <a:headEnd type="none" w="med" len="med"/>
-                      <a:tailEnd type="none" w="med" len="med"/>
-                    </a:lnB>
-                    <a:solidFill>
-                      <a:srgbClr val="FFFFFF"/>
-                    </a:solidFill>
-                  </a:tcPr>
-                </a:tc>
-                <a:tc>
-                  <a:txBody>
-                    <a:bodyPr/>
-                    <a:lstStyle/>
-                    <a:p>
-                      <a:pPr indent="0" marL="0">
-                        <a:buNone/>
-                      </a:pPr>
-                      <a:r>
-                        <a:rPr lang="en-US" sz="900" dirty="0">
-                          <a:solidFill>
-                            <a:srgbClr val="10161F"/>
-                          </a:solidFill>
-                          <a:latin typeface="Pretendard" pitchFamily="34" charset="0"/>
-                          <a:ea typeface="Pretendard" pitchFamily="34" charset="-122"/>
-                          <a:cs typeface="Pretendard" pitchFamily="34" charset="-120"/>
-                        </a:rPr>
-                        <a:t>디자인 </a:t>
-                      </a:r>
-                      <a:pPr indent="0" marL="0">
-                        <a:buNone/>
-                      </a:pPr>
-                      <a:r>
-                        <a:rPr lang="en-US" sz="900" dirty="0">
-                          <a:solidFill>
-                            <a:srgbClr val="10161F"/>
-                          </a:solidFill>
-                          <a:latin typeface="Pretendard" pitchFamily="34" charset="0"/>
-                          <a:ea typeface="Pretendard" pitchFamily="34" charset="-122"/>
-                          <a:cs typeface="Pretendard" pitchFamily="34" charset="-120"/>
-                        </a:rPr>
-                        <a:t>스튜디오</a:t>
-                      </a:r>
-                      <a:endParaRPr lang="en-US" sz="900" dirty="0">
-                        <a:latin typeface="Pretendard" charset="0"/>
-                        <a:ea typeface="Pretendard" charset="0"/>
-                        <a:cs typeface="Pretendard" charset="0"/>
-                      </a:endParaRPr>
-                    </a:p>
-                  </a:txBody>
-                  <a:tcPr marL="50800" marR="50800" marT="25400" marB="25400" anchor="ctr">
-                    <a:lnL w="3810" cap="flat" cmpd="sng" algn="ctr">
-                      <a:solidFill>
-                        <a:srgbClr val="CBD5E0"/>
-                      </a:solidFill>
-                      <a:prstDash val="solid"/>
-                      <a:round/>
-                      <a:headEnd type="none" w="med" len="med"/>
-                      <a:tailEnd type="none" w="med" len="med"/>
-                    </a:lnL>
-                    <a:lnR w="3810" cap="flat" cmpd="sng" algn="ctr">
-                      <a:solidFill>
-                        <a:srgbClr val="CBD5E0"/>
-                      </a:solidFill>
-                      <a:prstDash val="solid"/>
-                      <a:round/>
-                      <a:headEnd type="none" w="med" len="med"/>
-                      <a:tailEnd type="none" w="med" len="med"/>
-                    </a:lnR>
-                    <a:lnT w="3810" cap="flat" cmpd="sng" algn="ctr">
-                      <a:solidFill>
-                        <a:srgbClr val="CBD5E0"/>
-                      </a:solidFill>
-                      <a:prstDash val="solid"/>
-                      <a:round/>
-                      <a:headEnd type="none" w="med" len="med"/>
-                      <a:tailEnd type="none" w="med" len="med"/>
-                    </a:lnT>
-                    <a:lnB w="3810" cap="flat" cmpd="sng" algn="ctr">
-                      <a:solidFill>
-                        <a:srgbClr val="CBD5E0"/>
-                      </a:solidFill>
-                      <a:prstDash val="solid"/>
-                      <a:round/>
-                      <a:headEnd type="none" w="med" len="med"/>
-                      <a:tailEnd type="none" w="med" len="med"/>
-                    </a:lnB>
-                    <a:solidFill>
-                      <a:srgbClr val="FFFFFF"/>
-                    </a:solidFill>
-                  </a:tcPr>
-                </a:tc>
-                <a:tc>
-                  <a:txBody>
-                    <a:bodyPr/>
-                    <a:lstStyle/>
-                    <a:p>
-                      <a:pPr indent="0" marL="0">
-                        <a:buNone/>
-                      </a:pPr>
-                      <a:r>
-                        <a:rPr lang="en-US" sz="900" dirty="0">
-                          <a:solidFill>
-                            <a:srgbClr val="10161F"/>
-                          </a:solidFill>
-                          <a:latin typeface="Pretendard" pitchFamily="34" charset="0"/>
-                          <a:ea typeface="Pretendard" pitchFamily="34" charset="-122"/>
-                          <a:cs typeface="Pretendard" pitchFamily="34" charset="-120"/>
-                        </a:rPr>
-                        <a:t>63평(약 </a:t>
-                      </a:r>
-                      <a:pPr indent="0" marL="0">
-                        <a:buNone/>
-                      </a:pPr>
-                      <a:r>
-                        <a:rPr lang="en-US" sz="900" dirty="0">
-                          <a:solidFill>
-                            <a:srgbClr val="10161F"/>
-                          </a:solidFill>
-                          <a:latin typeface="Pretendard" pitchFamily="34" charset="0"/>
-                          <a:ea typeface="Pretendard" pitchFamily="34" charset="-122"/>
-                          <a:cs typeface="Pretendard" pitchFamily="34" charset="-120"/>
-                        </a:rPr>
-                        <a:t>208.3㎡)</a:t>
-                      </a:r>
-                      <a:endParaRPr lang="en-US" sz="900" dirty="0">
-                        <a:latin typeface="Pretendard" charset="0"/>
-                        <a:ea typeface="Pretendard" charset="0"/>
-                        <a:cs typeface="Pretendard" charset="0"/>
-                      </a:endParaRPr>
-                    </a:p>
-                  </a:txBody>
-                  <a:tcPr marL="50800" marR="50800" marT="25400" marB="25400" anchor="ctr">
-                    <a:lnL w="3810" cap="flat" cmpd="sng" algn="ctr">
-                      <a:solidFill>
-                        <a:srgbClr val="CBD5E0"/>
-                      </a:solidFill>
-                      <a:prstDash val="solid"/>
-                      <a:round/>
-                      <a:headEnd type="none" w="med" len="med"/>
-                      <a:tailEnd type="none" w="med" len="med"/>
-                    </a:lnL>
-                    <a:lnR w="3810" cap="flat" cmpd="sng" algn="ctr">
-                      <a:solidFill>
-                        <a:srgbClr val="CBD5E0"/>
-                      </a:solidFill>
-                      <a:prstDash val="solid"/>
-                      <a:round/>
-                      <a:headEnd type="none" w="med" len="med"/>
-                      <a:tailEnd type="none" w="med" len="med"/>
-                    </a:lnR>
-                    <a:lnT w="3810" cap="flat" cmpd="sng" algn="ctr">
-                      <a:solidFill>
-                        <a:srgbClr val="CBD5E0"/>
-                      </a:solidFill>
-                      <a:prstDash val="solid"/>
-                      <a:round/>
-                      <a:headEnd type="none" w="med" len="med"/>
-                      <a:tailEnd type="none" w="med" len="med"/>
-                    </a:lnT>
-                    <a:lnB w="3810" cap="flat" cmpd="sng" algn="ctr">
-                      <a:solidFill>
-                        <a:srgbClr val="CBD5E0"/>
-                      </a:solidFill>
-                      <a:prstDash val="solid"/>
-                      <a:round/>
-                      <a:headEnd type="none" w="med" len="med"/>
-                      <a:tailEnd type="none" w="med" len="med"/>
-                    </a:lnB>
-                    <a:solidFill>
-                      <a:srgbClr val="FFFFFF"/>
-                    </a:solidFill>
-                  </a:tcPr>
-                </a:tc>
-                <a:tc>
-                  <a:txBody>
-                    <a:bodyPr/>
-                    <a:lstStyle/>
-                    <a:p>
-                      <a:pPr indent="0" marL="0">
-                        <a:buNone/>
-                      </a:pPr>
-                      <a:r>
-                        <a:rPr lang="en-US" sz="900" dirty="0">
-                          <a:solidFill>
-                            <a:srgbClr val="10161F"/>
-                          </a:solidFill>
-                          <a:latin typeface="Pretendard" pitchFamily="34" charset="0"/>
-                          <a:ea typeface="Pretendard" pitchFamily="34" charset="-122"/>
-                          <a:cs typeface="Pretendard" pitchFamily="34" charset="-120"/>
-                        </a:rPr>
-                        <a:t>10,000만</a:t>
-                      </a:r>
-                      <a:endParaRPr lang="en-US" sz="900" dirty="0">
-                        <a:latin typeface="Pretendard" charset="0"/>
-                        <a:ea typeface="Pretendard" charset="0"/>
-                        <a:cs typeface="Pretendard" charset="0"/>
-                      </a:endParaRPr>
-                    </a:p>
-                  </a:txBody>
-                  <a:tcPr marL="50800" marR="50800" marT="25400" marB="25400" anchor="ctr">
-                    <a:lnL w="3810" cap="flat" cmpd="sng" algn="ctr">
-                      <a:solidFill>
-                        <a:srgbClr val="CBD5E0"/>
-                      </a:solidFill>
-                      <a:prstDash val="solid"/>
-                      <a:round/>
-                      <a:headEnd type="none" w="med" len="med"/>
-                      <a:tailEnd type="none" w="med" len="med"/>
-                    </a:lnL>
-                    <a:lnR w="3810" cap="flat" cmpd="sng" algn="ctr">
-                      <a:solidFill>
-                        <a:srgbClr val="CBD5E0"/>
-                      </a:solidFill>
-                      <a:prstDash val="solid"/>
-                      <a:round/>
-                      <a:headEnd type="none" w="med" len="med"/>
-                      <a:tailEnd type="none" w="med" len="med"/>
-                    </a:lnR>
-                    <a:lnT w="3810" cap="flat" cmpd="sng" algn="ctr">
-                      <a:solidFill>
-                        <a:srgbClr val="CBD5E0"/>
-                      </a:solidFill>
-                      <a:prstDash val="solid"/>
-                      <a:round/>
-                      <a:headEnd type="none" w="med" len="med"/>
-                      <a:tailEnd type="none" w="med" len="med"/>
-                    </a:lnT>
-                    <a:lnB w="3810" cap="flat" cmpd="sng" algn="ctr">
-                      <a:solidFill>
-                        <a:srgbClr val="CBD5E0"/>
-                      </a:solidFill>
-                      <a:prstDash val="solid"/>
-                      <a:round/>
-                      <a:headEnd type="none" w="med" len="med"/>
-                      <a:tailEnd type="none" w="med" len="med"/>
-                    </a:lnB>
-                    <a:solidFill>
-                      <a:srgbClr val="FFFFFF"/>
-                    </a:solidFill>
-                  </a:tcPr>
-                </a:tc>
-                <a:tc>
-                  <a:txBody>
-                    <a:bodyPr/>
-                    <a:lstStyle/>
-                    <a:p>
-                      <a:pPr indent="0" marL="0">
-                        <a:buNone/>
-                      </a:pPr>
-                      <a:r>
-                        <a:rPr lang="en-US" sz="900" dirty="0">
-                          <a:solidFill>
-                            <a:srgbClr val="10161F"/>
-                          </a:solidFill>
-                          <a:latin typeface="Pretendard" pitchFamily="34" charset="0"/>
-                          <a:ea typeface="Pretendard" pitchFamily="34" charset="-122"/>
-                          <a:cs typeface="Pretendard" pitchFamily="34" charset="-120"/>
-                        </a:rPr>
-                        <a:t>700만</a:t>
-                      </a:r>
-                      <a:endParaRPr lang="en-US" sz="900" dirty="0">
-                        <a:latin typeface="Pretendard" charset="0"/>
-                        <a:ea typeface="Pretendard" charset="0"/>
-                        <a:cs typeface="Pretendard" charset="0"/>
-                      </a:endParaRPr>
-                    </a:p>
-                  </a:txBody>
-                  <a:tcPr marL="50800" marR="50800" marT="25400" marB="25400" anchor="ctr">
-                    <a:lnL w="3810" cap="flat" cmpd="sng" algn="ctr">
-                      <a:solidFill>
-                        <a:srgbClr val="CBD5E0"/>
-                      </a:solidFill>
-                      <a:prstDash val="solid"/>
-                      <a:round/>
-                      <a:headEnd type="none" w="med" len="med"/>
-                      <a:tailEnd type="none" w="med" len="med"/>
-                    </a:lnL>
-                    <a:lnR w="3810" cap="flat" cmpd="sng" algn="ctr">
-                      <a:solidFill>
-                        <a:srgbClr val="CBD5E0"/>
-                      </a:solidFill>
-                      <a:prstDash val="solid"/>
-                      <a:round/>
-                      <a:headEnd type="none" w="med" len="med"/>
-                      <a:tailEnd type="none" w="med" len="med"/>
-                    </a:lnR>
-                    <a:lnT w="3810" cap="flat" cmpd="sng" algn="ctr">
-                      <a:solidFill>
-                        <a:srgbClr val="CBD5E0"/>
-                      </a:solidFill>
-                      <a:prstDash val="solid"/>
-                      <a:round/>
-                      <a:headEnd type="none" w="med" len="med"/>
-                      <a:tailEnd type="none" w="med" len="med"/>
-                    </a:lnT>
-                    <a:lnB w="3810" cap="flat" cmpd="sng" algn="ctr">
-                      <a:solidFill>
-                        <a:srgbClr val="CBD5E0"/>
-                      </a:solidFill>
-                      <a:prstDash val="solid"/>
-                      <a:round/>
-                      <a:headEnd type="none" w="med" len="med"/>
-                      <a:tailEnd type="none" w="med" len="med"/>
-                    </a:lnB>
-                    <a:solidFill>
-                      <a:srgbClr val="FFFFFF"/>
-                    </a:solidFill>
-                  </a:tcPr>
-                </a:tc>
-                <a:tc>
-                  <a:txBody>
-                    <a:bodyPr/>
-                    <a:lstStyle/>
-                    <a:p>
-                      <a:pPr indent="0" marL="0">
-                        <a:buNone/>
-                      </a:pPr>
-                      <a:endParaRPr lang="en-US" sz="900" dirty="0">
-                        <a:latin typeface="Pretendard" charset="0"/>
-                        <a:ea typeface="Pretendard" charset="0"/>
-                        <a:cs typeface="Pretendard" charset="0"/>
-                      </a:endParaRPr>
-                    </a:p>
-                  </a:txBody>
-                  <a:tcPr marL="50800" marR="50800" marT="25400" marB="25400" anchor="ctr">
-                    <a:lnL w="3810" cap="flat" cmpd="sng" algn="ctr">
-                      <a:solidFill>
-                        <a:srgbClr val="CBD5E0"/>
-                      </a:solidFill>
-                      <a:prstDash val="solid"/>
-                      <a:round/>
-                      <a:headEnd type="none" w="med" len="med"/>
-                      <a:tailEnd type="none" w="med" len="med"/>
-                    </a:lnL>
-                    <a:lnR w="3810" cap="flat" cmpd="sng" algn="ctr">
-                      <a:solidFill>
-                        <a:srgbClr val="CBD5E0"/>
-                      </a:solidFill>
-                      <a:prstDash val="solid"/>
-                      <a:round/>
-                      <a:headEnd type="none" w="med" len="med"/>
-                      <a:tailEnd type="none" w="med" len="med"/>
-                    </a:lnR>
-                    <a:lnT w="3810" cap="flat" cmpd="sng" algn="ctr">
-                      <a:solidFill>
-                        <a:srgbClr val="CBD5E0"/>
-                      </a:solidFill>
-                      <a:prstDash val="solid"/>
-                      <a:round/>
-                      <a:headEnd type="none" w="med" len="med"/>
-                      <a:tailEnd type="none" w="med" len="med"/>
-                    </a:lnT>
-                    <a:lnB w="3810" cap="flat" cmpd="sng" algn="ctr">
-                      <a:solidFill>
-                        <a:srgbClr val="CBD5E0"/>
-                      </a:solidFill>
-                      <a:prstDash val="solid"/>
-                      <a:round/>
-                      <a:headEnd type="none" w="med" len="med"/>
-                      <a:tailEnd type="none" w="med" len="med"/>
-                    </a:lnB>
-                    <a:solidFill>
-                      <a:srgbClr val="FFFFFF"/>
-                    </a:solidFill>
-                  </a:tcPr>
-                </a:tc>
-                <a:tc>
-                  <a:txBody>
-                    <a:bodyPr/>
-                    <a:lstStyle/>
-                    <a:p>
-                      <a:pPr indent="0" marL="0">
-                        <a:buNone/>
-                      </a:pPr>
-                      <a:r>
-                        <a:rPr lang="en-US" sz="900" dirty="0">
-                          <a:solidFill>
-                            <a:srgbClr val="10161F"/>
-                          </a:solidFill>
-                          <a:latin typeface="Pretendard" pitchFamily="34" charset="0"/>
-                          <a:ea typeface="Pretendard" pitchFamily="34" charset="-122"/>
-                          <a:cs typeface="Pretendard" pitchFamily="34" charset="-120"/>
-                        </a:rPr>
-                        <a:t>미정</a:t>
-                      </a:r>
-                      <a:endParaRPr lang="en-US" sz="900" dirty="0">
-                        <a:latin typeface="Pretendard" charset="0"/>
-                        <a:ea typeface="Pretendard" charset="0"/>
-                        <a:cs typeface="Pretendard" charset="0"/>
-                      </a:endParaRPr>
-                    </a:p>
-                  </a:txBody>
-                  <a:tcPr marL="50800" marR="50800" marT="25400" marB="25400" anchor="ctr">
-                    <a:lnL w="3810" cap="flat" cmpd="sng" algn="ctr">
-                      <a:solidFill>
-                        <a:srgbClr val="CBD5E0"/>
-                      </a:solidFill>
-                      <a:prstDash val="solid"/>
-                      <a:round/>
-                      <a:headEnd type="none" w="med" len="med"/>
-                      <a:tailEnd type="none" w="med" len="med"/>
-                    </a:lnL>
-                    <a:lnR w="3810" cap="flat" cmpd="sng" algn="ctr">
-                      <a:solidFill>
-                        <a:srgbClr val="CBD5E0"/>
-                      </a:solidFill>
-                      <a:prstDash val="solid"/>
-                      <a:round/>
-                      <a:headEnd type="none" w="med" len="med"/>
-                      <a:tailEnd type="none" w="med" len="med"/>
-                    </a:lnR>
-                    <a:lnT w="3810" cap="flat" cmpd="sng" algn="ctr">
-                      <a:solidFill>
-                        <a:srgbClr val="CBD5E0"/>
-                      </a:solidFill>
-                      <a:prstDash val="solid"/>
-                      <a:round/>
-                      <a:headEnd type="none" w="med" len="med"/>
-                      <a:tailEnd type="none" w="med" len="med"/>
-                    </a:lnT>
-                    <a:lnB w="3810" cap="flat" cmpd="sng" algn="ctr">
-                      <a:solidFill>
-                        <a:srgbClr val="CBD5E0"/>
-                      </a:solidFill>
-                      <a:prstDash val="solid"/>
-                      <a:round/>
-                      <a:headEnd type="none" w="med" len="med"/>
-                      <a:tailEnd type="none" w="med" len="med"/>
-                    </a:lnB>
-                    <a:solidFill>
-                      <a:srgbClr val="FFFFFF"/>
                     </a:solidFill>
                   </a:tcPr>
                 </a:tc>
@@ -12223,7 +11091,7 @@
                 <a:ea typeface="Pretendard" pitchFamily="34" charset="-122"/>
                 <a:cs typeface="Pretendard" pitchFamily="34" charset="-120"/>
               </a:rPr>
-              <a:t>아래 수치는 AI 추정값으로 참고용이며, 투자 결정의 근거로 사용할 수 없습니다. ### [참고] 핵심 현금흐름 3줄 요약 (내 돈 &amp; 월 순수익) ### 층별 임대 현황</a:t>
+              <a:t>{"ok":true,"mocked":true,"extractedFields":{"area_signal":"역삼","asset_type":"오피스빌딩","price_band":"300억","size_signal":"3000평(약 9917.4㎡)"},"extractedFacts":{"region":"역삼","exactAddressCandidate":"역삼동 742-1","assetType":"오피스빌딩","priceText":"300억","sizeText":"3000평(약 9917.4㎡)","currentUse":"오피스","currentUseSignal":"근린생활시설","leaseSignal":"임대중","vacancySignal":"공실없음","tenantNames":["쿠팡","네이버"],"unitRentTexts":["301호: 1500만"],"sellerMotivationText":"자산 효율화","brokerNotes":["초역세권 매물"]},"detectedSensitiveFields":["exact_address","tenant_name"],"ambiguousFields":[],"warnings":[],"areaSignal":"역삼","assetType":"오피스빌딩","priceBand":"300억","sizeSignal":"3000평(약 9917.4㎡)","dealType":"매각","buildingName":"역삼 센트럴타워","exactAddress":"역삼동 742-1","totalFloorArea":9917.3,"buildYear":2015,"currentUseSignal":"근린생활시설","vacancySignal":"공실 없음","fitSummary":"초역세권 근생 빌딩으로 시행/사옥 매입에 최적화","cautionSummary":"주요 임차인 만기 조율 필요","hiddenFields":["exact_address","seller_motivation"],"confidence":{"areaSignal":"confirmed","assetType":"confirmed","priceBand":"ai_hypothesis","fitSummary":"ai_hypothesis"},"missingData":["sizeSignal"],"boundaryNote":"본 자료는 실거래 통계 기반 참고치입니다.","buyerType":"법인 사옥형","budgetRange":{"min":50,"max":80,"display":"50억~80억"},"preferredRegions":["강남","성수"],"assetTypes":["꼬마빌딩","사옥용"],"purchasePurpose":"사옥용 매입","mustHave":["초역세권","주차"],"niceToHave":["테라스","루프탑"],"riskTolerance":"medium","financingNote":"자본금 50% 준비","missingQuestions":["구체적인 입주 시기가 언제인가요?","선호하는 수익률이 있나요?"],"privacyNotes":["연락처 비공개"],"fitReasons":["매수자 예산(50-80억)에 부합하는 매물입니다.","요청하신 성수/강남 권역에 해당합니다."],"cautionReasons":["요청한 용도와 달리 명도 협의가 다소 필요합니다."],"recommendedNextAction":"현장 답사 제안","kakaoMessage":"안녕하세요! 요청하신 조건에 부합하는 추천 매물이 있어 안내해 드립니다. 확인해보시고 피드백 부탁드립니다.","title":"강남 역삼역 초역세권 오피스 사옥용 빌딩 매각","shortSummary":"역삼역 도보 5분 거리의 준신축급 대형 오피스빌딩입니다.","dealPoints":["초역세권","사옥 최적"],"cautionPoints":["명도 조율 필요"],"hiddenInfoNotice":["보증금 및 지번은 인가 후 확인 가능"],"gateMessage":"G1 등급 등록이 필요합니다.","kakaoText":"강남 역삼역 오피스 빌딩 매각 안내입니다.","exactUnitCandidate":"101호","floor":"1층","areaSqmText":"150㎡","spaceType":"office","depositText":"5000만","monthlyRentText":"400만","maintenanceFeeText":"50만","availableFromText":"즉시입주","leaseTermMonthsText":"24","incentivesText":"렌트프리 2개월","restrictions":[],"landlordIdentity":"김성수","currentTenant":"스타트업","vacancyReason":"이전 확장","rentNegotiation":"협의 가능","region":"성수동","areaSqm":150,"deposit":5000,"monthlyRent":400,"maintenanceFee":50,"availableFrom":"즉시입주","leaseTermMonths":24,"incentives":{"rentFreeMonths":2,"interiorSupport":"일부 인테리어 지원","freeRentDetail":"렌트프리 2개월 지원"},"shortSummaryLease":"성수역 도보 5분 거리 1층 리테일 상가 매물입니다."} ### 층별 임대 현황</a:t>
             </a:r>
             <a:endParaRPr lang="en-US" sz="930" dirty="0"/>
           </a:p>
@@ -12485,11 +11353,11 @@
         <p:spPr>
           <a:xfrm>
             <a:off x="566928" y="1417320"/>
-            <a:ext cx="3515258" cy="3657600"/>
+            <a:ext cx="11057839" cy="3657600"/>
           </a:xfrm>
           <a:prstGeom prst="roundRect">
             <a:avLst>
-              <a:gd name="adj" fmla="val 1561"/>
+              <a:gd name="adj" fmla="val 1500"/>
             </a:avLst>
           </a:prstGeom>
           <a:solidFill>
@@ -12512,7 +11380,7 @@
         <p:spPr>
           <a:xfrm>
             <a:off x="566928" y="1417320"/>
-            <a:ext cx="3515258" cy="45720"/>
+            <a:ext cx="11057839" cy="45720"/>
           </a:xfrm>
           <a:prstGeom prst="rect">
             <a:avLst/>
@@ -12532,7 +11400,7 @@
         <p:spPr>
           <a:xfrm>
             <a:off x="795528" y="1618488"/>
-            <a:ext cx="3058058" cy="292608"/>
+            <a:ext cx="10600639" cy="292608"/>
           </a:xfrm>
           <a:prstGeom prst="rect">
             <a:avLst/>
@@ -12556,7 +11424,7 @@
                 <a:ea typeface="Pretendard" pitchFamily="34" charset="-122"/>
                 <a:cs typeface="Pretendard" pitchFamily="34" charset="-120"/>
               </a:rPr>
-              <a:t>건물 물리적 상태</a:t>
+              <a:t>용도 리스크</a:t>
             </a:r>
             <a:endParaRPr lang="en-US" sz="1350" dirty="0"/>
           </a:p>
@@ -12571,7 +11439,7 @@
         <p:spPr>
           <a:xfrm>
             <a:off x="795528" y="1947672"/>
-            <a:ext cx="3058058" cy="365760"/>
+            <a:ext cx="10600639" cy="365760"/>
           </a:xfrm>
           <a:prstGeom prst="rect">
             <a:avLst/>
@@ -12597,7 +11465,7 @@
                 <a:ea typeface="Pretendard" pitchFamily="34" charset="-122"/>
                 <a:cs typeface="Pretendard" pitchFamily="34" charset="-120"/>
               </a:rPr>
-              <a:t>준공연도 확인 필요, 구조 확인 필요</a:t>
+              <a:t>—</a:t>
             </a:r>
             <a:endParaRPr lang="en-US" sz="1250" dirty="0"/>
           </a:p>
@@ -12612,7 +11480,7 @@
         <p:spPr>
           <a:xfrm>
             <a:off x="795528" y="2377440"/>
-            <a:ext cx="3058058" cy="2606040"/>
+            <a:ext cx="10600639" cy="2606040"/>
           </a:xfrm>
           <a:prstGeom prst="rect">
             <a:avLst/>
@@ -12642,58 +11510,10 @@
                 <a:ea typeface="Pretendard" pitchFamily="34" charset="-122"/>
                 <a:cs typeface="Pretendard" pitchFamily="34" charset="-120"/>
               </a:rPr>
-              <a:t>누수</a:t>
+              <a:t>{"ok":true,"mocked":true,"extractedFields":{"area_signal":"역삼","asset_type":"오피스빌딩","price_band":"300억","size_signal":"3000평(약 9917.4㎡)"},"extractedFacts":{"region":"역삼","exactAddressCandidate":"역삼동 7</a:t>
             </a:r>
             <a:endParaRPr lang="en-US" sz="1100" dirty="0"/>
           </a:p>
-          <a:p>
-            <a:pPr marL="342900" indent="-342900">
-              <a:lnSpc>
-                <a:spcPct val="125000"/>
-              </a:lnSpc>
-              <a:spcBef>
-                <a:spcPts val="600"/>
-              </a:spcBef>
-              <a:buSzPct val="100000"/>
-              <a:buChar char="•"/>
-            </a:pPr>
-            <a:r>
-              <a:rPr lang="en-US" sz="1100" dirty="0">
-                <a:solidFill>
-                  <a:srgbClr val="10161F"/>
-                </a:solidFill>
-                <a:latin typeface="Pretendard" pitchFamily="34" charset="0"/>
-                <a:ea typeface="Pretendard" pitchFamily="34" charset="-122"/>
-                <a:cs typeface="Pretendard" pitchFamily="34" charset="-120"/>
-              </a:rPr>
-              <a:t>균열</a:t>
-            </a:r>
-            <a:endParaRPr lang="en-US" sz="1100" dirty="0"/>
-          </a:p>
-          <a:p>
-            <a:pPr marL="342900" indent="-342900">
-              <a:lnSpc>
-                <a:spcPct val="125000"/>
-              </a:lnSpc>
-              <a:spcBef>
-                <a:spcPts val="600"/>
-              </a:spcBef>
-              <a:buSzPct val="100000"/>
-              <a:buChar char="•"/>
-            </a:pPr>
-            <a:r>
-              <a:rPr lang="en-US" sz="1100" dirty="0">
-                <a:solidFill>
-                  <a:srgbClr val="10161F"/>
-                </a:solidFill>
-                <a:latin typeface="Pretendard" pitchFamily="34" charset="0"/>
-                <a:ea typeface="Pretendard" pitchFamily="34" charset="-122"/>
-                <a:cs typeface="Pretendard" pitchFamily="34" charset="-120"/>
-              </a:rPr>
-              <a:t>설비 노후 여부 현장 점검 필요</a:t>
-            </a:r>
-            <a:endParaRPr lang="en-US" sz="1100" dirty="0"/>
-          </a:p>
         </p:txBody>
       </p:sp>
       <p:sp>
@@ -12704,12 +11524,12 @@
         </p:nvSpPr>
         <p:spPr>
           <a:xfrm>
-            <a:off x="4338218" y="1417320"/>
-            <a:ext cx="3515258" cy="3657600"/>
+            <a:off x="566928" y="5193792"/>
+            <a:ext cx="11057839" cy="621792"/>
           </a:xfrm>
           <a:prstGeom prst="roundRect">
             <a:avLst>
-              <a:gd name="adj" fmla="val 1561"/>
+              <a:gd name="adj" fmla="val 8824"/>
             </a:avLst>
           </a:prstGeom>
           <a:solidFill>
@@ -12725,34 +11545,14 @@
       </p:sp>
       <p:sp>
         <p:nvSpPr>
-          <p:cNvPr id="12" name="Shape 10"/>
-          <p:cNvSpPr/>
-          <p:nvPr/>
-        </p:nvSpPr>
-        <p:spPr>
-          <a:xfrm>
-            <a:off x="4338218" y="1417320"/>
-            <a:ext cx="3515258" cy="45720"/>
-          </a:xfrm>
-          <a:prstGeom prst="rect">
-            <a:avLst/>
-          </a:prstGeom>
-          <a:solidFill>
-            <a:srgbClr val="B98A2E"/>
-          </a:solidFill>
-          <a:ln/>
-        </p:spPr>
-      </p:sp>
-      <p:sp>
-        <p:nvSpPr>
-          <p:cNvPr id="13" name="Text 11"/>
-          <p:cNvSpPr/>
-          <p:nvPr/>
-        </p:nvSpPr>
-        <p:spPr>
-          <a:xfrm>
-            <a:off x="4566818" y="1618488"/>
-            <a:ext cx="3058058" cy="292608"/>
+          <p:cNvPr id="12" name="Text 10"/>
+          <p:cNvSpPr/>
+          <p:nvPr/>
+        </p:nvSpPr>
+        <p:spPr>
+          <a:xfrm>
+            <a:off x="795528" y="5193792"/>
+            <a:ext cx="10600639" cy="621792"/>
           </a:xfrm>
           <a:prstGeom prst="rect">
             <a:avLst/>
@@ -12768,377 +11568,53 @@
               <a:buNone/>
             </a:pPr>
             <a:r>
-              <a:rPr lang="en-US" sz="1350" b="1" dirty="0">
-                <a:solidFill>
-                  <a:srgbClr val="977024"/>
+              <a:rPr lang="en-US" sz="1100" dirty="0">
+                <a:solidFill>
+                  <a:srgbClr val="10161F"/>
                 </a:solidFill>
                 <a:latin typeface="Pretendard" pitchFamily="34" charset="0"/>
                 <a:ea typeface="Pretendard" pitchFamily="34" charset="-122"/>
                 <a:cs typeface="Pretendard" pitchFamily="34" charset="-120"/>
               </a:rPr>
-              <a:t>승강기 및 설비</a:t>
-            </a:r>
-            <a:endParaRPr lang="en-US" sz="1350" dirty="0"/>
-          </a:p>
-        </p:txBody>
-      </p:sp>
-      <p:sp>
-        <p:nvSpPr>
-          <p:cNvPr id="14" name="Text 12"/>
-          <p:cNvSpPr/>
-          <p:nvPr/>
-        </p:nvSpPr>
-        <p:spPr>
-          <a:xfrm>
-            <a:off x="4566818" y="1947672"/>
-            <a:ext cx="3058058" cy="365760"/>
-          </a:xfrm>
-          <a:prstGeom prst="rect">
-            <a:avLst/>
-          </a:prstGeom>
-          <a:noFill/>
-          <a:ln/>
-        </p:spPr>
-        <p:txBody>
-          <a:bodyPr wrap="square" lIns="0" tIns="0" rIns="0" bIns="0" rtlCol="0" anchor="ctr">
-            <a:normAutofit/>
-          </a:bodyPr>
+              <a:t>※ 본 리스크 체크는 공부 및 브로커 확인 기반이며, 매수 전 전문 실사팀(변호사/건축사)을 통한 정밀 실사가 필요합니다.</a:t>
+            </a:r>
+            <a:endParaRPr lang="en-US" sz="1100" dirty="0"/>
+          </a:p>
+        </p:txBody>
+      </p:sp>
+      <p:sp>
+        <p:nvSpPr>
+          <p:cNvPr id="13" name="Text 11"/>
+          <p:cNvSpPr/>
+          <p:nvPr/>
+        </p:nvSpPr>
+        <p:spPr>
+          <a:xfrm>
+            <a:off x="566928" y="6382512"/>
+            <a:ext cx="7315200" cy="219456"/>
+          </a:xfrm>
+          <a:prstGeom prst="rect">
+            <a:avLst/>
+          </a:prstGeom>
+          <a:noFill/>
+          <a:ln/>
+        </p:spPr>
+        <p:txBody>
+          <a:bodyPr wrap="square" lIns="0" tIns="0" rIns="0" bIns="0" rtlCol="0" anchor="ctr"/>
           <a:lstStyle/>
           <a:p>
             <a:pPr indent="0" marL="0">
               <a:buNone/>
             </a:pPr>
             <a:r>
-              <a:rPr lang="en-US" sz="1250" b="1" dirty="0">
-                <a:solidFill>
-                  <a:srgbClr val="10161F"/>
+              <a:rPr lang="en-US" sz="800" dirty="0">
+                <a:solidFill>
+                  <a:srgbClr val="718096"/>
                 </a:solidFill>
                 <a:latin typeface="Pretendard" pitchFamily="34" charset="0"/>
                 <a:ea typeface="Pretendard" pitchFamily="34" charset="-122"/>
                 <a:cs typeface="Pretendard" pitchFamily="34" charset="-120"/>
               </a:rPr>
-              <a:t>승강기 정보 확인 필요</a:t>
-            </a:r>
-            <a:endParaRPr lang="en-US" sz="1250" dirty="0"/>
-          </a:p>
-        </p:txBody>
-      </p:sp>
-      <p:sp>
-        <p:nvSpPr>
-          <p:cNvPr id="15" name="Text 13"/>
-          <p:cNvSpPr/>
-          <p:nvPr/>
-        </p:nvSpPr>
-        <p:spPr>
-          <a:xfrm>
-            <a:off x="4566818" y="2377440"/>
-            <a:ext cx="3058058" cy="2606040"/>
-          </a:xfrm>
-          <a:prstGeom prst="rect">
-            <a:avLst/>
-          </a:prstGeom>
-          <a:noFill/>
-          <a:ln/>
-        </p:spPr>
-        <p:txBody>
-          <a:bodyPr wrap="square" lIns="0" tIns="0" rIns="0" bIns="0" rtlCol="0" anchor="t">
-            <a:normAutofit/>
-          </a:bodyPr>
-          <a:lstStyle/>
-          <a:p>
-            <a:pPr marL="342900" indent="-342900">
-              <a:lnSpc>
-                <a:spcPct val="125000"/>
-              </a:lnSpc>
-              <a:buSzPct val="100000"/>
-              <a:buChar char="•"/>
-            </a:pPr>
-            <a:r>
-              <a:rPr lang="en-US" sz="1100" dirty="0">
-                <a:solidFill>
-                  <a:srgbClr val="10161F"/>
-                </a:solidFill>
-                <a:latin typeface="Pretendard" pitchFamily="34" charset="0"/>
-                <a:ea typeface="Pretendard" pitchFamily="34" charset="-122"/>
-                <a:cs typeface="Pretendard" pitchFamily="34" charset="-120"/>
-              </a:rPr>
-              <a:t>정기검사 이력, 냉난방 설비 상태 확인 필요</a:t>
-            </a:r>
-            <a:endParaRPr lang="en-US" sz="1100" dirty="0"/>
-          </a:p>
-        </p:txBody>
-      </p:sp>
-      <p:sp>
-        <p:nvSpPr>
-          <p:cNvPr id="16" name="Shape 14"/>
-          <p:cNvSpPr/>
-          <p:nvPr/>
-        </p:nvSpPr>
-        <p:spPr>
-          <a:xfrm>
-            <a:off x="8109509" y="1417320"/>
-            <a:ext cx="3515258" cy="3657600"/>
-          </a:xfrm>
-          <a:prstGeom prst="roundRect">
-            <a:avLst>
-              <a:gd name="adj" fmla="val 1561"/>
-            </a:avLst>
-          </a:prstGeom>
-          <a:solidFill>
-            <a:srgbClr val="F7FAFC"/>
-          </a:solidFill>
-          <a:ln w="6350">
-            <a:solidFill>
-              <a:srgbClr val="CBD5E0"/>
-            </a:solidFill>
-            <a:prstDash val="solid"/>
-          </a:ln>
-        </p:spPr>
-      </p:sp>
-      <p:sp>
-        <p:nvSpPr>
-          <p:cNvPr id="17" name="Shape 15"/>
-          <p:cNvSpPr/>
-          <p:nvPr/>
-        </p:nvSpPr>
-        <p:spPr>
-          <a:xfrm>
-            <a:off x="8109509" y="1417320"/>
-            <a:ext cx="3515258" cy="45720"/>
-          </a:xfrm>
-          <a:prstGeom prst="rect">
-            <a:avLst/>
-          </a:prstGeom>
-          <a:solidFill>
-            <a:srgbClr val="B98A2E"/>
-          </a:solidFill>
-          <a:ln/>
-        </p:spPr>
-      </p:sp>
-      <p:sp>
-        <p:nvSpPr>
-          <p:cNvPr id="18" name="Text 16"/>
-          <p:cNvSpPr/>
-          <p:nvPr/>
-        </p:nvSpPr>
-        <p:spPr>
-          <a:xfrm>
-            <a:off x="8338109" y="1618488"/>
-            <a:ext cx="3058058" cy="292608"/>
-          </a:xfrm>
-          <a:prstGeom prst="rect">
-            <a:avLst/>
-          </a:prstGeom>
-          <a:noFill/>
-          <a:ln/>
-        </p:spPr>
-        <p:txBody>
-          <a:bodyPr wrap="square" lIns="0" tIns="0" rIns="0" bIns="0" rtlCol="0" anchor="ctr"/>
-          <a:lstStyle/>
-          <a:p>
-            <a:pPr indent="0" marL="0">
-              <a:buNone/>
-            </a:pPr>
-            <a:r>
-              <a:rPr lang="en-US" sz="1350" b="1" dirty="0">
-                <a:solidFill>
-                  <a:srgbClr val="977024"/>
-                </a:solidFill>
-                <a:latin typeface="Pretendard" pitchFamily="34" charset="0"/>
-                <a:ea typeface="Pretendard" pitchFamily="34" charset="-122"/>
-                <a:cs typeface="Pretendard" pitchFamily="34" charset="-120"/>
-              </a:rPr>
-              <a:t>임차인 이탈 위험</a:t>
-            </a:r>
-            <a:endParaRPr lang="en-US" sz="1350" dirty="0"/>
-          </a:p>
-        </p:txBody>
-      </p:sp>
-      <p:sp>
-        <p:nvSpPr>
-          <p:cNvPr id="19" name="Text 17"/>
-          <p:cNvSpPr/>
-          <p:nvPr/>
-        </p:nvSpPr>
-        <p:spPr>
-          <a:xfrm>
-            <a:off x="8338109" y="1947672"/>
-            <a:ext cx="3058058" cy="365760"/>
-          </a:xfrm>
-          <a:prstGeom prst="rect">
-            <a:avLst/>
-          </a:prstGeom>
-          <a:noFill/>
-          <a:ln/>
-        </p:spPr>
-        <p:txBody>
-          <a:bodyPr wrap="square" lIns="0" tIns="0" rIns="0" bIns="0" rtlCol="0" anchor="ctr">
-            <a:normAutofit/>
-          </a:bodyPr>
-          <a:lstStyle/>
-          <a:p>
-            <a:pPr indent="0" marL="0">
-              <a:buNone/>
-            </a:pPr>
-            <a:r>
-              <a:rPr lang="en-US" sz="1250" b="1" dirty="0">
-                <a:solidFill>
-                  <a:srgbClr val="10161F"/>
-                </a:solidFill>
-                <a:latin typeface="Pretendard" pitchFamily="34" charset="0"/>
-                <a:ea typeface="Pretendard" pitchFamily="34" charset="-122"/>
-                <a:cs typeface="Pretendard" pitchFamily="34" charset="-120"/>
-              </a:rPr>
-              <a:t>임대차 계약 현황 LOI 접수 후 열람</a:t>
-            </a:r>
-            <a:endParaRPr lang="en-US" sz="1250" dirty="0"/>
-          </a:p>
-        </p:txBody>
-      </p:sp>
-      <p:sp>
-        <p:nvSpPr>
-          <p:cNvPr id="20" name="Text 18"/>
-          <p:cNvSpPr/>
-          <p:nvPr/>
-        </p:nvSpPr>
-        <p:spPr>
-          <a:xfrm>
-            <a:off x="8338109" y="2377440"/>
-            <a:ext cx="3058058" cy="2606040"/>
-          </a:xfrm>
-          <a:prstGeom prst="rect">
-            <a:avLst/>
-          </a:prstGeom>
-          <a:noFill/>
-          <a:ln/>
-        </p:spPr>
-        <p:txBody>
-          <a:bodyPr wrap="square" lIns="0" tIns="0" rIns="0" bIns="0" rtlCol="0" anchor="t">
-            <a:normAutofit/>
-          </a:bodyPr>
-          <a:lstStyle/>
-          <a:p>
-            <a:pPr marL="342900" indent="-342900">
-              <a:lnSpc>
-                <a:spcPct val="125000"/>
-              </a:lnSpc>
-              <a:buSzPct val="100000"/>
-              <a:buChar char="•"/>
-            </a:pPr>
-            <a:r>
-              <a:rPr lang="en-US" sz="1100" dirty="0">
-                <a:solidFill>
-                  <a:srgbClr val="10161F"/>
-                </a:solidFill>
-                <a:latin typeface="Pretendard" pitchFamily="34" charset="0"/>
-                <a:ea typeface="Pretendard" pitchFamily="34" charset="-122"/>
-                <a:cs typeface="Pretendard" pitchFamily="34" charset="-120"/>
-              </a:rPr>
-              <a:t>잔여 계약기간(WALE), 임차인 신용도 확인 필요</a:t>
-            </a:r>
-            <a:endParaRPr lang="en-US" sz="1100" dirty="0"/>
-          </a:p>
-        </p:txBody>
-      </p:sp>
-      <p:sp>
-        <p:nvSpPr>
-          <p:cNvPr id="21" name="Shape 19"/>
-          <p:cNvSpPr/>
-          <p:nvPr/>
-        </p:nvSpPr>
-        <p:spPr>
-          <a:xfrm>
-            <a:off x="566928" y="5193792"/>
-            <a:ext cx="11057839" cy="621792"/>
-          </a:xfrm>
-          <a:prstGeom prst="roundRect">
-            <a:avLst>
-              <a:gd name="adj" fmla="val 8824"/>
-            </a:avLst>
-          </a:prstGeom>
-          <a:solidFill>
-            <a:srgbClr val="F7FAFC"/>
-          </a:solidFill>
-          <a:ln w="6350">
-            <a:solidFill>
-              <a:srgbClr val="CBD5E0"/>
-            </a:solidFill>
-            <a:prstDash val="solid"/>
-          </a:ln>
-        </p:spPr>
-      </p:sp>
-      <p:sp>
-        <p:nvSpPr>
-          <p:cNvPr id="22" name="Text 20"/>
-          <p:cNvSpPr/>
-          <p:nvPr/>
-        </p:nvSpPr>
-        <p:spPr>
-          <a:xfrm>
-            <a:off x="795528" y="5193792"/>
-            <a:ext cx="10600639" cy="621792"/>
-          </a:xfrm>
-          <a:prstGeom prst="rect">
-            <a:avLst/>
-          </a:prstGeom>
-          <a:noFill/>
-          <a:ln/>
-        </p:spPr>
-        <p:txBody>
-          <a:bodyPr wrap="square" lIns="0" tIns="0" rIns="0" bIns="0" rtlCol="0" anchor="ctr"/>
-          <a:lstStyle/>
-          <a:p>
-            <a:pPr indent="0" marL="0">
-              <a:buNone/>
-            </a:pPr>
-            <a:r>
-              <a:rPr lang="en-US" sz="1100" dirty="0">
-                <a:solidFill>
-                  <a:srgbClr val="10161F"/>
-                </a:solidFill>
-                <a:latin typeface="Pretendard" pitchFamily="34" charset="0"/>
-                <a:ea typeface="Pretendard" pitchFamily="34" charset="-122"/>
-                <a:cs typeface="Pretendard" pitchFamily="34" charset="-120"/>
-              </a:rPr>
-              <a:t>※ 본 리스크 체크는 공부 및 브로커 확인 기반이며, 매수 전 전문 실사팀(변호사/건축사)을 통한 정밀 실사가 필요합니다.</a:t>
-            </a:r>
-            <a:endParaRPr lang="en-US" sz="1100" dirty="0"/>
-          </a:p>
-        </p:txBody>
-      </p:sp>
-      <p:sp>
-        <p:nvSpPr>
-          <p:cNvPr id="23" name="Text 21"/>
-          <p:cNvSpPr/>
-          <p:nvPr/>
-        </p:nvSpPr>
-        <p:spPr>
-          <a:xfrm>
-            <a:off x="566928" y="6382512"/>
-            <a:ext cx="7315200" cy="219456"/>
-          </a:xfrm>
-          <a:prstGeom prst="rect">
-            <a:avLst/>
-          </a:prstGeom>
-          <a:noFill/>
-          <a:ln/>
-        </p:spPr>
-        <p:txBody>
-          <a:bodyPr wrap="square" lIns="0" tIns="0" rIns="0" bIns="0" rtlCol="0" anchor="ctr"/>
-          <a:lstStyle/>
-          <a:p>
-            <a:pPr indent="0" marL="0">
-              <a:buNone/>
-            </a:pPr>
-            <a:r>
-              <a:rPr lang="en-US" sz="800" dirty="0">
-                <a:solidFill>
-                  <a:srgbClr val="718096"/>
-                </a:solidFill>
-                <a:latin typeface="Pretendard" pitchFamily="34" charset="0"/>
-                <a:ea typeface="Pretendard" pitchFamily="34" charset="-122"/>
-                <a:cs typeface="Pretendard" pitchFamily="34" charset="-120"/>
-              </a:rPr>
               <a:t>크리딜   |   </a:t>
             </a:r>
             <a:endParaRPr lang="en-US" sz="800" dirty="0"/>
@@ -13147,7 +11623,7 @@
       </p:sp>
       <p:sp>
         <p:nvSpPr>
-          <p:cNvPr id="24" name="Text 22"/>
+          <p:cNvPr id="14" name="Text 12"/>
           <p:cNvSpPr/>
           <p:nvPr/>
         </p:nvSpPr>
@@ -13195,6 +11671,302 @@
 <file path=ppt/slides/slide8.xml><?xml version="1.0" encoding="utf-8"?>
 <p:sld xmlns:a="http://schemas.openxmlformats.org/drawingml/2006/main" xmlns:r="http://schemas.openxmlformats.org/officeDocument/2006/relationships" xmlns:p="http://schemas.openxmlformats.org/presentationml/2006/main">
   <p:cSld name="Slide 8">
+    <p:spTree>
+      <p:nvGrpSpPr>
+        <p:cNvPr id="1" name=""/>
+        <p:cNvGrpSpPr/>
+        <p:nvPr/>
+      </p:nvGrpSpPr>
+      <p:grpSpPr>
+        <a:xfrm>
+          <a:off x="0" y="0"/>
+          <a:ext cx="0" cy="0"/>
+          <a:chOff x="0" y="0"/>
+          <a:chExt cx="0" cy="0"/>
+        </a:xfrm>
+      </p:grpSpPr>
+      <p:sp>
+        <p:nvSpPr>
+          <p:cNvPr id="2" name="Shape 0"/>
+          <p:cNvSpPr/>
+          <p:nvPr/>
+        </p:nvSpPr>
+        <p:spPr>
+          <a:xfrm>
+            <a:off x="566928" y="457200"/>
+            <a:ext cx="384048" cy="384048"/>
+          </a:xfrm>
+          <a:prstGeom prst="ellipse">
+            <a:avLst/>
+          </a:prstGeom>
+          <a:solidFill>
+            <a:srgbClr val="B98A2E"/>
+          </a:solidFill>
+          <a:ln/>
+        </p:spPr>
+      </p:sp>
+      <p:sp>
+        <p:nvSpPr>
+          <p:cNvPr id="3" name="Text 1"/>
+          <p:cNvSpPr/>
+          <p:nvPr/>
+        </p:nvSpPr>
+        <p:spPr>
+          <a:xfrm>
+            <a:off x="566928" y="457200"/>
+            <a:ext cx="384048" cy="384048"/>
+          </a:xfrm>
+          <a:prstGeom prst="rect">
+            <a:avLst/>
+          </a:prstGeom>
+          <a:noFill/>
+          <a:ln/>
+        </p:spPr>
+        <p:txBody>
+          <a:bodyPr wrap="square" lIns="0" tIns="0" rIns="0" bIns="0" rtlCol="0" anchor="ctr"/>
+          <a:lstStyle/>
+          <a:p>
+            <a:pPr algn="ctr" indent="0" marL="0">
+              <a:buNone/>
+            </a:pPr>
+            <a:r>
+              <a:rPr lang="en-US" sz="1300" b="1" dirty="0">
+                <a:solidFill>
+                  <a:srgbClr val="FFFFFF"/>
+                </a:solidFill>
+                <a:latin typeface="Arial" pitchFamily="34" charset="0"/>
+                <a:ea typeface="Arial" pitchFamily="34" charset="-122"/>
+                <a:cs typeface="Arial" pitchFamily="34" charset="-120"/>
+              </a:rPr>
+              <a:t>08</a:t>
+            </a:r>
+            <a:endParaRPr lang="en-US" sz="1300" dirty="0"/>
+          </a:p>
+        </p:txBody>
+      </p:sp>
+      <p:sp>
+        <p:nvSpPr>
+          <p:cNvPr id="4" name="Text 2"/>
+          <p:cNvSpPr/>
+          <p:nvPr/>
+        </p:nvSpPr>
+        <p:spPr>
+          <a:xfrm>
+            <a:off x="1133856" y="457200"/>
+            <a:ext cx="10490911" cy="182880"/>
+          </a:xfrm>
+          <a:prstGeom prst="rect">
+            <a:avLst/>
+          </a:prstGeom>
+          <a:noFill/>
+          <a:ln/>
+        </p:spPr>
+        <p:txBody>
+          <a:bodyPr wrap="square" lIns="0" tIns="0" rIns="0" bIns="0" rtlCol="0" anchor="ctr"/>
+          <a:lstStyle/>
+          <a:p>
+            <a:pPr indent="0" marL="0">
+              <a:buNone/>
+            </a:pPr>
+            <a:r>
+              <a:rPr lang="en-US" sz="950" b="1" spc="200" kern="0" dirty="0">
+                <a:solidFill>
+                  <a:srgbClr val="B98A2E"/>
+                </a:solidFill>
+                <a:latin typeface="Arial" pitchFamily="34" charset="0"/>
+                <a:ea typeface="Arial" pitchFamily="34" charset="-122"/>
+                <a:cs typeface="Arial" pitchFamily="34" charset="-120"/>
+              </a:rPr>
+              <a:t>Checklist</a:t>
+            </a:r>
+            <a:endParaRPr lang="en-US" sz="950" dirty="0"/>
+          </a:p>
+        </p:txBody>
+      </p:sp>
+      <p:sp>
+        <p:nvSpPr>
+          <p:cNvPr id="5" name="Text 3"/>
+          <p:cNvSpPr/>
+          <p:nvPr/>
+        </p:nvSpPr>
+        <p:spPr>
+          <a:xfrm>
+            <a:off x="1133856" y="640080"/>
+            <a:ext cx="10490911" cy="365760"/>
+          </a:xfrm>
+          <a:prstGeom prst="rect">
+            <a:avLst/>
+          </a:prstGeom>
+          <a:noFill/>
+          <a:ln/>
+        </p:spPr>
+        <p:txBody>
+          <a:bodyPr wrap="square" lIns="0" tIns="0" rIns="0" bIns="0" rtlCol="0" anchor="ctr"/>
+          <a:lstStyle/>
+          <a:p>
+            <a:pPr indent="0" marL="0">
+              <a:buNone/>
+            </a:pPr>
+            <a:r>
+              <a:rPr lang="en-US" sz="2300" b="1" dirty="0">
+                <a:solidFill>
+                  <a:srgbClr val="10161F"/>
+                </a:solidFill>
+                <a:latin typeface="Pretendard" pitchFamily="34" charset="0"/>
+                <a:ea typeface="Pretendard" pitchFamily="34" charset="-122"/>
+                <a:cs typeface="Pretendard" pitchFamily="34" charset="-120"/>
+              </a:rPr>
+              <a:t>섹션 상세</a:t>
+            </a:r>
+            <a:endParaRPr lang="en-US" sz="2300" dirty="0"/>
+          </a:p>
+        </p:txBody>
+      </p:sp>
+      <p:sp>
+        <p:nvSpPr>
+          <p:cNvPr id="6" name="Text 4"/>
+          <p:cNvSpPr/>
+          <p:nvPr/>
+        </p:nvSpPr>
+        <p:spPr>
+          <a:xfrm>
+            <a:off x="566928" y="1517904"/>
+            <a:ext cx="6492240" cy="274320"/>
+          </a:xfrm>
+          <a:prstGeom prst="rect">
+            <a:avLst/>
+          </a:prstGeom>
+          <a:noFill/>
+          <a:ln/>
+        </p:spPr>
+        <p:txBody>
+          <a:bodyPr wrap="square" rtlCol="0" anchor="ctr"/>
+          <a:lstStyle/>
+          <a:p>
+            <a:pPr indent="0" marL="0">
+              <a:buNone/>
+            </a:pPr>
+            <a:endParaRPr lang="en-US" sz="1400" dirty="0"/>
+          </a:p>
+        </p:txBody>
+      </p:sp>
+      <p:sp>
+        <p:nvSpPr>
+          <p:cNvPr id="7" name="Text 5"/>
+          <p:cNvSpPr/>
+          <p:nvPr/>
+        </p:nvSpPr>
+        <p:spPr>
+          <a:xfrm>
+            <a:off x="566928" y="1874520"/>
+            <a:ext cx="6492240" cy="182880"/>
+          </a:xfrm>
+          <a:prstGeom prst="rect">
+            <a:avLst/>
+          </a:prstGeom>
+          <a:noFill/>
+          <a:ln/>
+        </p:spPr>
+        <p:txBody>
+          <a:bodyPr wrap="square" rtlCol="0" anchor="ctr"/>
+          <a:lstStyle/>
+          <a:p>
+            <a:pPr indent="0" marL="0">
+              <a:buNone/>
+            </a:pPr>
+            <a:endParaRPr lang="en-US" sz="900" dirty="0"/>
+          </a:p>
+        </p:txBody>
+      </p:sp>
+      <p:sp>
+        <p:nvSpPr>
+          <p:cNvPr id="8" name="Text 6"/>
+          <p:cNvSpPr/>
+          <p:nvPr/>
+        </p:nvSpPr>
+        <p:spPr>
+          <a:xfrm>
+            <a:off x="566928" y="6382512"/>
+            <a:ext cx="7315200" cy="219456"/>
+          </a:xfrm>
+          <a:prstGeom prst="rect">
+            <a:avLst/>
+          </a:prstGeom>
+          <a:noFill/>
+          <a:ln/>
+        </p:spPr>
+        <p:txBody>
+          <a:bodyPr wrap="square" lIns="0" tIns="0" rIns="0" bIns="0" rtlCol="0" anchor="ctr"/>
+          <a:lstStyle/>
+          <a:p>
+            <a:pPr indent="0" marL="0">
+              <a:buNone/>
+            </a:pPr>
+            <a:r>
+              <a:rPr lang="en-US" sz="800" dirty="0">
+                <a:solidFill>
+                  <a:srgbClr val="718096"/>
+                </a:solidFill>
+                <a:latin typeface="Pretendard" pitchFamily="34" charset="0"/>
+                <a:ea typeface="Pretendard" pitchFamily="34" charset="-122"/>
+                <a:cs typeface="Pretendard" pitchFamily="34" charset="-120"/>
+              </a:rPr>
+              <a:t>크리딜   |   </a:t>
+            </a:r>
+            <a:endParaRPr lang="en-US" sz="800" dirty="0"/>
+          </a:p>
+        </p:txBody>
+      </p:sp>
+      <p:sp>
+        <p:nvSpPr>
+          <p:cNvPr id="9" name="Text 7"/>
+          <p:cNvSpPr/>
+          <p:nvPr/>
+        </p:nvSpPr>
+        <p:spPr>
+          <a:xfrm>
+            <a:off x="10710367" y="6382512"/>
+            <a:ext cx="914400" cy="219456"/>
+          </a:xfrm>
+          <a:prstGeom prst="rect">
+            <a:avLst/>
+          </a:prstGeom>
+          <a:noFill/>
+          <a:ln/>
+        </p:spPr>
+        <p:txBody>
+          <a:bodyPr wrap="square" lIns="0" tIns="0" rIns="0" bIns="0" rtlCol="0" anchor="ctr"/>
+          <a:lstStyle/>
+          <a:p>
+            <a:pPr algn="r" indent="0" marL="0">
+              <a:buNone/>
+            </a:pPr>
+            <a:r>
+              <a:rPr lang="en-US" sz="900" b="1" dirty="0">
+                <a:solidFill>
+                  <a:srgbClr val="B98A2E"/>
+                </a:solidFill>
+                <a:latin typeface="Arial" pitchFamily="34" charset="0"/>
+                <a:ea typeface="Arial" pitchFamily="34" charset="-122"/>
+                <a:cs typeface="Arial" pitchFamily="34" charset="-120"/>
+              </a:rPr>
+              <a:t>8</a:t>
+            </a:r>
+            <a:endParaRPr lang="en-US" sz="900" dirty="0"/>
+          </a:p>
+        </p:txBody>
+      </p:sp>
+    </p:spTree>
+  </p:cSld>
+  <p:clrMapOvr>
+    <a:masterClrMapping/>
+  </p:clrMapOvr>
+</p:sld>
+</file>
+
+<file path=ppt/slides/slide9.xml><?xml version="1.0" encoding="utf-8"?>
+<p:sld xmlns:a="http://schemas.openxmlformats.org/drawingml/2006/main" xmlns:r="http://schemas.openxmlformats.org/officeDocument/2006/relationships" xmlns:p="http://schemas.openxmlformats.org/presentationml/2006/main">
+  <p:cSld name="Slide 9">
     <p:bg>
       <p:bgPr>
         <a:solidFill>
@@ -13269,7 +12041,7 @@
                 <a:ea typeface="Arial" pitchFamily="34" charset="-122"/>
                 <a:cs typeface="Arial" pitchFamily="34" charset="-120"/>
               </a:rPr>
-              <a:t>08</a:t>
+              <a:t>09</a:t>
             </a:r>
             <a:endParaRPr lang="en-US" sz="1300" dirty="0"/>
           </a:p>
@@ -13779,7 +12551,7 @@
       </p:sp>
       <p:graphicFrame>
         <p:nvGraphicFramePr>
-          <p:cNvPr id="9" name="Table 0"/>
+          <p:cNvPr id="10" name="Table 0"/>
           <p:cNvGraphicFramePr>
             <a:graphicFrameLocks noGrp="1"/>
           </p:cNvGraphicFramePr>
@@ -14936,434 +13708,6 @@
       <p:sp>
         <p:nvSpPr>
           <p:cNvPr id="25" name="Text 22"/>
-          <p:cNvSpPr/>
-          <p:nvPr/>
-        </p:nvSpPr>
-        <p:spPr>
-          <a:xfrm>
-            <a:off x="10710367" y="6382512"/>
-            <a:ext cx="914400" cy="219456"/>
-          </a:xfrm>
-          <a:prstGeom prst="rect">
-            <a:avLst/>
-          </a:prstGeom>
-          <a:noFill/>
-          <a:ln/>
-        </p:spPr>
-        <p:txBody>
-          <a:bodyPr wrap="square" lIns="0" tIns="0" rIns="0" bIns="0" rtlCol="0" anchor="ctr"/>
-          <a:lstStyle/>
-          <a:p>
-            <a:pPr algn="r" indent="0" marL="0">
-              <a:buNone/>
-            </a:pPr>
-            <a:r>
-              <a:rPr lang="en-US" sz="900" b="1" dirty="0">
-                <a:solidFill>
-                  <a:srgbClr val="B98A2E"/>
-                </a:solidFill>
-                <a:latin typeface="Arial" pitchFamily="34" charset="0"/>
-                <a:ea typeface="Arial" pitchFamily="34" charset="-122"/>
-                <a:cs typeface="Arial" pitchFamily="34" charset="-120"/>
-              </a:rPr>
-              <a:t>8</a:t>
-            </a:r>
-            <a:endParaRPr lang="en-US" sz="900" dirty="0"/>
-          </a:p>
-        </p:txBody>
-      </p:sp>
-    </p:spTree>
-  </p:cSld>
-  <p:clrMapOvr>
-    <a:masterClrMapping/>
-  </p:clrMapOvr>
-</p:sld>
-</file>
-
-<file path=ppt/slides/slide9.xml><?xml version="1.0" encoding="utf-8"?>
-<p:sld xmlns:a="http://schemas.openxmlformats.org/drawingml/2006/main" xmlns:r="http://schemas.openxmlformats.org/officeDocument/2006/relationships" xmlns:p="http://schemas.openxmlformats.org/presentationml/2006/main">
-  <p:cSld name="Slide 9">
-    <p:bg>
-      <p:bgPr>
-        <a:solidFill>
-          <a:srgbClr val="FFFFFF"/>
-        </a:solidFill>
-      </p:bgPr>
-    </p:bg>
-    <p:spTree>
-      <p:nvGrpSpPr>
-        <p:cNvPr id="1" name=""/>
-        <p:cNvGrpSpPr/>
-        <p:nvPr/>
-      </p:nvGrpSpPr>
-      <p:grpSpPr>
-        <a:xfrm>
-          <a:off x="0" y="0"/>
-          <a:ext cx="0" cy="0"/>
-          <a:chOff x="0" y="0"/>
-          <a:chExt cx="0" cy="0"/>
-        </a:xfrm>
-      </p:grpSpPr>
-      <p:sp>
-        <p:nvSpPr>
-          <p:cNvPr id="2" name="Shape 0"/>
-          <p:cNvSpPr/>
-          <p:nvPr/>
-        </p:nvSpPr>
-        <p:spPr>
-          <a:xfrm>
-            <a:off x="566928" y="457200"/>
-            <a:ext cx="384048" cy="384048"/>
-          </a:xfrm>
-          <a:prstGeom prst="ellipse">
-            <a:avLst/>
-          </a:prstGeom>
-          <a:solidFill>
-            <a:srgbClr val="B98A2E"/>
-          </a:solidFill>
-          <a:ln/>
-        </p:spPr>
-      </p:sp>
-      <p:sp>
-        <p:nvSpPr>
-          <p:cNvPr id="3" name="Text 1"/>
-          <p:cNvSpPr/>
-          <p:nvPr/>
-        </p:nvSpPr>
-        <p:spPr>
-          <a:xfrm>
-            <a:off x="566928" y="457200"/>
-            <a:ext cx="384048" cy="384048"/>
-          </a:xfrm>
-          <a:prstGeom prst="rect">
-            <a:avLst/>
-          </a:prstGeom>
-          <a:noFill/>
-          <a:ln/>
-        </p:spPr>
-        <p:txBody>
-          <a:bodyPr wrap="square" lIns="0" tIns="0" rIns="0" bIns="0" rtlCol="0" anchor="ctr"/>
-          <a:lstStyle/>
-          <a:p>
-            <a:pPr algn="ctr" indent="0" marL="0">
-              <a:buNone/>
-            </a:pPr>
-            <a:r>
-              <a:rPr lang="en-US" sz="1300" b="1" dirty="0">
-                <a:solidFill>
-                  <a:srgbClr val="FFFFFF"/>
-                </a:solidFill>
-                <a:latin typeface="Arial" pitchFamily="34" charset="0"/>
-                <a:ea typeface="Arial" pitchFamily="34" charset="-122"/>
-                <a:cs typeface="Arial" pitchFamily="34" charset="-120"/>
-              </a:rPr>
-              <a:t>09</a:t>
-            </a:r>
-            <a:endParaRPr lang="en-US" sz="1300" dirty="0"/>
-          </a:p>
-        </p:txBody>
-      </p:sp>
-      <p:sp>
-        <p:nvSpPr>
-          <p:cNvPr id="4" name="Text 2"/>
-          <p:cNvSpPr/>
-          <p:nvPr/>
-        </p:nvSpPr>
-        <p:spPr>
-          <a:xfrm>
-            <a:off x="1133856" y="457200"/>
-            <a:ext cx="10490911" cy="182880"/>
-          </a:xfrm>
-          <a:prstGeom prst="rect">
-            <a:avLst/>
-          </a:prstGeom>
-          <a:noFill/>
-          <a:ln/>
-        </p:spPr>
-        <p:txBody>
-          <a:bodyPr wrap="square" lIns="0" tIns="0" rIns="0" bIns="0" rtlCol="0" anchor="ctr"/>
-          <a:lstStyle/>
-          <a:p>
-            <a:pPr indent="0" marL="0">
-              <a:buNone/>
-            </a:pPr>
-            <a:r>
-              <a:rPr lang="en-US" sz="950" b="1" spc="200" kern="0" dirty="0">
-                <a:solidFill>
-                  <a:srgbClr val="B98A2E"/>
-                </a:solidFill>
-                <a:latin typeface="Arial" pitchFamily="34" charset="0"/>
-                <a:ea typeface="Arial" pitchFamily="34" charset="-122"/>
-                <a:cs typeface="Arial" pitchFamily="34" charset="-120"/>
-              </a:rPr>
-              <a:t>Process</a:t>
-            </a:r>
-            <a:endParaRPr lang="en-US" sz="950" dirty="0"/>
-          </a:p>
-        </p:txBody>
-      </p:sp>
-      <p:sp>
-        <p:nvSpPr>
-          <p:cNvPr id="5" name="Text 3"/>
-          <p:cNvSpPr/>
-          <p:nvPr/>
-        </p:nvSpPr>
-        <p:spPr>
-          <a:xfrm>
-            <a:off x="1133856" y="640080"/>
-            <a:ext cx="10490911" cy="365760"/>
-          </a:xfrm>
-          <a:prstGeom prst="rect">
-            <a:avLst/>
-          </a:prstGeom>
-          <a:noFill/>
-          <a:ln/>
-        </p:spPr>
-        <p:txBody>
-          <a:bodyPr wrap="square" lIns="0" tIns="0" rIns="0" bIns="0" rtlCol="0" anchor="ctr"/>
-          <a:lstStyle/>
-          <a:p>
-            <a:pPr indent="0" marL="0">
-              <a:buNone/>
-            </a:pPr>
-            <a:r>
-              <a:rPr lang="en-US" sz="2300" b="1" dirty="0">
-                <a:solidFill>
-                  <a:srgbClr val="10161F"/>
-                </a:solidFill>
-                <a:latin typeface="Pretendard" pitchFamily="34" charset="0"/>
-                <a:ea typeface="Pretendard" pitchFamily="34" charset="-122"/>
-                <a:cs typeface="Pretendard" pitchFamily="34" charset="-120"/>
-              </a:rPr>
-              <a:t>검토 후 다음 단계는 무엇인가</a:t>
-            </a:r>
-            <a:endParaRPr lang="en-US" sz="2300" dirty="0"/>
-          </a:p>
-        </p:txBody>
-      </p:sp>
-      <p:sp>
-        <p:nvSpPr>
-          <p:cNvPr id="6" name="Shape 4"/>
-          <p:cNvSpPr/>
-          <p:nvPr/>
-        </p:nvSpPr>
-        <p:spPr>
-          <a:xfrm>
-            <a:off x="566928" y="1572768"/>
-            <a:ext cx="11057839" cy="3200400"/>
-          </a:xfrm>
-          <a:prstGeom prst="roundRect">
-            <a:avLst>
-              <a:gd name="adj" fmla="val 1714"/>
-            </a:avLst>
-          </a:prstGeom>
-          <a:solidFill>
-            <a:srgbClr val="F7FAFC"/>
-          </a:solidFill>
-          <a:ln w="6350">
-            <a:solidFill>
-              <a:srgbClr val="CBD5E0"/>
-            </a:solidFill>
-            <a:prstDash val="solid"/>
-          </a:ln>
-        </p:spPr>
-      </p:sp>
-      <p:sp>
-        <p:nvSpPr>
-          <p:cNvPr id="7" name="Shape 5"/>
-          <p:cNvSpPr/>
-          <p:nvPr/>
-        </p:nvSpPr>
-        <p:spPr>
-          <a:xfrm>
-            <a:off x="786384" y="1792224"/>
-            <a:ext cx="438912" cy="438912"/>
-          </a:xfrm>
-          <a:prstGeom prst="ellipse">
-            <a:avLst/>
-          </a:prstGeom>
-          <a:solidFill>
-            <a:srgbClr val="B98A2E"/>
-          </a:solidFill>
-          <a:ln/>
-        </p:spPr>
-      </p:sp>
-      <p:sp>
-        <p:nvSpPr>
-          <p:cNvPr id="8" name="Text 6"/>
-          <p:cNvSpPr/>
-          <p:nvPr/>
-        </p:nvSpPr>
-        <p:spPr>
-          <a:xfrm>
-            <a:off x="786384" y="1792224"/>
-            <a:ext cx="438912" cy="438912"/>
-          </a:xfrm>
-          <a:prstGeom prst="rect">
-            <a:avLst/>
-          </a:prstGeom>
-          <a:noFill/>
-          <a:ln/>
-        </p:spPr>
-        <p:txBody>
-          <a:bodyPr wrap="square" lIns="0" tIns="0" rIns="0" bIns="0" rtlCol="0" anchor="ctr"/>
-          <a:lstStyle/>
-          <a:p>
-            <a:pPr algn="ctr" indent="0" marL="0">
-              <a:buNone/>
-            </a:pPr>
-            <a:r>
-              <a:rPr lang="en-US" sz="1400" b="1" dirty="0">
-                <a:solidFill>
-                  <a:srgbClr val="FFFFFF"/>
-                </a:solidFill>
-                <a:latin typeface="Arial" pitchFamily="34" charset="0"/>
-                <a:ea typeface="Arial" pitchFamily="34" charset="-122"/>
-                <a:cs typeface="Arial" pitchFamily="34" charset="-120"/>
-              </a:rPr>
-              <a:t>01</a:t>
-            </a:r>
-            <a:endParaRPr lang="en-US" sz="1400" dirty="0"/>
-          </a:p>
-        </p:txBody>
-      </p:sp>
-      <p:sp>
-        <p:nvSpPr>
-          <p:cNvPr id="9" name="Text 7"/>
-          <p:cNvSpPr/>
-          <p:nvPr/>
-        </p:nvSpPr>
-        <p:spPr>
-          <a:xfrm>
-            <a:off x="786384" y="2304288"/>
-            <a:ext cx="10618927" cy="365760"/>
-          </a:xfrm>
-          <a:prstGeom prst="rect">
-            <a:avLst/>
-          </a:prstGeom>
-          <a:noFill/>
-          <a:ln/>
-        </p:spPr>
-        <p:txBody>
-          <a:bodyPr wrap="square" rtlCol="0" anchor="ctr"/>
-          <a:lstStyle/>
-          <a:p>
-            <a:pPr indent="0" marL="0">
-              <a:buNone/>
-            </a:pPr>
-            <a:r>
-              <a:rPr lang="en-US" sz="1600" b="1" dirty="0">
-                <a:solidFill>
-                  <a:srgbClr val="10161F"/>
-                </a:solidFill>
-                <a:latin typeface="Pretendard" pitchFamily="34" charset="0"/>
-                <a:ea typeface="Pretendard" pitchFamily="34" charset="-122"/>
-                <a:cs typeface="Pretendard" pitchFamily="34" charset="-120"/>
-              </a:rPr>
-              <a:t>1단계</a:t>
-            </a:r>
-            <a:endParaRPr lang="en-US" sz="1600" dirty="0"/>
-          </a:p>
-        </p:txBody>
-      </p:sp>
-      <p:sp>
-        <p:nvSpPr>
-          <p:cNvPr id="10" name="Text 8"/>
-          <p:cNvSpPr/>
-          <p:nvPr/>
-        </p:nvSpPr>
-        <p:spPr>
-          <a:xfrm>
-            <a:off x="786384" y="2761488"/>
-            <a:ext cx="10618927" cy="1828800"/>
-          </a:xfrm>
-          <a:prstGeom prst="rect">
-            <a:avLst/>
-          </a:prstGeom>
-          <a:noFill/>
-          <a:ln/>
-        </p:spPr>
-        <p:txBody>
-          <a:bodyPr wrap="square" rtlCol="0" anchor="t"/>
-          <a:lstStyle/>
-          <a:p>
-            <a:pPr indent="0" marL="0">
-              <a:buNone/>
-            </a:pPr>
-            <a:r>
-              <a:rPr lang="en-US" sz="1100" dirty="0">
-                <a:solidFill>
-                  <a:srgbClr val="10161F"/>
-                </a:solidFill>
-                <a:latin typeface="Pretendard" pitchFamily="34" charset="0"/>
-                <a:ea typeface="Pretendard" pitchFamily="34" charset="-122"/>
-                <a:cs typeface="Pretendard" pitchFamily="34" charset="-120"/>
-              </a:rPr>
-              <a:t>{"ok"</a:t>
-            </a:r>
-            <a:endParaRPr lang="en-US" sz="1100" dirty="0"/>
-          </a:p>
-          <a:p>
-            <a:pPr indent="0" marL="0">
-              <a:buNone/>
-            </a:pPr>
-            <a:r>
-              <a:rPr lang="en-US" sz="1100" dirty="0">
-                <a:solidFill>
-                  <a:srgbClr val="10161F"/>
-                </a:solidFill>
-                <a:latin typeface="Pretendard" pitchFamily="34" charset="0"/>
-                <a:ea typeface="Pretendard" pitchFamily="34" charset="-122"/>
-                <a:cs typeface="Pretendard" pitchFamily="34" charset="-120"/>
-              </a:rPr>
-              <a:t>true,"mocked":true,"extractedFields":{"area_signal":"역삼","asset_type":"오피스빌딩","price_band":"300억","size_signal":"3000평(약 9917.4㎡)"},"extractedFacts":{"region":"역삼","exactAddressCandidate":"역삼동 742-1","assetType":"오피스빌딩","priceText":"300억","sizeText":"3000평(약 9917.4㎡)","currentUse":"오피스","currentUseSignal":"근린생활시설","leaseSignal":"임대중","vacancySignal":"공실없음","tenantNames":["쿠팡","네이버"],"unitRentTexts":["301호: 1500만"],"sellerMotivationText":"자산 효율화","brokerNotes":["초역세권 매물"]},"detectedSensitiveFields":["exact_address","tenant_name"],"ambiguousFields":[],"warnings":[],"areaSignal":"역삼","assetType":"오피스빌딩","priceBand":"300억","sizeSignal":"3000평(약 9917.4㎡)","dealType":"매각","buildingName":"역삼 센트럴타워","exactAddress":"역삼동 742-1","totalFloorArea":9917.3,"buildYear":2015,"currentUseSignal":"근린생활시설","vacancySignal":"공실 없음","fitSummary":"초역세권 근생 빌딩으로 시행/사옥 매입에 최적화","cautionSummary":"주요 임차인 만기 조율 필요","hiddenFields":["exact_address","seller_motivation"],"confidence":{"areaSignal":"confirmed","assetType":"confirmed","priceBand":"ai_hypothesis","fitSummary":"ai_hypothesis"},"missingData":["sizeSignal"],"boundaryNote":"본 자료는 실거래 통계 기반 참고치입니다.","buyerType":"법인 사옥형","budgetRange":{"min":50,"max":80,"display":"50억~80억"},"preferredRegions":["강남","성수"],"assetTypes":["꼬마빌딩","사옥용"],"purchasePurpose":"사옥용 매입","mustHave":["초역세권","주차"],"niceToHave":["테라스","루프탑"],"riskTolerance":"medium","financingNote":"자본금 50% 준비","missingQuestions":["구체적인 입주 시기가 언제인가요?","선호하는 수익률이 있나요?"],"privacyNotes":["연락처 비공개"],"fitReasons":["매수자 예산(50-80억)에 부합하는 매물입니다.","요청하신 성수/강남 권역에 해당합니다."],"cautionReasons":["요청한 용도와 달리 명도 협의가 다소 필요합니다."],"recommendedNextAction":"현장 답사 제안","kakaoMessage":"안녕하세요! 요청하신 조건에 부합하는 추천 매물이 있어 안내해 드립니다. 확인해보시고 피드백 부탁드립니다.","title":"강남 역삼역 초역세권 오피스 사옥용 빌딩 매각","shortSummary":"역삼역 도보 5분 거리의 준신축급 대형 오피스빌딩입니다.","dealPoints":["초역세권","사옥 최적"],"cautionPoints":["명도 조율 필요"],"hiddenInfoNotice":["보증금 및 지번은 인가 후 확인 가능"],"gateMessage":"G1 등급 등록이 필요합니다.","kakaoText":"강남 역삼역 오피스 빌딩 매각 안내입니다.","exactUnitCandidate":"101호","floor":"1층","areaSqmText":"150㎡","spaceType":"office","depositText":"5000만","monthlyRentText":"400만","maintenanceFeeText":"50만","availableFromText":"즉시입주","leaseTermMonthsText":"24","incentivesText":"렌트프리 2개월","restrictions":[],"landlordIdentity":"김성수","currentTenant":"스타트업","vacancyReason":"이전 확장","rentNegotiation":"협의 가능","region":"성수동","areaSqm":150,"deposit":5000,"monthlyRent":400,"maintenanceFee":50,"availableFrom":"즉시입주","leaseTermMonths":24,"incentives":{"rentFreeMonths":2,"interiorSupport":"일부 인테리어 지원","freeRentDetail":"렌트프리 2개월 지원"},"shortSummaryLease":"성수역 도보 5분 거리 1층 리테일 상가 매물입니다."}</a:t>
-            </a:r>
-            <a:endParaRPr lang="en-US" sz="1100" dirty="0"/>
-          </a:p>
-        </p:txBody>
-      </p:sp>
-      <p:sp>
-        <p:nvSpPr>
-          <p:cNvPr id="11" name="Text 9"/>
-          <p:cNvSpPr/>
-          <p:nvPr/>
-        </p:nvSpPr>
-        <p:spPr>
-          <a:xfrm>
-            <a:off x="566928" y="6382512"/>
-            <a:ext cx="7315200" cy="219456"/>
-          </a:xfrm>
-          <a:prstGeom prst="rect">
-            <a:avLst/>
-          </a:prstGeom>
-          <a:noFill/>
-          <a:ln/>
-        </p:spPr>
-        <p:txBody>
-          <a:bodyPr wrap="square" lIns="0" tIns="0" rIns="0" bIns="0" rtlCol="0" anchor="ctr"/>
-          <a:lstStyle/>
-          <a:p>
-            <a:pPr indent="0" marL="0">
-              <a:buNone/>
-            </a:pPr>
-            <a:r>
-              <a:rPr lang="en-US" sz="800" dirty="0">
-                <a:solidFill>
-                  <a:srgbClr val="718096"/>
-                </a:solidFill>
-                <a:latin typeface="Pretendard" pitchFamily="34" charset="0"/>
-                <a:ea typeface="Pretendard" pitchFamily="34" charset="-122"/>
-                <a:cs typeface="Pretendard" pitchFamily="34" charset="-120"/>
-              </a:rPr>
-              <a:t>크리딜   |   </a:t>
-            </a:r>
-            <a:endParaRPr lang="en-US" sz="800" dirty="0"/>
-          </a:p>
-        </p:txBody>
-      </p:sp>
-      <p:sp>
-        <p:nvSpPr>
-          <p:cNvPr id="12" name="Text 10"/>
           <p:cNvSpPr/>
           <p:nvPr/>
         </p:nvSpPr>

--- a/docs/test/stress/e2e-outputs/income_case02_hongdae_fnb_basic.pptx
+++ b/docs/test/stress/e2e-outputs/income_case02_hongdae_fnb_basic.pptx
@@ -20,9 +20,10 @@
     <p:sldId id="268" r:id="rId14"/>
     <p:sldId id="269" r:id="rId15"/>
     <p:sldId id="270" r:id="rId16"/>
+    <p:sldId id="271" r:id="rId17"/>
   </p:sldIdLst>
   <p:notesMasterIdLst>
-    <p:notesMasterId r:id="rId17"/>
+    <p:notesMasterId r:id="rId18"/>
   </p:notesMasterIdLst>
   <p:sldSz cx="12192000" cy="6858000"/>
   <p:notesSz cx="6858000" cy="12192000"/>
@@ -1068,6 +1069,94 @@
             <a:fld id="{F7021451-1387-4CA6-816F-3879F97B5CBC}" type="slidenum">
               <a:rPr lang="en-US"/>
               <a:t>15</a:t>
+            </a:fld>
+            <a:endParaRPr lang="en-US"/>
+          </a:p>
+        </p:txBody>
+      </p:sp>
+    </p:spTree>
+    <p:extLst>
+      <p:ext uri="{BB962C8B-B14F-4D97-AF65-F5344CB8AC3E}">
+        <p14:creationId xmlns:p14="http://schemas.microsoft.com/office/powerpoint/2010/main" val="1024086991"/>
+      </p:ext>
+    </p:extLst>
+  </p:cSld>
+  <p:clrMapOvr>
+    <a:masterClrMapping/>
+  </p:clrMapOvr>
+</p:notes>
+</file>
+
+<file path=ppt/notesSlides/notesSlide16.xml><?xml version="1.0" encoding="utf-8"?>
+<p:notes xmlns:a="http://schemas.openxmlformats.org/drawingml/2006/main" xmlns:r="http://schemas.openxmlformats.org/officeDocument/2006/relationships" xmlns:p="http://schemas.openxmlformats.org/presentationml/2006/main">
+  <p:cSld>
+    <p:spTree>
+      <p:nvGrpSpPr>
+        <p:cNvPr id="1" name=""/>
+        <p:cNvGrpSpPr/>
+        <p:nvPr/>
+      </p:nvGrpSpPr>
+      <p:grpSpPr>
+        <a:xfrm>
+          <a:off x="0" y="0"/>
+          <a:ext cx="0" cy="0"/>
+          <a:chOff x="0" y="0"/>
+          <a:chExt cx="0" cy="0"/>
+        </a:xfrm>
+      </p:grpSpPr>
+      <p:sp>
+        <p:nvSpPr>
+          <p:cNvPr id="2" name="Slide Image Placeholder 1"/>
+          <p:cNvSpPr>
+            <a:spLocks noGrp="1" noRot="1" noChangeAspect="1"/>
+          </p:cNvSpPr>
+          <p:nvPr>
+            <p:ph type="sldImg"/>
+          </p:nvPr>
+        </p:nvSpPr>
+        <p:spPr/>
+      </p:sp>
+      <p:sp>
+        <p:nvSpPr>
+          <p:cNvPr id="3" name="Notes Placeholder 2"/>
+          <p:cNvSpPr>
+            <a:spLocks noGrp="1"/>
+          </p:cNvSpPr>
+          <p:nvPr>
+            <p:ph type="body" idx="1"/>
+          </p:nvPr>
+        </p:nvSpPr>
+        <p:spPr/>
+        <p:txBody>
+          <a:bodyPr/>
+          <a:lstStyle/>
+          <a:p>
+            <a:r>
+              <a:rPr lang="en-US" dirty="0"/>
+              <a:t/>
+            </a:r>
+            <a:endParaRPr lang="en-US" dirty="0"/>
+          </a:p>
+        </p:txBody>
+      </p:sp>
+      <p:sp>
+        <p:nvSpPr>
+          <p:cNvPr id="4" name="Slide Number Placeholder 3"/>
+          <p:cNvSpPr>
+            <a:spLocks noGrp="1"/>
+          </p:cNvSpPr>
+          <p:nvPr>
+            <p:ph type="sldNum" sz="quarter" idx="10"/>
+          </p:nvPr>
+        </p:nvSpPr>
+        <p:spPr/>
+        <p:txBody>
+          <a:bodyPr/>
+          <a:lstStyle/>
+          <a:p>
+            <a:fld id="{F7021451-1387-4CA6-816F-3879F97B5CBC}" type="slidenum">
+              <a:rPr lang="en-US"/>
+              <a:t>16</a:t>
             </a:fld>
             <a:endParaRPr lang="en-US"/>
           </a:p>
@@ -8567,6 +8656,434 @@
     <p:bg>
       <p:bgPr>
         <a:solidFill>
+          <a:srgbClr val="FFFFFF"/>
+        </a:solidFill>
+      </p:bgPr>
+    </p:bg>
+    <p:spTree>
+      <p:nvGrpSpPr>
+        <p:cNvPr id="1" name=""/>
+        <p:cNvGrpSpPr/>
+        <p:nvPr/>
+      </p:nvGrpSpPr>
+      <p:grpSpPr>
+        <a:xfrm>
+          <a:off x="0" y="0"/>
+          <a:ext cx="0" cy="0"/>
+          <a:chOff x="0" y="0"/>
+          <a:chExt cx="0" cy="0"/>
+        </a:xfrm>
+      </p:grpSpPr>
+      <p:sp>
+        <p:nvSpPr>
+          <p:cNvPr id="2" name="Shape 0"/>
+          <p:cNvSpPr/>
+          <p:nvPr/>
+        </p:nvSpPr>
+        <p:spPr>
+          <a:xfrm>
+            <a:off x="566928" y="457200"/>
+            <a:ext cx="384048" cy="384048"/>
+          </a:xfrm>
+          <a:prstGeom prst="ellipse">
+            <a:avLst/>
+          </a:prstGeom>
+          <a:solidFill>
+            <a:srgbClr val="B98A2E"/>
+          </a:solidFill>
+          <a:ln/>
+        </p:spPr>
+      </p:sp>
+      <p:sp>
+        <p:nvSpPr>
+          <p:cNvPr id="3" name="Text 1"/>
+          <p:cNvSpPr/>
+          <p:nvPr/>
+        </p:nvSpPr>
+        <p:spPr>
+          <a:xfrm>
+            <a:off x="566928" y="457200"/>
+            <a:ext cx="384048" cy="384048"/>
+          </a:xfrm>
+          <a:prstGeom prst="rect">
+            <a:avLst/>
+          </a:prstGeom>
+          <a:noFill/>
+          <a:ln/>
+        </p:spPr>
+        <p:txBody>
+          <a:bodyPr wrap="square" lIns="0" tIns="0" rIns="0" bIns="0" rtlCol="0" anchor="ctr"/>
+          <a:lstStyle/>
+          <a:p>
+            <a:pPr algn="ctr" indent="0" marL="0">
+              <a:buNone/>
+            </a:pPr>
+            <a:r>
+              <a:rPr lang="en-US" sz="1300" b="1" dirty="0">
+                <a:solidFill>
+                  <a:srgbClr val="FFFFFF"/>
+                </a:solidFill>
+                <a:latin typeface="Arial" pitchFamily="34" charset="0"/>
+                <a:ea typeface="Arial" pitchFamily="34" charset="-122"/>
+                <a:cs typeface="Arial" pitchFamily="34" charset="-120"/>
+              </a:rPr>
+              <a:t>13</a:t>
+            </a:r>
+            <a:endParaRPr lang="en-US" sz="1300" dirty="0"/>
+          </a:p>
+        </p:txBody>
+      </p:sp>
+      <p:sp>
+        <p:nvSpPr>
+          <p:cNvPr id="4" name="Text 2"/>
+          <p:cNvSpPr/>
+          <p:nvPr/>
+        </p:nvSpPr>
+        <p:spPr>
+          <a:xfrm>
+            <a:off x="1133856" y="457200"/>
+            <a:ext cx="10490911" cy="182880"/>
+          </a:xfrm>
+          <a:prstGeom prst="rect">
+            <a:avLst/>
+          </a:prstGeom>
+          <a:noFill/>
+          <a:ln/>
+        </p:spPr>
+        <p:txBody>
+          <a:bodyPr wrap="square" lIns="0" tIns="0" rIns="0" bIns="0" rtlCol="0" anchor="ctr"/>
+          <a:lstStyle/>
+          <a:p>
+            <a:pPr indent="0" marL="0">
+              <a:buNone/>
+            </a:pPr>
+            <a:r>
+              <a:rPr lang="en-US" sz="950" b="1" spc="200" kern="0" dirty="0">
+                <a:solidFill>
+                  <a:srgbClr val="B98A2E"/>
+                </a:solidFill>
+                <a:latin typeface="Arial" pitchFamily="34" charset="0"/>
+                <a:ea typeface="Arial" pitchFamily="34" charset="-122"/>
+                <a:cs typeface="Arial" pitchFamily="34" charset="-120"/>
+              </a:rPr>
+              <a:t>Process</a:t>
+            </a:r>
+            <a:endParaRPr lang="en-US" sz="950" dirty="0"/>
+          </a:p>
+        </p:txBody>
+      </p:sp>
+      <p:sp>
+        <p:nvSpPr>
+          <p:cNvPr id="5" name="Text 3"/>
+          <p:cNvSpPr/>
+          <p:nvPr/>
+        </p:nvSpPr>
+        <p:spPr>
+          <a:xfrm>
+            <a:off x="1133856" y="640080"/>
+            <a:ext cx="10490911" cy="365760"/>
+          </a:xfrm>
+          <a:prstGeom prst="rect">
+            <a:avLst/>
+          </a:prstGeom>
+          <a:noFill/>
+          <a:ln/>
+        </p:spPr>
+        <p:txBody>
+          <a:bodyPr wrap="square" lIns="0" tIns="0" rIns="0" bIns="0" rtlCol="0" anchor="ctr"/>
+          <a:lstStyle/>
+          <a:p>
+            <a:pPr indent="0" marL="0">
+              <a:buNone/>
+            </a:pPr>
+            <a:r>
+              <a:rPr lang="en-US" sz="2300" b="1" dirty="0">
+                <a:solidFill>
+                  <a:srgbClr val="10161F"/>
+                </a:solidFill>
+                <a:latin typeface="Pretendard" pitchFamily="34" charset="0"/>
+                <a:ea typeface="Pretendard" pitchFamily="34" charset="-122"/>
+                <a:cs typeface="Pretendard" pitchFamily="34" charset="-120"/>
+              </a:rPr>
+              <a:t>검토 후 다음 단계는 무엇인가</a:t>
+            </a:r>
+            <a:endParaRPr lang="en-US" sz="2300" dirty="0"/>
+          </a:p>
+        </p:txBody>
+      </p:sp>
+      <p:sp>
+        <p:nvSpPr>
+          <p:cNvPr id="6" name="Shape 4"/>
+          <p:cNvSpPr/>
+          <p:nvPr/>
+        </p:nvSpPr>
+        <p:spPr>
+          <a:xfrm>
+            <a:off x="566928" y="1572768"/>
+            <a:ext cx="11057839" cy="3200400"/>
+          </a:xfrm>
+          <a:prstGeom prst="roundRect">
+            <a:avLst>
+              <a:gd name="adj" fmla="val 1714"/>
+            </a:avLst>
+          </a:prstGeom>
+          <a:solidFill>
+            <a:srgbClr val="F7FAFC"/>
+          </a:solidFill>
+          <a:ln w="6350">
+            <a:solidFill>
+              <a:srgbClr val="CBD5E0"/>
+            </a:solidFill>
+            <a:prstDash val="solid"/>
+          </a:ln>
+        </p:spPr>
+      </p:sp>
+      <p:sp>
+        <p:nvSpPr>
+          <p:cNvPr id="7" name="Shape 5"/>
+          <p:cNvSpPr/>
+          <p:nvPr/>
+        </p:nvSpPr>
+        <p:spPr>
+          <a:xfrm>
+            <a:off x="786384" y="1792224"/>
+            <a:ext cx="438912" cy="438912"/>
+          </a:xfrm>
+          <a:prstGeom prst="ellipse">
+            <a:avLst/>
+          </a:prstGeom>
+          <a:solidFill>
+            <a:srgbClr val="B98A2E"/>
+          </a:solidFill>
+          <a:ln/>
+        </p:spPr>
+      </p:sp>
+      <p:sp>
+        <p:nvSpPr>
+          <p:cNvPr id="8" name="Text 6"/>
+          <p:cNvSpPr/>
+          <p:nvPr/>
+        </p:nvSpPr>
+        <p:spPr>
+          <a:xfrm>
+            <a:off x="786384" y="1792224"/>
+            <a:ext cx="438912" cy="438912"/>
+          </a:xfrm>
+          <a:prstGeom prst="rect">
+            <a:avLst/>
+          </a:prstGeom>
+          <a:noFill/>
+          <a:ln/>
+        </p:spPr>
+        <p:txBody>
+          <a:bodyPr wrap="square" lIns="0" tIns="0" rIns="0" bIns="0" rtlCol="0" anchor="ctr"/>
+          <a:lstStyle/>
+          <a:p>
+            <a:pPr algn="ctr" indent="0" marL="0">
+              <a:buNone/>
+            </a:pPr>
+            <a:r>
+              <a:rPr lang="en-US" sz="1400" b="1" dirty="0">
+                <a:solidFill>
+                  <a:srgbClr val="FFFFFF"/>
+                </a:solidFill>
+                <a:latin typeface="Arial" pitchFamily="34" charset="0"/>
+                <a:ea typeface="Arial" pitchFamily="34" charset="-122"/>
+                <a:cs typeface="Arial" pitchFamily="34" charset="-120"/>
+              </a:rPr>
+              <a:t>01</a:t>
+            </a:r>
+            <a:endParaRPr lang="en-US" sz="1400" dirty="0"/>
+          </a:p>
+        </p:txBody>
+      </p:sp>
+      <p:sp>
+        <p:nvSpPr>
+          <p:cNvPr id="9" name="Text 7"/>
+          <p:cNvSpPr/>
+          <p:nvPr/>
+        </p:nvSpPr>
+        <p:spPr>
+          <a:xfrm>
+            <a:off x="786384" y="2304288"/>
+            <a:ext cx="10618927" cy="365760"/>
+          </a:xfrm>
+          <a:prstGeom prst="rect">
+            <a:avLst/>
+          </a:prstGeom>
+          <a:noFill/>
+          <a:ln/>
+        </p:spPr>
+        <p:txBody>
+          <a:bodyPr wrap="square" rtlCol="0" anchor="ctr"/>
+          <a:lstStyle/>
+          <a:p>
+            <a:pPr indent="0" marL="0">
+              <a:buNone/>
+            </a:pPr>
+            <a:r>
+              <a:rPr lang="en-US" sz="1600" b="1" dirty="0">
+                <a:solidFill>
+                  <a:srgbClr val="10161F"/>
+                </a:solidFill>
+                <a:latin typeface="Pretendard" pitchFamily="34" charset="0"/>
+                <a:ea typeface="Pretendard" pitchFamily="34" charset="-122"/>
+                <a:cs typeface="Pretendard" pitchFamily="34" charset="-120"/>
+              </a:rPr>
+              <a:t>1단계</a:t>
+            </a:r>
+            <a:endParaRPr lang="en-US" sz="1600" dirty="0"/>
+          </a:p>
+        </p:txBody>
+      </p:sp>
+      <p:sp>
+        <p:nvSpPr>
+          <p:cNvPr id="10" name="Text 8"/>
+          <p:cNvSpPr/>
+          <p:nvPr/>
+        </p:nvSpPr>
+        <p:spPr>
+          <a:xfrm>
+            <a:off x="786384" y="2761488"/>
+            <a:ext cx="10618927" cy="1828800"/>
+          </a:xfrm>
+          <a:prstGeom prst="rect">
+            <a:avLst/>
+          </a:prstGeom>
+          <a:noFill/>
+          <a:ln/>
+        </p:spPr>
+        <p:txBody>
+          <a:bodyPr wrap="square" rtlCol="0" anchor="t"/>
+          <a:lstStyle/>
+          <a:p>
+            <a:pPr indent="0" marL="0">
+              <a:buNone/>
+            </a:pPr>
+            <a:r>
+              <a:rPr lang="en-US" sz="1100" dirty="0">
+                <a:solidFill>
+                  <a:srgbClr val="10161F"/>
+                </a:solidFill>
+                <a:latin typeface="Pretendard" pitchFamily="34" charset="0"/>
+                <a:ea typeface="Pretendard" pitchFamily="34" charset="-122"/>
+                <a:cs typeface="Pretendard" pitchFamily="34" charset="-120"/>
+              </a:rPr>
+              <a:t>{"ok"</a:t>
+            </a:r>
+            <a:endParaRPr lang="en-US" sz="1100" dirty="0"/>
+          </a:p>
+          <a:p>
+            <a:pPr indent="0" marL="0">
+              <a:buNone/>
+            </a:pPr>
+            <a:r>
+              <a:rPr lang="en-US" sz="1100" dirty="0">
+                <a:solidFill>
+                  <a:srgbClr val="10161F"/>
+                </a:solidFill>
+                <a:latin typeface="Pretendard" pitchFamily="34" charset="0"/>
+                <a:ea typeface="Pretendard" pitchFamily="34" charset="-122"/>
+                <a:cs typeface="Pretendard" pitchFamily="34" charset="-120"/>
+              </a:rPr>
+              <a:t>true,"mocked":true,"extractedFields":{"area_signal":"역삼","asset_type":"[건물명 비공개]","price_band":"300억","size_signal":"3000평(약 9917.4㎡)"},"extractedFacts":{"region":"역삼","exactAddressCandidate":"역삼동 742-1","assetType":"[건물명 비공개]","priceText":"300억","sizeText":"3000평(약 9917.4㎡)","currentUse":"오피스","currentUseSignal":"근린생활시설","leaseSignal":"임대중","vacancySignal":"공실없음","tenantNames":["쿠팡","네이버"],"unitRentTexts":["301호: 1500만"],"sellerMotivationText":"자산 효율화","brokerNotes":["역세권 도보 3분 이내 매물"]},"detectedSensitiveFields":["exact_address","tenant_name"],"ambiguousFields":[],"warnings":[],"areaSignal":"역삼","assetType":"[건물명 비공개]","priceBand":"300억","sizeSignal":"3000평(약 9917.4㎡)","dealType":"매각","buildingName":"역삼 [건물명 비공개]","exactAddress":"역삼동 742-1","totalFloorArea":9917.3,"buildYear":2015,"currentUseSignal":"근린생활시설","vacancySignal":"공실 없음","fitSummary":"역세권 도보 3분 이내 근생 빌딩으로 시행/사옥 매입에 최적화","cautionSummary":"주요 임차인 만기 조율 필요","hiddenFields":["exact_address","seller_motivation"],"confidence":{"areaSignal":"confirmed","assetType":"confirmed","priceBand":"ai_hypothesis","fitSummary":"ai_hypothesis"},"missingData":["sizeSignal"],"boundaryNote":"본 자료는 실거래 통계 기반 참고치입니다.","buyerType":"법인 사옥형","budgetRange":{"min":50,"max":80,"display":"50억~80억"},"preferredRegions":["강남","성수"],"assetTypes":["[건물명 비공개]","사옥용"],"purchasePurpose":"사옥용 매입","mustHave":["역세권 도보 3분 이내","주차"],"niceToHave":["테라스","루프탑"],"riskTolerance":"medium","financingNote":"자본금 50% 준비","missingQuestions":["구체적인 입주 시기가 언제인가요?","선호하는 수익률이 있나요?"],"privacyNotes":["연락처 비공개"],"fitReasons":["매수자 예산(50-80억)에 부합하는 매물입니다.","요청하신 성수/강남 권역에 해당합니다."],"cautionReasons":["요청한 용도와 달리 명도 협의가 다소 필요합니다."],"recommendedNextAction":"현장 답사 제안","kakaoMessage":"안녕하세요! 요청하신 조건에 부합하는 추천 매물이 있어 안내해 드립니다. 확인해보시고 피드백 부탁드립니다.","title":"강남 역삼역 역세권 도보 3분 이내 오피스 사옥용 빌딩 매각","shortSummary":"역삼역 도보 5분 거리의 준신축급 대형 [건물명 비공개]입니다.","dealPoints":["역세권 도보 3분 이내","사옥 최적"],"cautionPoints":["명도 조율 필요"],"hiddenInfoNotice":["보증금 및 지번은 인가 후 확인 가능"],"gateMessage":"G1 등급 등록이 필요합니다.","kakaoText":"강남 역삼역 오피스 빌딩 매각 안내입니다.","exactUnitCandidate":"101호","floor":"1층","areaSqmText":"150㎡","spaceType":"office","depositText":"5000만","monthlyRentText":"400만","maintenanceFeeText":"50만","availableFromText":"즉시입주","leaseTermMonthsText":"24","incentivesText":"렌트프리(무상임대) 2개월","restrictions":[],"landlordIdentity":"김성수","currentTenant":"스타트업","vacancyReason":"이전 확장","rentNegotiation":"협의 가능","region":"성수동","areaSqm":150,"deposit":5000,"monthlyRent":400,"maintenanceFee":50,"availableFrom":"즉시입주","leaseTermMonths":24,"incentives":{"렌트프리(무상임대)(무상임대)Months":2,"interiorSupport":"일부 인테리어 지원","freeRentDetail":"렌트프리(무상임대) 2개월 지원"},"shortSummaryLease":"성수역 도보 5분 거리 1층 리테일 상가 매물입니다."}</a:t>
+            </a:r>
+            <a:endParaRPr lang="en-US" sz="1100" dirty="0"/>
+          </a:p>
+        </p:txBody>
+      </p:sp>
+      <p:sp>
+        <p:nvSpPr>
+          <p:cNvPr id="11" name="Text 9"/>
+          <p:cNvSpPr/>
+          <p:nvPr/>
+        </p:nvSpPr>
+        <p:spPr>
+          <a:xfrm>
+            <a:off x="566928" y="6382512"/>
+            <a:ext cx="7315200" cy="219456"/>
+          </a:xfrm>
+          <a:prstGeom prst="rect">
+            <a:avLst/>
+          </a:prstGeom>
+          <a:noFill/>
+          <a:ln/>
+        </p:spPr>
+        <p:txBody>
+          <a:bodyPr wrap="square" lIns="0" tIns="0" rIns="0" bIns="0" rtlCol="0" anchor="ctr"/>
+          <a:lstStyle/>
+          <a:p>
+            <a:pPr indent="0" marL="0">
+              <a:buNone/>
+            </a:pPr>
+            <a:r>
+              <a:rPr lang="en-US" sz="800" dirty="0">
+                <a:solidFill>
+                  <a:srgbClr val="718096"/>
+                </a:solidFill>
+                <a:latin typeface="Pretendard" pitchFamily="34" charset="0"/>
+                <a:ea typeface="Pretendard" pitchFamily="34" charset="-122"/>
+                <a:cs typeface="Pretendard" pitchFamily="34" charset="-120"/>
+              </a:rPr>
+              <a:t>크리딜   |   </a:t>
+            </a:r>
+            <a:endParaRPr lang="en-US" sz="800" dirty="0"/>
+          </a:p>
+        </p:txBody>
+      </p:sp>
+      <p:sp>
+        <p:nvSpPr>
+          <p:cNvPr id="12" name="Text 10"/>
+          <p:cNvSpPr/>
+          <p:nvPr/>
+        </p:nvSpPr>
+        <p:spPr>
+          <a:xfrm>
+            <a:off x="10710367" y="6382512"/>
+            <a:ext cx="914400" cy="219456"/>
+          </a:xfrm>
+          <a:prstGeom prst="rect">
+            <a:avLst/>
+          </a:prstGeom>
+          <a:noFill/>
+          <a:ln/>
+        </p:spPr>
+        <p:txBody>
+          <a:bodyPr wrap="square" lIns="0" tIns="0" rIns="0" bIns="0" rtlCol="0" anchor="ctr"/>
+          <a:lstStyle/>
+          <a:p>
+            <a:pPr algn="r" indent="0" marL="0">
+              <a:buNone/>
+            </a:pPr>
+            <a:r>
+              <a:rPr lang="en-US" sz="900" b="1" dirty="0">
+                <a:solidFill>
+                  <a:srgbClr val="B98A2E"/>
+                </a:solidFill>
+                <a:latin typeface="Arial" pitchFamily="34" charset="0"/>
+                <a:ea typeface="Arial" pitchFamily="34" charset="-122"/>
+                <a:cs typeface="Arial" pitchFamily="34" charset="-120"/>
+              </a:rPr>
+              <a:t>13</a:t>
+            </a:r>
+            <a:endParaRPr lang="en-US" sz="900" dirty="0"/>
+          </a:p>
+        </p:txBody>
+      </p:sp>
+    </p:spTree>
+  </p:cSld>
+  <p:clrMapOvr>
+    <a:masterClrMapping/>
+  </p:clrMapOvr>
+</p:sld>
+</file>
+
+<file path=ppt/slides/slide15.xml><?xml version="1.0" encoding="utf-8"?>
+<p:sld xmlns:a="http://schemas.openxmlformats.org/drawingml/2006/main" xmlns:r="http://schemas.openxmlformats.org/officeDocument/2006/relationships" xmlns:p="http://schemas.openxmlformats.org/presentationml/2006/main">
+  <p:cSld name="Slide 15">
+    <p:bg>
+      <p:bgPr>
+        <a:solidFill>
           <a:srgbClr val="10161F"/>
         </a:solidFill>
       </p:bgPr>
@@ -8638,7 +9155,7 @@
                 <a:ea typeface="Arial" pitchFamily="34" charset="-122"/>
                 <a:cs typeface="Arial" pitchFamily="34" charset="-120"/>
               </a:rPr>
-              <a:t>13</a:t>
+              <a:t>14</a:t>
             </a:r>
             <a:endParaRPr lang="en-US" sz="1300" dirty="0"/>
           </a:p>
@@ -10050,7 +10567,7 @@
                 <a:ea typeface="Arial" pitchFamily="34" charset="-122"/>
                 <a:cs typeface="Arial" pitchFamily="34" charset="-120"/>
               </a:rPr>
-              <a:t>13</a:t>
+              <a:t>14</a:t>
             </a:r>
             <a:endParaRPr lang="en-US" sz="900" dirty="0"/>
           </a:p>
@@ -10064,9 +10581,9 @@
 </p:sld>
 </file>
 
-<file path=ppt/slides/slide15.xml><?xml version="1.0" encoding="utf-8"?>
+<file path=ppt/slides/slide16.xml><?xml version="1.0" encoding="utf-8"?>
 <p:sld xmlns:a="http://schemas.openxmlformats.org/drawingml/2006/main" xmlns:r="http://schemas.openxmlformats.org/officeDocument/2006/relationships" xmlns:p="http://schemas.openxmlformats.org/presentationml/2006/main">
-  <p:cSld name="Slide 15">
+  <p:cSld name="Slide 16">
     <p:bg>
       <p:bgPr>
         <a:solidFill>
@@ -10141,7 +10658,7 @@
                 <a:ea typeface="Arial" pitchFamily="34" charset="-122"/>
                 <a:cs typeface="Arial" pitchFamily="34" charset="-120"/>
               </a:rPr>
-              <a:t>14</a:t>
+              <a:t>15</a:t>
             </a:r>
             <a:endParaRPr lang="en-US" sz="1300" dirty="0"/>
           </a:p>
@@ -10775,7 +11292,7 @@
                 <a:ea typeface="Arial" pitchFamily="34" charset="-122"/>
                 <a:cs typeface="Arial" pitchFamily="34" charset="-120"/>
               </a:rPr>
-              <a:t>14</a:t>
+              <a:t>15</a:t>
             </a:r>
             <a:endParaRPr lang="en-US" sz="900" dirty="0"/>
           </a:p>
